--- a/a7/build/out/u3/A7 3.03 Exponential Expressions - Slides.pptx
+++ b/a7/build/out/u3/A7 3.03 Exponential Expressions - Slides.pptx
@@ -3129,7 +3129,7 @@
         </p:nvSpPr>
         <p:spPr>
           <a:xfrm>
-            <a:off x="777240" y="1691640"/>
+            <a:off x="777240" y="2148840"/>
             <a:ext cx="10607040" cy="347472"/>
           </a:xfrm>
           <a:prstGeom prst="rect">
@@ -3164,7 +3164,7 @@
         </p:nvSpPr>
         <p:spPr>
           <a:xfrm>
-            <a:off x="777240" y="2048256"/>
+            <a:off x="777240" y="2505456"/>
             <a:ext cx="10607040" cy="1005840"/>
           </a:xfrm>
           <a:prstGeom prst="rect">
@@ -3199,7 +3199,7 @@
         </p:nvCxnSpPr>
         <p:spPr>
           <a:xfrm>
-            <a:off x="3291840" y="3255264"/>
+            <a:off x="3291840" y="3712464"/>
             <a:ext cx="5577840" cy="0"/>
           </a:xfrm>
           <a:prstGeom prst="line">
@@ -3234,7 +3234,7 @@
         </p:nvCxnSpPr>
         <p:spPr>
           <a:xfrm>
-            <a:off x="3291840" y="3337560"/>
+            <a:off x="3291840" y="3794760"/>
             <a:ext cx="5577840" cy="0"/>
           </a:xfrm>
           <a:prstGeom prst="line">
@@ -3269,7 +3269,7 @@
         </p:nvSpPr>
         <p:spPr>
           <a:xfrm>
-            <a:off x="777240" y="3502152"/>
+            <a:off x="777240" y="3959352"/>
             <a:ext cx="10607040" cy="310896"/>
           </a:xfrm>
           <a:prstGeom prst="rect">
@@ -3304,7 +3304,7 @@
         </p:nvSpPr>
         <p:spPr>
           <a:xfrm>
-            <a:off x="777240" y="3840480"/>
+            <a:off x="777240" y="4297680"/>
             <a:ext cx="10607040" cy="731520"/>
           </a:xfrm>
           <a:prstGeom prst="rect">
@@ -3331,125 +3331,9 @@
           </a:p>
         </p:txBody>
       </p:sp>
-      <p:sp>
-        <p:nvSpPr>
-          <p:cNvPr id="8" name="Rectangle 7"/>
-          <p:cNvSpPr/>
-          <p:nvPr/>
-        </p:nvSpPr>
-        <p:spPr>
-          <a:xfrm>
-            <a:off x="2377440" y="4736592"/>
-            <a:ext cx="7406640" cy="1051560"/>
-          </a:xfrm>
-          <a:prstGeom prst="rect">
-            <a:avLst/>
-          </a:prstGeom>
-          <a:solidFill>
-            <a:srgbClr val="F2F2F0"/>
-          </a:solidFill>
-          <a:ln w="9525">
-            <a:solidFill>
-              <a:srgbClr val="BFBFBF"/>
-            </a:solidFill>
-          </a:ln>
-          <a:effectLst/>
-        </p:spPr>
-        <p:style>
-          <a:lnRef idx="1">
-            <a:schemeClr val="accent1"/>
-          </a:lnRef>
-          <a:fillRef idx="3">
-            <a:schemeClr val="accent1"/>
-          </a:fillRef>
-          <a:effectRef idx="2">
-            <a:schemeClr val="accent1"/>
-          </a:effectRef>
-          <a:fontRef idx="minor">
-            <a:schemeClr val="lt1"/>
-          </a:fontRef>
-        </p:style>
-        <p:txBody>
-          <a:bodyPr rtlCol="0" anchor="ctr"/>
-          <a:lstStyle/>
-          <a:p>
-            <a:pPr algn="ctr"/>
-          </a:p>
-        </p:txBody>
-      </p:sp>
-      <p:sp>
-        <p:nvSpPr>
-          <p:cNvPr id="9" name="TextBox 8"/>
-          <p:cNvSpPr txBox="1"/>
-          <p:nvPr/>
-        </p:nvSpPr>
-        <p:spPr>
-          <a:xfrm>
-            <a:off x="2606040" y="4892040"/>
-            <a:ext cx="6949440" cy="365760"/>
-          </a:xfrm>
-          <a:prstGeom prst="rect">
-            <a:avLst/>
-          </a:prstGeom>
-          <a:noFill/>
-        </p:spPr>
-        <p:txBody>
-          <a:bodyPr wrap="square" lIns="45720" rIns="45720" tIns="18288" bIns="18288" anchor="t">
-            <a:spAutoFit/>
-          </a:bodyPr>
-          <a:lstStyle/>
-          <a:p>
-            <a:pPr algn="ctr"/>
-            <a:r>
-              <a:rPr sz="1700" b="0" i="1">
-                <a:solidFill>
-                  <a:srgbClr val="6B6B6B"/>
-                </a:solidFill>
-                <a:latin typeface="Century Schoolbook"/>
-              </a:rPr>
-              <a:t>Yesterday: seven laws, one at a time.</a:t>
-            </a:r>
-          </a:p>
-        </p:txBody>
-      </p:sp>
-      <p:sp>
-        <p:nvSpPr>
-          <p:cNvPr id="10" name="TextBox 9"/>
-          <p:cNvSpPr txBox="1"/>
-          <p:nvPr/>
-        </p:nvSpPr>
-        <p:spPr>
-          <a:xfrm>
-            <a:off x="2606040" y="5276088"/>
-            <a:ext cx="6949440" cy="365760"/>
-          </a:xfrm>
-          <a:prstGeom prst="rect">
-            <a:avLst/>
-          </a:prstGeom>
-          <a:noFill/>
-        </p:spPr>
-        <p:txBody>
-          <a:bodyPr wrap="square" lIns="45720" rIns="45720" tIns="18288" bIns="18288" anchor="t">
-            <a:spAutoFit/>
-          </a:bodyPr>
-          <a:lstStyle/>
-          <a:p>
-            <a:pPr algn="ctr"/>
-            <a:r>
-              <a:rPr sz="1700" b="1" i="0">
-                <a:solidFill>
-                  <a:srgbClr val="1A1A1A"/>
-                </a:solidFill>
-                <a:latin typeface="Century Schoolbook"/>
-              </a:rPr>
-              <a:t>Today: several laws in one expression — the order is yours.</a:t>
-            </a:r>
-          </a:p>
-        </p:txBody>
-      </p:sp>
       <p:cxnSp>
         <p:nvCxnSpPr>
-          <p:cNvPr id="11" name="Connector 10"/>
+          <p:cNvPr id="8" name="Connector 7"/>
           <p:cNvCxnSpPr/>
           <p:nvPr/>
         </p:nvCxnSpPr>
@@ -3484,7 +3368,7 @@
       </p:cxnSp>
       <p:sp>
         <p:nvSpPr>
-          <p:cNvPr id="12" name="TextBox 11"/>
+          <p:cNvPr id="9" name="TextBox 8"/>
           <p:cNvSpPr txBox="1"/>
           <p:nvPr/>
         </p:nvSpPr>
@@ -3519,7 +3403,7 @@
       </p:sp>
       <p:sp>
         <p:nvSpPr>
-          <p:cNvPr id="13" name="TextBox 12"/>
+          <p:cNvPr id="10" name="TextBox 9"/>
           <p:cNvSpPr txBox="1"/>
           <p:nvPr/>
         </p:nvSpPr>
@@ -3675,44 +3559,9 @@
           </a:fontRef>
         </p:style>
       </p:cxnSp>
-      <p:sp>
-        <p:nvSpPr>
-          <p:cNvPr id="5" name="TextBox 4"/>
-          <p:cNvSpPr txBox="1"/>
-          <p:nvPr/>
-        </p:nvSpPr>
-        <p:spPr>
-          <a:xfrm>
-            <a:off x="777240" y="1261872"/>
-            <a:ext cx="10607040" cy="310896"/>
-          </a:xfrm>
-          <a:prstGeom prst="rect">
-            <a:avLst/>
-          </a:prstGeom>
-          <a:noFill/>
-        </p:spPr>
-        <p:txBody>
-          <a:bodyPr wrap="square" lIns="45720" rIns="45720" tIns="18288" bIns="18288" anchor="t">
-            <a:spAutoFit/>
-          </a:bodyPr>
-          <a:lstStyle/>
-          <a:p>
-            <a:pPr algn="l"/>
-            <a:r>
-              <a:rPr sz="1700" b="0" i="1">
-                <a:solidFill>
-                  <a:srgbClr val="6B6B6B"/>
-                </a:solidFill>
-                <a:latin typeface="Century Schoolbook"/>
-              </a:rPr>
-              <a:t>Answer.</a:t>
-            </a:r>
-          </a:p>
-        </p:txBody>
-      </p:sp>
       <p:cxnSp>
         <p:nvCxnSpPr>
-          <p:cNvPr id="6" name="Connector 5"/>
+          <p:cNvPr id="5" name="Connector 4"/>
           <p:cNvCxnSpPr/>
           <p:nvPr/>
         </p:nvCxnSpPr>
@@ -3747,7 +3596,7 @@
       </p:cxnSp>
       <p:sp>
         <p:nvSpPr>
-          <p:cNvPr id="7" name="TextBox 6"/>
+          <p:cNvPr id="6" name="TextBox 5"/>
           <p:cNvSpPr txBox="1"/>
           <p:nvPr/>
         </p:nvSpPr>
@@ -3782,7 +3631,7 @@
       </p:sp>
       <p:sp>
         <p:nvSpPr>
-          <p:cNvPr id="8" name="TextBox 7"/>
+          <p:cNvPr id="7" name="TextBox 6"/>
           <p:cNvSpPr txBox="1"/>
           <p:nvPr/>
         </p:nvSpPr>
@@ -3817,7 +3666,7 @@
       </p:sp>
       <p:pic>
         <p:nvPicPr>
-          <p:cNvPr id="9" name="Picture 8" descr="d381195bd435c1bd.png"/>
+          <p:cNvPr id="8" name="Picture 7" descr="d381195bd435c1bd.png"/>
           <p:cNvPicPr>
             <a:picLocks noChangeAspect="1"/>
           </p:cNvPicPr>
@@ -3841,13 +3690,13 @@
       </p:pic>
       <p:sp>
         <p:nvSpPr>
-          <p:cNvPr id="10" name="TextBox 9"/>
-          <p:cNvSpPr txBox="1"/>
-          <p:nvPr/>
-        </p:nvSpPr>
-        <p:spPr>
-          <a:xfrm>
-            <a:off x="777240" y="3526536"/>
+          <p:cNvPr id="9" name="TextBox 8"/>
+          <p:cNvSpPr txBox="1"/>
+          <p:nvPr/>
+        </p:nvSpPr>
+        <p:spPr>
+          <a:xfrm>
+            <a:off x="777240" y="3709416"/>
             <a:ext cx="10607040" cy="429370"/>
           </a:xfrm>
           <a:prstGeom prst="rect">
@@ -3863,65 +3712,20 @@
           <a:p>
             <a:pPr algn="ctr"/>
             <a:r>
-              <a:rPr sz="2400" b="0" i="0">
-                <a:solidFill>
-                  <a:srgbClr val="6B6B6B"/>
-                </a:solidFill>
-                <a:latin typeface="Century Schoolbook"/>
-              </a:rPr>
-              <a:t>5</a:t>
-            </a:r>
-            <a:r>
-              <a:rPr sz="2400" b="0" i="0" baseline="30000">
-                <a:solidFill>
-                  <a:srgbClr val="6B6B6B"/>
-                </a:solidFill>
-                <a:latin typeface="Century Schoolbook"/>
-              </a:rPr>
-              <a:t>4</a:t>
-            </a:r>
-            <a:r>
-              <a:rPr sz="2400" b="0" i="0">
-                <a:solidFill>
-                  <a:srgbClr val="6B6B6B"/>
-                </a:solidFill>
-                <a:latin typeface="Century Schoolbook"/>
-              </a:rPr>
-              <a:t> · 1 over 5</a:t>
-            </a:r>
-            <a:r>
-              <a:rPr sz="2400" b="0" i="0" baseline="30000">
-                <a:solidFill>
-                  <a:srgbClr val="6B6B6B"/>
-                </a:solidFill>
-                <a:latin typeface="Century Schoolbook"/>
-              </a:rPr>
-              <a:t>2</a:t>
-            </a:r>
-            <a:r>
-              <a:rPr sz="2400" b="0" i="0">
-                <a:solidFill>
-                  <a:srgbClr val="6B6B6B"/>
-                </a:solidFill>
-                <a:latin typeface="Century Schoolbook"/>
-              </a:rPr>
-              <a:t>, so 5</a:t>
-            </a:r>
-            <a:r>
-              <a:rPr sz="2400" b="0" i="0" baseline="30000">
-                <a:solidFill>
-                  <a:srgbClr val="6B6B6B"/>
-                </a:solidFill>
-                <a:latin typeface="Century Schoolbook"/>
-              </a:rPr>
-              <a:t>2</a:t>
-            </a:r>
-          </a:p>
-        </p:txBody>
-      </p:sp>
-      <p:sp>
-        <p:nvSpPr>
-          <p:cNvPr id="11" name="TextBox 10"/>
+              <a:rPr sz="2400" b="1" i="0">
+                <a:solidFill>
+                  <a:srgbClr val="1A1A1A"/>
+                </a:solidFill>
+                <a:latin typeface="Century Schoolbook"/>
+              </a:rPr>
+              <a:t>Make a plan. Then find the value.</a:t>
+            </a:r>
+          </a:p>
+        </p:txBody>
+      </p:sp>
+      <p:sp>
+        <p:nvSpPr>
+          <p:cNvPr id="10" name="TextBox 9"/>
           <p:cNvSpPr txBox="1"/>
           <p:nvPr/>
         </p:nvSpPr>
@@ -4095,44 +3899,9 @@
           </a:fontRef>
         </p:style>
       </p:cxnSp>
-      <p:sp>
-        <p:nvSpPr>
-          <p:cNvPr id="5" name="TextBox 4"/>
-          <p:cNvSpPr txBox="1"/>
-          <p:nvPr/>
-        </p:nvSpPr>
-        <p:spPr>
-          <a:xfrm>
-            <a:off x="777240" y="1261872"/>
-            <a:ext cx="10607040" cy="310896"/>
-          </a:xfrm>
-          <a:prstGeom prst="rect">
-            <a:avLst/>
-          </a:prstGeom>
-          <a:noFill/>
-        </p:spPr>
-        <p:txBody>
-          <a:bodyPr wrap="square" lIns="45720" rIns="45720" tIns="18288" bIns="18288" anchor="t">
-            <a:spAutoFit/>
-          </a:bodyPr>
-          <a:lstStyle/>
-          <a:p>
-            <a:pPr algn="l"/>
-            <a:r>
-              <a:rPr sz="1700" b="0" i="1">
-                <a:solidFill>
-                  <a:srgbClr val="6B6B6B"/>
-                </a:solidFill>
-                <a:latin typeface="Century Schoolbook"/>
-              </a:rPr>
-              <a:t>Three laws, a decimal and a negative base.</a:t>
-            </a:r>
-          </a:p>
-        </p:txBody>
-      </p:sp>
       <p:cxnSp>
         <p:nvCxnSpPr>
-          <p:cNvPr id="6" name="Connector 5"/>
+          <p:cNvPr id="5" name="Connector 4"/>
           <p:cNvCxnSpPr/>
           <p:nvPr/>
         </p:nvCxnSpPr>
@@ -4167,7 +3936,7 @@
       </p:cxnSp>
       <p:sp>
         <p:nvSpPr>
-          <p:cNvPr id="7" name="TextBox 6"/>
+          <p:cNvPr id="6" name="TextBox 5"/>
           <p:cNvSpPr txBox="1"/>
           <p:nvPr/>
         </p:nvSpPr>
@@ -4202,7 +3971,7 @@
       </p:sp>
       <p:sp>
         <p:nvSpPr>
-          <p:cNvPr id="8" name="TextBox 7"/>
+          <p:cNvPr id="7" name="TextBox 6"/>
           <p:cNvSpPr txBox="1"/>
           <p:nvPr/>
         </p:nvSpPr>
@@ -4237,7 +4006,7 @@
       </p:sp>
       <p:pic>
         <p:nvPicPr>
-          <p:cNvPr id="9" name="Picture 8" descr="30d1cf39c0294a10.png"/>
+          <p:cNvPr id="8" name="Picture 7" descr="30d1cf39c0294a10.png"/>
           <p:cNvPicPr>
             <a:picLocks noChangeAspect="1"/>
           </p:cNvPicPr>
@@ -4261,7 +4030,7 @@
       </p:pic>
       <p:sp>
         <p:nvSpPr>
-          <p:cNvPr id="10" name="TextBox 9"/>
+          <p:cNvPr id="9" name="TextBox 8"/>
           <p:cNvSpPr txBox="1"/>
           <p:nvPr/>
         </p:nvSpPr>
@@ -4417,44 +4186,9 @@
           </a:fontRef>
         </p:style>
       </p:cxnSp>
-      <p:sp>
-        <p:nvSpPr>
-          <p:cNvPr id="5" name="TextBox 4"/>
-          <p:cNvSpPr txBox="1"/>
-          <p:nvPr/>
-        </p:nvSpPr>
-        <p:spPr>
-          <a:xfrm>
-            <a:off x="777240" y="1261872"/>
-            <a:ext cx="10607040" cy="310896"/>
-          </a:xfrm>
-          <a:prstGeom prst="rect">
-            <a:avLst/>
-          </a:prstGeom>
-          <a:noFill/>
-        </p:spPr>
-        <p:txBody>
-          <a:bodyPr wrap="square" lIns="45720" rIns="45720" tIns="18288" bIns="18288" anchor="t">
-            <a:spAutoFit/>
-          </a:bodyPr>
-          <a:lstStyle/>
-          <a:p>
-            <a:pPr algn="l"/>
-            <a:r>
-              <a:rPr sz="1700" b="0" i="1">
-                <a:solidFill>
-                  <a:srgbClr val="6B6B6B"/>
-                </a:solidFill>
-                <a:latin typeface="Century Schoolbook"/>
-              </a:rPr>
-              <a:t>Worked.</a:t>
-            </a:r>
-          </a:p>
-        </p:txBody>
-      </p:sp>
       <p:cxnSp>
         <p:nvCxnSpPr>
-          <p:cNvPr id="6" name="Connector 5"/>
+          <p:cNvPr id="5" name="Connector 4"/>
           <p:cNvCxnSpPr/>
           <p:nvPr/>
         </p:nvCxnSpPr>
@@ -4489,7 +4223,7 @@
       </p:cxnSp>
       <p:sp>
         <p:nvSpPr>
-          <p:cNvPr id="7" name="TextBox 6"/>
+          <p:cNvPr id="6" name="TextBox 5"/>
           <p:cNvSpPr txBox="1"/>
           <p:nvPr/>
         </p:nvSpPr>
@@ -4524,7 +4258,7 @@
       </p:sp>
       <p:sp>
         <p:nvSpPr>
-          <p:cNvPr id="8" name="TextBox 7"/>
+          <p:cNvPr id="7" name="TextBox 6"/>
           <p:cNvSpPr txBox="1"/>
           <p:nvPr/>
         </p:nvSpPr>
@@ -4559,7 +4293,7 @@
       </p:sp>
       <p:pic>
         <p:nvPicPr>
-          <p:cNvPr id="9" name="Picture 8" descr="8f14d1bdb840e74d.png"/>
+          <p:cNvPr id="8" name="Picture 7" descr="8f14d1bdb840e74d.png"/>
           <p:cNvPicPr>
             <a:picLocks noChangeAspect="1"/>
           </p:cNvPicPr>
@@ -4581,44 +4315,9 @@
           </a:prstGeom>
         </p:spPr>
       </p:pic>
-      <p:sp>
-        <p:nvSpPr>
-          <p:cNvPr id="10" name="TextBox 9"/>
-          <p:cNvSpPr txBox="1"/>
-          <p:nvPr/>
-        </p:nvSpPr>
-        <p:spPr>
-          <a:xfrm>
-            <a:off x="6690360" y="2132076"/>
-            <a:ext cx="4693920" cy="502920"/>
-          </a:xfrm>
-          <a:prstGeom prst="rect">
-            <a:avLst/>
-          </a:prstGeom>
-          <a:noFill/>
-        </p:spPr>
-        <p:txBody>
-          <a:bodyPr wrap="square" lIns="45720" rIns="45720" tIns="18288" bIns="18288" anchor="ctr">
-            <a:spAutoFit/>
-          </a:bodyPr>
-          <a:lstStyle/>
-          <a:p>
-            <a:pPr algn="l"/>
-            <a:r>
-              <a:rPr sz="2100" b="0" i="1">
-                <a:solidFill>
-                  <a:srgbClr val="6B6B6B"/>
-                </a:solidFill>
-                <a:latin typeface="Century Schoolbook"/>
-              </a:rPr>
-              <a:t>zero exponent; power of a quotient, backwards</a:t>
-            </a:r>
-          </a:p>
-        </p:txBody>
-      </p:sp>
       <p:pic>
         <p:nvPicPr>
-          <p:cNvPr id="11" name="Picture 10" descr="d8954ab13f1548f8.png"/>
+          <p:cNvPr id="9" name="Picture 8" descr="d8954ab13f1548f8.png"/>
           <p:cNvPicPr>
             <a:picLocks noChangeAspect="1"/>
           </p:cNvPicPr>
@@ -4640,44 +4339,9 @@
           </a:prstGeom>
         </p:spPr>
       </p:pic>
-      <p:sp>
-        <p:nvSpPr>
-          <p:cNvPr id="12" name="TextBox 11"/>
-          <p:cNvSpPr txBox="1"/>
-          <p:nvPr/>
-        </p:nvSpPr>
-        <p:spPr>
-          <a:xfrm>
-            <a:off x="5084064" y="3197352"/>
-            <a:ext cx="6300215" cy="502920"/>
-          </a:xfrm>
-          <a:prstGeom prst="rect">
-            <a:avLst/>
-          </a:prstGeom>
-          <a:noFill/>
-        </p:spPr>
-        <p:txBody>
-          <a:bodyPr wrap="square" lIns="45720" rIns="45720" tIns="18288" bIns="18288" anchor="ctr">
-            <a:spAutoFit/>
-          </a:bodyPr>
-          <a:lstStyle/>
-          <a:p>
-            <a:pPr algn="l"/>
-            <a:r>
-              <a:rPr sz="2100" b="0" i="1">
-                <a:solidFill>
-                  <a:srgbClr val="6B6B6B"/>
-                </a:solidFill>
-                <a:latin typeface="Century Schoolbook"/>
-              </a:rPr>
-              <a:t>divide inside: −15 ÷ 1.5 = −10</a:t>
-            </a:r>
-          </a:p>
-        </p:txBody>
-      </p:sp>
       <p:pic>
         <p:nvPicPr>
-          <p:cNvPr id="13" name="Picture 12" descr="c6322a597974340d.png"/>
+          <p:cNvPr id="10" name="Picture 9" descr="c6322a597974340d.png"/>
           <p:cNvPicPr>
             <a:picLocks noChangeAspect="1"/>
           </p:cNvPicPr>
@@ -4701,42 +4365,7 @@
       </p:pic>
       <p:sp>
         <p:nvSpPr>
-          <p:cNvPr id="14" name="TextBox 13"/>
-          <p:cNvSpPr txBox="1"/>
-          <p:nvPr/>
-        </p:nvSpPr>
-        <p:spPr>
-          <a:xfrm>
-            <a:off x="4794504" y="4027931"/>
-            <a:ext cx="6400800" cy="502920"/>
-          </a:xfrm>
-          <a:prstGeom prst="rect">
-            <a:avLst/>
-          </a:prstGeom>
-          <a:noFill/>
-        </p:spPr>
-        <p:txBody>
-          <a:bodyPr wrap="square" lIns="45720" rIns="45720" tIns="18288" bIns="18288" anchor="ctr">
-            <a:spAutoFit/>
-          </a:bodyPr>
-          <a:lstStyle/>
-          <a:p>
-            <a:pPr algn="l"/>
-            <a:r>
-              <a:rPr sz="2100" b="0" i="1">
-                <a:solidFill>
-                  <a:srgbClr val="6B6B6B"/>
-                </a:solidFill>
-                <a:latin typeface="Century Schoolbook"/>
-              </a:rPr>
-              <a:t>four negative factors: positive</a:t>
-            </a:r>
-          </a:p>
-        </p:txBody>
-      </p:sp>
-      <p:sp>
-        <p:nvSpPr>
-          <p:cNvPr id="15" name="TextBox 14"/>
+          <p:cNvPr id="11" name="TextBox 10"/>
           <p:cNvSpPr txBox="1"/>
           <p:nvPr/>
         </p:nvSpPr>
@@ -4892,44 +4521,9 @@
           </a:fontRef>
         </p:style>
       </p:cxnSp>
-      <p:sp>
-        <p:nvSpPr>
-          <p:cNvPr id="5" name="TextBox 4"/>
-          <p:cNvSpPr txBox="1"/>
-          <p:nvPr/>
-        </p:nvSpPr>
-        <p:spPr>
-          <a:xfrm>
-            <a:off x="777240" y="1261872"/>
-            <a:ext cx="10607040" cy="310896"/>
-          </a:xfrm>
-          <a:prstGeom prst="rect">
-            <a:avLst/>
-          </a:prstGeom>
-          <a:noFill/>
-        </p:spPr>
-        <p:txBody>
-          <a:bodyPr wrap="square" lIns="45720" rIns="45720" tIns="18288" bIns="18288" anchor="t">
-            <a:spAutoFit/>
-          </a:bodyPr>
-          <a:lstStyle/>
-          <a:p>
-            <a:pPr algn="l"/>
-            <a:r>
-              <a:rPr sz="1700" b="0" i="1">
-                <a:solidFill>
-                  <a:srgbClr val="6B6B6B"/>
-                </a:solidFill>
-                <a:latin typeface="Century Schoolbook"/>
-              </a:rPr>
-              <a:t>Same steps, your numbers. Boards up when done.</a:t>
-            </a:r>
-          </a:p>
-        </p:txBody>
-      </p:sp>
       <p:cxnSp>
         <p:nvCxnSpPr>
-          <p:cNvPr id="6" name="Connector 5"/>
+          <p:cNvPr id="5" name="Connector 4"/>
           <p:cNvCxnSpPr/>
           <p:nvPr/>
         </p:nvCxnSpPr>
@@ -4964,7 +4558,7 @@
       </p:cxnSp>
       <p:sp>
         <p:nvSpPr>
-          <p:cNvPr id="7" name="TextBox 6"/>
+          <p:cNvPr id="6" name="TextBox 5"/>
           <p:cNvSpPr txBox="1"/>
           <p:nvPr/>
         </p:nvSpPr>
@@ -4999,7 +4593,7 @@
       </p:sp>
       <p:sp>
         <p:nvSpPr>
-          <p:cNvPr id="8" name="TextBox 7"/>
+          <p:cNvPr id="7" name="TextBox 6"/>
           <p:cNvSpPr txBox="1"/>
           <p:nvPr/>
         </p:nvSpPr>
@@ -5034,7 +4628,7 @@
       </p:sp>
       <p:pic>
         <p:nvPicPr>
-          <p:cNvPr id="9" name="Picture 8" descr="274e6fec14c7e780.png"/>
+          <p:cNvPr id="8" name="Picture 7" descr="274e6fec14c7e780.png"/>
           <p:cNvPicPr>
             <a:picLocks noChangeAspect="1"/>
           </p:cNvPicPr>
@@ -5056,6 +4650,41 @@
           </a:prstGeom>
         </p:spPr>
       </p:pic>
+      <p:sp>
+        <p:nvSpPr>
+          <p:cNvPr id="9" name="TextBox 8"/>
+          <p:cNvSpPr txBox="1"/>
+          <p:nvPr/>
+        </p:nvSpPr>
+        <p:spPr>
+          <a:xfrm>
+            <a:off x="777240" y="3788664"/>
+            <a:ext cx="10607040" cy="429370"/>
+          </a:xfrm>
+          <a:prstGeom prst="rect">
+            <a:avLst/>
+          </a:prstGeom>
+          <a:noFill/>
+        </p:spPr>
+        <p:txBody>
+          <a:bodyPr wrap="square" lIns="45720" rIns="45720" tIns="18288" bIns="18288" anchor="t">
+            <a:spAutoFit/>
+          </a:bodyPr>
+          <a:lstStyle/>
+          <a:p>
+            <a:pPr algn="ctr"/>
+            <a:r>
+              <a:rPr sz="2400" b="1" i="0">
+                <a:solidFill>
+                  <a:srgbClr val="1A1A1A"/>
+                </a:solidFill>
+                <a:latin typeface="Century Schoolbook"/>
+              </a:rPr>
+              <a:t>Make a plan. Then find the value.</a:t>
+            </a:r>
+          </a:p>
+        </p:txBody>
+      </p:sp>
     </p:spTree>
   </p:cSld>
   <p:clrMapOvr>
@@ -5179,44 +4808,9 @@
           </a:fontRef>
         </p:style>
       </p:cxnSp>
-      <p:sp>
-        <p:nvSpPr>
-          <p:cNvPr id="5" name="TextBox 4"/>
-          <p:cNvSpPr txBox="1"/>
-          <p:nvPr/>
-        </p:nvSpPr>
-        <p:spPr>
-          <a:xfrm>
-            <a:off x="777240" y="1261872"/>
-            <a:ext cx="10607040" cy="310896"/>
-          </a:xfrm>
-          <a:prstGeom prst="rect">
-            <a:avLst/>
-          </a:prstGeom>
-          <a:noFill/>
-        </p:spPr>
-        <p:txBody>
-          <a:bodyPr wrap="square" lIns="45720" rIns="45720" tIns="18288" bIns="18288" anchor="t">
-            <a:spAutoFit/>
-          </a:bodyPr>
-          <a:lstStyle/>
-          <a:p>
-            <a:pPr algn="l"/>
-            <a:r>
-              <a:rPr sz="1700" b="0" i="1">
-                <a:solidFill>
-                  <a:srgbClr val="6B6B6B"/>
-                </a:solidFill>
-                <a:latin typeface="Century Schoolbook"/>
-              </a:rPr>
-              <a:t>Answer.</a:t>
-            </a:r>
-          </a:p>
-        </p:txBody>
-      </p:sp>
       <p:cxnSp>
         <p:nvCxnSpPr>
-          <p:cNvPr id="6" name="Connector 5"/>
+          <p:cNvPr id="5" name="Connector 4"/>
           <p:cNvCxnSpPr/>
           <p:nvPr/>
         </p:nvCxnSpPr>
@@ -5251,7 +4845,7 @@
       </p:cxnSp>
       <p:sp>
         <p:nvSpPr>
-          <p:cNvPr id="7" name="TextBox 6"/>
+          <p:cNvPr id="6" name="TextBox 5"/>
           <p:cNvSpPr txBox="1"/>
           <p:nvPr/>
         </p:nvSpPr>
@@ -5286,7 +4880,7 @@
       </p:sp>
       <p:sp>
         <p:nvSpPr>
-          <p:cNvPr id="8" name="TextBox 7"/>
+          <p:cNvPr id="7" name="TextBox 6"/>
           <p:cNvSpPr txBox="1"/>
           <p:nvPr/>
         </p:nvSpPr>
@@ -5321,7 +4915,7 @@
       </p:sp>
       <p:pic>
         <p:nvPicPr>
-          <p:cNvPr id="9" name="Picture 8" descr="e1a3a8f726b8bfc3.png"/>
+          <p:cNvPr id="8" name="Picture 7" descr="e1a3a8f726b8bfc3.png"/>
           <p:cNvPicPr>
             <a:picLocks noChangeAspect="1"/>
           </p:cNvPicPr>
@@ -5345,13 +4939,13 @@
       </p:pic>
       <p:sp>
         <p:nvSpPr>
-          <p:cNvPr id="10" name="TextBox 9"/>
-          <p:cNvSpPr txBox="1"/>
-          <p:nvPr/>
-        </p:nvSpPr>
-        <p:spPr>
-          <a:xfrm>
-            <a:off x="777240" y="3605784"/>
+          <p:cNvPr id="9" name="TextBox 8"/>
+          <p:cNvSpPr txBox="1"/>
+          <p:nvPr/>
+        </p:nvSpPr>
+        <p:spPr>
+          <a:xfrm>
+            <a:off x="777240" y="3788664"/>
             <a:ext cx="10607040" cy="429370"/>
           </a:xfrm>
           <a:prstGeom prst="rect">
@@ -5367,47 +4961,20 @@
           <a:p>
             <a:pPr algn="ctr"/>
             <a:r>
-              <a:rPr sz="2400" b="0" i="0">
-                <a:solidFill>
-                  <a:srgbClr val="6B6B6B"/>
-                </a:solidFill>
-                <a:latin typeface="Century Schoolbook"/>
-              </a:rPr>
-              <a:t>1 · (−12 ÷ 4)</a:t>
-            </a:r>
-            <a:r>
-              <a:rPr sz="2400" b="0" i="0" baseline="30000">
-                <a:solidFill>
-                  <a:srgbClr val="6B6B6B"/>
-                </a:solidFill>
-                <a:latin typeface="Century Schoolbook"/>
-              </a:rPr>
-              <a:t>3</a:t>
-            </a:r>
-            <a:r>
-              <a:rPr sz="2400" b="0" i="0">
-                <a:solidFill>
-                  <a:srgbClr val="6B6B6B"/>
-                </a:solidFill>
-                <a:latin typeface="Century Schoolbook"/>
-              </a:rPr>
-              <a:t> = (−3)</a:t>
-            </a:r>
-            <a:r>
-              <a:rPr sz="2400" b="0" i="0" baseline="30000">
-                <a:solidFill>
-                  <a:srgbClr val="6B6B6B"/>
-                </a:solidFill>
-                <a:latin typeface="Century Schoolbook"/>
-              </a:rPr>
-              <a:t>3</a:t>
-            </a:r>
-          </a:p>
-        </p:txBody>
-      </p:sp>
-      <p:sp>
-        <p:nvSpPr>
-          <p:cNvPr id="11" name="TextBox 10"/>
+              <a:rPr sz="2400" b="1" i="0">
+                <a:solidFill>
+                  <a:srgbClr val="1A1A1A"/>
+                </a:solidFill>
+                <a:latin typeface="Century Schoolbook"/>
+              </a:rPr>
+              <a:t>Make a plan. Then find the value.</a:t>
+            </a:r>
+          </a:p>
+        </p:txBody>
+      </p:sp>
+      <p:sp>
+        <p:nvSpPr>
+          <p:cNvPr id="10" name="TextBox 9"/>
           <p:cNvSpPr txBox="1"/>
           <p:nvPr/>
         </p:nvSpPr>
@@ -5563,44 +5130,9 @@
           </a:fontRef>
         </p:style>
       </p:cxnSp>
-      <p:sp>
-        <p:nvSpPr>
-          <p:cNvPr id="5" name="TextBox 4"/>
-          <p:cNvSpPr txBox="1"/>
-          <p:nvPr/>
-        </p:nvSpPr>
-        <p:spPr>
-          <a:xfrm>
-            <a:off x="777240" y="1261872"/>
-            <a:ext cx="10607040" cy="310896"/>
-          </a:xfrm>
-          <a:prstGeom prst="rect">
-            <a:avLst/>
-          </a:prstGeom>
-          <a:noFill/>
-        </p:spPr>
-        <p:txBody>
-          <a:bodyPr wrap="square" lIns="45720" rIns="45720" tIns="18288" bIns="18288" anchor="t">
-            <a:spAutoFit/>
-          </a:bodyPr>
-          <a:lstStyle/>
-          <a:p>
-            <a:pPr algn="l"/>
-            <a:r>
-              <a:rPr sz="1700" b="0" i="1">
-                <a:solidFill>
-                  <a:srgbClr val="6B6B6B"/>
-                </a:solidFill>
-                <a:latin typeface="Century Schoolbook"/>
-              </a:rPr>
-              <a:t>Boards up on three.</a:t>
-            </a:r>
-          </a:p>
-        </p:txBody>
-      </p:sp>
       <p:cxnSp>
         <p:nvCxnSpPr>
-          <p:cNvPr id="6" name="Connector 5"/>
+          <p:cNvPr id="5" name="Connector 4"/>
           <p:cNvCxnSpPr/>
           <p:nvPr/>
         </p:nvCxnSpPr>
@@ -5635,7 +5167,7 @@
       </p:cxnSp>
       <p:sp>
         <p:nvSpPr>
-          <p:cNvPr id="7" name="TextBox 6"/>
+          <p:cNvPr id="6" name="TextBox 5"/>
           <p:cNvSpPr txBox="1"/>
           <p:nvPr/>
         </p:nvSpPr>
@@ -5670,7 +5202,7 @@
       </p:sp>
       <p:sp>
         <p:nvSpPr>
-          <p:cNvPr id="8" name="TextBox 7"/>
+          <p:cNvPr id="7" name="TextBox 6"/>
           <p:cNvSpPr txBox="1"/>
           <p:nvPr/>
         </p:nvSpPr>
@@ -5705,7 +5237,7 @@
       </p:sp>
       <p:sp>
         <p:nvSpPr>
-          <p:cNvPr id="9" name="TextBox 8"/>
+          <p:cNvPr id="8" name="TextBox 7"/>
           <p:cNvSpPr txBox="1"/>
           <p:nvPr/>
         </p:nvSpPr>
@@ -5740,7 +5272,7 @@
       </p:sp>
       <p:pic>
         <p:nvPicPr>
-          <p:cNvPr id="10" name="Picture 9" descr="ef1987aeb6be68e4.png"/>
+          <p:cNvPr id="9" name="Picture 8" descr="ef1987aeb6be68e4.png"/>
           <p:cNvPicPr>
             <a:picLocks noChangeAspect="1"/>
           </p:cNvPicPr>
@@ -5764,7 +5296,7 @@
       </p:pic>
       <p:sp>
         <p:nvSpPr>
-          <p:cNvPr id="11" name="TextBox 10"/>
+          <p:cNvPr id="10" name="TextBox 9"/>
           <p:cNvSpPr txBox="1"/>
           <p:nvPr/>
         </p:nvSpPr>
@@ -5799,7 +5331,7 @@
       </p:sp>
       <p:pic>
         <p:nvPicPr>
-          <p:cNvPr id="12" name="Picture 11" descr="bd667566e598f523.png"/>
+          <p:cNvPr id="11" name="Picture 10" descr="bd667566e598f523.png"/>
           <p:cNvPicPr>
             <a:picLocks noChangeAspect="1"/>
           </p:cNvPicPr>
@@ -5823,7 +5355,7 @@
       </p:pic>
       <p:sp>
         <p:nvSpPr>
-          <p:cNvPr id="13" name="TextBox 12"/>
+          <p:cNvPr id="12" name="TextBox 11"/>
           <p:cNvSpPr txBox="1"/>
           <p:nvPr/>
         </p:nvSpPr>
@@ -5858,7 +5390,7 @@
       </p:sp>
       <p:sp>
         <p:nvSpPr>
-          <p:cNvPr id="14" name="TextBox 13"/>
+          <p:cNvPr id="13" name="TextBox 12"/>
           <p:cNvSpPr txBox="1"/>
           <p:nvPr/>
         </p:nvSpPr>
@@ -5893,7 +5425,7 @@
       </p:sp>
       <p:sp>
         <p:nvSpPr>
-          <p:cNvPr id="15" name="TextBox 14"/>
+          <p:cNvPr id="14" name="TextBox 13"/>
           <p:cNvSpPr txBox="1"/>
           <p:nvPr/>
         </p:nvSpPr>
@@ -5928,7 +5460,7 @@
       </p:sp>
       <p:sp>
         <p:nvSpPr>
-          <p:cNvPr id="16" name="TextBox 15"/>
+          <p:cNvPr id="15" name="TextBox 14"/>
           <p:cNvSpPr txBox="1"/>
           <p:nvPr/>
         </p:nvSpPr>
@@ -6084,44 +5616,9 @@
           </a:fontRef>
         </p:style>
       </p:cxnSp>
-      <p:sp>
-        <p:nvSpPr>
-          <p:cNvPr id="5" name="TextBox 4"/>
-          <p:cNvSpPr txBox="1"/>
-          <p:nvPr/>
-        </p:nvSpPr>
-        <p:spPr>
-          <a:xfrm>
-            <a:off x="777240" y="1261872"/>
-            <a:ext cx="10607040" cy="310896"/>
-          </a:xfrm>
-          <a:prstGeom prst="rect">
-            <a:avLst/>
-          </a:prstGeom>
-          <a:noFill/>
-        </p:spPr>
-        <p:txBody>
-          <a:bodyPr wrap="square" lIns="45720" rIns="45720" tIns="18288" bIns="18288" anchor="t">
-            <a:spAutoFit/>
-          </a:bodyPr>
-          <a:lstStyle/>
-          <a:p>
-            <a:pPr algn="l"/>
-            <a:r>
-              <a:rPr sz="1700" b="0" i="1">
-                <a:solidFill>
-                  <a:srgbClr val="6B6B6B"/>
-                </a:solidFill>
-                <a:latin typeface="Century Schoolbook"/>
-              </a:rPr>
-              <a:t>Answer.</a:t>
-            </a:r>
-          </a:p>
-        </p:txBody>
-      </p:sp>
       <p:cxnSp>
         <p:nvCxnSpPr>
-          <p:cNvPr id="6" name="Connector 5"/>
+          <p:cNvPr id="5" name="Connector 4"/>
           <p:cNvCxnSpPr/>
           <p:nvPr/>
         </p:nvCxnSpPr>
@@ -6156,7 +5653,7 @@
       </p:cxnSp>
       <p:sp>
         <p:nvSpPr>
-          <p:cNvPr id="7" name="TextBox 6"/>
+          <p:cNvPr id="6" name="TextBox 5"/>
           <p:cNvSpPr txBox="1"/>
           <p:nvPr/>
         </p:nvSpPr>
@@ -6191,7 +5688,7 @@
       </p:sp>
       <p:sp>
         <p:nvSpPr>
-          <p:cNvPr id="8" name="TextBox 7"/>
+          <p:cNvPr id="7" name="TextBox 6"/>
           <p:cNvSpPr txBox="1"/>
           <p:nvPr/>
         </p:nvSpPr>
@@ -6226,7 +5723,7 @@
       </p:sp>
       <p:sp>
         <p:nvSpPr>
-          <p:cNvPr id="9" name="TextBox 8"/>
+          <p:cNvPr id="8" name="TextBox 7"/>
           <p:cNvSpPr txBox="1"/>
           <p:nvPr/>
         </p:nvSpPr>
@@ -6261,7 +5758,7 @@
       </p:sp>
       <p:pic>
         <p:nvPicPr>
-          <p:cNvPr id="10" name="Picture 9" descr="08d825ede09be259.png"/>
+          <p:cNvPr id="9" name="Picture 8" descr="08d825ede09be259.png"/>
           <p:cNvPicPr>
             <a:picLocks noChangeAspect="1"/>
           </p:cNvPicPr>
@@ -6285,7 +5782,7 @@
       </p:pic>
       <p:sp>
         <p:nvSpPr>
-          <p:cNvPr id="11" name="TextBox 10"/>
+          <p:cNvPr id="10" name="TextBox 9"/>
           <p:cNvSpPr txBox="1"/>
           <p:nvPr/>
         </p:nvSpPr>
@@ -6320,7 +5817,7 @@
       </p:sp>
       <p:pic>
         <p:nvPicPr>
-          <p:cNvPr id="12" name="Picture 11" descr="e32dba3262b932bf.png"/>
+          <p:cNvPr id="11" name="Picture 10" descr="e32dba3262b932bf.png"/>
           <p:cNvPicPr>
             <a:picLocks noChangeAspect="1"/>
           </p:cNvPicPr>
@@ -6344,7 +5841,7 @@
       </p:pic>
       <p:sp>
         <p:nvSpPr>
-          <p:cNvPr id="13" name="TextBox 12"/>
+          <p:cNvPr id="12" name="TextBox 11"/>
           <p:cNvSpPr txBox="1"/>
           <p:nvPr/>
         </p:nvSpPr>
@@ -6379,7 +5876,7 @@
       </p:sp>
       <p:sp>
         <p:nvSpPr>
-          <p:cNvPr id="14" name="TextBox 13"/>
+          <p:cNvPr id="13" name="TextBox 12"/>
           <p:cNvSpPr txBox="1"/>
           <p:nvPr/>
         </p:nvSpPr>
@@ -6414,7 +5911,7 @@
       </p:sp>
       <p:sp>
         <p:nvSpPr>
-          <p:cNvPr id="15" name="TextBox 14"/>
+          <p:cNvPr id="14" name="TextBox 13"/>
           <p:cNvSpPr txBox="1"/>
           <p:nvPr/>
         </p:nvSpPr>
@@ -6449,87 +5946,7 @@
       </p:sp>
       <p:sp>
         <p:nvSpPr>
-          <p:cNvPr id="16" name="TextBox 15"/>
-          <p:cNvSpPr txBox="1"/>
-          <p:nvPr/>
-        </p:nvSpPr>
-        <p:spPr>
-          <a:xfrm>
-            <a:off x="1828800" y="3656804"/>
-            <a:ext cx="8503920" cy="548640"/>
-          </a:xfrm>
-          <a:prstGeom prst="rect">
-            <a:avLst/>
-          </a:prstGeom>
-          <a:noFill/>
-        </p:spPr>
-        <p:txBody>
-          <a:bodyPr wrap="square" lIns="45720" rIns="45720" tIns="18288" bIns="18288" anchor="t">
-            <a:spAutoFit/>
-          </a:bodyPr>
-          <a:lstStyle/>
-          <a:p>
-            <a:pPr algn="ctr"/>
-            <a:r>
-              <a:rPr sz="2400" b="0" i="0">
-                <a:solidFill>
-                  <a:srgbClr val="6B6B6B"/>
-                </a:solidFill>
-                <a:latin typeface="Century Schoolbook"/>
-              </a:rPr>
-              <a:t>6</a:t>
-            </a:r>
-            <a:r>
-              <a:rPr sz="2400" b="0" i="0" baseline="30000">
-                <a:solidFill>
-                  <a:srgbClr val="6B6B6B"/>
-                </a:solidFill>
-                <a:latin typeface="Century Schoolbook"/>
-              </a:rPr>
-              <a:t>4</a:t>
-            </a:r>
-            <a:r>
-              <a:rPr sz="2400" b="0" i="0">
-                <a:solidFill>
-                  <a:srgbClr val="6B6B6B"/>
-                </a:solidFill>
-                <a:latin typeface="Century Schoolbook"/>
-              </a:rPr>
-              <a:t> over 6</a:t>
-            </a:r>
-            <a:r>
-              <a:rPr sz="2400" b="0" i="0" baseline="30000">
-                <a:solidFill>
-                  <a:srgbClr val="6B6B6B"/>
-                </a:solidFill>
-                <a:latin typeface="Century Schoolbook"/>
-              </a:rPr>
-              <a:t>2</a:t>
-            </a:r>
-            <a:r>
-              <a:rPr sz="2400" b="0" i="0">
-                <a:solidFill>
-                  <a:srgbClr val="6B6B6B"/>
-                </a:solidFill>
-                <a:latin typeface="Century Schoolbook"/>
-              </a:rPr>
-              <a:t>, so 6</a:t>
-            </a:r>
-            <a:r>
-              <a:rPr sz="2400" b="0" i="0" baseline="30000">
-                <a:solidFill>
-                  <a:srgbClr val="6B6B6B"/>
-                </a:solidFill>
-                <a:latin typeface="Century Schoolbook"/>
-              </a:rPr>
-              <a:t>2</a:t>
-            </a:r>
-          </a:p>
-        </p:txBody>
-      </p:sp>
-      <p:sp>
-        <p:nvSpPr>
-          <p:cNvPr id="17" name="TextBox 16"/>
+          <p:cNvPr id="15" name="TextBox 14"/>
           <p:cNvSpPr txBox="1"/>
           <p:nvPr/>
         </p:nvSpPr>
@@ -6685,44 +6102,9 @@
           </a:fontRef>
         </p:style>
       </p:cxnSp>
-      <p:sp>
-        <p:nvSpPr>
-          <p:cNvPr id="5" name="TextBox 4"/>
-          <p:cNvSpPr txBox="1"/>
-          <p:nvPr/>
-        </p:nvSpPr>
-        <p:spPr>
-          <a:xfrm>
-            <a:off x="777240" y="1261872"/>
-            <a:ext cx="10607040" cy="310896"/>
-          </a:xfrm>
-          <a:prstGeom prst="rect">
-            <a:avLst/>
-          </a:prstGeom>
-          <a:noFill/>
-        </p:spPr>
-        <p:txBody>
-          <a:bodyPr wrap="square" lIns="45720" rIns="45720" tIns="18288" bIns="18288" anchor="t">
-            <a:spAutoFit/>
-          </a:bodyPr>
-          <a:lstStyle/>
-          <a:p>
-            <a:pPr algn="l"/>
-            <a:r>
-              <a:rPr sz="1700" b="0" i="1">
-                <a:solidFill>
-                  <a:srgbClr val="6B6B6B"/>
-                </a:solidFill>
-                <a:latin typeface="Century Schoolbook"/>
-              </a:rPr>
-              <a:t>Boards up on three.</a:t>
-            </a:r>
-          </a:p>
-        </p:txBody>
-      </p:sp>
       <p:cxnSp>
         <p:nvCxnSpPr>
-          <p:cNvPr id="6" name="Connector 5"/>
+          <p:cNvPr id="5" name="Connector 4"/>
           <p:cNvCxnSpPr/>
           <p:nvPr/>
         </p:nvCxnSpPr>
@@ -6757,7 +6139,7 @@
       </p:cxnSp>
       <p:sp>
         <p:nvSpPr>
-          <p:cNvPr id="7" name="TextBox 6"/>
+          <p:cNvPr id="6" name="TextBox 5"/>
           <p:cNvSpPr txBox="1"/>
           <p:nvPr/>
         </p:nvSpPr>
@@ -6792,7 +6174,7 @@
       </p:sp>
       <p:sp>
         <p:nvSpPr>
-          <p:cNvPr id="8" name="TextBox 7"/>
+          <p:cNvPr id="7" name="TextBox 6"/>
           <p:cNvSpPr txBox="1"/>
           <p:nvPr/>
         </p:nvSpPr>
@@ -6827,7 +6209,7 @@
       </p:sp>
       <p:pic>
         <p:nvPicPr>
-          <p:cNvPr id="9" name="Picture 8" descr="eca797d063644f8c.png"/>
+          <p:cNvPr id="8" name="Picture 7" descr="eca797d063644f8c.png"/>
           <p:cNvPicPr>
             <a:picLocks noChangeAspect="1"/>
           </p:cNvPicPr>
@@ -6851,7 +6233,7 @@
       </p:pic>
       <p:sp>
         <p:nvSpPr>
-          <p:cNvPr id="10" name="TextBox 9"/>
+          <p:cNvPr id="9" name="TextBox 8"/>
           <p:cNvSpPr txBox="1"/>
           <p:nvPr/>
         </p:nvSpPr>
@@ -6880,41 +6262,6 @@
                 <a:latin typeface="Century Schoolbook"/>
               </a:rPr>
               <a:t>Answer it.</a:t>
-            </a:r>
-          </a:p>
-        </p:txBody>
-      </p:sp>
-      <p:sp>
-        <p:nvSpPr>
-          <p:cNvPr id="11" name="TextBox 10"/>
-          <p:cNvSpPr txBox="1"/>
-          <p:nvPr/>
-        </p:nvSpPr>
-        <p:spPr>
-          <a:xfrm>
-            <a:off x="777240" y="4828032"/>
-            <a:ext cx="10607040" cy="365760"/>
-          </a:xfrm>
-          <a:prstGeom prst="rect">
-            <a:avLst/>
-          </a:prstGeom>
-          <a:noFill/>
-        </p:spPr>
-        <p:txBody>
-          <a:bodyPr wrap="square" lIns="45720" rIns="45720" tIns="18288" bIns="18288" anchor="t">
-            <a:spAutoFit/>
-          </a:bodyPr>
-          <a:lstStyle/>
-          <a:p>
-            <a:pPr algn="ctr"/>
-            <a:r>
-              <a:rPr sz="1900" b="0" i="1">
-                <a:solidFill>
-                  <a:srgbClr val="6B6B6B"/>
-                </a:solidFill>
-                <a:latin typeface="Century Schoolbook"/>
-              </a:rPr>
-              <a:t>Find the value.</a:t>
             </a:r>
           </a:p>
         </p:txBody>
@@ -7042,44 +6389,9 @@
           </a:fontRef>
         </p:style>
       </p:cxnSp>
-      <p:sp>
-        <p:nvSpPr>
-          <p:cNvPr id="5" name="TextBox 4"/>
-          <p:cNvSpPr txBox="1"/>
-          <p:nvPr/>
-        </p:nvSpPr>
-        <p:spPr>
-          <a:xfrm>
-            <a:off x="777240" y="1261872"/>
-            <a:ext cx="10607040" cy="310896"/>
-          </a:xfrm>
-          <a:prstGeom prst="rect">
-            <a:avLst/>
-          </a:prstGeom>
-          <a:noFill/>
-        </p:spPr>
-        <p:txBody>
-          <a:bodyPr wrap="square" lIns="45720" rIns="45720" tIns="18288" bIns="18288" anchor="t">
-            <a:spAutoFit/>
-          </a:bodyPr>
-          <a:lstStyle/>
-          <a:p>
-            <a:pPr algn="l"/>
-            <a:r>
-              <a:rPr sz="1700" b="0" i="1">
-                <a:solidFill>
-                  <a:srgbClr val="6B6B6B"/>
-                </a:solidFill>
-                <a:latin typeface="Century Schoolbook"/>
-              </a:rPr>
-              <a:t>Answer.</a:t>
-            </a:r>
-          </a:p>
-        </p:txBody>
-      </p:sp>
       <p:cxnSp>
         <p:nvCxnSpPr>
-          <p:cNvPr id="6" name="Connector 5"/>
+          <p:cNvPr id="5" name="Connector 4"/>
           <p:cNvCxnSpPr/>
           <p:nvPr/>
         </p:nvCxnSpPr>
@@ -7114,7 +6426,7 @@
       </p:cxnSp>
       <p:sp>
         <p:nvSpPr>
-          <p:cNvPr id="7" name="TextBox 6"/>
+          <p:cNvPr id="6" name="TextBox 5"/>
           <p:cNvSpPr txBox="1"/>
           <p:nvPr/>
         </p:nvSpPr>
@@ -7149,7 +6461,7 @@
       </p:sp>
       <p:sp>
         <p:nvSpPr>
-          <p:cNvPr id="8" name="TextBox 7"/>
+          <p:cNvPr id="7" name="TextBox 6"/>
           <p:cNvSpPr txBox="1"/>
           <p:nvPr/>
         </p:nvSpPr>
@@ -7184,7 +6496,7 @@
       </p:sp>
       <p:pic>
         <p:nvPicPr>
-          <p:cNvPr id="9" name="Picture 8" descr="3af1907ef808e9a5.png"/>
+          <p:cNvPr id="8" name="Picture 7" descr="3af1907ef808e9a5.png"/>
           <p:cNvPicPr>
             <a:picLocks noChangeAspect="1"/>
           </p:cNvPicPr>
@@ -7208,87 +6520,7 @@
       </p:pic>
       <p:sp>
         <p:nvSpPr>
-          <p:cNvPr id="10" name="TextBox 9"/>
-          <p:cNvSpPr txBox="1"/>
-          <p:nvPr/>
-        </p:nvSpPr>
-        <p:spPr>
-          <a:xfrm>
-            <a:off x="1828800" y="2895599"/>
-            <a:ext cx="8503920" cy="548640"/>
-          </a:xfrm>
-          <a:prstGeom prst="rect">
-            <a:avLst/>
-          </a:prstGeom>
-          <a:noFill/>
-        </p:spPr>
-        <p:txBody>
-          <a:bodyPr wrap="square" lIns="45720" rIns="45720" tIns="18288" bIns="18288" anchor="t">
-            <a:spAutoFit/>
-          </a:bodyPr>
-          <a:lstStyle/>
-          <a:p>
-            <a:pPr algn="ctr"/>
-            <a:r>
-              <a:rPr sz="2400" b="0" i="0">
-                <a:solidFill>
-                  <a:srgbClr val="6B6B6B"/>
-                </a:solidFill>
-                <a:latin typeface="Century Schoolbook"/>
-              </a:rPr>
-              <a:t>(3</a:t>
-            </a:r>
-            <a:r>
-              <a:rPr sz="2400" b="0" i="0" baseline="30000">
-                <a:solidFill>
-                  <a:srgbClr val="6B6B6B"/>
-                </a:solidFill>
-                <a:latin typeface="Century Schoolbook"/>
-              </a:rPr>
-              <a:t>2</a:t>
-            </a:r>
-            <a:r>
-              <a:rPr sz="2400" b="0" i="0">
-                <a:solidFill>
-                  <a:srgbClr val="6B6B6B"/>
-                </a:solidFill>
-                <a:latin typeface="Century Schoolbook"/>
-              </a:rPr>
-              <a:t>)</a:t>
-            </a:r>
-            <a:r>
-              <a:rPr sz="2400" b="0" i="0" baseline="30000">
-                <a:solidFill>
-                  <a:srgbClr val="6B6B6B"/>
-                </a:solidFill>
-                <a:latin typeface="Century Schoolbook"/>
-              </a:rPr>
-              <a:t>3</a:t>
-            </a:r>
-            <a:r>
-              <a:rPr sz="2400" b="0" i="0">
-                <a:solidFill>
-                  <a:srgbClr val="6B6B6B"/>
-                </a:solidFill>
-                <a:latin typeface="Century Schoolbook"/>
-              </a:rPr>
-              <a:t> = 3</a:t>
-            </a:r>
-            <a:r>
-              <a:rPr sz="2400" b="0" i="0" baseline="30000">
-                <a:solidFill>
-                  <a:srgbClr val="6B6B6B"/>
-                </a:solidFill>
-                <a:latin typeface="Century Schoolbook"/>
-              </a:rPr>
-              <a:t>6</a:t>
-            </a:r>
-          </a:p>
-        </p:txBody>
-      </p:sp>
-      <p:sp>
-        <p:nvSpPr>
-          <p:cNvPr id="11" name="TextBox 10"/>
+          <p:cNvPr id="9" name="TextBox 8"/>
           <p:cNvSpPr txBox="1"/>
           <p:nvPr/>
         </p:nvSpPr>
@@ -7444,44 +6676,9 @@
           </a:fontRef>
         </p:style>
       </p:cxnSp>
-      <p:sp>
-        <p:nvSpPr>
-          <p:cNvPr id="5" name="TextBox 4"/>
-          <p:cNvSpPr txBox="1"/>
-          <p:nvPr/>
-        </p:nvSpPr>
-        <p:spPr>
-          <a:xfrm>
-            <a:off x="777240" y="1261872"/>
-            <a:ext cx="10607040" cy="310896"/>
-          </a:xfrm>
-          <a:prstGeom prst="rect">
-            <a:avLst/>
-          </a:prstGeom>
-          <a:noFill/>
-        </p:spPr>
-        <p:txBody>
-          <a:bodyPr wrap="square" lIns="45720" rIns="45720" tIns="18288" bIns="18288" anchor="t">
-            <a:spAutoFit/>
-          </a:bodyPr>
-          <a:lstStyle/>
-          <a:p>
-            <a:pPr algn="l"/>
-            <a:r>
-              <a:rPr sz="1700" b="0" i="1">
-                <a:solidFill>
-                  <a:srgbClr val="6B6B6B"/>
-                </a:solidFill>
-                <a:latin typeface="Century Schoolbook"/>
-              </a:rPr>
-              <a:t>Boards up on three.</a:t>
-            </a:r>
-          </a:p>
-        </p:txBody>
-      </p:sp>
       <p:cxnSp>
         <p:nvCxnSpPr>
-          <p:cNvPr id="6" name="Connector 5"/>
+          <p:cNvPr id="5" name="Connector 4"/>
           <p:cNvCxnSpPr/>
           <p:nvPr/>
         </p:nvCxnSpPr>
@@ -7516,7 +6713,7 @@
       </p:cxnSp>
       <p:sp>
         <p:nvSpPr>
-          <p:cNvPr id="7" name="TextBox 6"/>
+          <p:cNvPr id="6" name="TextBox 5"/>
           <p:cNvSpPr txBox="1"/>
           <p:nvPr/>
         </p:nvSpPr>
@@ -7551,7 +6748,7 @@
       </p:sp>
       <p:sp>
         <p:nvSpPr>
-          <p:cNvPr id="8" name="TextBox 7"/>
+          <p:cNvPr id="7" name="TextBox 6"/>
           <p:cNvSpPr txBox="1"/>
           <p:nvPr/>
         </p:nvSpPr>
@@ -7586,7 +6783,7 @@
       </p:sp>
       <p:pic>
         <p:nvPicPr>
-          <p:cNvPr id="9" name="Picture 8" descr="32948134bf5e3591.png"/>
+          <p:cNvPr id="8" name="Picture 7" descr="32948134bf5e3591.png"/>
           <p:cNvPicPr>
             <a:picLocks noChangeAspect="1"/>
           </p:cNvPicPr>
@@ -7610,7 +6807,7 @@
       </p:pic>
       <p:sp>
         <p:nvSpPr>
-          <p:cNvPr id="10" name="TextBox 9"/>
+          <p:cNvPr id="9" name="TextBox 8"/>
           <p:cNvSpPr txBox="1"/>
           <p:nvPr/>
         </p:nvSpPr>
@@ -7639,41 +6836,6 @@
                 <a:latin typeface="Century Schoolbook"/>
               </a:rPr>
               <a:t>Answer it.</a:t>
-            </a:r>
-          </a:p>
-        </p:txBody>
-      </p:sp>
-      <p:sp>
-        <p:nvSpPr>
-          <p:cNvPr id="11" name="TextBox 10"/>
-          <p:cNvSpPr txBox="1"/>
-          <p:nvPr/>
-        </p:nvSpPr>
-        <p:spPr>
-          <a:xfrm>
-            <a:off x="777240" y="4828032"/>
-            <a:ext cx="10607040" cy="365760"/>
-          </a:xfrm>
-          <a:prstGeom prst="rect">
-            <a:avLst/>
-          </a:prstGeom>
-          <a:noFill/>
-        </p:spPr>
-        <p:txBody>
-          <a:bodyPr wrap="square" lIns="45720" rIns="45720" tIns="18288" bIns="18288" anchor="t">
-            <a:spAutoFit/>
-          </a:bodyPr>
-          <a:lstStyle/>
-          <a:p>
-            <a:pPr algn="ctr"/>
-            <a:r>
-              <a:rPr sz="1900" b="0" i="1">
-                <a:solidFill>
-                  <a:srgbClr val="6B6B6B"/>
-                </a:solidFill>
-                <a:latin typeface="Century Schoolbook"/>
-              </a:rPr>
-              <a:t>Find the value.</a:t>
             </a:r>
           </a:p>
         </p:txBody>
@@ -7801,44 +6963,9 @@
           </a:fontRef>
         </p:style>
       </p:cxnSp>
-      <p:sp>
-        <p:nvSpPr>
-          <p:cNvPr id="5" name="TextBox 4"/>
-          <p:cNvSpPr txBox="1"/>
-          <p:nvPr/>
-        </p:nvSpPr>
-        <p:spPr>
-          <a:xfrm>
-            <a:off x="777240" y="1261872"/>
-            <a:ext cx="10607040" cy="310896"/>
-          </a:xfrm>
-          <a:prstGeom prst="rect">
-            <a:avLst/>
-          </a:prstGeom>
-          <a:noFill/>
-        </p:spPr>
-        <p:txBody>
-          <a:bodyPr wrap="square" lIns="45720" rIns="45720" tIns="18288" bIns="18288" anchor="t">
-            <a:spAutoFit/>
-          </a:bodyPr>
-          <a:lstStyle/>
-          <a:p>
-            <a:pPr algn="l"/>
-            <a:r>
-              <a:rPr sz="1700" b="0" i="1">
-                <a:solidFill>
-                  <a:srgbClr val="6B6B6B"/>
-                </a:solidFill>
-                <a:latin typeface="Century Schoolbook"/>
-              </a:rPr>
-              <a:t>On your own. Four minutes. No notes.</a:t>
-            </a:r>
-          </a:p>
-        </p:txBody>
-      </p:sp>
       <p:cxnSp>
         <p:nvCxnSpPr>
-          <p:cNvPr id="6" name="Connector 5"/>
+          <p:cNvPr id="5" name="Connector 4"/>
           <p:cNvCxnSpPr/>
           <p:nvPr/>
         </p:nvCxnSpPr>
@@ -7873,7 +7000,7 @@
       </p:cxnSp>
       <p:sp>
         <p:nvSpPr>
-          <p:cNvPr id="7" name="TextBox 6"/>
+          <p:cNvPr id="6" name="TextBox 5"/>
           <p:cNvSpPr txBox="1"/>
           <p:nvPr/>
         </p:nvSpPr>
@@ -7908,7 +7035,7 @@
       </p:sp>
       <p:sp>
         <p:nvSpPr>
-          <p:cNvPr id="8" name="TextBox 7"/>
+          <p:cNvPr id="7" name="TextBox 6"/>
           <p:cNvSpPr txBox="1"/>
           <p:nvPr/>
         </p:nvSpPr>
@@ -7943,13 +7070,13 @@
       </p:sp>
       <p:sp>
         <p:nvSpPr>
-          <p:cNvPr id="9" name="TextBox 8"/>
-          <p:cNvSpPr txBox="1"/>
-          <p:nvPr/>
-        </p:nvSpPr>
-        <p:spPr>
-          <a:xfrm>
-            <a:off x="1874519" y="1886712"/>
+          <p:cNvPr id="8" name="TextBox 7"/>
+          <p:cNvSpPr txBox="1"/>
+          <p:nvPr/>
+        </p:nvSpPr>
+        <p:spPr>
+          <a:xfrm>
+            <a:off x="1874519" y="1566672"/>
             <a:ext cx="3058734" cy="457200"/>
           </a:xfrm>
           <a:prstGeom prst="rect">
@@ -7978,7 +7105,7 @@
       </p:sp>
       <p:pic>
         <p:nvPicPr>
-          <p:cNvPr id="10" name="Picture 9" descr="0d08d420e081e8bf.png"/>
+          <p:cNvPr id="9" name="Picture 8" descr="0d08d420e081e8bf.png"/>
           <p:cNvPicPr>
             <a:picLocks noChangeAspect="1"/>
           </p:cNvPicPr>
@@ -7992,7 +7119,7 @@
         </p:blipFill>
         <p:spPr>
           <a:xfrm>
-            <a:off x="4796094" y="1783080"/>
+            <a:off x="4796094" y="1463040"/>
             <a:ext cx="469392" cy="664464"/>
           </a:xfrm>
           <a:prstGeom prst="rect">
@@ -8002,13 +7129,13 @@
       </p:pic>
       <p:sp>
         <p:nvSpPr>
-          <p:cNvPr id="11" name="TextBox 10"/>
-          <p:cNvSpPr txBox="1"/>
-          <p:nvPr/>
-        </p:nvSpPr>
-        <p:spPr>
-          <a:xfrm>
-            <a:off x="1874519" y="2625852"/>
+          <p:cNvPr id="10" name="TextBox 9"/>
+          <p:cNvSpPr txBox="1"/>
+          <p:nvPr/>
+        </p:nvSpPr>
+        <p:spPr>
+          <a:xfrm>
+            <a:off x="1874519" y="2305812"/>
             <a:ext cx="1082239" cy="457200"/>
           </a:xfrm>
           <a:prstGeom prst="rect">
@@ -8037,7 +7164,7 @@
       </p:sp>
       <p:pic>
         <p:nvPicPr>
-          <p:cNvPr id="12" name="Picture 11" descr="697434924d454a71.png"/>
+          <p:cNvPr id="11" name="Picture 10" descr="697434924d454a71.png"/>
           <p:cNvPicPr>
             <a:picLocks noChangeAspect="1"/>
           </p:cNvPicPr>
@@ -8051,7 +7178,7 @@
         </p:blipFill>
         <p:spPr>
           <a:xfrm>
-            <a:off x="2819599" y="2650236"/>
+            <a:off x="2819599" y="2330196"/>
             <a:ext cx="688848" cy="408432"/>
           </a:xfrm>
           <a:prstGeom prst="rect">
@@ -8061,13 +7188,13 @@
       </p:pic>
       <p:sp>
         <p:nvSpPr>
-          <p:cNvPr id="13" name="TextBox 12"/>
-          <p:cNvSpPr txBox="1"/>
-          <p:nvPr/>
-        </p:nvSpPr>
-        <p:spPr>
-          <a:xfrm>
-            <a:off x="3508447" y="2625852"/>
+          <p:cNvPr id="12" name="TextBox 11"/>
+          <p:cNvSpPr txBox="1"/>
+          <p:nvPr/>
+        </p:nvSpPr>
+        <p:spPr>
+          <a:xfrm>
+            <a:off x="3508447" y="2305812"/>
             <a:ext cx="2879837" cy="457200"/>
           </a:xfrm>
           <a:prstGeom prst="rect">
@@ -8096,13 +7223,13 @@
       </p:sp>
       <p:sp>
         <p:nvSpPr>
-          <p:cNvPr id="14" name="TextBox 13"/>
-          <p:cNvSpPr txBox="1"/>
-          <p:nvPr/>
-        </p:nvSpPr>
-        <p:spPr>
-          <a:xfrm>
-            <a:off x="1874519" y="3238500"/>
+          <p:cNvPr id="13" name="TextBox 12"/>
+          <p:cNvSpPr txBox="1"/>
+          <p:nvPr/>
+        </p:nvSpPr>
+        <p:spPr>
+          <a:xfrm>
+            <a:off x="1874519" y="2918460"/>
             <a:ext cx="1652008" cy="457200"/>
           </a:xfrm>
           <a:prstGeom prst="rect">
@@ -8131,7 +7258,7 @@
       </p:sp>
       <p:pic>
         <p:nvPicPr>
-          <p:cNvPr id="15" name="Picture 14" descr="7747f117721bd827.png"/>
+          <p:cNvPr id="14" name="Picture 13" descr="7747f117721bd827.png"/>
           <p:cNvPicPr>
             <a:picLocks noChangeAspect="1"/>
           </p:cNvPicPr>
@@ -8145,7 +7272,7 @@
         </p:blipFill>
         <p:spPr>
           <a:xfrm>
-            <a:off x="3389368" y="3323844"/>
+            <a:off x="3389368" y="3003804"/>
             <a:ext cx="1658112" cy="286512"/>
           </a:xfrm>
           <a:prstGeom prst="rect">
@@ -8155,13 +7282,13 @@
       </p:pic>
       <p:sp>
         <p:nvSpPr>
-          <p:cNvPr id="16" name="TextBox 15"/>
-          <p:cNvSpPr txBox="1"/>
-          <p:nvPr/>
-        </p:nvSpPr>
-        <p:spPr>
-          <a:xfrm>
-            <a:off x="1874519" y="3851148"/>
+          <p:cNvPr id="15" name="TextBox 14"/>
+          <p:cNvSpPr txBox="1"/>
+          <p:nvPr/>
+        </p:nvSpPr>
+        <p:spPr>
+          <a:xfrm>
+            <a:off x="1874519" y="3531108"/>
             <a:ext cx="2190435" cy="457200"/>
           </a:xfrm>
           <a:prstGeom prst="rect">
@@ -8190,7 +7317,7 @@
       </p:sp>
       <p:pic>
         <p:nvPicPr>
-          <p:cNvPr id="17" name="Picture 16" descr="2a87b786c67fb6da.png"/>
+          <p:cNvPr id="16" name="Picture 15" descr="2a87b786c67fb6da.png"/>
           <p:cNvPicPr>
             <a:picLocks noChangeAspect="1"/>
           </p:cNvPicPr>
@@ -8204,7 +7331,7 @@
         </p:blipFill>
         <p:spPr>
           <a:xfrm>
-            <a:off x="3927795" y="3934968"/>
+            <a:off x="3927795" y="3614928"/>
             <a:ext cx="1112520" cy="289560"/>
           </a:xfrm>
           <a:prstGeom prst="rect">
@@ -8335,44 +7462,9 @@
           </a:fontRef>
         </p:style>
       </p:cxnSp>
-      <p:sp>
-        <p:nvSpPr>
-          <p:cNvPr id="5" name="TextBox 4"/>
-          <p:cNvSpPr txBox="1"/>
-          <p:nvPr/>
-        </p:nvSpPr>
-        <p:spPr>
-          <a:xfrm>
-            <a:off x="777240" y="1261872"/>
-            <a:ext cx="10607040" cy="310896"/>
-          </a:xfrm>
-          <a:prstGeom prst="rect">
-            <a:avLst/>
-          </a:prstGeom>
-          <a:noFill/>
-        </p:spPr>
-        <p:txBody>
-          <a:bodyPr wrap="square" lIns="45720" rIns="45720" tIns="18288" bIns="18288" anchor="t">
-            <a:spAutoFit/>
-          </a:bodyPr>
-          <a:lstStyle/>
-          <a:p>
-            <a:pPr algn="l"/>
-            <a:r>
-              <a:rPr sz="1700" b="0" i="1">
-                <a:solidFill>
-                  <a:srgbClr val="6B6B6B"/>
-                </a:solidFill>
-                <a:latin typeface="Century Schoolbook"/>
-              </a:rPr>
-              <a:t>Answer.</a:t>
-            </a:r>
-          </a:p>
-        </p:txBody>
-      </p:sp>
       <p:cxnSp>
         <p:nvCxnSpPr>
-          <p:cNvPr id="6" name="Connector 5"/>
+          <p:cNvPr id="5" name="Connector 4"/>
           <p:cNvCxnSpPr/>
           <p:nvPr/>
         </p:nvCxnSpPr>
@@ -8407,7 +7499,7 @@
       </p:cxnSp>
       <p:sp>
         <p:nvSpPr>
-          <p:cNvPr id="7" name="TextBox 6"/>
+          <p:cNvPr id="6" name="TextBox 5"/>
           <p:cNvSpPr txBox="1"/>
           <p:nvPr/>
         </p:nvSpPr>
@@ -8442,7 +7534,7 @@
       </p:sp>
       <p:sp>
         <p:nvSpPr>
-          <p:cNvPr id="8" name="TextBox 7"/>
+          <p:cNvPr id="7" name="TextBox 6"/>
           <p:cNvSpPr txBox="1"/>
           <p:nvPr/>
         </p:nvSpPr>
@@ -8477,7 +7569,7 @@
       </p:sp>
       <p:pic>
         <p:nvPicPr>
-          <p:cNvPr id="9" name="Picture 8" descr="7bfc7057b3b2cf51.png"/>
+          <p:cNvPr id="8" name="Picture 7" descr="7bfc7057b3b2cf51.png"/>
           <p:cNvPicPr>
             <a:picLocks noChangeAspect="1"/>
           </p:cNvPicPr>
@@ -8501,87 +7593,7 @@
       </p:pic>
       <p:sp>
         <p:nvSpPr>
-          <p:cNvPr id="10" name="TextBox 9"/>
-          <p:cNvSpPr txBox="1"/>
-          <p:nvPr/>
-        </p:nvSpPr>
-        <p:spPr>
-          <a:xfrm>
-            <a:off x="1828800" y="3563112"/>
-            <a:ext cx="8503920" cy="548640"/>
-          </a:xfrm>
-          <a:prstGeom prst="rect">
-            <a:avLst/>
-          </a:prstGeom>
-          <a:noFill/>
-        </p:spPr>
-        <p:txBody>
-          <a:bodyPr wrap="square" lIns="45720" rIns="45720" tIns="18288" bIns="18288" anchor="t">
-            <a:spAutoFit/>
-          </a:bodyPr>
-          <a:lstStyle/>
-          <a:p>
-            <a:pPr algn="ctr"/>
-            <a:r>
-              <a:rPr sz="2400" b="0" i="0">
-                <a:solidFill>
-                  <a:srgbClr val="6B6B6B"/>
-                </a:solidFill>
-                <a:latin typeface="Century Schoolbook"/>
-              </a:rPr>
-              <a:t>0.5</a:t>
-            </a:r>
-            <a:r>
-              <a:rPr sz="2400" b="0" i="0" baseline="30000">
-                <a:solidFill>
-                  <a:srgbClr val="6B6B6B"/>
-                </a:solidFill>
-                <a:latin typeface="Century Schoolbook"/>
-              </a:rPr>
-              <a:t>6</a:t>
-            </a:r>
-            <a:r>
-              <a:rPr sz="2400" b="0" i="0">
-                <a:solidFill>
-                  <a:srgbClr val="6B6B6B"/>
-                </a:solidFill>
-                <a:latin typeface="Century Schoolbook"/>
-              </a:rPr>
-              <a:t> ÷ 0.5</a:t>
-            </a:r>
-            <a:r>
-              <a:rPr sz="2400" b="0" i="0" baseline="30000">
-                <a:solidFill>
-                  <a:srgbClr val="6B6B6B"/>
-                </a:solidFill>
-                <a:latin typeface="Century Schoolbook"/>
-              </a:rPr>
-              <a:t>2</a:t>
-            </a:r>
-            <a:r>
-              <a:rPr sz="2400" b="0" i="0">
-                <a:solidFill>
-                  <a:srgbClr val="6B6B6B"/>
-                </a:solidFill>
-                <a:latin typeface="Century Schoolbook"/>
-              </a:rPr>
-              <a:t> = 0.5</a:t>
-            </a:r>
-            <a:r>
-              <a:rPr sz="2400" b="0" i="0" baseline="30000">
-                <a:solidFill>
-                  <a:srgbClr val="6B6B6B"/>
-                </a:solidFill>
-                <a:latin typeface="Century Schoolbook"/>
-              </a:rPr>
-              <a:t>4</a:t>
-            </a:r>
-          </a:p>
-        </p:txBody>
-      </p:sp>
-      <p:sp>
-        <p:nvSpPr>
-          <p:cNvPr id="11" name="TextBox 10"/>
+          <p:cNvPr id="9" name="TextBox 8"/>
           <p:cNvSpPr txBox="1"/>
           <p:nvPr/>
         </p:nvSpPr>
@@ -8737,44 +7749,9 @@
           </a:fontRef>
         </p:style>
       </p:cxnSp>
-      <p:sp>
-        <p:nvSpPr>
-          <p:cNvPr id="5" name="TextBox 4"/>
-          <p:cNvSpPr txBox="1"/>
-          <p:nvPr/>
-        </p:nvSpPr>
-        <p:spPr>
-          <a:xfrm>
-            <a:off x="777240" y="1261872"/>
-            <a:ext cx="10607040" cy="310896"/>
-          </a:xfrm>
-          <a:prstGeom prst="rect">
-            <a:avLst/>
-          </a:prstGeom>
-          <a:noFill/>
-        </p:spPr>
-        <p:txBody>
-          <a:bodyPr wrap="square" lIns="45720" rIns="45720" tIns="18288" bIns="18288" anchor="t">
-            <a:spAutoFit/>
-          </a:bodyPr>
-          <a:lstStyle/>
-          <a:p>
-            <a:pPr algn="l"/>
-            <a:r>
-              <a:rPr sz="1700" b="0" i="1">
-                <a:solidFill>
-                  <a:srgbClr val="6B6B6B"/>
-                </a:solidFill>
-                <a:latin typeface="Century Schoolbook"/>
-              </a:rPr>
-              <a:t>Boards up on three.</a:t>
-            </a:r>
-          </a:p>
-        </p:txBody>
-      </p:sp>
       <p:cxnSp>
         <p:nvCxnSpPr>
-          <p:cNvPr id="6" name="Connector 5"/>
+          <p:cNvPr id="5" name="Connector 4"/>
           <p:cNvCxnSpPr/>
           <p:nvPr/>
         </p:nvCxnSpPr>
@@ -8809,7 +7786,7 @@
       </p:cxnSp>
       <p:sp>
         <p:nvSpPr>
-          <p:cNvPr id="7" name="TextBox 6"/>
+          <p:cNvPr id="6" name="TextBox 5"/>
           <p:cNvSpPr txBox="1"/>
           <p:nvPr/>
         </p:nvSpPr>
@@ -8844,7 +7821,7 @@
       </p:sp>
       <p:sp>
         <p:nvSpPr>
-          <p:cNvPr id="8" name="TextBox 7"/>
+          <p:cNvPr id="7" name="TextBox 6"/>
           <p:cNvSpPr txBox="1"/>
           <p:nvPr/>
         </p:nvSpPr>
@@ -8879,7 +7856,7 @@
       </p:sp>
       <p:pic>
         <p:nvPicPr>
-          <p:cNvPr id="9" name="Picture 8" descr="5b85e638d34eb13f.png"/>
+          <p:cNvPr id="8" name="Picture 7" descr="5b85e638d34eb13f.png"/>
           <p:cNvPicPr>
             <a:picLocks noChangeAspect="1"/>
           </p:cNvPicPr>
@@ -8903,7 +7880,7 @@
       </p:pic>
       <p:sp>
         <p:nvSpPr>
-          <p:cNvPr id="10" name="TextBox 9"/>
+          <p:cNvPr id="9" name="TextBox 8"/>
           <p:cNvSpPr txBox="1"/>
           <p:nvPr/>
         </p:nvSpPr>
@@ -8932,41 +7909,6 @@
                 <a:latin typeface="Century Schoolbook"/>
               </a:rPr>
               <a:t>Answer it.</a:t>
-            </a:r>
-          </a:p>
-        </p:txBody>
-      </p:sp>
-      <p:sp>
-        <p:nvSpPr>
-          <p:cNvPr id="11" name="TextBox 10"/>
-          <p:cNvSpPr txBox="1"/>
-          <p:nvPr/>
-        </p:nvSpPr>
-        <p:spPr>
-          <a:xfrm>
-            <a:off x="777240" y="4828032"/>
-            <a:ext cx="10607040" cy="365760"/>
-          </a:xfrm>
-          <a:prstGeom prst="rect">
-            <a:avLst/>
-          </a:prstGeom>
-          <a:noFill/>
-        </p:spPr>
-        <p:txBody>
-          <a:bodyPr wrap="square" lIns="45720" rIns="45720" tIns="18288" bIns="18288" anchor="t">
-            <a:spAutoFit/>
-          </a:bodyPr>
-          <a:lstStyle/>
-          <a:p>
-            <a:pPr algn="ctr"/>
-            <a:r>
-              <a:rPr sz="1900" b="0" i="1">
-                <a:solidFill>
-                  <a:srgbClr val="6B6B6B"/>
-                </a:solidFill>
-                <a:latin typeface="Century Schoolbook"/>
-              </a:rPr>
-              <a:t>Find the value.</a:t>
             </a:r>
           </a:p>
         </p:txBody>
@@ -9094,44 +8036,9 @@
           </a:fontRef>
         </p:style>
       </p:cxnSp>
-      <p:sp>
-        <p:nvSpPr>
-          <p:cNvPr id="5" name="TextBox 4"/>
-          <p:cNvSpPr txBox="1"/>
-          <p:nvPr/>
-        </p:nvSpPr>
-        <p:spPr>
-          <a:xfrm>
-            <a:off x="777240" y="1261872"/>
-            <a:ext cx="10607040" cy="310896"/>
-          </a:xfrm>
-          <a:prstGeom prst="rect">
-            <a:avLst/>
-          </a:prstGeom>
-          <a:noFill/>
-        </p:spPr>
-        <p:txBody>
-          <a:bodyPr wrap="square" lIns="45720" rIns="45720" tIns="18288" bIns="18288" anchor="t">
-            <a:spAutoFit/>
-          </a:bodyPr>
-          <a:lstStyle/>
-          <a:p>
-            <a:pPr algn="l"/>
-            <a:r>
-              <a:rPr sz="1700" b="0" i="1">
-                <a:solidFill>
-                  <a:srgbClr val="6B6B6B"/>
-                </a:solidFill>
-                <a:latin typeface="Century Schoolbook"/>
-              </a:rPr>
-              <a:t>Answer.</a:t>
-            </a:r>
-          </a:p>
-        </p:txBody>
-      </p:sp>
       <p:cxnSp>
         <p:nvCxnSpPr>
-          <p:cNvPr id="6" name="Connector 5"/>
+          <p:cNvPr id="5" name="Connector 4"/>
           <p:cNvCxnSpPr/>
           <p:nvPr/>
         </p:nvCxnSpPr>
@@ -9166,7 +8073,7 @@
       </p:cxnSp>
       <p:sp>
         <p:nvSpPr>
-          <p:cNvPr id="7" name="TextBox 6"/>
+          <p:cNvPr id="6" name="TextBox 5"/>
           <p:cNvSpPr txBox="1"/>
           <p:nvPr/>
         </p:nvSpPr>
@@ -9201,7 +8108,7 @@
       </p:sp>
       <p:sp>
         <p:nvSpPr>
-          <p:cNvPr id="8" name="TextBox 7"/>
+          <p:cNvPr id="7" name="TextBox 6"/>
           <p:cNvSpPr txBox="1"/>
           <p:nvPr/>
         </p:nvSpPr>
@@ -9236,7 +8143,7 @@
       </p:sp>
       <p:pic>
         <p:nvPicPr>
-          <p:cNvPr id="9" name="Picture 8" descr="e041e4b255d1e34c.png"/>
+          <p:cNvPr id="8" name="Picture 7" descr="e041e4b255d1e34c.png"/>
           <p:cNvPicPr>
             <a:picLocks noChangeAspect="1"/>
           </p:cNvPicPr>
@@ -9260,60 +8167,7 @@
       </p:pic>
       <p:sp>
         <p:nvSpPr>
-          <p:cNvPr id="10" name="TextBox 9"/>
-          <p:cNvSpPr txBox="1"/>
-          <p:nvPr/>
-        </p:nvSpPr>
-        <p:spPr>
-          <a:xfrm>
-            <a:off x="1828800" y="3395471"/>
-            <a:ext cx="8503920" cy="548640"/>
-          </a:xfrm>
-          <a:prstGeom prst="rect">
-            <a:avLst/>
-          </a:prstGeom>
-          <a:noFill/>
-        </p:spPr>
-        <p:txBody>
-          <a:bodyPr wrap="square" lIns="45720" rIns="45720" tIns="18288" bIns="18288" anchor="t">
-            <a:spAutoFit/>
-          </a:bodyPr>
-          <a:lstStyle/>
-          <a:p>
-            <a:pPr algn="ctr"/>
-            <a:r>
-              <a:rPr sz="2400" b="0" i="0">
-                <a:solidFill>
-                  <a:srgbClr val="6B6B6B"/>
-                </a:solidFill>
-                <a:latin typeface="Century Schoolbook"/>
-              </a:rPr>
-              <a:t>2.5</a:t>
-            </a:r>
-            <a:r>
-              <a:rPr sz="2400" b="0" i="0" baseline="30000">
-                <a:solidFill>
-                  <a:srgbClr val="6B6B6B"/>
-                </a:solidFill>
-                <a:latin typeface="Century Schoolbook"/>
-              </a:rPr>
-              <a:t>2</a:t>
-            </a:r>
-            <a:r>
-              <a:rPr sz="2400" b="0" i="0">
-                <a:solidFill>
-                  <a:srgbClr val="6B6B6B"/>
-                </a:solidFill>
-                <a:latin typeface="Century Schoolbook"/>
-              </a:rPr>
-              <a:t> — the exponent 1 changes nothing</a:t>
-            </a:r>
-          </a:p>
-        </p:txBody>
-      </p:sp>
-      <p:sp>
-        <p:nvSpPr>
-          <p:cNvPr id="11" name="TextBox 10"/>
+          <p:cNvPr id="9" name="TextBox 8"/>
           <p:cNvSpPr txBox="1"/>
           <p:nvPr/>
         </p:nvSpPr>
@@ -9469,44 +8323,9 @@
           </a:fontRef>
         </p:style>
       </p:cxnSp>
-      <p:sp>
-        <p:nvSpPr>
-          <p:cNvPr id="5" name="TextBox 4"/>
-          <p:cNvSpPr txBox="1"/>
-          <p:nvPr/>
-        </p:nvSpPr>
-        <p:spPr>
-          <a:xfrm>
-            <a:off x="777240" y="1261872"/>
-            <a:ext cx="10607040" cy="310896"/>
-          </a:xfrm>
-          <a:prstGeom prst="rect">
-            <a:avLst/>
-          </a:prstGeom>
-          <a:noFill/>
-        </p:spPr>
-        <p:txBody>
-          <a:bodyPr wrap="square" lIns="45720" rIns="45720" tIns="18288" bIns="18288" anchor="t">
-            <a:spAutoFit/>
-          </a:bodyPr>
-          <a:lstStyle/>
-          <a:p>
-            <a:pPr algn="l"/>
-            <a:r>
-              <a:rPr sz="1700" b="0" i="1">
-                <a:solidFill>
-                  <a:srgbClr val="6B6B6B"/>
-                </a:solidFill>
-                <a:latin typeface="Century Schoolbook"/>
-              </a:rPr>
-              <a:t>Boards up on three.</a:t>
-            </a:r>
-          </a:p>
-        </p:txBody>
-      </p:sp>
       <p:cxnSp>
         <p:nvCxnSpPr>
-          <p:cNvPr id="6" name="Connector 5"/>
+          <p:cNvPr id="5" name="Connector 4"/>
           <p:cNvCxnSpPr/>
           <p:nvPr/>
         </p:nvCxnSpPr>
@@ -9541,7 +8360,7 @@
       </p:cxnSp>
       <p:sp>
         <p:nvSpPr>
-          <p:cNvPr id="7" name="TextBox 6"/>
+          <p:cNvPr id="6" name="TextBox 5"/>
           <p:cNvSpPr txBox="1"/>
           <p:nvPr/>
         </p:nvSpPr>
@@ -9576,7 +8395,7 @@
       </p:sp>
       <p:sp>
         <p:nvSpPr>
-          <p:cNvPr id="8" name="TextBox 7"/>
+          <p:cNvPr id="7" name="TextBox 6"/>
           <p:cNvSpPr txBox="1"/>
           <p:nvPr/>
         </p:nvSpPr>
@@ -9611,7 +8430,7 @@
       </p:sp>
       <p:pic>
         <p:nvPicPr>
-          <p:cNvPr id="9" name="Picture 8" descr="85a5d92abe26b906.png"/>
+          <p:cNvPr id="8" name="Picture 7" descr="85a5d92abe26b906.png"/>
           <p:cNvPicPr>
             <a:picLocks noChangeAspect="1"/>
           </p:cNvPicPr>
@@ -9635,7 +8454,7 @@
       </p:pic>
       <p:sp>
         <p:nvSpPr>
-          <p:cNvPr id="10" name="TextBox 9"/>
+          <p:cNvPr id="9" name="TextBox 8"/>
           <p:cNvSpPr txBox="1"/>
           <p:nvPr/>
         </p:nvSpPr>
@@ -9670,7 +8489,7 @@
       </p:sp>
       <p:sp>
         <p:nvSpPr>
-          <p:cNvPr id="11" name="TextBox 10"/>
+          <p:cNvPr id="10" name="TextBox 9"/>
           <p:cNvSpPr txBox="1"/>
           <p:nvPr/>
         </p:nvSpPr>
@@ -9714,7 +8533,7 @@
       </p:sp>
       <p:sp>
         <p:nvSpPr>
-          <p:cNvPr id="12" name="TextBox 11"/>
+          <p:cNvPr id="11" name="TextBox 10"/>
           <p:cNvSpPr txBox="1"/>
           <p:nvPr/>
         </p:nvSpPr>
@@ -9767,7 +8586,7 @@
       </p:sp>
       <p:sp>
         <p:nvSpPr>
-          <p:cNvPr id="13" name="TextBox 12"/>
+          <p:cNvPr id="12" name="TextBox 11"/>
           <p:cNvSpPr txBox="1"/>
           <p:nvPr/>
         </p:nvSpPr>
@@ -9811,7 +8630,7 @@
       </p:sp>
       <p:sp>
         <p:nvSpPr>
-          <p:cNvPr id="14" name="TextBox 13"/>
+          <p:cNvPr id="13" name="TextBox 12"/>
           <p:cNvSpPr txBox="1"/>
           <p:nvPr/>
         </p:nvSpPr>
@@ -9855,7 +8674,7 @@
       </p:sp>
       <p:sp>
         <p:nvSpPr>
-          <p:cNvPr id="15" name="TextBox 14"/>
+          <p:cNvPr id="14" name="TextBox 13"/>
           <p:cNvSpPr txBox="1"/>
           <p:nvPr/>
         </p:nvSpPr>
@@ -10011,44 +8830,9 @@
           </a:fontRef>
         </p:style>
       </p:cxnSp>
-      <p:sp>
-        <p:nvSpPr>
-          <p:cNvPr id="5" name="TextBox 4"/>
-          <p:cNvSpPr txBox="1"/>
-          <p:nvPr/>
-        </p:nvSpPr>
-        <p:spPr>
-          <a:xfrm>
-            <a:off x="777240" y="1261872"/>
-            <a:ext cx="10607040" cy="310896"/>
-          </a:xfrm>
-          <a:prstGeom prst="rect">
-            <a:avLst/>
-          </a:prstGeom>
-          <a:noFill/>
-        </p:spPr>
-        <p:txBody>
-          <a:bodyPr wrap="square" lIns="45720" rIns="45720" tIns="18288" bIns="18288" anchor="t">
-            <a:spAutoFit/>
-          </a:bodyPr>
-          <a:lstStyle/>
-          <a:p>
-            <a:pPr algn="l"/>
-            <a:r>
-              <a:rPr sz="1700" b="0" i="1">
-                <a:solidFill>
-                  <a:srgbClr val="6B6B6B"/>
-                </a:solidFill>
-                <a:latin typeface="Century Schoolbook"/>
-              </a:rPr>
-              <a:t>Answer.</a:t>
-            </a:r>
-          </a:p>
-        </p:txBody>
-      </p:sp>
       <p:cxnSp>
         <p:nvCxnSpPr>
-          <p:cNvPr id="6" name="Connector 5"/>
+          <p:cNvPr id="5" name="Connector 4"/>
           <p:cNvCxnSpPr/>
           <p:nvPr/>
         </p:nvCxnSpPr>
@@ -10083,7 +8867,7 @@
       </p:cxnSp>
       <p:sp>
         <p:nvSpPr>
-          <p:cNvPr id="7" name="TextBox 6"/>
+          <p:cNvPr id="6" name="TextBox 5"/>
           <p:cNvSpPr txBox="1"/>
           <p:nvPr/>
         </p:nvSpPr>
@@ -10118,7 +8902,7 @@
       </p:sp>
       <p:sp>
         <p:nvSpPr>
-          <p:cNvPr id="8" name="TextBox 7"/>
+          <p:cNvPr id="7" name="TextBox 6"/>
           <p:cNvSpPr txBox="1"/>
           <p:nvPr/>
         </p:nvSpPr>
@@ -10153,7 +8937,7 @@
       </p:sp>
       <p:pic>
         <p:nvPicPr>
-          <p:cNvPr id="9" name="Picture 8" descr="c78ed1ad0d5dedd3.png"/>
+          <p:cNvPr id="8" name="Picture 7" descr="c78ed1ad0d5dedd3.png"/>
           <p:cNvPicPr>
             <a:picLocks noChangeAspect="1"/>
           </p:cNvPicPr>
@@ -10177,7 +8961,7 @@
       </p:pic>
       <p:sp>
         <p:nvSpPr>
-          <p:cNvPr id="10" name="TextBox 9"/>
+          <p:cNvPr id="9" name="TextBox 8"/>
           <p:cNvSpPr txBox="1"/>
           <p:nvPr/>
         </p:nvSpPr>
@@ -10212,7 +8996,7 @@
       </p:sp>
       <p:sp>
         <p:nvSpPr>
-          <p:cNvPr id="11" name="TextBox 10"/>
+          <p:cNvPr id="10" name="TextBox 9"/>
           <p:cNvSpPr txBox="1"/>
           <p:nvPr/>
         </p:nvSpPr>
@@ -10256,7 +9040,7 @@
       </p:sp>
       <p:sp>
         <p:nvSpPr>
-          <p:cNvPr id="12" name="TextBox 11"/>
+          <p:cNvPr id="11" name="TextBox 10"/>
           <p:cNvSpPr txBox="1"/>
           <p:nvPr/>
         </p:nvSpPr>
@@ -10309,7 +9093,7 @@
       </p:sp>
       <p:sp>
         <p:nvSpPr>
-          <p:cNvPr id="13" name="TextBox 12"/>
+          <p:cNvPr id="12" name="TextBox 11"/>
           <p:cNvSpPr txBox="1"/>
           <p:nvPr/>
         </p:nvSpPr>
@@ -10353,7 +9137,7 @@
       </p:sp>
       <p:sp>
         <p:nvSpPr>
-          <p:cNvPr id="14" name="TextBox 13"/>
+          <p:cNvPr id="13" name="TextBox 12"/>
           <p:cNvSpPr txBox="1"/>
           <p:nvPr/>
         </p:nvSpPr>
@@ -10397,7 +9181,7 @@
       </p:sp>
       <p:sp>
         <p:nvSpPr>
-          <p:cNvPr id="15" name="TextBox 14"/>
+          <p:cNvPr id="14" name="TextBox 13"/>
           <p:cNvSpPr txBox="1"/>
           <p:nvPr/>
         </p:nvSpPr>
@@ -10553,44 +9337,9 @@
           </a:fontRef>
         </p:style>
       </p:cxnSp>
-      <p:sp>
-        <p:nvSpPr>
-          <p:cNvPr id="5" name="TextBox 4"/>
-          <p:cNvSpPr txBox="1"/>
-          <p:nvPr/>
-        </p:nvSpPr>
-        <p:spPr>
-          <a:xfrm>
-            <a:off x="777240" y="1261872"/>
-            <a:ext cx="10607040" cy="310896"/>
-          </a:xfrm>
-          <a:prstGeom prst="rect">
-            <a:avLst/>
-          </a:prstGeom>
-          <a:noFill/>
-        </p:spPr>
-        <p:txBody>
-          <a:bodyPr wrap="square" lIns="45720" rIns="45720" tIns="18288" bIns="18288" anchor="t">
-            <a:spAutoFit/>
-          </a:bodyPr>
-          <a:lstStyle/>
-          <a:p>
-            <a:pPr algn="l"/>
-            <a:r>
-              <a:rPr sz="1700" b="0" i="1">
-                <a:solidFill>
-                  <a:srgbClr val="6B6B6B"/>
-                </a:solidFill>
-                <a:latin typeface="Century Schoolbook"/>
-              </a:rPr>
-              <a:t>Boards up on three.</a:t>
-            </a:r>
-          </a:p>
-        </p:txBody>
-      </p:sp>
       <p:cxnSp>
         <p:nvCxnSpPr>
-          <p:cNvPr id="6" name="Connector 5"/>
+          <p:cNvPr id="5" name="Connector 4"/>
           <p:cNvCxnSpPr/>
           <p:nvPr/>
         </p:nvCxnSpPr>
@@ -10625,7 +9374,7 @@
       </p:cxnSp>
       <p:sp>
         <p:nvSpPr>
-          <p:cNvPr id="7" name="TextBox 6"/>
+          <p:cNvPr id="6" name="TextBox 5"/>
           <p:cNvSpPr txBox="1"/>
           <p:nvPr/>
         </p:nvSpPr>
@@ -10660,7 +9409,7 @@
       </p:sp>
       <p:sp>
         <p:nvSpPr>
-          <p:cNvPr id="8" name="TextBox 7"/>
+          <p:cNvPr id="7" name="TextBox 6"/>
           <p:cNvSpPr txBox="1"/>
           <p:nvPr/>
         </p:nvSpPr>
@@ -10695,7 +9444,7 @@
       </p:sp>
       <p:pic>
         <p:nvPicPr>
-          <p:cNvPr id="9" name="Picture 8" descr="36dd69d05a8fa1b0.png"/>
+          <p:cNvPr id="8" name="Picture 7" descr="36dd69d05a8fa1b0.png"/>
           <p:cNvPicPr>
             <a:picLocks noChangeAspect="1"/>
           </p:cNvPicPr>
@@ -10719,7 +9468,7 @@
       </p:pic>
       <p:sp>
         <p:nvSpPr>
-          <p:cNvPr id="10" name="TextBox 9"/>
+          <p:cNvPr id="9" name="TextBox 8"/>
           <p:cNvSpPr txBox="1"/>
           <p:nvPr/>
         </p:nvSpPr>
@@ -10754,7 +9503,7 @@
       </p:sp>
       <p:sp>
         <p:nvSpPr>
-          <p:cNvPr id="11" name="TextBox 10"/>
+          <p:cNvPr id="10" name="TextBox 9"/>
           <p:cNvSpPr txBox="1"/>
           <p:nvPr/>
         </p:nvSpPr>
@@ -10825,7 +9574,7 @@
       </p:sp>
       <p:sp>
         <p:nvSpPr>
-          <p:cNvPr id="12" name="TextBox 11"/>
+          <p:cNvPr id="11" name="TextBox 10"/>
           <p:cNvSpPr txBox="1"/>
           <p:nvPr/>
         </p:nvSpPr>
@@ -10896,7 +9645,7 @@
       </p:sp>
       <p:sp>
         <p:nvSpPr>
-          <p:cNvPr id="13" name="TextBox 12"/>
+          <p:cNvPr id="12" name="TextBox 11"/>
           <p:cNvSpPr txBox="1"/>
           <p:nvPr/>
         </p:nvSpPr>
@@ -10949,7 +9698,7 @@
       </p:sp>
       <p:sp>
         <p:nvSpPr>
-          <p:cNvPr id="14" name="TextBox 13"/>
+          <p:cNvPr id="13" name="TextBox 12"/>
           <p:cNvSpPr txBox="1"/>
           <p:nvPr/>
         </p:nvSpPr>
@@ -11002,7 +9751,7 @@
       </p:sp>
       <p:sp>
         <p:nvSpPr>
-          <p:cNvPr id="15" name="TextBox 14"/>
+          <p:cNvPr id="14" name="TextBox 13"/>
           <p:cNvSpPr txBox="1"/>
           <p:nvPr/>
         </p:nvSpPr>
@@ -11158,44 +9907,9 @@
           </a:fontRef>
         </p:style>
       </p:cxnSp>
-      <p:sp>
-        <p:nvSpPr>
-          <p:cNvPr id="5" name="TextBox 4"/>
-          <p:cNvSpPr txBox="1"/>
-          <p:nvPr/>
-        </p:nvSpPr>
-        <p:spPr>
-          <a:xfrm>
-            <a:off x="777240" y="1261872"/>
-            <a:ext cx="10607040" cy="310896"/>
-          </a:xfrm>
-          <a:prstGeom prst="rect">
-            <a:avLst/>
-          </a:prstGeom>
-          <a:noFill/>
-        </p:spPr>
-        <p:txBody>
-          <a:bodyPr wrap="square" lIns="45720" rIns="45720" tIns="18288" bIns="18288" anchor="t">
-            <a:spAutoFit/>
-          </a:bodyPr>
-          <a:lstStyle/>
-          <a:p>
-            <a:pPr algn="l"/>
-            <a:r>
-              <a:rPr sz="1700" b="0" i="1">
-                <a:solidFill>
-                  <a:srgbClr val="6B6B6B"/>
-                </a:solidFill>
-                <a:latin typeface="Century Schoolbook"/>
-              </a:rPr>
-              <a:t>Answer.</a:t>
-            </a:r>
-          </a:p>
-        </p:txBody>
-      </p:sp>
       <p:cxnSp>
         <p:nvCxnSpPr>
-          <p:cNvPr id="6" name="Connector 5"/>
+          <p:cNvPr id="5" name="Connector 4"/>
           <p:cNvCxnSpPr/>
           <p:nvPr/>
         </p:nvCxnSpPr>
@@ -11230,7 +9944,7 @@
       </p:cxnSp>
       <p:sp>
         <p:nvSpPr>
-          <p:cNvPr id="7" name="TextBox 6"/>
+          <p:cNvPr id="6" name="TextBox 5"/>
           <p:cNvSpPr txBox="1"/>
           <p:nvPr/>
         </p:nvSpPr>
@@ -11265,7 +9979,7 @@
       </p:sp>
       <p:sp>
         <p:nvSpPr>
-          <p:cNvPr id="8" name="TextBox 7"/>
+          <p:cNvPr id="7" name="TextBox 6"/>
           <p:cNvSpPr txBox="1"/>
           <p:nvPr/>
         </p:nvSpPr>
@@ -11300,7 +10014,7 @@
       </p:sp>
       <p:pic>
         <p:nvPicPr>
-          <p:cNvPr id="9" name="Picture 8" descr="916206a62c8d46a5.png"/>
+          <p:cNvPr id="8" name="Picture 7" descr="916206a62c8d46a5.png"/>
           <p:cNvPicPr>
             <a:picLocks noChangeAspect="1"/>
           </p:cNvPicPr>
@@ -11324,7 +10038,7 @@
       </p:pic>
       <p:sp>
         <p:nvSpPr>
-          <p:cNvPr id="10" name="TextBox 9"/>
+          <p:cNvPr id="9" name="TextBox 8"/>
           <p:cNvSpPr txBox="1"/>
           <p:nvPr/>
         </p:nvSpPr>
@@ -11359,7 +10073,7 @@
       </p:sp>
       <p:sp>
         <p:nvSpPr>
-          <p:cNvPr id="11" name="TextBox 10"/>
+          <p:cNvPr id="10" name="TextBox 9"/>
           <p:cNvSpPr txBox="1"/>
           <p:nvPr/>
         </p:nvSpPr>
@@ -11430,7 +10144,7 @@
       </p:sp>
       <p:sp>
         <p:nvSpPr>
-          <p:cNvPr id="12" name="TextBox 11"/>
+          <p:cNvPr id="11" name="TextBox 10"/>
           <p:cNvSpPr txBox="1"/>
           <p:nvPr/>
         </p:nvSpPr>
@@ -11501,7 +10215,7 @@
       </p:sp>
       <p:sp>
         <p:nvSpPr>
-          <p:cNvPr id="13" name="TextBox 12"/>
+          <p:cNvPr id="12" name="TextBox 11"/>
           <p:cNvSpPr txBox="1"/>
           <p:nvPr/>
         </p:nvSpPr>
@@ -11554,7 +10268,7 @@
       </p:sp>
       <p:sp>
         <p:nvSpPr>
-          <p:cNvPr id="14" name="TextBox 13"/>
+          <p:cNvPr id="13" name="TextBox 12"/>
           <p:cNvSpPr txBox="1"/>
           <p:nvPr/>
         </p:nvSpPr>
@@ -11607,7 +10321,7 @@
       </p:sp>
       <p:sp>
         <p:nvSpPr>
-          <p:cNvPr id="15" name="TextBox 14"/>
+          <p:cNvPr id="14" name="TextBox 13"/>
           <p:cNvSpPr txBox="1"/>
           <p:nvPr/>
         </p:nvSpPr>
@@ -11772,44 +10486,9 @@
           </a:fontRef>
         </p:style>
       </p:cxnSp>
-      <p:sp>
-        <p:nvSpPr>
-          <p:cNvPr id="5" name="TextBox 4"/>
-          <p:cNvSpPr txBox="1"/>
-          <p:nvPr/>
-        </p:nvSpPr>
-        <p:spPr>
-          <a:xfrm>
-            <a:off x="777240" y="1261872"/>
-            <a:ext cx="10607040" cy="310896"/>
-          </a:xfrm>
-          <a:prstGeom prst="rect">
-            <a:avLst/>
-          </a:prstGeom>
-          <a:noFill/>
-        </p:spPr>
-        <p:txBody>
-          <a:bodyPr wrap="square" lIns="45720" rIns="45720" tIns="18288" bIns="18288" anchor="t">
-            <a:spAutoFit/>
-          </a:bodyPr>
-          <a:lstStyle/>
-          <a:p>
-            <a:pPr algn="l"/>
-            <a:r>
-              <a:rPr sz="1700" b="0" i="1">
-                <a:solidFill>
-                  <a:srgbClr val="6B6B6B"/>
-                </a:solidFill>
-                <a:latin typeface="Century Schoolbook"/>
-              </a:rPr>
-              <a:t>Boards up on three.</a:t>
-            </a:r>
-          </a:p>
-        </p:txBody>
-      </p:sp>
       <p:cxnSp>
         <p:nvCxnSpPr>
-          <p:cNvPr id="6" name="Connector 5"/>
+          <p:cNvPr id="5" name="Connector 4"/>
           <p:cNvCxnSpPr/>
           <p:nvPr/>
         </p:nvCxnSpPr>
@@ -11844,7 +10523,7 @@
       </p:cxnSp>
       <p:sp>
         <p:nvSpPr>
-          <p:cNvPr id="7" name="TextBox 6"/>
+          <p:cNvPr id="6" name="TextBox 5"/>
           <p:cNvSpPr txBox="1"/>
           <p:nvPr/>
         </p:nvSpPr>
@@ -11879,7 +10558,7 @@
       </p:sp>
       <p:sp>
         <p:nvSpPr>
-          <p:cNvPr id="8" name="TextBox 7"/>
+          <p:cNvPr id="7" name="TextBox 6"/>
           <p:cNvSpPr txBox="1"/>
           <p:nvPr/>
         </p:nvSpPr>
@@ -11914,7 +10593,7 @@
       </p:sp>
       <p:pic>
         <p:nvPicPr>
-          <p:cNvPr id="9" name="Picture 8" descr="1564dccdbc1be462.png"/>
+          <p:cNvPr id="8" name="Picture 7" descr="1564dccdbc1be462.png"/>
           <p:cNvPicPr>
             <a:picLocks noChangeAspect="1"/>
           </p:cNvPicPr>
@@ -11938,7 +10617,7 @@
       </p:pic>
       <p:sp>
         <p:nvSpPr>
-          <p:cNvPr id="10" name="TextBox 9"/>
+          <p:cNvPr id="9" name="TextBox 8"/>
           <p:cNvSpPr txBox="1"/>
           <p:nvPr/>
         </p:nvSpPr>
@@ -11967,41 +10646,6 @@
                 <a:latin typeface="Century Schoolbook"/>
               </a:rPr>
               <a:t>Answer it.</a:t>
-            </a:r>
-          </a:p>
-        </p:txBody>
-      </p:sp>
-      <p:sp>
-        <p:nvSpPr>
-          <p:cNvPr id="11" name="TextBox 10"/>
-          <p:cNvSpPr txBox="1"/>
-          <p:nvPr/>
-        </p:nvSpPr>
-        <p:spPr>
-          <a:xfrm>
-            <a:off x="777240" y="4828032"/>
-            <a:ext cx="10607040" cy="365760"/>
-          </a:xfrm>
-          <a:prstGeom prst="rect">
-            <a:avLst/>
-          </a:prstGeom>
-          <a:noFill/>
-        </p:spPr>
-        <p:txBody>
-          <a:bodyPr wrap="square" lIns="45720" rIns="45720" tIns="18288" bIns="18288" anchor="t">
-            <a:spAutoFit/>
-          </a:bodyPr>
-          <a:lstStyle/>
-          <a:p>
-            <a:pPr algn="ctr"/>
-            <a:r>
-              <a:rPr sz="1900" b="0" i="1">
-                <a:solidFill>
-                  <a:srgbClr val="6B6B6B"/>
-                </a:solidFill>
-                <a:latin typeface="Century Schoolbook"/>
-              </a:rPr>
-              <a:t>Find the value.</a:t>
             </a:r>
           </a:p>
         </p:txBody>
@@ -12129,44 +10773,9 @@
           </a:fontRef>
         </p:style>
       </p:cxnSp>
-      <p:sp>
-        <p:nvSpPr>
-          <p:cNvPr id="5" name="TextBox 4"/>
-          <p:cNvSpPr txBox="1"/>
-          <p:nvPr/>
-        </p:nvSpPr>
-        <p:spPr>
-          <a:xfrm>
-            <a:off x="777240" y="1261872"/>
-            <a:ext cx="10607040" cy="310896"/>
-          </a:xfrm>
-          <a:prstGeom prst="rect">
-            <a:avLst/>
-          </a:prstGeom>
-          <a:noFill/>
-        </p:spPr>
-        <p:txBody>
-          <a:bodyPr wrap="square" lIns="45720" rIns="45720" tIns="18288" bIns="18288" anchor="t">
-            <a:spAutoFit/>
-          </a:bodyPr>
-          <a:lstStyle/>
-          <a:p>
-            <a:pPr algn="l"/>
-            <a:r>
-              <a:rPr sz="1700" b="0" i="1">
-                <a:solidFill>
-                  <a:srgbClr val="6B6B6B"/>
-                </a:solidFill>
-                <a:latin typeface="Century Schoolbook"/>
-              </a:rPr>
-              <a:t>Answer.</a:t>
-            </a:r>
-          </a:p>
-        </p:txBody>
-      </p:sp>
       <p:cxnSp>
         <p:nvCxnSpPr>
-          <p:cNvPr id="6" name="Connector 5"/>
+          <p:cNvPr id="5" name="Connector 4"/>
           <p:cNvCxnSpPr/>
           <p:nvPr/>
         </p:nvCxnSpPr>
@@ -12201,7 +10810,7 @@
       </p:cxnSp>
       <p:sp>
         <p:nvSpPr>
-          <p:cNvPr id="7" name="TextBox 6"/>
+          <p:cNvPr id="6" name="TextBox 5"/>
           <p:cNvSpPr txBox="1"/>
           <p:nvPr/>
         </p:nvSpPr>
@@ -12236,7 +10845,7 @@
       </p:sp>
       <p:sp>
         <p:nvSpPr>
-          <p:cNvPr id="8" name="TextBox 7"/>
+          <p:cNvPr id="7" name="TextBox 6"/>
           <p:cNvSpPr txBox="1"/>
           <p:nvPr/>
         </p:nvSpPr>
@@ -12271,7 +10880,7 @@
       </p:sp>
       <p:pic>
         <p:nvPicPr>
-          <p:cNvPr id="9" name="Picture 8" descr="51f9e7dda47d9701.png"/>
+          <p:cNvPr id="8" name="Picture 7" descr="51f9e7dda47d9701.png"/>
           <p:cNvPicPr>
             <a:picLocks noChangeAspect="1"/>
           </p:cNvPicPr>
@@ -12295,87 +10904,7 @@
       </p:pic>
       <p:sp>
         <p:nvSpPr>
-          <p:cNvPr id="10" name="TextBox 9"/>
-          <p:cNvSpPr txBox="1"/>
-          <p:nvPr/>
-        </p:nvSpPr>
-        <p:spPr>
-          <a:xfrm>
-            <a:off x="1828800" y="2895599"/>
-            <a:ext cx="8503920" cy="548640"/>
-          </a:xfrm>
-          <a:prstGeom prst="rect">
-            <a:avLst/>
-          </a:prstGeom>
-          <a:noFill/>
-        </p:spPr>
-        <p:txBody>
-          <a:bodyPr wrap="square" lIns="45720" rIns="45720" tIns="18288" bIns="18288" anchor="t">
-            <a:spAutoFit/>
-          </a:bodyPr>
-          <a:lstStyle/>
-          <a:p>
-            <a:pPr algn="ctr"/>
-            <a:r>
-              <a:rPr sz="2400" b="0" i="0">
-                <a:solidFill>
-                  <a:srgbClr val="6B6B6B"/>
-                </a:solidFill>
-                <a:latin typeface="Century Schoolbook"/>
-              </a:rPr>
-              <a:t>0.1</a:t>
-            </a:r>
-            <a:r>
-              <a:rPr sz="2400" b="0" i="0" baseline="30000">
-                <a:solidFill>
-                  <a:srgbClr val="6B6B6B"/>
-                </a:solidFill>
-                <a:latin typeface="Century Schoolbook"/>
-              </a:rPr>
-              <a:t>2</a:t>
-            </a:r>
-            <a:r>
-              <a:rPr sz="2400" b="0" i="0">
-                <a:solidFill>
-                  <a:srgbClr val="6B6B6B"/>
-                </a:solidFill>
-                <a:latin typeface="Century Schoolbook"/>
-              </a:rPr>
-              <a:t> · 0.1</a:t>
-            </a:r>
-            <a:r>
-              <a:rPr sz="2400" b="0" i="0" baseline="30000">
-                <a:solidFill>
-                  <a:srgbClr val="6B6B6B"/>
-                </a:solidFill>
-                <a:latin typeface="Century Schoolbook"/>
-              </a:rPr>
-              <a:t>2</a:t>
-            </a:r>
-            <a:r>
-              <a:rPr sz="2400" b="0" i="0">
-                <a:solidFill>
-                  <a:srgbClr val="6B6B6B"/>
-                </a:solidFill>
-                <a:latin typeface="Century Schoolbook"/>
-              </a:rPr>
-              <a:t> = 0.1</a:t>
-            </a:r>
-            <a:r>
-              <a:rPr sz="2400" b="0" i="0" baseline="30000">
-                <a:solidFill>
-                  <a:srgbClr val="6B6B6B"/>
-                </a:solidFill>
-                <a:latin typeface="Century Schoolbook"/>
-              </a:rPr>
-              <a:t>4</a:t>
-            </a:r>
-          </a:p>
-        </p:txBody>
-      </p:sp>
-      <p:sp>
-        <p:nvSpPr>
-          <p:cNvPr id="11" name="TextBox 10"/>
+          <p:cNvPr id="9" name="TextBox 8"/>
           <p:cNvSpPr txBox="1"/>
           <p:nvPr/>
         </p:nvSpPr>
@@ -12531,44 +11060,9 @@
           </a:fontRef>
         </p:style>
       </p:cxnSp>
-      <p:sp>
-        <p:nvSpPr>
-          <p:cNvPr id="5" name="TextBox 4"/>
-          <p:cNvSpPr txBox="1"/>
-          <p:nvPr/>
-        </p:nvSpPr>
-        <p:spPr>
-          <a:xfrm>
-            <a:off x="777240" y="1261872"/>
-            <a:ext cx="10607040" cy="310896"/>
-          </a:xfrm>
-          <a:prstGeom prst="rect">
-            <a:avLst/>
-          </a:prstGeom>
-          <a:noFill/>
-        </p:spPr>
-        <p:txBody>
-          <a:bodyPr wrap="square" lIns="45720" rIns="45720" tIns="18288" bIns="18288" anchor="t">
-            <a:spAutoFit/>
-          </a:bodyPr>
-          <a:lstStyle/>
-          <a:p>
-            <a:pPr algn="l"/>
-            <a:r>
-              <a:rPr sz="1700" b="0" i="1">
-                <a:solidFill>
-                  <a:srgbClr val="6B6B6B"/>
-                </a:solidFill>
-                <a:latin typeface="Century Schoolbook"/>
-              </a:rPr>
-              <a:t>Boards up on three.</a:t>
-            </a:r>
-          </a:p>
-        </p:txBody>
-      </p:sp>
       <p:cxnSp>
         <p:nvCxnSpPr>
-          <p:cNvPr id="6" name="Connector 5"/>
+          <p:cNvPr id="5" name="Connector 4"/>
           <p:cNvCxnSpPr/>
           <p:nvPr/>
         </p:nvCxnSpPr>
@@ -12603,7 +11097,7 @@
       </p:cxnSp>
       <p:sp>
         <p:nvSpPr>
-          <p:cNvPr id="7" name="TextBox 6"/>
+          <p:cNvPr id="6" name="TextBox 5"/>
           <p:cNvSpPr txBox="1"/>
           <p:nvPr/>
         </p:nvSpPr>
@@ -12638,7 +11132,7 @@
       </p:sp>
       <p:sp>
         <p:nvSpPr>
-          <p:cNvPr id="8" name="TextBox 7"/>
+          <p:cNvPr id="7" name="TextBox 6"/>
           <p:cNvSpPr txBox="1"/>
           <p:nvPr/>
         </p:nvSpPr>
@@ -12673,7 +11167,7 @@
       </p:sp>
       <p:pic>
         <p:nvPicPr>
-          <p:cNvPr id="9" name="Picture 8" descr="a2077b17c7711d12.png"/>
+          <p:cNvPr id="8" name="Picture 7" descr="a2077b17c7711d12.png"/>
           <p:cNvPicPr>
             <a:picLocks noChangeAspect="1"/>
           </p:cNvPicPr>
@@ -12697,7 +11191,7 @@
       </p:pic>
       <p:sp>
         <p:nvSpPr>
-          <p:cNvPr id="10" name="TextBox 9"/>
+          <p:cNvPr id="9" name="TextBox 8"/>
           <p:cNvSpPr txBox="1"/>
           <p:nvPr/>
         </p:nvSpPr>
@@ -12726,41 +11220,6 @@
                 <a:latin typeface="Century Schoolbook"/>
               </a:rPr>
               <a:t>Answer it.</a:t>
-            </a:r>
-          </a:p>
-        </p:txBody>
-      </p:sp>
-      <p:sp>
-        <p:nvSpPr>
-          <p:cNvPr id="11" name="TextBox 10"/>
-          <p:cNvSpPr txBox="1"/>
-          <p:nvPr/>
-        </p:nvSpPr>
-        <p:spPr>
-          <a:xfrm>
-            <a:off x="777240" y="4828032"/>
-            <a:ext cx="10607040" cy="365760"/>
-          </a:xfrm>
-          <a:prstGeom prst="rect">
-            <a:avLst/>
-          </a:prstGeom>
-          <a:noFill/>
-        </p:spPr>
-        <p:txBody>
-          <a:bodyPr wrap="square" lIns="45720" rIns="45720" tIns="18288" bIns="18288" anchor="t">
-            <a:spAutoFit/>
-          </a:bodyPr>
-          <a:lstStyle/>
-          <a:p>
-            <a:pPr algn="ctr"/>
-            <a:r>
-              <a:rPr sz="1900" b="0" i="1">
-                <a:solidFill>
-                  <a:srgbClr val="6B6B6B"/>
-                </a:solidFill>
-                <a:latin typeface="Century Schoolbook"/>
-              </a:rPr>
-              <a:t>Find the value.</a:t>
             </a:r>
           </a:p>
         </p:txBody>
@@ -12888,44 +11347,9 @@
           </a:fontRef>
         </p:style>
       </p:cxnSp>
-      <p:sp>
-        <p:nvSpPr>
-          <p:cNvPr id="5" name="TextBox 4"/>
-          <p:cNvSpPr txBox="1"/>
-          <p:nvPr/>
-        </p:nvSpPr>
-        <p:spPr>
-          <a:xfrm>
-            <a:off x="777240" y="1261872"/>
-            <a:ext cx="10607040" cy="310896"/>
-          </a:xfrm>
-          <a:prstGeom prst="rect">
-            <a:avLst/>
-          </a:prstGeom>
-          <a:noFill/>
-        </p:spPr>
-        <p:txBody>
-          <a:bodyPr wrap="square" lIns="45720" rIns="45720" tIns="18288" bIns="18288" anchor="t">
-            <a:spAutoFit/>
-          </a:bodyPr>
-          <a:lstStyle/>
-          <a:p>
-            <a:pPr algn="l"/>
-            <a:r>
-              <a:rPr sz="1700" b="0" i="1">
-                <a:solidFill>
-                  <a:srgbClr val="6B6B6B"/>
-                </a:solidFill>
-                <a:latin typeface="Century Schoolbook"/>
-              </a:rPr>
-              <a:t>Answers.</a:t>
-            </a:r>
-          </a:p>
-        </p:txBody>
-      </p:sp>
       <p:cxnSp>
         <p:nvCxnSpPr>
-          <p:cNvPr id="6" name="Connector 5"/>
+          <p:cNvPr id="5" name="Connector 4"/>
           <p:cNvCxnSpPr/>
           <p:nvPr/>
         </p:nvCxnSpPr>
@@ -12960,7 +11384,7 @@
       </p:cxnSp>
       <p:sp>
         <p:nvSpPr>
-          <p:cNvPr id="7" name="TextBox 6"/>
+          <p:cNvPr id="6" name="TextBox 5"/>
           <p:cNvSpPr txBox="1"/>
           <p:nvPr/>
         </p:nvSpPr>
@@ -12995,7 +11419,7 @@
       </p:sp>
       <p:sp>
         <p:nvSpPr>
-          <p:cNvPr id="8" name="TextBox 7"/>
+          <p:cNvPr id="7" name="TextBox 6"/>
           <p:cNvSpPr txBox="1"/>
           <p:nvPr/>
         </p:nvSpPr>
@@ -13030,13 +11454,13 @@
       </p:sp>
       <p:sp>
         <p:nvSpPr>
-          <p:cNvPr id="9" name="TextBox 8"/>
-          <p:cNvSpPr txBox="1"/>
-          <p:nvPr/>
-        </p:nvSpPr>
-        <p:spPr>
-          <a:xfrm>
-            <a:off x="1874519" y="1886712"/>
+          <p:cNvPr id="8" name="TextBox 7"/>
+          <p:cNvSpPr txBox="1"/>
+          <p:nvPr/>
+        </p:nvSpPr>
+        <p:spPr>
+          <a:xfrm>
+            <a:off x="1874519" y="1566672"/>
             <a:ext cx="3058734" cy="457200"/>
           </a:xfrm>
           <a:prstGeom prst="rect">
@@ -13065,7 +11489,7 @@
       </p:sp>
       <p:pic>
         <p:nvPicPr>
-          <p:cNvPr id="10" name="Picture 9" descr="0d08d420e081e8bf.png"/>
+          <p:cNvPr id="9" name="Picture 8" descr="0d08d420e081e8bf.png"/>
           <p:cNvPicPr>
             <a:picLocks noChangeAspect="1"/>
           </p:cNvPicPr>
@@ -13079,7 +11503,7 @@
         </p:blipFill>
         <p:spPr>
           <a:xfrm>
-            <a:off x="4796094" y="1783080"/>
+            <a:off x="4796094" y="1463040"/>
             <a:ext cx="469392" cy="664464"/>
           </a:xfrm>
           <a:prstGeom prst="rect">
@@ -13089,13 +11513,13 @@
       </p:pic>
       <p:sp>
         <p:nvSpPr>
-          <p:cNvPr id="11" name="TextBox 10"/>
-          <p:cNvSpPr txBox="1"/>
-          <p:nvPr/>
-        </p:nvSpPr>
-        <p:spPr>
-          <a:xfrm>
-            <a:off x="5814126" y="1760220"/>
+          <p:cNvPr id="10" name="TextBox 9"/>
+          <p:cNvSpPr txBox="1"/>
+          <p:nvPr/>
+        </p:nvSpPr>
+        <p:spPr>
+          <a:xfrm>
+            <a:off x="5814126" y="1440180"/>
             <a:ext cx="743533" cy="457200"/>
           </a:xfrm>
           <a:prstGeom prst="rect">
@@ -13124,13 +11548,13 @@
       </p:sp>
       <p:sp>
         <p:nvSpPr>
-          <p:cNvPr id="12" name="TextBox 11"/>
-          <p:cNvSpPr txBox="1"/>
-          <p:nvPr/>
-        </p:nvSpPr>
-        <p:spPr>
-          <a:xfrm>
-            <a:off x="1874519" y="2625852"/>
+          <p:cNvPr id="11" name="TextBox 10"/>
+          <p:cNvSpPr txBox="1"/>
+          <p:nvPr/>
+        </p:nvSpPr>
+        <p:spPr>
+          <a:xfrm>
+            <a:off x="1874519" y="2305812"/>
             <a:ext cx="1082239" cy="457200"/>
           </a:xfrm>
           <a:prstGeom prst="rect">
@@ -13159,7 +11583,7 @@
       </p:sp>
       <p:pic>
         <p:nvPicPr>
-          <p:cNvPr id="13" name="Picture 12" descr="697434924d454a71.png"/>
+          <p:cNvPr id="12" name="Picture 11" descr="697434924d454a71.png"/>
           <p:cNvPicPr>
             <a:picLocks noChangeAspect="1"/>
           </p:cNvPicPr>
@@ -13173,7 +11597,7 @@
         </p:blipFill>
         <p:spPr>
           <a:xfrm>
-            <a:off x="2819599" y="2650236"/>
+            <a:off x="2819599" y="2330196"/>
             <a:ext cx="688848" cy="408432"/>
           </a:xfrm>
           <a:prstGeom prst="rect">
@@ -13183,13 +11607,13 @@
       </p:pic>
       <p:sp>
         <p:nvSpPr>
-          <p:cNvPr id="14" name="TextBox 13"/>
-          <p:cNvSpPr txBox="1"/>
-          <p:nvPr/>
-        </p:nvSpPr>
-        <p:spPr>
-          <a:xfrm>
-            <a:off x="3508447" y="2625852"/>
+          <p:cNvPr id="13" name="TextBox 12"/>
+          <p:cNvSpPr txBox="1"/>
+          <p:nvPr/>
+        </p:nvSpPr>
+        <p:spPr>
+          <a:xfrm>
+            <a:off x="3508447" y="2305812"/>
             <a:ext cx="2879837" cy="457200"/>
           </a:xfrm>
           <a:prstGeom prst="rect">
@@ -13218,13 +11642,13 @@
       </p:sp>
       <p:sp>
         <p:nvSpPr>
-          <p:cNvPr id="15" name="TextBox 14"/>
-          <p:cNvSpPr txBox="1"/>
-          <p:nvPr/>
-        </p:nvSpPr>
-        <p:spPr>
-          <a:xfrm>
-            <a:off x="6799764" y="2625852"/>
+          <p:cNvPr id="14" name="TextBox 13"/>
+          <p:cNvSpPr txBox="1"/>
+          <p:nvPr/>
+        </p:nvSpPr>
+        <p:spPr>
+          <a:xfrm>
+            <a:off x="6799764" y="2305812"/>
             <a:ext cx="388052" cy="457200"/>
           </a:xfrm>
           <a:prstGeom prst="rect">
@@ -13253,13 +11677,13 @@
       </p:sp>
       <p:sp>
         <p:nvSpPr>
-          <p:cNvPr id="16" name="TextBox 15"/>
-          <p:cNvSpPr txBox="1"/>
-          <p:nvPr/>
-        </p:nvSpPr>
-        <p:spPr>
-          <a:xfrm>
-            <a:off x="1874519" y="3238500"/>
+          <p:cNvPr id="15" name="TextBox 14"/>
+          <p:cNvSpPr txBox="1"/>
+          <p:nvPr/>
+        </p:nvSpPr>
+        <p:spPr>
+          <a:xfrm>
+            <a:off x="1874519" y="2918460"/>
             <a:ext cx="1652008" cy="457200"/>
           </a:xfrm>
           <a:prstGeom prst="rect">
@@ -13288,7 +11712,7 @@
       </p:sp>
       <p:pic>
         <p:nvPicPr>
-          <p:cNvPr id="17" name="Picture 16" descr="7747f117721bd827.png"/>
+          <p:cNvPr id="16" name="Picture 15" descr="7747f117721bd827.png"/>
           <p:cNvPicPr>
             <a:picLocks noChangeAspect="1"/>
           </p:cNvPicPr>
@@ -13302,7 +11726,7 @@
         </p:blipFill>
         <p:spPr>
           <a:xfrm>
-            <a:off x="3389368" y="3323844"/>
+            <a:off x="3389368" y="3003804"/>
             <a:ext cx="1658112" cy="286512"/>
           </a:xfrm>
           <a:prstGeom prst="rect">
@@ -13312,13 +11736,13 @@
       </p:pic>
       <p:sp>
         <p:nvSpPr>
-          <p:cNvPr id="18" name="TextBox 17"/>
-          <p:cNvSpPr txBox="1"/>
-          <p:nvPr/>
-        </p:nvSpPr>
-        <p:spPr>
-          <a:xfrm>
-            <a:off x="5596120" y="3238500"/>
+          <p:cNvPr id="17" name="TextBox 16"/>
+          <p:cNvSpPr txBox="1"/>
+          <p:nvPr/>
+        </p:nvSpPr>
+        <p:spPr>
+          <a:xfrm>
+            <a:off x="5596120" y="2918460"/>
             <a:ext cx="942623" cy="457200"/>
           </a:xfrm>
           <a:prstGeom prst="rect">
@@ -13347,13 +11771,13 @@
       </p:sp>
       <p:sp>
         <p:nvSpPr>
-          <p:cNvPr id="19" name="TextBox 18"/>
-          <p:cNvSpPr txBox="1"/>
-          <p:nvPr/>
-        </p:nvSpPr>
-        <p:spPr>
-          <a:xfrm>
-            <a:off x="1874519" y="3851148"/>
+          <p:cNvPr id="18" name="TextBox 17"/>
+          <p:cNvSpPr txBox="1"/>
+          <p:nvPr/>
+        </p:nvSpPr>
+        <p:spPr>
+          <a:xfrm>
+            <a:off x="1874519" y="3531108"/>
             <a:ext cx="2190435" cy="457200"/>
           </a:xfrm>
           <a:prstGeom prst="rect">
@@ -13382,7 +11806,7 @@
       </p:sp>
       <p:pic>
         <p:nvPicPr>
-          <p:cNvPr id="20" name="Picture 19" descr="2a87b786c67fb6da.png"/>
+          <p:cNvPr id="19" name="Picture 18" descr="2a87b786c67fb6da.png"/>
           <p:cNvPicPr>
             <a:picLocks noChangeAspect="1"/>
           </p:cNvPicPr>
@@ -13396,7 +11820,7 @@
         </p:blipFill>
         <p:spPr>
           <a:xfrm>
-            <a:off x="3927795" y="3934968"/>
+            <a:off x="3927795" y="3614928"/>
             <a:ext cx="1112520" cy="289560"/>
           </a:xfrm>
           <a:prstGeom prst="rect">
@@ -13406,13 +11830,13 @@
       </p:pic>
       <p:sp>
         <p:nvSpPr>
-          <p:cNvPr id="21" name="TextBox 20"/>
-          <p:cNvSpPr txBox="1"/>
-          <p:nvPr/>
-        </p:nvSpPr>
-        <p:spPr>
-          <a:xfrm>
-            <a:off x="5588955" y="3851148"/>
+          <p:cNvPr id="20" name="TextBox 19"/>
+          <p:cNvSpPr txBox="1"/>
+          <p:nvPr/>
+        </p:nvSpPr>
+        <p:spPr>
+          <a:xfrm>
+            <a:off x="5588955" y="3531108"/>
             <a:ext cx="565792" cy="457200"/>
           </a:xfrm>
           <a:prstGeom prst="rect">
@@ -13562,44 +11986,9 @@
           </a:fontRef>
         </p:style>
       </p:cxnSp>
-      <p:sp>
-        <p:nvSpPr>
-          <p:cNvPr id="5" name="TextBox 4"/>
-          <p:cNvSpPr txBox="1"/>
-          <p:nvPr/>
-        </p:nvSpPr>
-        <p:spPr>
-          <a:xfrm>
-            <a:off x="777240" y="1261872"/>
-            <a:ext cx="10607040" cy="310896"/>
-          </a:xfrm>
-          <a:prstGeom prst="rect">
-            <a:avLst/>
-          </a:prstGeom>
-          <a:noFill/>
-        </p:spPr>
-        <p:txBody>
-          <a:bodyPr wrap="square" lIns="45720" rIns="45720" tIns="18288" bIns="18288" anchor="t">
-            <a:spAutoFit/>
-          </a:bodyPr>
-          <a:lstStyle/>
-          <a:p>
-            <a:pPr algn="l"/>
-            <a:r>
-              <a:rPr sz="1700" b="0" i="1">
-                <a:solidFill>
-                  <a:srgbClr val="6B6B6B"/>
-                </a:solidFill>
-                <a:latin typeface="Century Schoolbook"/>
-              </a:rPr>
-              <a:t>Answer.</a:t>
-            </a:r>
-          </a:p>
-        </p:txBody>
-      </p:sp>
       <p:cxnSp>
         <p:nvCxnSpPr>
-          <p:cNvPr id="6" name="Connector 5"/>
+          <p:cNvPr id="5" name="Connector 4"/>
           <p:cNvCxnSpPr/>
           <p:nvPr/>
         </p:nvCxnSpPr>
@@ -13634,7 +12023,7 @@
       </p:cxnSp>
       <p:sp>
         <p:nvSpPr>
-          <p:cNvPr id="7" name="TextBox 6"/>
+          <p:cNvPr id="6" name="TextBox 5"/>
           <p:cNvSpPr txBox="1"/>
           <p:nvPr/>
         </p:nvSpPr>
@@ -13669,7 +12058,7 @@
       </p:sp>
       <p:sp>
         <p:nvSpPr>
-          <p:cNvPr id="8" name="TextBox 7"/>
+          <p:cNvPr id="7" name="TextBox 6"/>
           <p:cNvSpPr txBox="1"/>
           <p:nvPr/>
         </p:nvSpPr>
@@ -13704,7 +12093,7 @@
       </p:sp>
       <p:pic>
         <p:nvPicPr>
-          <p:cNvPr id="9" name="Picture 8" descr="c2f375830fedead4.png"/>
+          <p:cNvPr id="8" name="Picture 7" descr="c2f375830fedead4.png"/>
           <p:cNvPicPr>
             <a:picLocks noChangeAspect="1"/>
           </p:cNvPicPr>
@@ -13728,60 +12117,7 @@
       </p:pic>
       <p:sp>
         <p:nvSpPr>
-          <p:cNvPr id="10" name="TextBox 9"/>
-          <p:cNvSpPr txBox="1"/>
-          <p:nvPr/>
-        </p:nvSpPr>
-        <p:spPr>
-          <a:xfrm>
-            <a:off x="1828800" y="3563112"/>
-            <a:ext cx="8503920" cy="548640"/>
-          </a:xfrm>
-          <a:prstGeom prst="rect">
-            <a:avLst/>
-          </a:prstGeom>
-          <a:noFill/>
-        </p:spPr>
-        <p:txBody>
-          <a:bodyPr wrap="square" lIns="45720" rIns="45720" tIns="18288" bIns="18288" anchor="t">
-            <a:spAutoFit/>
-          </a:bodyPr>
-          <a:lstStyle/>
-          <a:p>
-            <a:pPr algn="ctr"/>
-            <a:r>
-              <a:rPr sz="2400" b="0" i="0">
-                <a:solidFill>
-                  <a:srgbClr val="6B6B6B"/>
-                </a:solidFill>
-                <a:latin typeface="Century Schoolbook"/>
-              </a:rPr>
-              <a:t>(−4)</a:t>
-            </a:r>
-            <a:r>
-              <a:rPr sz="2400" b="0" i="0" baseline="30000">
-                <a:solidFill>
-                  <a:srgbClr val="6B6B6B"/>
-                </a:solidFill>
-                <a:latin typeface="Century Schoolbook"/>
-              </a:rPr>
-              <a:t>3</a:t>
-            </a:r>
-            <a:r>
-              <a:rPr sz="2400" b="0" i="0">
-                <a:solidFill>
-                  <a:srgbClr val="6B6B6B"/>
-                </a:solidFill>
-                <a:latin typeface="Century Schoolbook"/>
-              </a:rPr>
-              <a:t> over 1</a:t>
-            </a:r>
-          </a:p>
-        </p:txBody>
-      </p:sp>
-      <p:sp>
-        <p:nvSpPr>
-          <p:cNvPr id="11" name="TextBox 10"/>
+          <p:cNvPr id="9" name="TextBox 8"/>
           <p:cNvSpPr txBox="1"/>
           <p:nvPr/>
         </p:nvSpPr>
@@ -13937,44 +12273,9 @@
           </a:fontRef>
         </p:style>
       </p:cxnSp>
-      <p:sp>
-        <p:nvSpPr>
-          <p:cNvPr id="5" name="TextBox 4"/>
-          <p:cNvSpPr txBox="1"/>
-          <p:nvPr/>
-        </p:nvSpPr>
-        <p:spPr>
-          <a:xfrm>
-            <a:off x="777240" y="1261872"/>
-            <a:ext cx="10607040" cy="310896"/>
-          </a:xfrm>
-          <a:prstGeom prst="rect">
-            <a:avLst/>
-          </a:prstGeom>
-          <a:noFill/>
-        </p:spPr>
-        <p:txBody>
-          <a:bodyPr wrap="square" lIns="45720" rIns="45720" tIns="18288" bIns="18288" anchor="t">
-            <a:spAutoFit/>
-          </a:bodyPr>
-          <a:lstStyle/>
-          <a:p>
-            <a:pPr algn="l"/>
-            <a:r>
-              <a:rPr sz="1700" b="0" i="1">
-                <a:solidFill>
-                  <a:srgbClr val="6B6B6B"/>
-                </a:solidFill>
-                <a:latin typeface="Century Schoolbook"/>
-              </a:rPr>
-              <a:t>Take your time. Boards up when you have written it.</a:t>
-            </a:r>
-          </a:p>
-        </p:txBody>
-      </p:sp>
       <p:cxnSp>
         <p:nvCxnSpPr>
-          <p:cNvPr id="6" name="Connector 5"/>
+          <p:cNvPr id="5" name="Connector 4"/>
           <p:cNvCxnSpPr/>
           <p:nvPr/>
         </p:nvCxnSpPr>
@@ -14009,7 +12310,7 @@
       </p:cxnSp>
       <p:sp>
         <p:nvSpPr>
-          <p:cNvPr id="7" name="TextBox 6"/>
+          <p:cNvPr id="6" name="TextBox 5"/>
           <p:cNvSpPr txBox="1"/>
           <p:nvPr/>
         </p:nvSpPr>
@@ -14044,7 +12345,7 @@
       </p:sp>
       <p:sp>
         <p:nvSpPr>
-          <p:cNvPr id="8" name="TextBox 7"/>
+          <p:cNvPr id="7" name="TextBox 6"/>
           <p:cNvSpPr txBox="1"/>
           <p:nvPr/>
         </p:nvSpPr>
@@ -14079,7 +12380,7 @@
       </p:sp>
       <p:sp>
         <p:nvSpPr>
-          <p:cNvPr id="9" name="TextBox 8"/>
+          <p:cNvPr id="8" name="TextBox 7"/>
           <p:cNvSpPr txBox="1"/>
           <p:nvPr/>
         </p:nvSpPr>
@@ -14114,7 +12415,7 @@
       </p:sp>
       <p:pic>
         <p:nvPicPr>
-          <p:cNvPr id="10" name="Picture 9" descr="8510a940fc60582e.png"/>
+          <p:cNvPr id="9" name="Picture 8" descr="8510a940fc60582e.png"/>
           <p:cNvPicPr>
             <a:picLocks noChangeAspect="1"/>
           </p:cNvPicPr>
@@ -14138,7 +12439,7 @@
       </p:pic>
       <p:sp>
         <p:nvSpPr>
-          <p:cNvPr id="11" name="TextBox 10"/>
+          <p:cNvPr id="10" name="TextBox 9"/>
           <p:cNvSpPr txBox="1"/>
           <p:nvPr/>
         </p:nvSpPr>
@@ -14173,7 +12474,7 @@
       </p:sp>
       <p:pic>
         <p:nvPicPr>
-          <p:cNvPr id="12" name="Picture 11" descr="895c1949fc6ae630.png"/>
+          <p:cNvPr id="11" name="Picture 10" descr="895c1949fc6ae630.png"/>
           <p:cNvPicPr>
             <a:picLocks noChangeAspect="1"/>
           </p:cNvPicPr>
@@ -14197,7 +12498,7 @@
       </p:pic>
       <p:sp>
         <p:nvSpPr>
-          <p:cNvPr id="13" name="TextBox 12"/>
+          <p:cNvPr id="12" name="TextBox 11"/>
           <p:cNvSpPr txBox="1"/>
           <p:nvPr/>
         </p:nvSpPr>
@@ -14232,7 +12533,7 @@
       </p:sp>
       <p:sp>
         <p:nvSpPr>
-          <p:cNvPr id="14" name="TextBox 13"/>
+          <p:cNvPr id="13" name="TextBox 12"/>
           <p:cNvSpPr txBox="1"/>
           <p:nvPr/>
         </p:nvSpPr>
@@ -14267,7 +12568,7 @@
       </p:sp>
       <p:sp>
         <p:nvSpPr>
-          <p:cNvPr id="15" name="TextBox 14"/>
+          <p:cNvPr id="14" name="TextBox 13"/>
           <p:cNvSpPr txBox="1"/>
           <p:nvPr/>
         </p:nvSpPr>
@@ -14296,41 +12597,6 @@
                 <a:latin typeface="Century Schoolbook"/>
               </a:rPr>
               <a:t>Write your answer in sentences.</a:t>
-            </a:r>
-          </a:p>
-        </p:txBody>
-      </p:sp>
-      <p:sp>
-        <p:nvSpPr>
-          <p:cNvPr id="16" name="TextBox 15"/>
-          <p:cNvSpPr txBox="1"/>
-          <p:nvPr/>
-        </p:nvSpPr>
-        <p:spPr>
-          <a:xfrm>
-            <a:off x="777240" y="4828032"/>
-            <a:ext cx="10607040" cy="365760"/>
-          </a:xfrm>
-          <a:prstGeom prst="rect">
-            <a:avLst/>
-          </a:prstGeom>
-          <a:noFill/>
-        </p:spPr>
-        <p:txBody>
-          <a:bodyPr wrap="square" lIns="45720" rIns="45720" tIns="18288" bIns="18288" anchor="t">
-            <a:spAutoFit/>
-          </a:bodyPr>
-          <a:lstStyle/>
-          <a:p>
-            <a:pPr algn="ctr"/>
-            <a:r>
-              <a:rPr sz="1900" b="0" i="1">
-                <a:solidFill>
-                  <a:srgbClr val="6B6B6B"/>
-                </a:solidFill>
-                <a:latin typeface="Century Schoolbook"/>
-              </a:rPr>
-              <a:t>Name the law each one used first, and give the value.</a:t>
             </a:r>
           </a:p>
         </p:txBody>
@@ -14458,44 +12724,9 @@
           </a:fontRef>
         </p:style>
       </p:cxnSp>
-      <p:sp>
-        <p:nvSpPr>
-          <p:cNvPr id="5" name="TextBox 4"/>
-          <p:cNvSpPr txBox="1"/>
-          <p:nvPr/>
-        </p:nvSpPr>
-        <p:spPr>
-          <a:xfrm>
-            <a:off x="777240" y="1261872"/>
-            <a:ext cx="10607040" cy="310896"/>
-          </a:xfrm>
-          <a:prstGeom prst="rect">
-            <a:avLst/>
-          </a:prstGeom>
-          <a:noFill/>
-        </p:spPr>
-        <p:txBody>
-          <a:bodyPr wrap="square" lIns="45720" rIns="45720" tIns="18288" bIns="18288" anchor="t">
-            <a:spAutoFit/>
-          </a:bodyPr>
-          <a:lstStyle/>
-          <a:p>
-            <a:pPr algn="l"/>
-            <a:r>
-              <a:rPr sz="1700" b="0" i="1">
-                <a:solidFill>
-                  <a:srgbClr val="6B6B6B"/>
-                </a:solidFill>
-                <a:latin typeface="Century Schoolbook"/>
-              </a:rPr>
-              <a:t>Answer.</a:t>
-            </a:r>
-          </a:p>
-        </p:txBody>
-      </p:sp>
       <p:cxnSp>
         <p:nvCxnSpPr>
-          <p:cNvPr id="6" name="Connector 5"/>
+          <p:cNvPr id="5" name="Connector 4"/>
           <p:cNvCxnSpPr/>
           <p:nvPr/>
         </p:nvCxnSpPr>
@@ -14530,7 +12761,7 @@
       </p:cxnSp>
       <p:sp>
         <p:nvSpPr>
-          <p:cNvPr id="7" name="TextBox 6"/>
+          <p:cNvPr id="6" name="TextBox 5"/>
           <p:cNvSpPr txBox="1"/>
           <p:nvPr/>
         </p:nvSpPr>
@@ -14565,7 +12796,7 @@
       </p:sp>
       <p:sp>
         <p:nvSpPr>
-          <p:cNvPr id="8" name="TextBox 7"/>
+          <p:cNvPr id="7" name="TextBox 6"/>
           <p:cNvSpPr txBox="1"/>
           <p:nvPr/>
         </p:nvSpPr>
@@ -14600,7 +12831,7 @@
       </p:sp>
       <p:sp>
         <p:nvSpPr>
-          <p:cNvPr id="9" name="TextBox 8"/>
+          <p:cNvPr id="8" name="TextBox 7"/>
           <p:cNvSpPr txBox="1"/>
           <p:nvPr/>
         </p:nvSpPr>
@@ -14635,7 +12866,7 @@
       </p:sp>
       <p:pic>
         <p:nvPicPr>
-          <p:cNvPr id="10" name="Picture 9" descr="7499f9d1d2ab2e70.png"/>
+          <p:cNvPr id="9" name="Picture 8" descr="7499f9d1d2ab2e70.png"/>
           <p:cNvPicPr>
             <a:picLocks noChangeAspect="1"/>
           </p:cNvPicPr>
@@ -14659,7 +12890,7 @@
       </p:pic>
       <p:sp>
         <p:nvSpPr>
-          <p:cNvPr id="11" name="TextBox 10"/>
+          <p:cNvPr id="10" name="TextBox 9"/>
           <p:cNvSpPr txBox="1"/>
           <p:nvPr/>
         </p:nvSpPr>
@@ -14694,7 +12925,7 @@
       </p:sp>
       <p:pic>
         <p:nvPicPr>
-          <p:cNvPr id="12" name="Picture 11" descr="dc00211af1d70f1b.png"/>
+          <p:cNvPr id="11" name="Picture 10" descr="dc00211af1d70f1b.png"/>
           <p:cNvPicPr>
             <a:picLocks noChangeAspect="1"/>
           </p:cNvPicPr>
@@ -14718,7 +12949,7 @@
       </p:pic>
       <p:sp>
         <p:nvSpPr>
-          <p:cNvPr id="13" name="TextBox 12"/>
+          <p:cNvPr id="12" name="TextBox 11"/>
           <p:cNvSpPr txBox="1"/>
           <p:nvPr/>
         </p:nvSpPr>
@@ -14753,7 +12984,7 @@
       </p:sp>
       <p:sp>
         <p:nvSpPr>
-          <p:cNvPr id="14" name="TextBox 13"/>
+          <p:cNvPr id="13" name="TextBox 12"/>
           <p:cNvSpPr txBox="1"/>
           <p:nvPr/>
         </p:nvSpPr>
@@ -14788,51 +13019,7 @@
       </p:sp>
       <p:sp>
         <p:nvSpPr>
-          <p:cNvPr id="15" name="TextBox 14"/>
-          <p:cNvSpPr txBox="1"/>
-          <p:nvPr/>
-        </p:nvSpPr>
-        <p:spPr>
-          <a:xfrm>
-            <a:off x="1828800" y="3802711"/>
-            <a:ext cx="8503920" cy="548640"/>
-          </a:xfrm>
-          <a:prstGeom prst="rect">
-            <a:avLst/>
-          </a:prstGeom>
-          <a:noFill/>
-        </p:spPr>
-        <p:txBody>
-          <a:bodyPr wrap="square" lIns="45720" rIns="45720" tIns="18288" bIns="18288" anchor="t">
-            <a:spAutoFit/>
-          </a:bodyPr>
-          <a:lstStyle/>
-          <a:p>
-            <a:pPr algn="ctr"/>
-            <a:r>
-              <a:rPr sz="2400" b="0" i="0">
-                <a:solidFill>
-                  <a:srgbClr val="6B6B6B"/>
-                </a:solidFill>
-                <a:latin typeface="Century Schoolbook"/>
-              </a:rPr>
-              <a:t>both plans end at 2</a:t>
-            </a:r>
-            <a:r>
-              <a:rPr sz="2400" b="0" i="0" baseline="30000">
-                <a:solidFill>
-                  <a:srgbClr val="6B6B6B"/>
-                </a:solidFill>
-                <a:latin typeface="Century Schoolbook"/>
-              </a:rPr>
-              <a:t>6</a:t>
-            </a:r>
-          </a:p>
-        </p:txBody>
-      </p:sp>
-      <p:sp>
-        <p:nvSpPr>
-          <p:cNvPr id="16" name="TextBox 15"/>
+          <p:cNvPr id="14" name="TextBox 13"/>
           <p:cNvSpPr txBox="1"/>
           <p:nvPr/>
         </p:nvSpPr>
@@ -15006,44 +13193,9 @@
           </a:fontRef>
         </p:style>
       </p:cxnSp>
-      <p:sp>
-        <p:nvSpPr>
-          <p:cNvPr id="5" name="TextBox 4"/>
-          <p:cNvSpPr txBox="1"/>
-          <p:nvPr/>
-        </p:nvSpPr>
-        <p:spPr>
-          <a:xfrm>
-            <a:off x="777240" y="1261872"/>
-            <a:ext cx="10607040" cy="310896"/>
-          </a:xfrm>
-          <a:prstGeom prst="rect">
-            <a:avLst/>
-          </a:prstGeom>
-          <a:noFill/>
-        </p:spPr>
-        <p:txBody>
-          <a:bodyPr wrap="square" lIns="45720" rIns="45720" tIns="18288" bIns="18288" anchor="t">
-            <a:spAutoFit/>
-          </a:bodyPr>
-          <a:lstStyle/>
-          <a:p>
-            <a:pPr algn="l"/>
-            <a:r>
-              <a:rPr sz="1700" b="0" i="1">
-                <a:solidFill>
-                  <a:srgbClr val="6B6B6B"/>
-                </a:solidFill>
-                <a:latin typeface="Century Schoolbook"/>
-              </a:rPr>
-              <a:t>Six questions. On your own, in silence.</a:t>
-            </a:r>
-          </a:p>
-        </p:txBody>
-      </p:sp>
       <p:cxnSp>
         <p:nvCxnSpPr>
-          <p:cNvPr id="6" name="Connector 5"/>
+          <p:cNvPr id="5" name="Connector 4"/>
           <p:cNvCxnSpPr/>
           <p:nvPr/>
         </p:nvCxnSpPr>
@@ -15078,7 +13230,7 @@
       </p:cxnSp>
       <p:sp>
         <p:nvSpPr>
-          <p:cNvPr id="7" name="TextBox 6"/>
+          <p:cNvPr id="6" name="TextBox 5"/>
           <p:cNvSpPr txBox="1"/>
           <p:nvPr/>
         </p:nvSpPr>
@@ -15113,7 +13265,7 @@
       </p:sp>
       <p:sp>
         <p:nvSpPr>
-          <p:cNvPr id="8" name="TextBox 7"/>
+          <p:cNvPr id="7" name="TextBox 6"/>
           <p:cNvSpPr txBox="1"/>
           <p:nvPr/>
         </p:nvSpPr>
@@ -15148,7 +13300,7 @@
       </p:sp>
       <p:sp>
         <p:nvSpPr>
-          <p:cNvPr id="9" name="TextBox 8"/>
+          <p:cNvPr id="8" name="TextBox 7"/>
           <p:cNvSpPr txBox="1"/>
           <p:nvPr/>
         </p:nvSpPr>
@@ -15183,7 +13335,7 @@
       </p:sp>
       <p:sp>
         <p:nvSpPr>
-          <p:cNvPr id="10" name="TextBox 9"/>
+          <p:cNvPr id="9" name="TextBox 8"/>
           <p:cNvSpPr txBox="1"/>
           <p:nvPr/>
         </p:nvSpPr>
@@ -15218,7 +13370,7 @@
       </p:sp>
       <p:sp>
         <p:nvSpPr>
-          <p:cNvPr id="11" name="TextBox 10"/>
+          <p:cNvPr id="10" name="TextBox 9"/>
           <p:cNvSpPr txBox="1"/>
           <p:nvPr/>
         </p:nvSpPr>
@@ -15253,7 +13405,7 @@
       </p:sp>
       <p:sp>
         <p:nvSpPr>
-          <p:cNvPr id="12" name="TextBox 11"/>
+          <p:cNvPr id="11" name="TextBox 10"/>
           <p:cNvSpPr txBox="1"/>
           <p:nvPr/>
         </p:nvSpPr>
@@ -15288,7 +13440,7 @@
       </p:sp>
       <p:sp>
         <p:nvSpPr>
-          <p:cNvPr id="13" name="TextBox 12"/>
+          <p:cNvPr id="12" name="TextBox 11"/>
           <p:cNvSpPr txBox="1"/>
           <p:nvPr/>
         </p:nvSpPr>
@@ -15323,7 +13475,7 @@
       </p:sp>
       <p:sp>
         <p:nvSpPr>
-          <p:cNvPr id="14" name="TextBox 13"/>
+          <p:cNvPr id="13" name="TextBox 12"/>
           <p:cNvSpPr txBox="1"/>
           <p:nvPr/>
         </p:nvSpPr>
@@ -15479,44 +13631,9 @@
           </a:fontRef>
         </p:style>
       </p:cxnSp>
-      <p:sp>
-        <p:nvSpPr>
-          <p:cNvPr id="5" name="TextBox 4"/>
-          <p:cNvSpPr txBox="1"/>
-          <p:nvPr/>
-        </p:nvSpPr>
-        <p:spPr>
-          <a:xfrm>
-            <a:off x="777240" y="1261872"/>
-            <a:ext cx="10607040" cy="310896"/>
-          </a:xfrm>
-          <a:prstGeom prst="rect">
-            <a:avLst/>
-          </a:prstGeom>
-          <a:noFill/>
-        </p:spPr>
-        <p:txBody>
-          <a:bodyPr wrap="square" lIns="45720" rIns="45720" tIns="18288" bIns="18288" anchor="t">
-            <a:spAutoFit/>
-          </a:bodyPr>
-          <a:lstStyle/>
-          <a:p>
-            <a:pPr algn="l"/>
-            <a:r>
-              <a:rPr sz="1700" b="0" i="1">
-                <a:solidFill>
-                  <a:srgbClr val="6B6B6B"/>
-                </a:solidFill>
-                <a:latin typeface="Century Schoolbook"/>
-              </a:rPr>
-              <a:t>Last five minutes.</a:t>
-            </a:r>
-          </a:p>
-        </p:txBody>
-      </p:sp>
       <p:cxnSp>
         <p:nvCxnSpPr>
-          <p:cNvPr id="6" name="Connector 5"/>
+          <p:cNvPr id="5" name="Connector 4"/>
           <p:cNvCxnSpPr/>
           <p:nvPr/>
         </p:nvCxnSpPr>
@@ -15551,7 +13668,7 @@
       </p:cxnSp>
       <p:sp>
         <p:nvSpPr>
-          <p:cNvPr id="7" name="TextBox 6"/>
+          <p:cNvPr id="6" name="TextBox 5"/>
           <p:cNvSpPr txBox="1"/>
           <p:nvPr/>
         </p:nvSpPr>
@@ -15586,7 +13703,7 @@
       </p:sp>
       <p:sp>
         <p:nvSpPr>
-          <p:cNvPr id="8" name="TextBox 7"/>
+          <p:cNvPr id="7" name="TextBox 6"/>
           <p:cNvSpPr txBox="1"/>
           <p:nvPr/>
         </p:nvSpPr>
@@ -15621,7 +13738,7 @@
       </p:sp>
       <p:sp>
         <p:nvSpPr>
-          <p:cNvPr id="9" name="TextBox 8"/>
+          <p:cNvPr id="8" name="TextBox 7"/>
           <p:cNvSpPr txBox="1"/>
           <p:nvPr/>
         </p:nvSpPr>
@@ -15656,7 +13773,7 @@
       </p:sp>
       <p:sp>
         <p:nvSpPr>
-          <p:cNvPr id="10" name="TextBox 9"/>
+          <p:cNvPr id="9" name="TextBox 8"/>
           <p:cNvSpPr txBox="1"/>
           <p:nvPr/>
         </p:nvSpPr>
@@ -15691,7 +13808,7 @@
       </p:sp>
       <p:sp>
         <p:nvSpPr>
-          <p:cNvPr id="11" name="TextBox 10"/>
+          <p:cNvPr id="10" name="TextBox 9"/>
           <p:cNvSpPr txBox="1"/>
           <p:nvPr/>
         </p:nvSpPr>
@@ -15726,7 +13843,7 @@
       </p:sp>
       <p:sp>
         <p:nvSpPr>
-          <p:cNvPr id="12" name="TextBox 11"/>
+          <p:cNvPr id="11" name="TextBox 10"/>
           <p:cNvSpPr txBox="1"/>
           <p:nvPr/>
         </p:nvSpPr>
@@ -15761,7 +13878,7 @@
       </p:sp>
       <p:sp>
         <p:nvSpPr>
-          <p:cNvPr id="13" name="TextBox 12"/>
+          <p:cNvPr id="12" name="TextBox 11"/>
           <p:cNvSpPr txBox="1"/>
           <p:nvPr/>
         </p:nvSpPr>
@@ -15796,7 +13913,7 @@
       </p:sp>
       <p:sp>
         <p:nvSpPr>
-          <p:cNvPr id="14" name="TextBox 13"/>
+          <p:cNvPr id="13" name="TextBox 12"/>
           <p:cNvSpPr txBox="1"/>
           <p:nvPr/>
         </p:nvSpPr>
@@ -15831,7 +13948,7 @@
       </p:sp>
       <p:sp>
         <p:nvSpPr>
-          <p:cNvPr id="15" name="TextBox 14"/>
+          <p:cNvPr id="14" name="TextBox 13"/>
           <p:cNvSpPr txBox="1"/>
           <p:nvPr/>
         </p:nvSpPr>
@@ -15866,7 +13983,7 @@
       </p:sp>
       <p:sp>
         <p:nvSpPr>
-          <p:cNvPr id="16" name="TextBox 15"/>
+          <p:cNvPr id="15" name="TextBox 14"/>
           <p:cNvSpPr txBox="1"/>
           <p:nvPr/>
         </p:nvSpPr>
@@ -16022,44 +14139,9 @@
           </a:fontRef>
         </p:style>
       </p:cxnSp>
-      <p:sp>
-        <p:nvSpPr>
-          <p:cNvPr id="5" name="TextBox 4"/>
-          <p:cNvSpPr txBox="1"/>
-          <p:nvPr/>
-        </p:nvSpPr>
-        <p:spPr>
-          <a:xfrm>
-            <a:off x="777240" y="1261872"/>
-            <a:ext cx="10607040" cy="310896"/>
-          </a:xfrm>
-          <a:prstGeom prst="rect">
-            <a:avLst/>
-          </a:prstGeom>
-          <a:noFill/>
-        </p:spPr>
-        <p:txBody>
-          <a:bodyPr wrap="square" lIns="45720" rIns="45720" tIns="18288" bIns="18288" anchor="t">
-            <a:spAutoFit/>
-          </a:bodyPr>
-          <a:lstStyle/>
-          <a:p>
-            <a:pPr algn="l"/>
-            <a:r>
-              <a:rPr sz="1700" b="0" i="1">
-                <a:solidFill>
-                  <a:srgbClr val="6B6B6B"/>
-                </a:solidFill>
-                <a:latin typeface="Century Schoolbook"/>
-              </a:rPr>
-              <a:t>Copy the table. It is your reference for the rest of the unit.</a:t>
-            </a:r>
-          </a:p>
-        </p:txBody>
-      </p:sp>
       <p:cxnSp>
         <p:nvCxnSpPr>
-          <p:cNvPr id="6" name="Connector 5"/>
+          <p:cNvPr id="5" name="Connector 4"/>
           <p:cNvCxnSpPr/>
           <p:nvPr/>
         </p:nvCxnSpPr>
@@ -16094,7 +14176,7 @@
       </p:cxnSp>
       <p:sp>
         <p:nvSpPr>
-          <p:cNvPr id="7" name="TextBox 6"/>
+          <p:cNvPr id="6" name="TextBox 5"/>
           <p:cNvSpPr txBox="1"/>
           <p:nvPr/>
         </p:nvSpPr>
@@ -16129,7 +14211,7 @@
       </p:sp>
       <p:sp>
         <p:nvSpPr>
-          <p:cNvPr id="8" name="TextBox 7"/>
+          <p:cNvPr id="7" name="TextBox 6"/>
           <p:cNvSpPr txBox="1"/>
           <p:nvPr/>
         </p:nvSpPr>
@@ -16164,13 +14246,13 @@
       </p:sp>
       <p:sp>
         <p:nvSpPr>
-          <p:cNvPr id="9" name="TextBox 8"/>
-          <p:cNvSpPr txBox="1"/>
-          <p:nvPr/>
-        </p:nvSpPr>
-        <p:spPr>
-          <a:xfrm>
-            <a:off x="777240" y="1737360"/>
+          <p:cNvPr id="8" name="TextBox 7"/>
+          <p:cNvSpPr txBox="1"/>
+          <p:nvPr/>
+        </p:nvSpPr>
+        <p:spPr>
+          <a:xfrm>
+            <a:off x="777240" y="1389888"/>
             <a:ext cx="10607040" cy="402336"/>
           </a:xfrm>
           <a:prstGeom prst="rect">
@@ -16199,13 +14281,13 @@
       </p:sp>
       <p:cxnSp>
         <p:nvCxnSpPr>
-          <p:cNvPr id="10" name="Connector 9"/>
+          <p:cNvPr id="9" name="Connector 8"/>
           <p:cNvCxnSpPr/>
           <p:nvPr/>
         </p:nvCxnSpPr>
         <p:spPr>
           <a:xfrm>
-            <a:off x="777240" y="2176272"/>
+            <a:off x="777240" y="1828800"/>
             <a:ext cx="10607040" cy="0"/>
           </a:xfrm>
           <a:prstGeom prst="line">
@@ -16234,14 +14316,14 @@
       </p:cxnSp>
       <p:graphicFrame>
         <p:nvGraphicFramePr>
-          <p:cNvPr id="11" name="Table 10"/>
+          <p:cNvPr id="10" name="Table 9"/>
           <p:cNvGraphicFramePr>
             <a:graphicFrameLocks noGrp="1"/>
           </p:cNvGraphicFramePr>
           <p:nvPr/>
         </p:nvGraphicFramePr>
         <p:xfrm>
-          <a:off x="1051560" y="2340864"/>
+          <a:off x="1051560" y="1993392"/>
           <a:ext cx="10058400" cy="3072384"/>
         </p:xfrm>
         <a:graphic>
@@ -18048,44 +16130,9 @@
           </a:fontRef>
         </p:style>
       </p:cxnSp>
-      <p:sp>
-        <p:nvSpPr>
-          <p:cNvPr id="5" name="TextBox 4"/>
-          <p:cNvSpPr txBox="1"/>
-          <p:nvPr/>
-        </p:nvSpPr>
-        <p:spPr>
-          <a:xfrm>
-            <a:off x="777240" y="1261872"/>
-            <a:ext cx="10607040" cy="310896"/>
-          </a:xfrm>
-          <a:prstGeom prst="rect">
-            <a:avLst/>
-          </a:prstGeom>
-          <a:noFill/>
-        </p:spPr>
-        <p:txBody>
-          <a:bodyPr wrap="square" lIns="45720" rIns="45720" tIns="18288" bIns="18288" anchor="t">
-            <a:spAutoFit/>
-          </a:bodyPr>
-          <a:lstStyle/>
-          <a:p>
-            <a:pPr algn="l"/>
-            <a:r>
-              <a:rPr sz="1700" b="0" i="1">
-                <a:solidFill>
-                  <a:srgbClr val="6B6B6B"/>
-                </a:solidFill>
-                <a:latin typeface="Century Schoolbook"/>
-              </a:rPr>
-              <a:t>Two students, two orders, one value.</a:t>
-            </a:r>
-          </a:p>
-        </p:txBody>
-      </p:sp>
       <p:cxnSp>
         <p:nvCxnSpPr>
-          <p:cNvPr id="6" name="Connector 5"/>
+          <p:cNvPr id="5" name="Connector 4"/>
           <p:cNvCxnSpPr/>
           <p:nvPr/>
         </p:nvCxnSpPr>
@@ -18120,7 +16167,7 @@
       </p:cxnSp>
       <p:sp>
         <p:nvSpPr>
-          <p:cNvPr id="7" name="TextBox 6"/>
+          <p:cNvPr id="6" name="TextBox 5"/>
           <p:cNvSpPr txBox="1"/>
           <p:nvPr/>
         </p:nvSpPr>
@@ -18155,7 +16202,7 @@
       </p:sp>
       <p:sp>
         <p:nvSpPr>
-          <p:cNvPr id="8" name="TextBox 7"/>
+          <p:cNvPr id="7" name="TextBox 6"/>
           <p:cNvSpPr txBox="1"/>
           <p:nvPr/>
         </p:nvSpPr>
@@ -18190,13 +16237,13 @@
       </p:sp>
       <p:sp>
         <p:nvSpPr>
-          <p:cNvPr id="9" name="TextBox 8"/>
-          <p:cNvSpPr txBox="1"/>
-          <p:nvPr/>
-        </p:nvSpPr>
-        <p:spPr>
-          <a:xfrm>
-            <a:off x="777240" y="1737360"/>
+          <p:cNvPr id="8" name="TextBox 7"/>
+          <p:cNvSpPr txBox="1"/>
+          <p:nvPr/>
+        </p:nvSpPr>
+        <p:spPr>
+          <a:xfrm>
+            <a:off x="777240" y="1389888"/>
             <a:ext cx="10607040" cy="402336"/>
           </a:xfrm>
           <a:prstGeom prst="rect">
@@ -18225,13 +16272,13 @@
       </p:sp>
       <p:cxnSp>
         <p:nvCxnSpPr>
-          <p:cNvPr id="10" name="Connector 9"/>
+          <p:cNvPr id="9" name="Connector 8"/>
           <p:cNvCxnSpPr/>
           <p:nvPr/>
         </p:nvCxnSpPr>
         <p:spPr>
           <a:xfrm>
-            <a:off x="777240" y="2176272"/>
+            <a:off x="777240" y="1828800"/>
             <a:ext cx="10607040" cy="0"/>
           </a:xfrm>
           <a:prstGeom prst="line">
@@ -18260,13 +16307,13 @@
       </p:cxnSp>
       <p:sp>
         <p:nvSpPr>
-          <p:cNvPr id="11" name="TextBox 10"/>
-          <p:cNvSpPr txBox="1"/>
-          <p:nvPr/>
-        </p:nvSpPr>
-        <p:spPr>
-          <a:xfrm>
-            <a:off x="3330561" y="2514600"/>
+          <p:cNvPr id="10" name="TextBox 9"/>
+          <p:cNvSpPr txBox="1"/>
+          <p:nvPr/>
+        </p:nvSpPr>
+        <p:spPr>
+          <a:xfrm>
+            <a:off x="3330561" y="2167128"/>
             <a:ext cx="1854989" cy="457200"/>
           </a:xfrm>
           <a:prstGeom prst="rect">
@@ -18295,7 +16342,7 @@
       </p:sp>
       <p:pic>
         <p:nvPicPr>
-          <p:cNvPr id="12" name="Picture 11" descr="2d268109f28c9abf.png"/>
+          <p:cNvPr id="11" name="Picture 10" descr="2d268109f28c9abf.png"/>
           <p:cNvPicPr>
             <a:picLocks noChangeAspect="1"/>
           </p:cNvPicPr>
@@ -18309,7 +16356,7 @@
         </p:blipFill>
         <p:spPr>
           <a:xfrm>
-            <a:off x="5048390" y="2340864"/>
+            <a:off x="5048390" y="1993392"/>
             <a:ext cx="3782568" cy="804672"/>
           </a:xfrm>
           <a:prstGeom prst="rect">
@@ -18319,13 +16366,13 @@
       </p:pic>
       <p:sp>
         <p:nvSpPr>
-          <p:cNvPr id="13" name="TextBox 12"/>
-          <p:cNvSpPr txBox="1"/>
-          <p:nvPr/>
-        </p:nvSpPr>
-        <p:spPr>
-          <a:xfrm>
-            <a:off x="2943041" y="3663696"/>
+          <p:cNvPr id="12" name="TextBox 11"/>
+          <p:cNvSpPr txBox="1"/>
+          <p:nvPr/>
+        </p:nvSpPr>
+        <p:spPr>
+          <a:xfrm>
+            <a:off x="2943041" y="3316224"/>
             <a:ext cx="1621140" cy="457200"/>
           </a:xfrm>
           <a:prstGeom prst="rect">
@@ -18354,7 +16401,7 @@
       </p:sp>
       <p:pic>
         <p:nvPicPr>
-          <p:cNvPr id="14" name="Picture 13" descr="20e6fc4620e3ea78.png"/>
+          <p:cNvPr id="13" name="Picture 12" descr="20e6fc4620e3ea78.png"/>
           <p:cNvPicPr>
             <a:picLocks noChangeAspect="1"/>
           </p:cNvPicPr>
@@ -18368,7 +16415,7 @@
         </p:blipFill>
         <p:spPr>
           <a:xfrm>
-            <a:off x="4427022" y="3419856"/>
+            <a:off x="4427022" y="3072384"/>
             <a:ext cx="4791456" cy="944880"/>
           </a:xfrm>
           <a:prstGeom prst="rect">
@@ -18378,13 +16425,13 @@
       </p:pic>
       <p:sp>
         <p:nvSpPr>
-          <p:cNvPr id="15" name="TextBox 14"/>
-          <p:cNvSpPr txBox="1"/>
-          <p:nvPr/>
-        </p:nvSpPr>
-        <p:spPr>
-          <a:xfrm>
-            <a:off x="987552" y="4703064"/>
+          <p:cNvPr id="14" name="TextBox 13"/>
+          <p:cNvSpPr txBox="1"/>
+          <p:nvPr/>
+        </p:nvSpPr>
+        <p:spPr>
+          <a:xfrm>
+            <a:off x="987552" y="4355592"/>
             <a:ext cx="10131551" cy="475488"/>
           </a:xfrm>
           <a:prstGeom prst="rect">
@@ -18647,7 +16694,7 @@
         </p:nvSpPr>
         <p:spPr>
           <a:xfrm>
-            <a:off x="777240" y="1737360"/>
+            <a:off x="777240" y="1389888"/>
             <a:ext cx="10607040" cy="402336"/>
           </a:xfrm>
           <a:prstGeom prst="rect">
@@ -18682,7 +16729,7 @@
         </p:nvCxnSpPr>
         <p:spPr>
           <a:xfrm>
-            <a:off x="777240" y="2176272"/>
+            <a:off x="777240" y="1828800"/>
             <a:ext cx="10607040" cy="0"/>
           </a:xfrm>
           <a:prstGeom prst="line">
@@ -18717,7 +16764,7 @@
         </p:nvSpPr>
         <p:spPr>
           <a:xfrm>
-            <a:off x="987552" y="2404872"/>
+            <a:off x="987552" y="2057400"/>
             <a:ext cx="548640" cy="384048"/>
           </a:xfrm>
           <a:prstGeom prst="rect">
@@ -18752,7 +16799,7 @@
         </p:nvSpPr>
         <p:spPr>
           <a:xfrm>
-            <a:off x="1581912" y="2404872"/>
+            <a:off x="1581912" y="2057400"/>
             <a:ext cx="9537192" cy="950976"/>
           </a:xfrm>
           <a:prstGeom prst="rect">
@@ -18787,7 +16834,7 @@
         </p:nvSpPr>
         <p:spPr>
           <a:xfrm>
-            <a:off x="987552" y="3611879"/>
+            <a:off x="987552" y="3264408"/>
             <a:ext cx="548640" cy="384048"/>
           </a:xfrm>
           <a:prstGeom prst="rect">
@@ -18822,7 +16869,7 @@
         </p:nvSpPr>
         <p:spPr>
           <a:xfrm>
-            <a:off x="1581912" y="3611879"/>
+            <a:off x="1581912" y="3264408"/>
             <a:ext cx="9537192" cy="475488"/>
           </a:xfrm>
           <a:prstGeom prst="rect">
@@ -18857,7 +16904,7 @@
         </p:nvSpPr>
         <p:spPr>
           <a:xfrm>
-            <a:off x="987552" y="4343400"/>
+            <a:off x="987552" y="3995928"/>
             <a:ext cx="548640" cy="384048"/>
           </a:xfrm>
           <a:prstGeom prst="rect">
@@ -18892,7 +16939,7 @@
         </p:nvSpPr>
         <p:spPr>
           <a:xfrm>
-            <a:off x="1581912" y="4343400"/>
+            <a:off x="1581912" y="3995928"/>
             <a:ext cx="9537192" cy="475488"/>
           </a:xfrm>
           <a:prstGeom prst="rect">
@@ -18927,7 +16974,7 @@
         </p:nvSpPr>
         <p:spPr>
           <a:xfrm>
-            <a:off x="987552" y="5074920"/>
+            <a:off x="987552" y="4727448"/>
             <a:ext cx="548640" cy="384048"/>
           </a:xfrm>
           <a:prstGeom prst="rect">
@@ -18962,7 +17009,7 @@
         </p:nvSpPr>
         <p:spPr>
           <a:xfrm>
-            <a:off x="1581912" y="5033771"/>
+            <a:off x="1581912" y="4686299"/>
             <a:ext cx="4078112" cy="457200"/>
           </a:xfrm>
           <a:prstGeom prst="rect">
@@ -19005,7 +17052,7 @@
         </p:blipFill>
         <p:spPr>
           <a:xfrm>
-            <a:off x="5522864" y="5085587"/>
+            <a:off x="5522864" y="4738115"/>
             <a:ext cx="3118104" cy="353568"/>
           </a:xfrm>
           <a:prstGeom prst="rect">
@@ -19021,7 +17068,7 @@
         </p:nvSpPr>
         <p:spPr>
           <a:xfrm>
-            <a:off x="8640968" y="5033771"/>
+            <a:off x="8640968" y="4686299"/>
             <a:ext cx="1002676" cy="457200"/>
           </a:xfrm>
           <a:prstGeom prst="rect">
@@ -19064,7 +17111,7 @@
         </p:blipFill>
         <p:spPr>
           <a:xfrm>
-            <a:off x="9506485" y="5091683"/>
+            <a:off x="9506485" y="4744211"/>
             <a:ext cx="326136" cy="341376"/>
           </a:xfrm>
           <a:prstGeom prst="rect">
@@ -19080,7 +17127,7 @@
         </p:nvSpPr>
         <p:spPr>
           <a:xfrm>
-            <a:off x="9832621" y="5033771"/>
+            <a:off x="9832621" y="4686299"/>
             <a:ext cx="296395" cy="457200"/>
           </a:xfrm>
           <a:prstGeom prst="rect">
@@ -19230,44 +17277,9 @@
           </a:fontRef>
         </p:style>
       </p:cxnSp>
-      <p:sp>
-        <p:nvSpPr>
-          <p:cNvPr id="5" name="TextBox 4"/>
-          <p:cNvSpPr txBox="1"/>
-          <p:nvPr/>
-        </p:nvSpPr>
-        <p:spPr>
-          <a:xfrm>
-            <a:off x="777240" y="1261872"/>
-            <a:ext cx="10607040" cy="310896"/>
-          </a:xfrm>
-          <a:prstGeom prst="rect">
-            <a:avLst/>
-          </a:prstGeom>
-          <a:noFill/>
-        </p:spPr>
-        <p:txBody>
-          <a:bodyPr wrap="square" lIns="45720" rIns="45720" tIns="18288" bIns="18288" anchor="t">
-            <a:spAutoFit/>
-          </a:bodyPr>
-          <a:lstStyle/>
-          <a:p>
-            <a:pPr algn="l"/>
-            <a:r>
-              <a:rPr sz="1700" b="0" i="1">
-                <a:solidFill>
-                  <a:srgbClr val="6B6B6B"/>
-                </a:solidFill>
-                <a:latin typeface="Century Schoolbook"/>
-              </a:rPr>
-              <a:t>A zero exponent inside a product inside a quotient.</a:t>
-            </a:r>
-          </a:p>
-        </p:txBody>
-      </p:sp>
       <p:cxnSp>
         <p:nvCxnSpPr>
-          <p:cNvPr id="6" name="Connector 5"/>
+          <p:cNvPr id="5" name="Connector 4"/>
           <p:cNvCxnSpPr/>
           <p:nvPr/>
         </p:nvCxnSpPr>
@@ -19302,7 +17314,7 @@
       </p:cxnSp>
       <p:sp>
         <p:nvSpPr>
-          <p:cNvPr id="7" name="TextBox 6"/>
+          <p:cNvPr id="6" name="TextBox 5"/>
           <p:cNvSpPr txBox="1"/>
           <p:nvPr/>
         </p:nvSpPr>
@@ -19337,7 +17349,7 @@
       </p:sp>
       <p:sp>
         <p:nvSpPr>
-          <p:cNvPr id="8" name="TextBox 7"/>
+          <p:cNvPr id="7" name="TextBox 6"/>
           <p:cNvSpPr txBox="1"/>
           <p:nvPr/>
         </p:nvSpPr>
@@ -19372,7 +17384,7 @@
       </p:sp>
       <p:pic>
         <p:nvPicPr>
-          <p:cNvPr id="9" name="Picture 8" descr="9c240cefdf3b14b2.png"/>
+          <p:cNvPr id="8" name="Picture 7" descr="9c240cefdf3b14b2.png"/>
           <p:cNvPicPr>
             <a:picLocks noChangeAspect="1"/>
           </p:cNvPicPr>
@@ -19396,7 +17408,7 @@
       </p:pic>
       <p:sp>
         <p:nvSpPr>
-          <p:cNvPr id="10" name="TextBox 9"/>
+          <p:cNvPr id="9" name="TextBox 8"/>
           <p:cNvSpPr txBox="1"/>
           <p:nvPr/>
         </p:nvSpPr>
@@ -19552,44 +17564,9 @@
           </a:fontRef>
         </p:style>
       </p:cxnSp>
-      <p:sp>
-        <p:nvSpPr>
-          <p:cNvPr id="5" name="TextBox 4"/>
-          <p:cNvSpPr txBox="1"/>
-          <p:nvPr/>
-        </p:nvSpPr>
-        <p:spPr>
-          <a:xfrm>
-            <a:off x="777240" y="1261872"/>
-            <a:ext cx="10607040" cy="310896"/>
-          </a:xfrm>
-          <a:prstGeom prst="rect">
-            <a:avLst/>
-          </a:prstGeom>
-          <a:noFill/>
-        </p:spPr>
-        <p:txBody>
-          <a:bodyPr wrap="square" lIns="45720" rIns="45720" tIns="18288" bIns="18288" anchor="t">
-            <a:spAutoFit/>
-          </a:bodyPr>
-          <a:lstStyle/>
-          <a:p>
-            <a:pPr algn="l"/>
-            <a:r>
-              <a:rPr sz="1700" b="0" i="1">
-                <a:solidFill>
-                  <a:srgbClr val="6B6B6B"/>
-                </a:solidFill>
-                <a:latin typeface="Century Schoolbook"/>
-              </a:rPr>
-              <a:t>Worked — Caroline's plan and Jamir's plan.</a:t>
-            </a:r>
-          </a:p>
-        </p:txBody>
-      </p:sp>
       <p:cxnSp>
         <p:nvCxnSpPr>
-          <p:cNvPr id="6" name="Connector 5"/>
+          <p:cNvPr id="5" name="Connector 4"/>
           <p:cNvCxnSpPr/>
           <p:nvPr/>
         </p:nvCxnSpPr>
@@ -19624,7 +17601,7 @@
       </p:cxnSp>
       <p:sp>
         <p:nvSpPr>
-          <p:cNvPr id="7" name="TextBox 6"/>
+          <p:cNvPr id="6" name="TextBox 5"/>
           <p:cNvSpPr txBox="1"/>
           <p:nvPr/>
         </p:nvSpPr>
@@ -19659,7 +17636,7 @@
       </p:sp>
       <p:sp>
         <p:nvSpPr>
-          <p:cNvPr id="8" name="TextBox 7"/>
+          <p:cNvPr id="7" name="TextBox 6"/>
           <p:cNvSpPr txBox="1"/>
           <p:nvPr/>
         </p:nvSpPr>
@@ -19694,7 +17671,7 @@
       </p:sp>
       <p:pic>
         <p:nvPicPr>
-          <p:cNvPr id="9" name="Picture 8" descr="cfcc880844c57bbb.png"/>
+          <p:cNvPr id="8" name="Picture 7" descr="cfcc880844c57bbb.png"/>
           <p:cNvPicPr>
             <a:picLocks noChangeAspect="1"/>
           </p:cNvPicPr>
@@ -19716,44 +17693,9 @@
           </a:prstGeom>
         </p:spPr>
       </p:pic>
-      <p:sp>
-        <p:nvSpPr>
-          <p:cNvPr id="10" name="TextBox 9"/>
-          <p:cNvSpPr txBox="1"/>
-          <p:nvPr/>
-        </p:nvSpPr>
-        <p:spPr>
-          <a:xfrm>
-            <a:off x="5312664" y="2093976"/>
-            <a:ext cx="6071615" cy="502920"/>
-          </a:xfrm>
-          <a:prstGeom prst="rect">
-            <a:avLst/>
-          </a:prstGeom>
-          <a:noFill/>
-        </p:spPr>
-        <p:txBody>
-          <a:bodyPr wrap="square" lIns="45720" rIns="45720" tIns="18288" bIns="18288" anchor="ctr">
-            <a:spAutoFit/>
-          </a:bodyPr>
-          <a:lstStyle/>
-          <a:p>
-            <a:pPr algn="l"/>
-            <a:r>
-              <a:rPr sz="2100" b="0" i="1">
-                <a:solidFill>
-                  <a:srgbClr val="6B6B6B"/>
-                </a:solidFill>
-                <a:latin typeface="Century Schoolbook"/>
-              </a:rPr>
-              <a:t>Caroline: product of powers first</a:t>
-            </a:r>
-          </a:p>
-        </p:txBody>
-      </p:sp>
       <p:pic>
         <p:nvPicPr>
-          <p:cNvPr id="11" name="Picture 10" descr="4c8aa7fdd39a6875.png"/>
+          <p:cNvPr id="9" name="Picture 8" descr="4c8aa7fdd39a6875.png"/>
           <p:cNvPicPr>
             <a:picLocks noChangeAspect="1"/>
           </p:cNvPicPr>
@@ -19775,44 +17717,9 @@
           </a:prstGeom>
         </p:spPr>
       </p:pic>
-      <p:sp>
-        <p:nvSpPr>
-          <p:cNvPr id="12" name="TextBox 11"/>
-          <p:cNvSpPr txBox="1"/>
-          <p:nvPr/>
-        </p:nvSpPr>
-        <p:spPr>
-          <a:xfrm>
-            <a:off x="5327904" y="3172968"/>
-            <a:ext cx="6056376" cy="502920"/>
-          </a:xfrm>
-          <a:prstGeom prst="rect">
-            <a:avLst/>
-          </a:prstGeom>
-          <a:noFill/>
-        </p:spPr>
-        <p:txBody>
-          <a:bodyPr wrap="square" lIns="45720" rIns="45720" tIns="18288" bIns="18288" anchor="ctr">
-            <a:spAutoFit/>
-          </a:bodyPr>
-          <a:lstStyle/>
-          <a:p>
-            <a:pPr algn="l"/>
-            <a:r>
-              <a:rPr sz="2100" b="0" i="1">
-                <a:solidFill>
-                  <a:srgbClr val="6B6B6B"/>
-                </a:solidFill>
-                <a:latin typeface="Century Schoolbook"/>
-              </a:rPr>
-              <a:t>Jamir: zero exponent first</a:t>
-            </a:r>
-          </a:p>
-        </p:txBody>
-      </p:sp>
       <p:pic>
         <p:nvPicPr>
-          <p:cNvPr id="13" name="Picture 12" descr="8fb9fcec01a757f9.png"/>
+          <p:cNvPr id="10" name="Picture 9" descr="8fb9fcec01a757f9.png"/>
           <p:cNvPicPr>
             <a:picLocks noChangeAspect="1"/>
           </p:cNvPicPr>
@@ -19836,42 +17743,7 @@
       </p:pic>
       <p:sp>
         <p:nvSpPr>
-          <p:cNvPr id="14" name="TextBox 13"/>
-          <p:cNvSpPr txBox="1"/>
-          <p:nvPr/>
-        </p:nvSpPr>
-        <p:spPr>
-          <a:xfrm>
-            <a:off x="4267199" y="4251960"/>
-            <a:ext cx="6400800" cy="502920"/>
-          </a:xfrm>
-          <a:prstGeom prst="rect">
-            <a:avLst/>
-          </a:prstGeom>
-          <a:noFill/>
-        </p:spPr>
-        <p:txBody>
-          <a:bodyPr wrap="square" lIns="45720" rIns="45720" tIns="18288" bIns="18288" anchor="ctr">
-            <a:spAutoFit/>
-          </a:bodyPr>
-          <a:lstStyle/>
-          <a:p>
-            <a:pPr algn="l"/>
-            <a:r>
-              <a:rPr sz="2100" b="0" i="1">
-                <a:solidFill>
-                  <a:srgbClr val="6B6B6B"/>
-                </a:solidFill>
-                <a:latin typeface="Century Schoolbook"/>
-              </a:rPr>
-              <a:t>both: quotient of powers, then evaluate</a:t>
-            </a:r>
-          </a:p>
-        </p:txBody>
-      </p:sp>
-      <p:sp>
-        <p:nvSpPr>
-          <p:cNvPr id="15" name="TextBox 14"/>
+          <p:cNvPr id="11" name="TextBox 10"/>
           <p:cNvSpPr txBox="1"/>
           <p:nvPr/>
         </p:nvSpPr>
@@ -20027,44 +17899,9 @@
           </a:fontRef>
         </p:style>
       </p:cxnSp>
-      <p:sp>
-        <p:nvSpPr>
-          <p:cNvPr id="5" name="TextBox 4"/>
-          <p:cNvSpPr txBox="1"/>
-          <p:nvPr/>
-        </p:nvSpPr>
-        <p:spPr>
-          <a:xfrm>
-            <a:off x="777240" y="1261872"/>
-            <a:ext cx="10607040" cy="310896"/>
-          </a:xfrm>
-          <a:prstGeom prst="rect">
-            <a:avLst/>
-          </a:prstGeom>
-          <a:noFill/>
-        </p:spPr>
-        <p:txBody>
-          <a:bodyPr wrap="square" lIns="45720" rIns="45720" tIns="18288" bIns="18288" anchor="t">
-            <a:spAutoFit/>
-          </a:bodyPr>
-          <a:lstStyle/>
-          <a:p>
-            <a:pPr algn="l"/>
-            <a:r>
-              <a:rPr sz="1700" b="0" i="1">
-                <a:solidFill>
-                  <a:srgbClr val="6B6B6B"/>
-                </a:solidFill>
-                <a:latin typeface="Century Schoolbook"/>
-              </a:rPr>
-              <a:t>Same steps, your numbers. Boards up when done.</a:t>
-            </a:r>
-          </a:p>
-        </p:txBody>
-      </p:sp>
       <p:cxnSp>
         <p:nvCxnSpPr>
-          <p:cNvPr id="6" name="Connector 5"/>
+          <p:cNvPr id="5" name="Connector 4"/>
           <p:cNvCxnSpPr/>
           <p:nvPr/>
         </p:nvCxnSpPr>
@@ -20099,7 +17936,7 @@
       </p:cxnSp>
       <p:sp>
         <p:nvSpPr>
-          <p:cNvPr id="7" name="TextBox 6"/>
+          <p:cNvPr id="6" name="TextBox 5"/>
           <p:cNvSpPr txBox="1"/>
           <p:nvPr/>
         </p:nvSpPr>
@@ -20134,7 +17971,7 @@
       </p:sp>
       <p:sp>
         <p:nvSpPr>
-          <p:cNvPr id="8" name="TextBox 7"/>
+          <p:cNvPr id="7" name="TextBox 6"/>
           <p:cNvSpPr txBox="1"/>
           <p:nvPr/>
         </p:nvSpPr>
@@ -20169,7 +18006,7 @@
       </p:sp>
       <p:pic>
         <p:nvPicPr>
-          <p:cNvPr id="9" name="Picture 8" descr="ecdab13571b725e6.png"/>
+          <p:cNvPr id="8" name="Picture 7" descr="ecdab13571b725e6.png"/>
           <p:cNvPicPr>
             <a:picLocks noChangeAspect="1"/>
           </p:cNvPicPr>
@@ -20191,6 +18028,41 @@
           </a:prstGeom>
         </p:spPr>
       </p:pic>
+      <p:sp>
+        <p:nvSpPr>
+          <p:cNvPr id="9" name="TextBox 8"/>
+          <p:cNvSpPr txBox="1"/>
+          <p:nvPr/>
+        </p:nvSpPr>
+        <p:spPr>
+          <a:xfrm>
+            <a:off x="777240" y="3715512"/>
+            <a:ext cx="10607040" cy="429370"/>
+          </a:xfrm>
+          <a:prstGeom prst="rect">
+            <a:avLst/>
+          </a:prstGeom>
+          <a:noFill/>
+        </p:spPr>
+        <p:txBody>
+          <a:bodyPr wrap="square" lIns="45720" rIns="45720" tIns="18288" bIns="18288" anchor="t">
+            <a:spAutoFit/>
+          </a:bodyPr>
+          <a:lstStyle/>
+          <a:p>
+            <a:pPr algn="ctr"/>
+            <a:r>
+              <a:rPr sz="2400" b="1" i="0">
+                <a:solidFill>
+                  <a:srgbClr val="1A1A1A"/>
+                </a:solidFill>
+                <a:latin typeface="Century Schoolbook"/>
+              </a:rPr>
+              <a:t>Make a plan. Then find the value.</a:t>
+            </a:r>
+          </a:p>
+        </p:txBody>
+      </p:sp>
     </p:spTree>
   </p:cSld>
   <p:clrMapOvr>

--- a/a7/build/out/u3/A7 3.03 Exponential Expressions - Slides.pptx
+++ b/a7/build/out/u3/A7 3.03 Exponential Expressions - Slides.pptx
@@ -13306,23 +13306,23 @@
         </p:nvSpPr>
         <p:spPr>
           <a:xfrm>
-            <a:off x="960120" y="2011680"/>
-            <a:ext cx="548640" cy="356616"/>
-          </a:xfrm>
-          <a:prstGeom prst="rect">
-            <a:avLst/>
-          </a:prstGeom>
-          <a:noFill/>
-        </p:spPr>
-        <p:txBody>
-          <a:bodyPr wrap="square" lIns="45720" rIns="45720" tIns="18288" bIns="18288" anchor="t">
+            <a:off x="960120" y="1616964"/>
+            <a:ext cx="548640" cy="457200"/>
+          </a:xfrm>
+          <a:prstGeom prst="rect">
+            <a:avLst/>
+          </a:prstGeom>
+          <a:noFill/>
+        </p:spPr>
+        <p:txBody>
+          <a:bodyPr wrap="square" lIns="45720" rIns="45720" tIns="18288" bIns="18288" anchor="ctr">
             <a:spAutoFit/>
           </a:bodyPr>
           <a:lstStyle/>
           <a:p>
             <a:pPr algn="l"/>
             <a:r>
-              <a:rPr sz="2100" b="1" i="0">
+              <a:rPr sz="2300" b="1" i="0">
                 <a:solidFill>
                   <a:srgbClr val="0B5394"/>
                 </a:solidFill>
@@ -13341,169 +13341,617 @@
         </p:nvSpPr>
         <p:spPr>
           <a:xfrm>
-            <a:off x="1554480" y="2011680"/>
-            <a:ext cx="9829800" cy="411480"/>
-          </a:xfrm>
-          <a:prstGeom prst="rect">
-            <a:avLst/>
-          </a:prstGeom>
-          <a:noFill/>
-        </p:spPr>
-        <p:txBody>
-          <a:bodyPr wrap="square" lIns="45720" rIns="45720" tIns="18288" bIns="18288" anchor="t">
+            <a:off x="1554480" y="1616964"/>
+            <a:ext cx="2548440" cy="457200"/>
+          </a:xfrm>
+          <a:prstGeom prst="rect">
+            <a:avLst/>
+          </a:prstGeom>
+          <a:noFill/>
+        </p:spPr>
+        <p:txBody>
+          <a:bodyPr wrap="none" lIns="45720" rIns="45720" tIns="18288" bIns="18288" anchor="ctr">
+            <a:noAutofit/>
+          </a:bodyPr>
+          <a:lstStyle/>
+          <a:p>
+            <a:pPr algn="l"/>
+            <a:r>
+              <a:rPr sz="2300" b="0" i="0">
+                <a:solidFill>
+                  <a:srgbClr val="1A1A1A"/>
+                </a:solidFill>
+                <a:latin typeface="Century Schoolbook"/>
+              </a:rPr>
+              <a:t>Find the value.  </a:t>
+            </a:r>
+          </a:p>
+        </p:txBody>
+      </p:sp>
+      <p:pic>
+        <p:nvPicPr>
+          <p:cNvPr id="10" name="Picture 9" descr="c3712374923f9761.png"/>
+          <p:cNvPicPr>
+            <a:picLocks noChangeAspect="1"/>
+          </p:cNvPicPr>
+          <p:nvPr/>
+        </p:nvPicPr>
+        <p:blipFill>
+          <a:blip r:embed="rId2"/>
+          <a:stretch>
+            <a:fillRect/>
+          </a:stretch>
+        </p:blipFill>
+        <p:spPr>
+          <a:xfrm>
+            <a:off x="3965760" y="1517904"/>
+            <a:ext cx="795528" cy="655320"/>
+          </a:xfrm>
+          <a:prstGeom prst="rect">
+            <a:avLst/>
+          </a:prstGeom>
+        </p:spPr>
+      </p:pic>
+      <p:sp>
+        <p:nvSpPr>
+          <p:cNvPr id="11" name="TextBox 10"/>
+          <p:cNvSpPr txBox="1"/>
+          <p:nvPr/>
+        </p:nvSpPr>
+        <p:spPr>
+          <a:xfrm>
+            <a:off x="960120" y="2333244"/>
+            <a:ext cx="548640" cy="457200"/>
+          </a:xfrm>
+          <a:prstGeom prst="rect">
+            <a:avLst/>
+          </a:prstGeom>
+          <a:noFill/>
+        </p:spPr>
+        <p:txBody>
+          <a:bodyPr wrap="square" lIns="45720" rIns="45720" tIns="18288" bIns="18288" anchor="ctr">
             <a:spAutoFit/>
           </a:bodyPr>
           <a:lstStyle/>
           <a:p>
             <a:pPr algn="l"/>
             <a:r>
-              <a:rPr sz="2100" b="0" i="0">
+              <a:rPr sz="2300" b="1" i="0">
+                <a:solidFill>
+                  <a:srgbClr val="0B5394"/>
+                </a:solidFill>
+                <a:latin typeface="Century Schoolbook"/>
+              </a:rPr>
+              <a:t>2.</a:t>
+            </a:r>
+          </a:p>
+        </p:txBody>
+      </p:sp>
+      <p:sp>
+        <p:nvSpPr>
+          <p:cNvPr id="12" name="TextBox 11"/>
+          <p:cNvSpPr txBox="1"/>
+          <p:nvPr/>
+        </p:nvSpPr>
+        <p:spPr>
+          <a:xfrm>
+            <a:off x="1554480" y="2333244"/>
+            <a:ext cx="2548440" cy="457200"/>
+          </a:xfrm>
+          <a:prstGeom prst="rect">
+            <a:avLst/>
+          </a:prstGeom>
+          <a:noFill/>
+        </p:spPr>
+        <p:txBody>
+          <a:bodyPr wrap="none" lIns="45720" rIns="45720" tIns="18288" bIns="18288" anchor="ctr">
+            <a:noAutofit/>
+          </a:bodyPr>
+          <a:lstStyle/>
+          <a:p>
+            <a:pPr algn="l"/>
+            <a:r>
+              <a:rPr sz="2300" b="0" i="0">
                 <a:solidFill>
                   <a:srgbClr val="1A1A1A"/>
                 </a:solidFill>
                 <a:latin typeface="Century Schoolbook"/>
               </a:rPr>
-              <a:t>Six questions. Work down the page.</a:t>
-            </a:r>
-          </a:p>
-        </p:txBody>
-      </p:sp>
-      <p:sp>
-        <p:nvSpPr>
-          <p:cNvPr id="10" name="TextBox 9"/>
-          <p:cNvSpPr txBox="1"/>
-          <p:nvPr/>
-        </p:nvSpPr>
-        <p:spPr>
-          <a:xfrm>
-            <a:off x="960120" y="2551176"/>
-            <a:ext cx="548640" cy="356616"/>
-          </a:xfrm>
-          <a:prstGeom prst="rect">
-            <a:avLst/>
-          </a:prstGeom>
-          <a:noFill/>
-        </p:spPr>
-        <p:txBody>
-          <a:bodyPr wrap="square" lIns="45720" rIns="45720" tIns="18288" bIns="18288" anchor="t">
+              <a:t>Find the value.  </a:t>
+            </a:r>
+          </a:p>
+        </p:txBody>
+      </p:sp>
+      <p:pic>
+        <p:nvPicPr>
+          <p:cNvPr id="13" name="Picture 12" descr="838223a6e608c3dd.png"/>
+          <p:cNvPicPr>
+            <a:picLocks noChangeAspect="1"/>
+          </p:cNvPicPr>
+          <p:nvPr/>
+        </p:nvPicPr>
+        <p:blipFill>
+          <a:blip r:embed="rId3"/>
+          <a:stretch>
+            <a:fillRect/>
+          </a:stretch>
+        </p:blipFill>
+        <p:spPr>
+          <a:xfrm>
+            <a:off x="3965760" y="2394204"/>
+            <a:ext cx="1109472" cy="335280"/>
+          </a:xfrm>
+          <a:prstGeom prst="rect">
+            <a:avLst/>
+          </a:prstGeom>
+        </p:spPr>
+      </p:pic>
+      <p:sp>
+        <p:nvSpPr>
+          <p:cNvPr id="14" name="TextBox 13"/>
+          <p:cNvSpPr txBox="1"/>
+          <p:nvPr/>
+        </p:nvSpPr>
+        <p:spPr>
+          <a:xfrm>
+            <a:off x="960120" y="3057144"/>
+            <a:ext cx="548640" cy="457200"/>
+          </a:xfrm>
+          <a:prstGeom prst="rect">
+            <a:avLst/>
+          </a:prstGeom>
+          <a:noFill/>
+        </p:spPr>
+        <p:txBody>
+          <a:bodyPr wrap="square" lIns="45720" rIns="45720" tIns="18288" bIns="18288" anchor="ctr">
             <a:spAutoFit/>
           </a:bodyPr>
           <a:lstStyle/>
           <a:p>
             <a:pPr algn="l"/>
             <a:r>
-              <a:rPr sz="2100" b="1" i="0">
+              <a:rPr sz="2300" b="1" i="0">
                 <a:solidFill>
                   <a:srgbClr val="0B5394"/>
                 </a:solidFill>
                 <a:latin typeface="Century Schoolbook"/>
               </a:rPr>
-              <a:t>2.</a:t>
-            </a:r>
-          </a:p>
-        </p:txBody>
-      </p:sp>
-      <p:sp>
-        <p:nvSpPr>
-          <p:cNvPr id="11" name="TextBox 10"/>
-          <p:cNvSpPr txBox="1"/>
-          <p:nvPr/>
-        </p:nvSpPr>
-        <p:spPr>
-          <a:xfrm>
-            <a:off x="1554480" y="2551176"/>
-            <a:ext cx="9829800" cy="411480"/>
-          </a:xfrm>
-          <a:prstGeom prst="rect">
-            <a:avLst/>
-          </a:prstGeom>
-          <a:noFill/>
-        </p:spPr>
-        <p:txBody>
-          <a:bodyPr wrap="square" lIns="45720" rIns="45720" tIns="18288" bIns="18288" anchor="t">
+              <a:t>3.</a:t>
+            </a:r>
+          </a:p>
+        </p:txBody>
+      </p:sp>
+      <p:sp>
+        <p:nvSpPr>
+          <p:cNvPr id="15" name="TextBox 14"/>
+          <p:cNvSpPr txBox="1"/>
+          <p:nvPr/>
+        </p:nvSpPr>
+        <p:spPr>
+          <a:xfrm>
+            <a:off x="1554480" y="3057144"/>
+            <a:ext cx="3168165" cy="457200"/>
+          </a:xfrm>
+          <a:prstGeom prst="rect">
+            <a:avLst/>
+          </a:prstGeom>
+          <a:noFill/>
+        </p:spPr>
+        <p:txBody>
+          <a:bodyPr wrap="none" lIns="45720" rIns="45720" tIns="18288" bIns="18288" anchor="ctr">
+            <a:noAutofit/>
+          </a:bodyPr>
+          <a:lstStyle/>
+          <a:p>
+            <a:pPr algn="l"/>
+            <a:r>
+              <a:rPr sz="2300" b="0" i="0">
+                <a:solidFill>
+                  <a:srgbClr val="1A1A1A"/>
+                </a:solidFill>
+                <a:latin typeface="Century Schoolbook"/>
+              </a:rPr>
+              <a:t>Write as one power.  </a:t>
+            </a:r>
+          </a:p>
+        </p:txBody>
+      </p:sp>
+      <p:pic>
+        <p:nvPicPr>
+          <p:cNvPr id="16" name="Picture 15" descr="c3aa4635365ee7a4.png"/>
+          <p:cNvPicPr>
+            <a:picLocks noChangeAspect="1"/>
+          </p:cNvPicPr>
+          <p:nvPr/>
+        </p:nvPicPr>
+        <p:blipFill>
+          <a:blip r:embed="rId4"/>
+          <a:stretch>
+            <a:fillRect/>
+          </a:stretch>
+        </p:blipFill>
+        <p:spPr>
+          <a:xfrm>
+            <a:off x="4585485" y="2950464"/>
+            <a:ext cx="801624" cy="670560"/>
+          </a:xfrm>
+          <a:prstGeom prst="rect">
+            <a:avLst/>
+          </a:prstGeom>
+        </p:spPr>
+      </p:pic>
+      <p:sp>
+        <p:nvSpPr>
+          <p:cNvPr id="17" name="TextBox 16"/>
+          <p:cNvSpPr txBox="1"/>
+          <p:nvPr/>
+        </p:nvSpPr>
+        <p:spPr>
+          <a:xfrm>
+            <a:off x="960120" y="3781044"/>
+            <a:ext cx="548640" cy="457200"/>
+          </a:xfrm>
+          <a:prstGeom prst="rect">
+            <a:avLst/>
+          </a:prstGeom>
+          <a:noFill/>
+        </p:spPr>
+        <p:txBody>
+          <a:bodyPr wrap="square" lIns="45720" rIns="45720" tIns="18288" bIns="18288" anchor="ctr">
             <a:spAutoFit/>
           </a:bodyPr>
           <a:lstStyle/>
           <a:p>
             <a:pPr algn="l"/>
             <a:r>
-              <a:rPr sz="2100" b="0" i="0">
+              <a:rPr sz="2300" b="1" i="0">
+                <a:solidFill>
+                  <a:srgbClr val="0B5394"/>
+                </a:solidFill>
+                <a:latin typeface="Century Schoolbook"/>
+              </a:rPr>
+              <a:t>4.</a:t>
+            </a:r>
+          </a:p>
+        </p:txBody>
+      </p:sp>
+      <p:sp>
+        <p:nvSpPr>
+          <p:cNvPr id="18" name="TextBox 17"/>
+          <p:cNvSpPr txBox="1"/>
+          <p:nvPr/>
+        </p:nvSpPr>
+        <p:spPr>
+          <a:xfrm>
+            <a:off x="1554480" y="3781044"/>
+            <a:ext cx="2548440" cy="457200"/>
+          </a:xfrm>
+          <a:prstGeom prst="rect">
+            <a:avLst/>
+          </a:prstGeom>
+          <a:noFill/>
+        </p:spPr>
+        <p:txBody>
+          <a:bodyPr wrap="none" lIns="45720" rIns="45720" tIns="18288" bIns="18288" anchor="ctr">
+            <a:noAutofit/>
+          </a:bodyPr>
+          <a:lstStyle/>
+          <a:p>
+            <a:pPr algn="l"/>
+            <a:r>
+              <a:rPr sz="2300" b="0" i="0">
                 <a:solidFill>
                   <a:srgbClr val="1A1A1A"/>
                 </a:solidFill>
                 <a:latin typeface="Century Schoolbook"/>
               </a:rPr>
-              <a:t>Show the step that does the work, not just the answer.</a:t>
-            </a:r>
-          </a:p>
-        </p:txBody>
-      </p:sp>
-      <p:sp>
-        <p:nvSpPr>
-          <p:cNvPr id="12" name="TextBox 11"/>
-          <p:cNvSpPr txBox="1"/>
-          <p:nvPr/>
-        </p:nvSpPr>
-        <p:spPr>
-          <a:xfrm>
-            <a:off x="960120" y="3090672"/>
-            <a:ext cx="548640" cy="356616"/>
-          </a:xfrm>
-          <a:prstGeom prst="rect">
-            <a:avLst/>
-          </a:prstGeom>
-          <a:noFill/>
-        </p:spPr>
-        <p:txBody>
-          <a:bodyPr wrap="square" lIns="45720" rIns="45720" tIns="18288" bIns="18288" anchor="t">
+              <a:t>Find the value.  </a:t>
+            </a:r>
+          </a:p>
+        </p:txBody>
+      </p:sp>
+      <p:pic>
+        <p:nvPicPr>
+          <p:cNvPr id="19" name="Picture 18" descr="f06c6a4d76a6bc03.png"/>
+          <p:cNvPicPr>
+            <a:picLocks noChangeAspect="1"/>
+          </p:cNvPicPr>
+          <p:nvPr/>
+        </p:nvPicPr>
+        <p:blipFill>
+          <a:blip r:embed="rId5"/>
+          <a:stretch>
+            <a:fillRect/>
+          </a:stretch>
+        </p:blipFill>
+        <p:spPr>
+          <a:xfrm>
+            <a:off x="3965760" y="3842004"/>
+            <a:ext cx="1612392" cy="335280"/>
+          </a:xfrm>
+          <a:prstGeom prst="rect">
+            <a:avLst/>
+          </a:prstGeom>
+        </p:spPr>
+      </p:pic>
+      <p:sp>
+        <p:nvSpPr>
+          <p:cNvPr id="20" name="TextBox 19"/>
+          <p:cNvSpPr txBox="1"/>
+          <p:nvPr/>
+        </p:nvSpPr>
+        <p:spPr>
+          <a:xfrm>
+            <a:off x="960120" y="4556760"/>
+            <a:ext cx="548640" cy="457200"/>
+          </a:xfrm>
+          <a:prstGeom prst="rect">
+            <a:avLst/>
+          </a:prstGeom>
+          <a:noFill/>
+        </p:spPr>
+        <p:txBody>
+          <a:bodyPr wrap="square" lIns="45720" rIns="45720" tIns="18288" bIns="18288" anchor="ctr">
             <a:spAutoFit/>
           </a:bodyPr>
           <a:lstStyle/>
           <a:p>
             <a:pPr algn="l"/>
             <a:r>
-              <a:rPr sz="2100" b="1" i="0">
+              <a:rPr sz="2300" b="1" i="0">
                 <a:solidFill>
                   <a:srgbClr val="0B5394"/>
                 </a:solidFill>
                 <a:latin typeface="Century Schoolbook"/>
               </a:rPr>
-              <a:t>3.</a:t>
-            </a:r>
-          </a:p>
-        </p:txBody>
-      </p:sp>
-      <p:sp>
-        <p:nvSpPr>
-          <p:cNvPr id="13" name="TextBox 12"/>
-          <p:cNvSpPr txBox="1"/>
-          <p:nvPr/>
-        </p:nvSpPr>
-        <p:spPr>
-          <a:xfrm>
-            <a:off x="1554480" y="3090672"/>
-            <a:ext cx="9829800" cy="411480"/>
-          </a:xfrm>
-          <a:prstGeom prst="rect">
-            <a:avLst/>
-          </a:prstGeom>
-          <a:noFill/>
-        </p:spPr>
-        <p:txBody>
-          <a:bodyPr wrap="square" lIns="45720" rIns="45720" tIns="18288" bIns="18288" anchor="t">
+              <a:t>5.</a:t>
+            </a:r>
+          </a:p>
+        </p:txBody>
+      </p:sp>
+      <p:sp>
+        <p:nvSpPr>
+          <p:cNvPr id="21" name="TextBox 20"/>
+          <p:cNvSpPr txBox="1"/>
+          <p:nvPr/>
+        </p:nvSpPr>
+        <p:spPr>
+          <a:xfrm>
+            <a:off x="1554480" y="4556760"/>
+            <a:ext cx="2548440" cy="457200"/>
+          </a:xfrm>
+          <a:prstGeom prst="rect">
+            <a:avLst/>
+          </a:prstGeom>
+          <a:noFill/>
+        </p:spPr>
+        <p:txBody>
+          <a:bodyPr wrap="none" lIns="45720" rIns="45720" tIns="18288" bIns="18288" anchor="ctr">
+            <a:noAutofit/>
+          </a:bodyPr>
+          <a:lstStyle/>
+          <a:p>
+            <a:pPr algn="l"/>
+            <a:r>
+              <a:rPr sz="2300" b="0" i="0">
+                <a:solidFill>
+                  <a:srgbClr val="1A1A1A"/>
+                </a:solidFill>
+                <a:latin typeface="Century Schoolbook"/>
+              </a:rPr>
+              <a:t>Find the value.  </a:t>
+            </a:r>
+          </a:p>
+        </p:txBody>
+      </p:sp>
+      <p:pic>
+        <p:nvPicPr>
+          <p:cNvPr id="22" name="Picture 21" descr="b0ae21ade1d55a48.png"/>
+          <p:cNvPicPr>
+            <a:picLocks noChangeAspect="1"/>
+          </p:cNvPicPr>
+          <p:nvPr/>
+        </p:nvPicPr>
+        <p:blipFill>
+          <a:blip r:embed="rId6"/>
+          <a:stretch>
+            <a:fillRect/>
+          </a:stretch>
+        </p:blipFill>
+        <p:spPr>
+          <a:xfrm>
+            <a:off x="3965760" y="4398264"/>
+            <a:ext cx="1688592" cy="774192"/>
+          </a:xfrm>
+          <a:prstGeom prst="rect">
+            <a:avLst/>
+          </a:prstGeom>
+        </p:spPr>
+      </p:pic>
+      <p:sp>
+        <p:nvSpPr>
+          <p:cNvPr id="23" name="TextBox 22"/>
+          <p:cNvSpPr txBox="1"/>
+          <p:nvPr/>
+        </p:nvSpPr>
+        <p:spPr>
+          <a:xfrm>
+            <a:off x="960120" y="5458968"/>
+            <a:ext cx="548640" cy="457200"/>
+          </a:xfrm>
+          <a:prstGeom prst="rect">
+            <a:avLst/>
+          </a:prstGeom>
+          <a:noFill/>
+        </p:spPr>
+        <p:txBody>
+          <a:bodyPr wrap="square" lIns="45720" rIns="45720" tIns="18288" bIns="18288" anchor="ctr">
             <a:spAutoFit/>
           </a:bodyPr>
           <a:lstStyle/>
           <a:p>
             <a:pPr algn="l"/>
             <a:r>
-              <a:rPr sz="2100" b="0" i="0">
+              <a:rPr sz="2300" b="1" i="0">
+                <a:solidFill>
+                  <a:srgbClr val="0B5394"/>
+                </a:solidFill>
+                <a:latin typeface="Century Schoolbook"/>
+              </a:rPr>
+              <a:t>6.</a:t>
+            </a:r>
+          </a:p>
+        </p:txBody>
+      </p:sp>
+      <p:sp>
+        <p:nvSpPr>
+          <p:cNvPr id="24" name="TextBox 23"/>
+          <p:cNvSpPr txBox="1"/>
+          <p:nvPr/>
+        </p:nvSpPr>
+        <p:spPr>
+          <a:xfrm>
+            <a:off x="1554480" y="5458968"/>
+            <a:ext cx="1841475" cy="457200"/>
+          </a:xfrm>
+          <a:prstGeom prst="rect">
+            <a:avLst/>
+          </a:prstGeom>
+          <a:noFill/>
+        </p:spPr>
+        <p:txBody>
+          <a:bodyPr wrap="none" lIns="45720" rIns="45720" tIns="18288" bIns="18288" anchor="ctr">
+            <a:noAutofit/>
+          </a:bodyPr>
+          <a:lstStyle/>
+          <a:p>
+            <a:pPr algn="l"/>
+            <a:r>
+              <a:rPr sz="2300" b="0" i="0">
                 <a:solidFill>
                   <a:srgbClr val="1A1A1A"/>
                 </a:solidFill>
                 <a:latin typeface="Century Schoolbook"/>
               </a:rPr>
-              <a:t>Silence until the six minutes are up.</a:t>
+              <a:t>Show that  </a:t>
+            </a:r>
+          </a:p>
+        </p:txBody>
+      </p:sp>
+      <p:pic>
+        <p:nvPicPr>
+          <p:cNvPr id="25" name="Picture 24" descr="e88c5dabf2ca6570.png"/>
+          <p:cNvPicPr>
+            <a:picLocks noChangeAspect="1"/>
+          </p:cNvPicPr>
+          <p:nvPr/>
+        </p:nvPicPr>
+        <p:blipFill>
+          <a:blip r:embed="rId7"/>
+          <a:stretch>
+            <a:fillRect/>
+          </a:stretch>
+        </p:blipFill>
+        <p:spPr>
+          <a:xfrm>
+            <a:off x="3258795" y="5355336"/>
+            <a:ext cx="975360" cy="664464"/>
+          </a:xfrm>
+          <a:prstGeom prst="rect">
+            <a:avLst/>
+          </a:prstGeom>
+        </p:spPr>
+      </p:pic>
+      <p:sp>
+        <p:nvSpPr>
+          <p:cNvPr id="26" name="TextBox 25"/>
+          <p:cNvSpPr txBox="1"/>
+          <p:nvPr/>
+        </p:nvSpPr>
+        <p:spPr>
+          <a:xfrm>
+            <a:off x="4234155" y="5458968"/>
+            <a:ext cx="1093755" cy="457200"/>
+          </a:xfrm>
+          <a:prstGeom prst="rect">
+            <a:avLst/>
+          </a:prstGeom>
+          <a:noFill/>
+        </p:spPr>
+        <p:txBody>
+          <a:bodyPr wrap="none" lIns="45720" rIns="45720" tIns="18288" bIns="18288" anchor="ctr">
+            <a:noAutofit/>
+          </a:bodyPr>
+          <a:lstStyle/>
+          <a:p>
+            <a:pPr algn="l"/>
+            <a:r>
+              <a:rPr sz="2300" b="0" i="0">
+                <a:solidFill>
+                  <a:srgbClr val="1A1A1A"/>
+                </a:solidFill>
+                <a:latin typeface="Century Schoolbook"/>
+              </a:rPr>
+              <a:t>  and  </a:t>
+            </a:r>
+          </a:p>
+        </p:txBody>
+      </p:sp>
+      <p:pic>
+        <p:nvPicPr>
+          <p:cNvPr id="27" name="Picture 26" descr="f77131d9c4c01025.png"/>
+          <p:cNvPicPr>
+            <a:picLocks noChangeAspect="1"/>
+          </p:cNvPicPr>
+          <p:nvPr/>
+        </p:nvPicPr>
+        <p:blipFill>
+          <a:blip r:embed="rId8"/>
+          <a:stretch>
+            <a:fillRect/>
+          </a:stretch>
+        </p:blipFill>
+        <p:spPr>
+          <a:xfrm>
+            <a:off x="5190750" y="5355336"/>
+            <a:ext cx="469392" cy="664464"/>
+          </a:xfrm>
+          <a:prstGeom prst="rect">
+            <a:avLst/>
+          </a:prstGeom>
+        </p:spPr>
+      </p:pic>
+      <p:sp>
+        <p:nvSpPr>
+          <p:cNvPr id="28" name="TextBox 27"/>
+          <p:cNvSpPr txBox="1"/>
+          <p:nvPr/>
+        </p:nvSpPr>
+        <p:spPr>
+          <a:xfrm>
+            <a:off x="5660142" y="5458968"/>
+            <a:ext cx="3372988" cy="457200"/>
+          </a:xfrm>
+          <a:prstGeom prst="rect">
+            <a:avLst/>
+          </a:prstGeom>
+          <a:noFill/>
+        </p:spPr>
+        <p:txBody>
+          <a:bodyPr wrap="none" lIns="45720" rIns="45720" tIns="18288" bIns="18288" anchor="ctr">
+            <a:noAutofit/>
+          </a:bodyPr>
+          <a:lstStyle/>
+          <a:p>
+            <a:pPr algn="l"/>
+            <a:r>
+              <a:rPr sz="2300" b="0" i="0">
+                <a:solidFill>
+                  <a:srgbClr val="1A1A1A"/>
+                </a:solidFill>
+                <a:latin typeface="Century Schoolbook"/>
+              </a:rPr>
+              <a:t>  have the same value.</a:t>
             </a:r>
           </a:p>
         </p:txBody>

--- a/a7/build/out/u3/A7 3.03 Exponential Expressions - Slides.pptx
+++ b/a7/build/out/u3/A7 3.03 Exponential Expressions - Slides.pptx
@@ -3145,11 +3145,11 @@
           <a:p>
             <a:pPr algn="ctr"/>
             <a:r>
-              <a:rPr sz="1500" b="0" i="0">
+              <a:rPr sz="1420" b="0" i="0">
                 <a:solidFill>
                   <a:srgbClr val="6B6B6B"/>
                 </a:solidFill>
-                <a:latin typeface="Century Schoolbook"/>
+                <a:latin typeface="Lexend"/>
               </a:rPr>
               <a:t>GRADE 7 ACCELERATED  ·  UNIT 3  ·  LESSON 3</a:t>
             </a:r>
@@ -3180,11 +3180,11 @@
           <a:p>
             <a:pPr algn="ctr"/>
             <a:r>
-              <a:rPr sz="3400" b="1" i="0">
+              <a:rPr sz="3229" b="1" i="0">
                 <a:solidFill>
                   <a:srgbClr val="1A1A1A"/>
                 </a:solidFill>
-                <a:latin typeface="Century Schoolbook"/>
+                <a:latin typeface="Lexend"/>
               </a:rPr>
               <a:t>Exponential Expressions</a:t>
             </a:r>
@@ -3285,11 +3285,11 @@
           <a:p>
             <a:pPr algn="ctr"/>
             <a:r>
-              <a:rPr sz="1600" b="1" i="0">
+              <a:rPr sz="1520" b="1" i="0">
                 <a:solidFill>
                   <a:srgbClr val="1A1A1A"/>
                 </a:solidFill>
-                <a:latin typeface="Century Schoolbook"/>
+                <a:latin typeface="Lexend"/>
               </a:rPr>
               <a:t>MA.7.NSO.1.1</a:t>
             </a:r>
@@ -3320,11 +3320,11 @@
           <a:p>
             <a:pPr algn="ctr"/>
             <a:r>
-              <a:rPr sz="1900" b="0" i="1">
+              <a:rPr sz="1810" b="0" i="0">
                 <a:solidFill>
                   <a:srgbClr val="1A1A1A"/>
                 </a:solidFill>
-                <a:latin typeface="Century Schoolbook"/>
+                <a:latin typeface="Lexend"/>
               </a:rPr>
               <a:t>I can apply more than one law of exponents to evaluate an expression and to write an equivalent one.</a:t>
             </a:r>
@@ -3390,11 +3390,11 @@
           <a:p>
             <a:pPr algn="l"/>
             <a:r>
-              <a:rPr sz="1100" b="0" i="1">
+              <a:rPr sz="1040" b="0" i="0">
                 <a:solidFill>
                   <a:srgbClr val="6B6B6B"/>
                 </a:solidFill>
-                <a:latin typeface="Century Schoolbook"/>
+                <a:latin typeface="Lexend"/>
               </a:rPr>
               <a:t>Grade 7 Accelerated · Unit 3 · Lesson 3 — Exponential Expressions</a:t>
             </a:r>
@@ -3425,11 +3425,11 @@
           <a:p>
             <a:pPr algn="r"/>
             <a:r>
-              <a:rPr sz="1100" b="0" i="0">
+              <a:rPr sz="1040" b="0" i="0">
                 <a:solidFill>
                   <a:srgbClr val="6B6B6B"/>
                 </a:solidFill>
-                <a:latin typeface="Century Schoolbook"/>
+                <a:latin typeface="Lexend"/>
               </a:rPr>
               <a:t>1</a:t>
             </a:r>
@@ -3478,11 +3478,11 @@
           <a:p>
             <a:pPr algn="l"/>
             <a:r>
-              <a:rPr sz="3600" b="1" i="0">
+              <a:rPr sz="3420" b="1" i="0">
                 <a:solidFill>
                   <a:srgbClr val="1A1A1A"/>
                 </a:solidFill>
-                <a:latin typeface="Century Schoolbook"/>
+                <a:latin typeface="Lexend"/>
               </a:rPr>
               <a:t>Your Turn</a:t>
             </a:r>
@@ -3618,11 +3618,11 @@
           <a:p>
             <a:pPr algn="l"/>
             <a:r>
-              <a:rPr sz="1100" b="0" i="1">
+              <a:rPr sz="1040" b="0" i="0">
                 <a:solidFill>
                   <a:srgbClr val="6B6B6B"/>
                 </a:solidFill>
-                <a:latin typeface="Century Schoolbook"/>
+                <a:latin typeface="Lexend"/>
               </a:rPr>
               <a:t>Grade 7 Accelerated · Unit 3 · Lesson 3 — Exponential Expressions</a:t>
             </a:r>
@@ -3653,11 +3653,11 @@
           <a:p>
             <a:pPr algn="r"/>
             <a:r>
-              <a:rPr sz="1100" b="0" i="0">
+              <a:rPr sz="1040" b="0" i="0">
                 <a:solidFill>
                   <a:srgbClr val="6B6B6B"/>
                 </a:solidFill>
-                <a:latin typeface="Century Schoolbook"/>
+                <a:latin typeface="Lexend"/>
               </a:rPr>
               <a:t>10</a:t>
             </a:r>
@@ -3666,7 +3666,7 @@
       </p:sp>
       <p:pic>
         <p:nvPicPr>
-          <p:cNvPr id="8" name="Picture 7" descr="d381195bd435c1bd.png"/>
+          <p:cNvPr id="8" name="Picture 7" descr="64d9077d4a04b7dc.png"/>
           <p:cNvPicPr>
             <a:picLocks noChangeAspect="1"/>
           </p:cNvPicPr>
@@ -3680,8 +3680,8 @@
         </p:blipFill>
         <p:spPr>
           <a:xfrm>
-            <a:off x="5472683" y="2194560"/>
-            <a:ext cx="1216152" cy="1011936"/>
+            <a:off x="5434583" y="1600200"/>
+            <a:ext cx="1292352" cy="993648"/>
           </a:xfrm>
           <a:prstGeom prst="rect">
             <a:avLst/>
@@ -3696,7 +3696,7 @@
         </p:nvSpPr>
         <p:spPr>
           <a:xfrm>
-            <a:off x="777240" y="3709416"/>
+            <a:off x="777240" y="3096768"/>
             <a:ext cx="10607040" cy="429370"/>
           </a:xfrm>
           <a:prstGeom prst="rect">
@@ -3712,26 +3712,133 @@
           <a:p>
             <a:pPr algn="ctr"/>
             <a:r>
-              <a:rPr sz="2400" b="1" i="0">
+              <a:rPr sz="2280" b="1" i="0">
                 <a:solidFill>
                   <a:srgbClr val="1A1A1A"/>
                 </a:solidFill>
-                <a:latin typeface="Century Schoolbook"/>
+                <a:latin typeface="Lexend"/>
               </a:rPr>
               <a:t>Make a plan. Then find the value.</a:t>
             </a:r>
           </a:p>
         </p:txBody>
       </p:sp>
-      <p:sp>
-        <p:nvSpPr>
-          <p:cNvPr id="10" name="TextBox 9"/>
-          <p:cNvSpPr txBox="1"/>
-          <p:nvPr/>
-        </p:nvSpPr>
-        <p:spPr>
-          <a:xfrm>
-            <a:off x="777240" y="4572000"/>
+      <p:pic>
+        <p:nvPicPr>
+          <p:cNvPr id="10" name="Picture 9" descr="7d5966605e1b5a7b.png"/>
+          <p:cNvPicPr>
+            <a:picLocks noChangeAspect="1"/>
+          </p:cNvPicPr>
+          <p:nvPr/>
+        </p:nvPicPr>
+        <p:blipFill>
+          <a:blip r:embed="rId3"/>
+          <a:stretch>
+            <a:fillRect/>
+          </a:stretch>
+        </p:blipFill>
+        <p:spPr>
+          <a:xfrm>
+            <a:off x="3527217" y="3762358"/>
+            <a:ext cx="832104" cy="304800"/>
+          </a:xfrm>
+          <a:prstGeom prst="rect">
+            <a:avLst/>
+          </a:prstGeom>
+        </p:spPr>
+      </p:pic>
+      <p:sp>
+        <p:nvSpPr>
+          <p:cNvPr id="11" name="TextBox 10"/>
+          <p:cNvSpPr txBox="1"/>
+          <p:nvPr/>
+        </p:nvSpPr>
+        <p:spPr>
+          <a:xfrm>
+            <a:off x="4359321" y="3686158"/>
+            <a:ext cx="3113692" cy="457200"/>
+          </a:xfrm>
+          <a:prstGeom prst="rect">
+            <a:avLst/>
+          </a:prstGeom>
+          <a:noFill/>
+        </p:spPr>
+        <p:txBody>
+          <a:bodyPr wrap="none" lIns="45720" rIns="45720" tIns="18288" bIns="18288" anchor="ctr">
+            <a:noAutofit/>
+          </a:bodyPr>
+          <a:lstStyle/>
+          <a:p>
+            <a:pPr algn="l"/>
+            <a:r>
+              <a:rPr sz="2750" b="0" i="0">
+                <a:solidFill>
+                  <a:srgbClr val="1A1A1A"/>
+                </a:solidFill>
+                <a:latin typeface="Lexend"/>
+              </a:rPr>
+              <a:t>,   so the top is   </a:t>
+            </a:r>
+          </a:p>
+        </p:txBody>
+      </p:sp>
+      <p:pic>
+        <p:nvPicPr>
+          <p:cNvPr id="12" name="Picture 11" descr="cfeba237a81f8368.png"/>
+          <p:cNvPicPr>
+            <a:picLocks noChangeAspect="1"/>
+          </p:cNvPicPr>
+          <p:nvPr/>
+        </p:nvPicPr>
+        <p:blipFill>
+          <a:blip r:embed="rId4"/>
+          <a:stretch>
+            <a:fillRect/>
+          </a:stretch>
+        </p:blipFill>
+        <p:spPr>
+          <a:xfrm>
+            <a:off x="7335854" y="3762358"/>
+            <a:ext cx="1414272" cy="304800"/>
+          </a:xfrm>
+          <a:prstGeom prst="rect">
+            <a:avLst/>
+          </a:prstGeom>
+        </p:spPr>
+      </p:pic>
+      <p:pic>
+        <p:nvPicPr>
+          <p:cNvPr id="13" name="Picture 12" descr="c9da1d73bbb72ec2.png"/>
+          <p:cNvPicPr>
+            <a:picLocks noChangeAspect="1"/>
+          </p:cNvPicPr>
+          <p:nvPr/>
+        </p:nvPicPr>
+        <p:blipFill>
+          <a:blip r:embed="rId5"/>
+          <a:stretch>
+            <a:fillRect/>
+          </a:stretch>
+        </p:blipFill>
+        <p:spPr>
+          <a:xfrm>
+            <a:off x="3527217" y="4248514"/>
+            <a:ext cx="2834640" cy="719328"/>
+          </a:xfrm>
+          <a:prstGeom prst="rect">
+            <a:avLst/>
+          </a:prstGeom>
+        </p:spPr>
+      </p:pic>
+      <p:sp>
+        <p:nvSpPr>
+          <p:cNvPr id="14" name="TextBox 13"/>
+          <p:cNvSpPr txBox="1"/>
+          <p:nvPr/>
+        </p:nvSpPr>
+        <p:spPr>
+          <a:xfrm>
+            <a:off x="777240" y="5105002"/>
             <a:ext cx="10607040" cy="548640"/>
           </a:xfrm>
           <a:prstGeom prst="rect">
@@ -3747,29 +3854,29 @@
           <a:p>
             <a:pPr algn="ctr"/>
             <a:r>
-              <a:rPr sz="3200" b="1" i="0">
+              <a:rPr sz="3040" b="1" i="0">
                 <a:solidFill>
                   <a:srgbClr val="9E1B32"/>
                 </a:solidFill>
-                <a:latin typeface="Century Schoolbook"/>
+                <a:latin typeface="Lexend"/>
               </a:rPr>
               <a:t>Answer:   5</a:t>
             </a:r>
             <a:r>
-              <a:rPr sz="3200" b="1" i="0" baseline="30000">
+              <a:rPr sz="3040" b="1" i="0" baseline="30000">
                 <a:solidFill>
                   <a:srgbClr val="9E1B32"/>
                 </a:solidFill>
-                <a:latin typeface="Century Schoolbook"/>
+                <a:latin typeface="Lexend"/>
               </a:rPr>
               <a:t>2</a:t>
             </a:r>
             <a:r>
-              <a:rPr sz="3200" b="1" i="0">
+              <a:rPr sz="3040" b="1" i="0">
                 <a:solidFill>
                   <a:srgbClr val="9E1B32"/>
                 </a:solidFill>
-                <a:latin typeface="Century Schoolbook"/>
+                <a:latin typeface="Lexend"/>
               </a:rPr>
               <a:t> = 25</a:t>
             </a:r>
@@ -3818,11 +3925,11 @@
           <a:p>
             <a:pPr algn="l"/>
             <a:r>
-              <a:rPr sz="3600" b="1" i="0">
+              <a:rPr sz="3420" b="1" i="0">
                 <a:solidFill>
                   <a:srgbClr val="1A1A1A"/>
                 </a:solidFill>
-                <a:latin typeface="Century Schoolbook"/>
+                <a:latin typeface="Lexend"/>
               </a:rPr>
               <a:t>Example 2</a:t>
             </a:r>
@@ -3958,11 +4065,11 @@
           <a:p>
             <a:pPr algn="l"/>
             <a:r>
-              <a:rPr sz="1100" b="0" i="1">
+              <a:rPr sz="1040" b="0" i="0">
                 <a:solidFill>
                   <a:srgbClr val="6B6B6B"/>
                 </a:solidFill>
-                <a:latin typeface="Century Schoolbook"/>
+                <a:latin typeface="Lexend"/>
               </a:rPr>
               <a:t>Grade 7 Accelerated · Unit 3 · Lesson 3 — Exponential Expressions</a:t>
             </a:r>
@@ -3993,11 +4100,11 @@
           <a:p>
             <a:pPr algn="r"/>
             <a:r>
-              <a:rPr sz="1100" b="0" i="0">
+              <a:rPr sz="1040" b="0" i="0">
                 <a:solidFill>
                   <a:srgbClr val="6B6B6B"/>
                 </a:solidFill>
-                <a:latin typeface="Century Schoolbook"/>
+                <a:latin typeface="Lexend"/>
               </a:rPr>
               <a:t>11</a:t>
             </a:r>
@@ -4006,7 +4113,7 @@
       </p:sp>
       <p:pic>
         <p:nvPicPr>
-          <p:cNvPr id="8" name="Picture 7" descr="30d1cf39c0294a10.png"/>
+          <p:cNvPr id="8" name="Picture 7" descr="2eb7f507fb1bddae.png"/>
           <p:cNvPicPr>
             <a:picLocks noChangeAspect="1"/>
           </p:cNvPicPr>
@@ -4020,8 +4127,8 @@
         </p:blipFill>
         <p:spPr>
           <a:xfrm>
-            <a:off x="4983479" y="2103120"/>
-            <a:ext cx="2194560" cy="880872"/>
+            <a:off x="4994147" y="2103120"/>
+            <a:ext cx="2173224" cy="862584"/>
           </a:xfrm>
           <a:prstGeom prst="rect">
             <a:avLst/>
@@ -4036,7 +4143,7 @@
         </p:nvSpPr>
         <p:spPr>
           <a:xfrm>
-            <a:off x="777240" y="3486912"/>
+            <a:off x="777240" y="3468624"/>
             <a:ext cx="10607040" cy="429370"/>
           </a:xfrm>
           <a:prstGeom prst="rect">
@@ -4052,11 +4159,11 @@
           <a:p>
             <a:pPr algn="ctr"/>
             <a:r>
-              <a:rPr sz="2400" b="1" i="0">
+              <a:rPr sz="2280" b="1" i="0">
                 <a:solidFill>
                   <a:srgbClr val="1A1A1A"/>
                 </a:solidFill>
-                <a:latin typeface="Century Schoolbook"/>
+                <a:latin typeface="Lexend"/>
               </a:rPr>
               <a:t>Make a plan. Then find the value.</a:t>
             </a:r>
@@ -4105,11 +4212,11 @@
           <a:p>
             <a:pPr algn="l"/>
             <a:r>
-              <a:rPr sz="3600" b="1" i="0">
+              <a:rPr sz="3420" b="1" i="0">
                 <a:solidFill>
                   <a:srgbClr val="1A1A1A"/>
                 </a:solidFill>
-                <a:latin typeface="Century Schoolbook"/>
+                <a:latin typeface="Lexend"/>
               </a:rPr>
               <a:t>Example 2</a:t>
             </a:r>
@@ -4245,11 +4352,11 @@
           <a:p>
             <a:pPr algn="l"/>
             <a:r>
-              <a:rPr sz="1100" b="0" i="1">
+              <a:rPr sz="1040" b="0" i="0">
                 <a:solidFill>
                   <a:srgbClr val="6B6B6B"/>
                 </a:solidFill>
-                <a:latin typeface="Century Schoolbook"/>
+                <a:latin typeface="Lexend"/>
               </a:rPr>
               <a:t>Grade 7 Accelerated · Unit 3 · Lesson 3 — Exponential Expressions</a:t>
             </a:r>
@@ -4280,11 +4387,11 @@
           <a:p>
             <a:pPr algn="r"/>
             <a:r>
-              <a:rPr sz="1100" b="0" i="0">
+              <a:rPr sz="1040" b="0" i="0">
                 <a:solidFill>
                   <a:srgbClr val="6B6B6B"/>
                 </a:solidFill>
-                <a:latin typeface="Century Schoolbook"/>
+                <a:latin typeface="Lexend"/>
               </a:rPr>
               <a:t>12</a:t>
             </a:r>
@@ -4293,7 +4400,7 @@
       </p:sp>
       <p:pic>
         <p:nvPicPr>
-          <p:cNvPr id="8" name="Picture 7" descr="8f14d1bdb840e74d.png"/>
+          <p:cNvPr id="8" name="Picture 7" descr="466ad9eb1c6c0f60.png"/>
           <p:cNvPicPr>
             <a:picLocks noChangeAspect="1"/>
           </p:cNvPicPr>
@@ -4308,7 +4415,7 @@
         <p:spPr>
           <a:xfrm>
             <a:off x="1828800" y="1920240"/>
-            <a:ext cx="4404360" cy="880872"/>
+            <a:ext cx="4291584" cy="862584"/>
           </a:xfrm>
           <a:prstGeom prst="rect">
             <a:avLst/>
@@ -4317,7 +4424,7 @@
       </p:pic>
       <p:pic>
         <p:nvPicPr>
-          <p:cNvPr id="9" name="Picture 8" descr="d8954ab13f1548f8.png"/>
+          <p:cNvPr id="9" name="Picture 8" descr="805526f61b3f744c.png"/>
           <p:cNvPicPr>
             <a:picLocks noChangeAspect="1"/>
           </p:cNvPicPr>
@@ -4331,8 +4438,8 @@
         </p:blipFill>
         <p:spPr>
           <a:xfrm>
-            <a:off x="1828800" y="3075432"/>
-            <a:ext cx="2798064" cy="701040"/>
+            <a:off x="1828800" y="3057144"/>
+            <a:ext cx="2709672" cy="676656"/>
           </a:xfrm>
           <a:prstGeom prst="rect">
             <a:avLst/>
@@ -4341,7 +4448,7 @@
       </p:pic>
       <p:pic>
         <p:nvPicPr>
-          <p:cNvPr id="10" name="Picture 9" descr="c6322a597974340d.png"/>
+          <p:cNvPr id="10" name="Picture 9" descr="e03466c326967c38.png"/>
           <p:cNvPicPr>
             <a:picLocks noChangeAspect="1"/>
           </p:cNvPicPr>
@@ -4355,8 +4462,8 @@
         </p:blipFill>
         <p:spPr>
           <a:xfrm>
-            <a:off x="1828800" y="4050791"/>
-            <a:ext cx="2508504" cy="411480"/>
+            <a:off x="1828800" y="4008119"/>
+            <a:ext cx="2578608" cy="408432"/>
           </a:xfrm>
           <a:prstGeom prst="rect">
             <a:avLst/>
@@ -4371,7 +4478,7 @@
         </p:nvSpPr>
         <p:spPr>
           <a:xfrm>
-            <a:off x="777240" y="4919472"/>
+            <a:off x="777240" y="4873751"/>
             <a:ext cx="10607040" cy="548640"/>
           </a:xfrm>
           <a:prstGeom prst="rect">
@@ -4387,11 +4494,11 @@
           <a:p>
             <a:pPr algn="ctr"/>
             <a:r>
-              <a:rPr sz="3200" b="1" i="0">
+              <a:rPr sz="3040" b="1" i="0">
                 <a:solidFill>
                   <a:srgbClr val="9E1B32"/>
                 </a:solidFill>
-                <a:latin typeface="Century Schoolbook"/>
+                <a:latin typeface="Lexend"/>
               </a:rPr>
               <a:t>Answer:   10,000</a:t>
             </a:r>
@@ -4440,11 +4547,11 @@
           <a:p>
             <a:pPr algn="l"/>
             <a:r>
-              <a:rPr sz="3600" b="1" i="0">
+              <a:rPr sz="3420" b="1" i="0">
                 <a:solidFill>
                   <a:srgbClr val="1A1A1A"/>
                 </a:solidFill>
-                <a:latin typeface="Century Schoolbook"/>
+                <a:latin typeface="Lexend"/>
               </a:rPr>
               <a:t>Your Turn</a:t>
             </a:r>
@@ -4580,11 +4687,11 @@
           <a:p>
             <a:pPr algn="l"/>
             <a:r>
-              <a:rPr sz="1100" b="0" i="1">
+              <a:rPr sz="1040" b="0" i="0">
                 <a:solidFill>
                   <a:srgbClr val="6B6B6B"/>
                 </a:solidFill>
-                <a:latin typeface="Century Schoolbook"/>
+                <a:latin typeface="Lexend"/>
               </a:rPr>
               <a:t>Grade 7 Accelerated · Unit 3 · Lesson 3 — Exponential Expressions</a:t>
             </a:r>
@@ -4615,11 +4722,11 @@
           <a:p>
             <a:pPr algn="r"/>
             <a:r>
-              <a:rPr sz="1100" b="0" i="0">
+              <a:rPr sz="1040" b="0" i="0">
                 <a:solidFill>
                   <a:srgbClr val="6B6B6B"/>
                 </a:solidFill>
-                <a:latin typeface="Century Schoolbook"/>
+                <a:latin typeface="Lexend"/>
               </a:rPr>
               <a:t>13</a:t>
             </a:r>
@@ -4628,7 +4735,7 @@
       </p:sp>
       <p:pic>
         <p:nvPicPr>
-          <p:cNvPr id="8" name="Picture 7" descr="274e6fec14c7e780.png"/>
+          <p:cNvPr id="8" name="Picture 7" descr="31005eb0e2b932cb.png"/>
           <p:cNvPicPr>
             <a:picLocks noChangeAspect="1"/>
           </p:cNvPicPr>
@@ -4642,8 +4749,8 @@
         </p:blipFill>
         <p:spPr>
           <a:xfrm>
-            <a:off x="5004815" y="2194560"/>
-            <a:ext cx="2151888" cy="1091184"/>
+            <a:off x="5035295" y="1600200"/>
+            <a:ext cx="2090928" cy="1069848"/>
           </a:xfrm>
           <a:prstGeom prst="rect">
             <a:avLst/>
@@ -4658,7 +4765,7 @@
         </p:nvSpPr>
         <p:spPr>
           <a:xfrm>
-            <a:off x="777240" y="3788664"/>
+            <a:off x="777240" y="3172968"/>
             <a:ext cx="10607040" cy="429370"/>
           </a:xfrm>
           <a:prstGeom prst="rect">
@@ -4674,11 +4781,11 @@
           <a:p>
             <a:pPr algn="ctr"/>
             <a:r>
-              <a:rPr sz="2400" b="1" i="0">
+              <a:rPr sz="2280" b="1" i="0">
                 <a:solidFill>
                   <a:srgbClr val="1A1A1A"/>
                 </a:solidFill>
-                <a:latin typeface="Century Schoolbook"/>
+                <a:latin typeface="Lexend"/>
               </a:rPr>
               <a:t>Make a plan. Then find the value.</a:t>
             </a:r>
@@ -4727,11 +4834,11 @@
           <a:p>
             <a:pPr algn="l"/>
             <a:r>
-              <a:rPr sz="3600" b="1" i="0">
+              <a:rPr sz="3420" b="1" i="0">
                 <a:solidFill>
                   <a:srgbClr val="1A1A1A"/>
                 </a:solidFill>
-                <a:latin typeface="Century Schoolbook"/>
+                <a:latin typeface="Lexend"/>
               </a:rPr>
               <a:t>Your Turn</a:t>
             </a:r>
@@ -4867,11 +4974,11 @@
           <a:p>
             <a:pPr algn="l"/>
             <a:r>
-              <a:rPr sz="1100" b="0" i="1">
+              <a:rPr sz="1040" b="0" i="0">
                 <a:solidFill>
                   <a:srgbClr val="6B6B6B"/>
                 </a:solidFill>
-                <a:latin typeface="Century Schoolbook"/>
+                <a:latin typeface="Lexend"/>
               </a:rPr>
               <a:t>Grade 7 Accelerated · Unit 3 · Lesson 3 — Exponential Expressions</a:t>
             </a:r>
@@ -4902,11 +5009,11 @@
           <a:p>
             <a:pPr algn="r"/>
             <a:r>
-              <a:rPr sz="1100" b="0" i="0">
+              <a:rPr sz="1040" b="0" i="0">
                 <a:solidFill>
                   <a:srgbClr val="6B6B6B"/>
                 </a:solidFill>
-                <a:latin typeface="Century Schoolbook"/>
+                <a:latin typeface="Lexend"/>
               </a:rPr>
               <a:t>14</a:t>
             </a:r>
@@ -4915,7 +5022,7 @@
       </p:sp>
       <p:pic>
         <p:nvPicPr>
-          <p:cNvPr id="8" name="Picture 7" descr="e1a3a8f726b8bfc3.png"/>
+          <p:cNvPr id="8" name="Picture 7" descr="3c51ce23219019ca.png"/>
           <p:cNvPicPr>
             <a:picLocks noChangeAspect="1"/>
           </p:cNvPicPr>
@@ -4929,8 +5036,8 @@
         </p:blipFill>
         <p:spPr>
           <a:xfrm>
-            <a:off x="5007864" y="2194560"/>
-            <a:ext cx="2145792" cy="1091184"/>
+            <a:off x="5038344" y="1600200"/>
+            <a:ext cx="2084831" cy="1069848"/>
           </a:xfrm>
           <a:prstGeom prst="rect">
             <a:avLst/>
@@ -4945,7 +5052,7 @@
         </p:nvSpPr>
         <p:spPr>
           <a:xfrm>
-            <a:off x="777240" y="3788664"/>
+            <a:off x="777240" y="3172968"/>
             <a:ext cx="10607040" cy="429370"/>
           </a:xfrm>
           <a:prstGeom prst="rect">
@@ -4961,26 +5068,74 @@
           <a:p>
             <a:pPr algn="ctr"/>
             <a:r>
-              <a:rPr sz="2400" b="1" i="0">
+              <a:rPr sz="2280" b="1" i="0">
                 <a:solidFill>
                   <a:srgbClr val="1A1A1A"/>
                 </a:solidFill>
-                <a:latin typeface="Century Schoolbook"/>
+                <a:latin typeface="Lexend"/>
               </a:rPr>
               <a:t>Make a plan. Then find the value.</a:t>
             </a:r>
           </a:p>
         </p:txBody>
       </p:sp>
-      <p:sp>
-        <p:nvSpPr>
-          <p:cNvPr id="10" name="TextBox 9"/>
-          <p:cNvSpPr txBox="1"/>
-          <p:nvPr/>
-        </p:nvSpPr>
-        <p:spPr>
-          <a:xfrm>
-            <a:off x="777240" y="4572000"/>
+      <p:pic>
+        <p:nvPicPr>
+          <p:cNvPr id="10" name="Picture 9" descr="861380fef57da390.png"/>
+          <p:cNvPicPr>
+            <a:picLocks noChangeAspect="1"/>
+          </p:cNvPicPr>
+          <p:nvPr/>
+        </p:nvPicPr>
+        <p:blipFill>
+          <a:blip r:embed="rId3"/>
+          <a:stretch>
+            <a:fillRect/>
+          </a:stretch>
+        </p:blipFill>
+        <p:spPr>
+          <a:xfrm>
+            <a:off x="3887723" y="3837034"/>
+            <a:ext cx="813816" cy="307848"/>
+          </a:xfrm>
+          <a:prstGeom prst="rect">
+            <a:avLst/>
+          </a:prstGeom>
+        </p:spPr>
+      </p:pic>
+      <p:pic>
+        <p:nvPicPr>
+          <p:cNvPr id="11" name="Picture 10" descr="6ae16a65768a73b3.png"/>
+          <p:cNvPicPr>
+            <a:picLocks noChangeAspect="1"/>
+          </p:cNvPicPr>
+          <p:nvPr/>
+        </p:nvPicPr>
+        <p:blipFill>
+          <a:blip r:embed="rId4"/>
+          <a:stretch>
+            <a:fillRect/>
+          </a:stretch>
+        </p:blipFill>
+        <p:spPr>
+          <a:xfrm>
+            <a:off x="3887723" y="4324714"/>
+            <a:ext cx="4498848" cy="774192"/>
+          </a:xfrm>
+          <a:prstGeom prst="rect">
+            <a:avLst/>
+          </a:prstGeom>
+        </p:spPr>
+      </p:pic>
+      <p:sp>
+        <p:nvSpPr>
+          <p:cNvPr id="12" name="TextBox 11"/>
+          <p:cNvSpPr txBox="1"/>
+          <p:nvPr/>
+        </p:nvSpPr>
+        <p:spPr>
+          <a:xfrm>
+            <a:off x="777240" y="5236066"/>
             <a:ext cx="10607040" cy="548640"/>
           </a:xfrm>
           <a:prstGeom prst="rect">
@@ -4996,11 +5151,11 @@
           <a:p>
             <a:pPr algn="ctr"/>
             <a:r>
-              <a:rPr sz="3200" b="1" i="0">
+              <a:rPr sz="3040" b="1" i="0">
                 <a:solidFill>
                   <a:srgbClr val="9E1B32"/>
                 </a:solidFill>
-                <a:latin typeface="Century Schoolbook"/>
+                <a:latin typeface="Lexend"/>
               </a:rPr>
               <a:t>Answer:   −27</a:t>
             </a:r>
@@ -5049,11 +5204,11 @@
           <a:p>
             <a:pPr algn="l"/>
             <a:r>
-              <a:rPr sz="3400" b="1" i="0">
+              <a:rPr sz="3229" b="1" i="0">
                 <a:solidFill>
                   <a:srgbClr val="1A1A1A"/>
                 </a:solidFill>
-                <a:latin typeface="Century Schoolbook"/>
+                <a:latin typeface="Lexend"/>
               </a:rPr>
               <a:t>Whiteboards   ·   Question 1 of 9</a:t>
             </a:r>
@@ -5189,11 +5344,11 @@
           <a:p>
             <a:pPr algn="l"/>
             <a:r>
-              <a:rPr sz="1100" b="0" i="1">
+              <a:rPr sz="1040" b="0" i="0">
                 <a:solidFill>
                   <a:srgbClr val="6B6B6B"/>
                 </a:solidFill>
-                <a:latin typeface="Century Schoolbook"/>
+                <a:latin typeface="Lexend"/>
               </a:rPr>
               <a:t>Grade 7 Accelerated · Unit 3 · Lesson 3 — Exponential Expressions</a:t>
             </a:r>
@@ -5224,11 +5379,11 @@
           <a:p>
             <a:pPr algn="r"/>
             <a:r>
-              <a:rPr sz="1100" b="0" i="0">
+              <a:rPr sz="1040" b="0" i="0">
                 <a:solidFill>
                   <a:srgbClr val="6B6B6B"/>
                 </a:solidFill>
-                <a:latin typeface="Century Schoolbook"/>
+                <a:latin typeface="Lexend"/>
               </a:rPr>
               <a:t>15</a:t>
             </a:r>
@@ -5244,7 +5399,7 @@
         <p:spPr>
           <a:xfrm>
             <a:off x="1234440" y="1851660"/>
-            <a:ext cx="3195668" cy="457200"/>
+            <a:ext cx="3171891" cy="457200"/>
           </a:xfrm>
           <a:prstGeom prst="rect">
             <a:avLst/>
@@ -5259,11 +5414,11 @@
           <a:p>
             <a:pPr algn="l"/>
             <a:r>
-              <a:rPr sz="2400" b="0" i="0">
+              <a:rPr sz="2280" b="0" i="0">
                 <a:solidFill>
                   <a:srgbClr val="1A1A1A"/>
                 </a:solidFill>
-                <a:latin typeface="Century Schoolbook"/>
+                <a:latin typeface="Lexend"/>
               </a:rPr>
               <a:t>A warehouse holds  </a:t>
             </a:r>
@@ -5272,7 +5427,7 @@
       </p:sp>
       <p:pic>
         <p:nvPicPr>
-          <p:cNvPr id="9" name="Picture 8" descr="ef1987aeb6be68e4.png"/>
+          <p:cNvPr id="9" name="Picture 8" descr="0ad9a9f5739e6855.png"/>
           <p:cNvPicPr>
             <a:picLocks noChangeAspect="1"/>
           </p:cNvPicPr>
@@ -5286,8 +5441,8 @@
         </p:blipFill>
         <p:spPr>
           <a:xfrm>
-            <a:off x="4292948" y="1938527"/>
-            <a:ext cx="268224" cy="283464"/>
+            <a:off x="4269171" y="1946147"/>
+            <a:ext cx="292608" cy="268224"/>
           </a:xfrm>
           <a:prstGeom prst="rect">
             <a:avLst/>
@@ -5302,8 +5457,8 @@
         </p:nvSpPr>
         <p:spPr>
           <a:xfrm>
-            <a:off x="4561172" y="1851660"/>
-            <a:ext cx="1769800" cy="457200"/>
+            <a:off x="4561779" y="1851660"/>
+            <a:ext cx="1774104" cy="457200"/>
           </a:xfrm>
           <a:prstGeom prst="rect">
             <a:avLst/>
@@ -5318,11 +5473,11 @@
           <a:p>
             <a:pPr algn="l"/>
             <a:r>
-              <a:rPr sz="2400" b="0" i="0">
+              <a:rPr sz="2280" b="0" i="0">
                 <a:solidFill>
                   <a:srgbClr val="1A1A1A"/>
                 </a:solidFill>
-                <a:latin typeface="Century Schoolbook"/>
+                <a:latin typeface="Lexend"/>
               </a:rPr>
               <a:t>  boxes in  </a:t>
             </a:r>
@@ -5331,7 +5486,7 @@
       </p:sp>
       <p:pic>
         <p:nvPicPr>
-          <p:cNvPr id="11" name="Picture 10" descr="bd667566e598f523.png"/>
+          <p:cNvPr id="11" name="Picture 10" descr="90ca6f61d8d9d8f2.png"/>
           <p:cNvPicPr>
             <a:picLocks noChangeAspect="1"/>
           </p:cNvPicPr>
@@ -5345,8 +5500,8 @@
         </p:blipFill>
         <p:spPr>
           <a:xfrm>
-            <a:off x="6193812" y="1940052"/>
-            <a:ext cx="268224" cy="280416"/>
+            <a:off x="6198724" y="1943100"/>
+            <a:ext cx="280416" cy="274320"/>
           </a:xfrm>
           <a:prstGeom prst="rect">
             <a:avLst/>
@@ -5361,8 +5516,8 @@
         </p:nvSpPr>
         <p:spPr>
           <a:xfrm>
-            <a:off x="6462036" y="1851660"/>
-            <a:ext cx="2079373" cy="457200"/>
+            <a:off x="6479140" y="1851660"/>
+            <a:ext cx="2058907" cy="457200"/>
           </a:xfrm>
           <a:prstGeom prst="rect">
             <a:avLst/>
@@ -5377,11 +5532,11 @@
           <a:p>
             <a:pPr algn="l"/>
             <a:r>
-              <a:rPr sz="2400" b="0" i="0">
+              <a:rPr sz="2280" b="0" i="0">
                 <a:solidFill>
                   <a:srgbClr val="1A1A1A"/>
                 </a:solidFill>
-                <a:latin typeface="Century Schoolbook"/>
+                <a:latin typeface="Lexend"/>
               </a:rPr>
               <a:t>  equal rows.</a:t>
             </a:r>
@@ -5412,11 +5567,11 @@
           <a:p>
             <a:pPr algn="l"/>
             <a:r>
-              <a:rPr sz="2400" b="0" i="0">
+              <a:rPr sz="2280" b="0" i="0">
                 <a:solidFill>
                   <a:srgbClr val="1A1A1A"/>
                 </a:solidFill>
-                <a:latin typeface="Century Schoolbook"/>
+                <a:latin typeface="Lexend"/>
               </a:rPr>
               <a:t>Each box weighs 3 kilograms.</a:t>
             </a:r>
@@ -5447,11 +5602,11 @@
           <a:p>
             <a:pPr algn="l"/>
             <a:r>
-              <a:rPr sz="2400" b="1" i="0">
+              <a:rPr sz="2280" b="1" i="0">
                 <a:solidFill>
                   <a:srgbClr val="1A1A1A"/>
                 </a:solidFill>
-                <a:latin typeface="Century Schoolbook"/>
+                <a:latin typeface="Lexend"/>
               </a:rPr>
               <a:t>How many boxes are in each row?</a:t>
             </a:r>
@@ -5482,11 +5637,11 @@
           <a:p>
             <a:pPr algn="ctr"/>
             <a:r>
-              <a:rPr sz="2600" b="1" i="0">
+              <a:rPr sz="2470" b="1" i="0">
                 <a:solidFill>
                   <a:srgbClr val="1A1A1A"/>
                 </a:solidFill>
-                <a:latin typeface="Century Schoolbook"/>
+                <a:latin typeface="Lexend"/>
               </a:rPr>
               <a:t>Answer it.</a:t>
             </a:r>
@@ -5535,11 +5690,11 @@
           <a:p>
             <a:pPr algn="l"/>
             <a:r>
-              <a:rPr sz="3400" b="1" i="0">
+              <a:rPr sz="3229" b="1" i="0">
                 <a:solidFill>
                   <a:srgbClr val="1A1A1A"/>
                 </a:solidFill>
-                <a:latin typeface="Century Schoolbook"/>
+                <a:latin typeface="Lexend"/>
               </a:rPr>
               <a:t>Whiteboards   ·   Question 1 of 9</a:t>
             </a:r>
@@ -5675,11 +5830,11 @@
           <a:p>
             <a:pPr algn="l"/>
             <a:r>
-              <a:rPr sz="1100" b="0" i="1">
+              <a:rPr sz="1040" b="0" i="0">
                 <a:solidFill>
                   <a:srgbClr val="6B6B6B"/>
                 </a:solidFill>
-                <a:latin typeface="Century Schoolbook"/>
+                <a:latin typeface="Lexend"/>
               </a:rPr>
               <a:t>Grade 7 Accelerated · Unit 3 · Lesson 3 — Exponential Expressions</a:t>
             </a:r>
@@ -5710,11 +5865,11 @@
           <a:p>
             <a:pPr algn="r"/>
             <a:r>
-              <a:rPr sz="1100" b="0" i="0">
+              <a:rPr sz="1040" b="0" i="0">
                 <a:solidFill>
                   <a:srgbClr val="6B6B6B"/>
                 </a:solidFill>
-                <a:latin typeface="Century Schoolbook"/>
+                <a:latin typeface="Lexend"/>
               </a:rPr>
               <a:t>16</a:t>
             </a:r>
@@ -5730,7 +5885,7 @@
         <p:spPr>
           <a:xfrm>
             <a:off x="1234440" y="1851660"/>
-            <a:ext cx="3195668" cy="457200"/>
+            <a:ext cx="3171891" cy="457200"/>
           </a:xfrm>
           <a:prstGeom prst="rect">
             <a:avLst/>
@@ -5745,11 +5900,11 @@
           <a:p>
             <a:pPr algn="l"/>
             <a:r>
-              <a:rPr sz="2400" b="0" i="0">
+              <a:rPr sz="2280" b="0" i="0">
                 <a:solidFill>
                   <a:srgbClr val="1A1A1A"/>
                 </a:solidFill>
-                <a:latin typeface="Century Schoolbook"/>
+                <a:latin typeface="Lexend"/>
               </a:rPr>
               <a:t>A warehouse holds  </a:t>
             </a:r>
@@ -5758,7 +5913,7 @@
       </p:sp>
       <p:pic>
         <p:nvPicPr>
-          <p:cNvPr id="9" name="Picture 8" descr="08d825ede09be259.png"/>
+          <p:cNvPr id="9" name="Picture 8" descr="39f35dfe45d0621d.png"/>
           <p:cNvPicPr>
             <a:picLocks noChangeAspect="1"/>
           </p:cNvPicPr>
@@ -5772,8 +5927,8 @@
         </p:blipFill>
         <p:spPr>
           <a:xfrm>
-            <a:off x="4292948" y="1940052"/>
-            <a:ext cx="271272" cy="280416"/>
+            <a:off x="4269171" y="1944623"/>
+            <a:ext cx="292608" cy="271272"/>
           </a:xfrm>
           <a:prstGeom prst="rect">
             <a:avLst/>
@@ -5788,8 +5943,8 @@
         </p:nvSpPr>
         <p:spPr>
           <a:xfrm>
-            <a:off x="4564220" y="1851660"/>
-            <a:ext cx="1769800" cy="457200"/>
+            <a:off x="4561779" y="1851660"/>
+            <a:ext cx="1774104" cy="457200"/>
           </a:xfrm>
           <a:prstGeom prst="rect">
             <a:avLst/>
@@ -5804,11 +5959,11 @@
           <a:p>
             <a:pPr algn="l"/>
             <a:r>
-              <a:rPr sz="2400" b="0" i="0">
+              <a:rPr sz="2280" b="0" i="0">
                 <a:solidFill>
                   <a:srgbClr val="1A1A1A"/>
                 </a:solidFill>
-                <a:latin typeface="Century Schoolbook"/>
+                <a:latin typeface="Lexend"/>
               </a:rPr>
               <a:t>  boxes in  </a:t>
             </a:r>
@@ -5817,7 +5972,7 @@
       </p:sp>
       <p:pic>
         <p:nvPicPr>
-          <p:cNvPr id="11" name="Picture 10" descr="e32dba3262b932bf.png"/>
+          <p:cNvPr id="11" name="Picture 10" descr="83256b733f6eea67.png"/>
           <p:cNvPicPr>
             <a:picLocks noChangeAspect="1"/>
           </p:cNvPicPr>
@@ -5831,8 +5986,8 @@
         </p:blipFill>
         <p:spPr>
           <a:xfrm>
-            <a:off x="6196860" y="1940052"/>
-            <a:ext cx="268224" cy="280416"/>
+            <a:off x="6198724" y="1943100"/>
+            <a:ext cx="283464" cy="274320"/>
           </a:xfrm>
           <a:prstGeom prst="rect">
             <a:avLst/>
@@ -5847,8 +6002,8 @@
         </p:nvSpPr>
         <p:spPr>
           <a:xfrm>
-            <a:off x="6465084" y="1851660"/>
-            <a:ext cx="2079373" cy="457200"/>
+            <a:off x="6482188" y="1851660"/>
+            <a:ext cx="2058907" cy="457200"/>
           </a:xfrm>
           <a:prstGeom prst="rect">
             <a:avLst/>
@@ -5863,11 +6018,11 @@
           <a:p>
             <a:pPr algn="l"/>
             <a:r>
-              <a:rPr sz="2400" b="0" i="0">
+              <a:rPr sz="2280" b="0" i="0">
                 <a:solidFill>
                   <a:srgbClr val="1A1A1A"/>
                 </a:solidFill>
-                <a:latin typeface="Century Schoolbook"/>
+                <a:latin typeface="Lexend"/>
               </a:rPr>
               <a:t>  equal rows.</a:t>
             </a:r>
@@ -5898,11 +6053,11 @@
           <a:p>
             <a:pPr algn="l"/>
             <a:r>
-              <a:rPr sz="2400" b="0" i="0">
+              <a:rPr sz="2280" b="0" i="0">
                 <a:solidFill>
                   <a:srgbClr val="1A1A1A"/>
                 </a:solidFill>
-                <a:latin typeface="Century Schoolbook"/>
+                <a:latin typeface="Lexend"/>
               </a:rPr>
               <a:t>Each box weighs 3 kilograms.</a:t>
             </a:r>
@@ -5933,26 +6088,74 @@
           <a:p>
             <a:pPr algn="l"/>
             <a:r>
-              <a:rPr sz="2400" b="1" i="0">
+              <a:rPr sz="2280" b="1" i="0">
                 <a:solidFill>
                   <a:srgbClr val="1A1A1A"/>
                 </a:solidFill>
-                <a:latin typeface="Century Schoolbook"/>
+                <a:latin typeface="Lexend"/>
               </a:rPr>
               <a:t>How many boxes are in each row?</a:t>
             </a:r>
           </a:p>
         </p:txBody>
       </p:sp>
-      <p:sp>
-        <p:nvSpPr>
-          <p:cNvPr id="15" name="TextBox 14"/>
-          <p:cNvSpPr txBox="1"/>
-          <p:nvPr/>
-        </p:nvSpPr>
-        <p:spPr>
-          <a:xfrm>
-            <a:off x="777240" y="4663440"/>
+      <p:pic>
+        <p:nvPicPr>
+          <p:cNvPr id="15" name="Picture 14" descr="7a08f76444d3db9b.png"/>
+          <p:cNvPicPr>
+            <a:picLocks noChangeAspect="1"/>
+          </p:cNvPicPr>
+          <p:nvPr/>
+        </p:nvPicPr>
+        <p:blipFill>
+          <a:blip r:embed="rId4"/>
+          <a:stretch>
+            <a:fillRect/>
+          </a:stretch>
+        </p:blipFill>
+        <p:spPr>
+          <a:xfrm>
+            <a:off x="4770119" y="3739100"/>
+            <a:ext cx="2727960" cy="301752"/>
+          </a:xfrm>
+          <a:prstGeom prst="rect">
+            <a:avLst/>
+          </a:prstGeom>
+        </p:spPr>
+      </p:pic>
+      <p:pic>
+        <p:nvPicPr>
+          <p:cNvPr id="16" name="Picture 15" descr="8cf4bb25f9be7695.png"/>
+          <p:cNvPicPr>
+            <a:picLocks noChangeAspect="1"/>
+          </p:cNvPicPr>
+          <p:nvPr/>
+        </p:nvPicPr>
+        <p:blipFill>
+          <a:blip r:embed="rId5"/>
+          <a:stretch>
+            <a:fillRect/>
+          </a:stretch>
+        </p:blipFill>
+        <p:spPr>
+          <a:xfrm>
+            <a:off x="4770119" y="4277072"/>
+            <a:ext cx="1024128" cy="304800"/>
+          </a:xfrm>
+          <a:prstGeom prst="rect">
+            <a:avLst/>
+          </a:prstGeom>
+        </p:spPr>
+      </p:pic>
+      <p:sp>
+        <p:nvSpPr>
+          <p:cNvPr id="17" name="TextBox 16"/>
+          <p:cNvSpPr txBox="1"/>
+          <p:nvPr/>
+        </p:nvSpPr>
+        <p:spPr>
+          <a:xfrm>
+            <a:off x="777240" y="4772372"/>
             <a:ext cx="10607040" cy="548640"/>
           </a:xfrm>
           <a:prstGeom prst="rect">
@@ -5968,11 +6171,11 @@
           <a:p>
             <a:pPr algn="ctr"/>
             <a:r>
-              <a:rPr sz="3200" b="1" i="0">
+              <a:rPr sz="3040" b="1" i="0">
                 <a:solidFill>
                   <a:srgbClr val="9E1B32"/>
                 </a:solidFill>
-                <a:latin typeface="Century Schoolbook"/>
+                <a:latin typeface="Lexend"/>
               </a:rPr>
               <a:t>Answer:   36</a:t>
             </a:r>
@@ -6021,11 +6224,11 @@
           <a:p>
             <a:pPr algn="l"/>
             <a:r>
-              <a:rPr sz="3400" b="1" i="0">
+              <a:rPr sz="3229" b="1" i="0">
                 <a:solidFill>
                   <a:srgbClr val="1A1A1A"/>
                 </a:solidFill>
-                <a:latin typeface="Century Schoolbook"/>
+                <a:latin typeface="Lexend"/>
               </a:rPr>
               <a:t>Whiteboards   ·   Question 2 of 9</a:t>
             </a:r>
@@ -6161,11 +6364,11 @@
           <a:p>
             <a:pPr algn="l"/>
             <a:r>
-              <a:rPr sz="1100" b="0" i="1">
+              <a:rPr sz="1040" b="0" i="0">
                 <a:solidFill>
                   <a:srgbClr val="6B6B6B"/>
                 </a:solidFill>
-                <a:latin typeface="Century Schoolbook"/>
+                <a:latin typeface="Lexend"/>
               </a:rPr>
               <a:t>Grade 7 Accelerated · Unit 3 · Lesson 3 — Exponential Expressions</a:t>
             </a:r>
@@ -6196,11 +6399,11 @@
           <a:p>
             <a:pPr algn="r"/>
             <a:r>
-              <a:rPr sz="1100" b="0" i="0">
+              <a:rPr sz="1040" b="0" i="0">
                 <a:solidFill>
                   <a:srgbClr val="6B6B6B"/>
                 </a:solidFill>
-                <a:latin typeface="Century Schoolbook"/>
+                <a:latin typeface="Lexend"/>
               </a:rPr>
               <a:t>17</a:t>
             </a:r>
@@ -6209,7 +6412,7 @@
       </p:sp>
       <p:pic>
         <p:nvPicPr>
-          <p:cNvPr id="8" name="Picture 7" descr="eca797d063644f8c.png"/>
+          <p:cNvPr id="8" name="Picture 7" descr="d7dfc0540bf78cb5.png"/>
           <p:cNvPicPr>
             <a:picLocks noChangeAspect="1"/>
           </p:cNvPicPr>
@@ -6223,8 +6426,8 @@
         </p:blipFill>
         <p:spPr>
           <a:xfrm>
-            <a:off x="5234940" y="2194560"/>
-            <a:ext cx="1691640" cy="518160"/>
+            <a:off x="5230368" y="2194560"/>
+            <a:ext cx="1700784" cy="509016"/>
           </a:xfrm>
           <a:prstGeom prst="rect">
             <a:avLst/>
@@ -6255,11 +6458,11 @@
           <a:p>
             <a:pPr algn="ctr"/>
             <a:r>
-              <a:rPr sz="2600" b="1" i="0">
+              <a:rPr sz="2470" b="1" i="0">
                 <a:solidFill>
                   <a:srgbClr val="1A1A1A"/>
                 </a:solidFill>
-                <a:latin typeface="Century Schoolbook"/>
+                <a:latin typeface="Lexend"/>
               </a:rPr>
               <a:t>Answer it.</a:t>
             </a:r>
@@ -6308,11 +6511,11 @@
           <a:p>
             <a:pPr algn="l"/>
             <a:r>
-              <a:rPr sz="3400" b="1" i="0">
+              <a:rPr sz="3229" b="1" i="0">
                 <a:solidFill>
                   <a:srgbClr val="1A1A1A"/>
                 </a:solidFill>
-                <a:latin typeface="Century Schoolbook"/>
+                <a:latin typeface="Lexend"/>
               </a:rPr>
               <a:t>Whiteboards   ·   Question 2 of 9</a:t>
             </a:r>
@@ -6448,11 +6651,11 @@
           <a:p>
             <a:pPr algn="l"/>
             <a:r>
-              <a:rPr sz="1100" b="0" i="1">
+              <a:rPr sz="1040" b="0" i="0">
                 <a:solidFill>
                   <a:srgbClr val="6B6B6B"/>
                 </a:solidFill>
-                <a:latin typeface="Century Schoolbook"/>
+                <a:latin typeface="Lexend"/>
               </a:rPr>
               <a:t>Grade 7 Accelerated · Unit 3 · Lesson 3 — Exponential Expressions</a:t>
             </a:r>
@@ -6483,11 +6686,11 @@
           <a:p>
             <a:pPr algn="r"/>
             <a:r>
-              <a:rPr sz="1100" b="0" i="0">
+              <a:rPr sz="1040" b="0" i="0">
                 <a:solidFill>
                   <a:srgbClr val="6B6B6B"/>
                 </a:solidFill>
-                <a:latin typeface="Century Schoolbook"/>
+                <a:latin typeface="Lexend"/>
               </a:rPr>
               <a:t>18</a:t>
             </a:r>
@@ -6496,7 +6699,7 @@
       </p:sp>
       <p:pic>
         <p:nvPicPr>
-          <p:cNvPr id="8" name="Picture 7" descr="3af1907ef808e9a5.png"/>
+          <p:cNvPr id="8" name="Picture 7" descr="1728c2e18e9d3714.png"/>
           <p:cNvPicPr>
             <a:picLocks noChangeAspect="1"/>
           </p:cNvPicPr>
@@ -6510,8 +6713,8 @@
         </p:blipFill>
         <p:spPr>
           <a:xfrm>
-            <a:off x="5233415" y="2103120"/>
-            <a:ext cx="1694688" cy="518160"/>
+            <a:off x="5230368" y="2103120"/>
+            <a:ext cx="1700784" cy="509016"/>
           </a:xfrm>
           <a:prstGeom prst="rect">
             <a:avLst/>
@@ -6521,6 +6724,89 @@
       <p:sp>
         <p:nvSpPr>
           <p:cNvPr id="9" name="TextBox 8"/>
+          <p:cNvSpPr txBox="1"/>
+          <p:nvPr/>
+        </p:nvSpPr>
+        <p:spPr>
+          <a:xfrm>
+            <a:off x="3636576" y="2891028"/>
+            <a:ext cx="2456062" cy="457200"/>
+          </a:xfrm>
+          <a:prstGeom prst="rect">
+            <a:avLst/>
+          </a:prstGeom>
+          <a:noFill/>
+        </p:spPr>
+        <p:txBody>
+          <a:bodyPr wrap="none" lIns="45720" rIns="45720" tIns="18288" bIns="18288" anchor="ctr">
+            <a:noAutofit/>
+          </a:bodyPr>
+          <a:lstStyle/>
+          <a:p>
+            <a:pPr algn="l"/>
+            <a:r>
+              <a:rPr sz="2750" b="0" i="0">
+                <a:solidFill>
+                  <a:srgbClr val="1A1A1A"/>
+                </a:solidFill>
+                <a:latin typeface="Lexend"/>
+              </a:rPr>
+              <a:t>Inside first:  </a:t>
+            </a:r>
+          </a:p>
+        </p:txBody>
+      </p:sp>
+      <p:pic>
+        <p:nvPicPr>
+          <p:cNvPr id="10" name="Picture 9" descr="a8f80e542aac10d4.png"/>
+          <p:cNvPicPr>
+            <a:picLocks noChangeAspect="1"/>
+          </p:cNvPicPr>
+          <p:nvPr/>
+        </p:nvPicPr>
+        <p:blipFill>
+          <a:blip r:embed="rId3"/>
+          <a:stretch>
+            <a:fillRect/>
+          </a:stretch>
+        </p:blipFill>
+        <p:spPr>
+          <a:xfrm>
+            <a:off x="5955479" y="2967228"/>
+            <a:ext cx="2569464" cy="304800"/>
+          </a:xfrm>
+          <a:prstGeom prst="rect">
+            <a:avLst/>
+          </a:prstGeom>
+        </p:spPr>
+      </p:pic>
+      <p:pic>
+        <p:nvPicPr>
+          <p:cNvPr id="11" name="Picture 10" descr="562836d64a249868.png"/>
+          <p:cNvPicPr>
+            <a:picLocks noChangeAspect="1"/>
+          </p:cNvPicPr>
+          <p:nvPr/>
+        </p:nvPicPr>
+        <p:blipFill>
+          <a:blip r:embed="rId4"/>
+          <a:stretch>
+            <a:fillRect/>
+          </a:stretch>
+        </p:blipFill>
+        <p:spPr>
+          <a:xfrm>
+            <a:off x="3691440" y="3473195"/>
+            <a:ext cx="3206496" cy="371856"/>
+          </a:xfrm>
+          <a:prstGeom prst="rect">
+            <a:avLst/>
+          </a:prstGeom>
+        </p:spPr>
+      </p:pic>
+      <p:sp>
+        <p:nvSpPr>
+          <p:cNvPr id="12" name="TextBox 11"/>
           <p:cNvSpPr txBox="1"/>
           <p:nvPr/>
         </p:nvSpPr>
@@ -6542,11 +6828,11 @@
           <a:p>
             <a:pPr algn="ctr"/>
             <a:r>
-              <a:rPr sz="3200" b="1" i="0">
+              <a:rPr sz="3040" b="1" i="0">
                 <a:solidFill>
                   <a:srgbClr val="9E1B32"/>
                 </a:solidFill>
-                <a:latin typeface="Century Schoolbook"/>
+                <a:latin typeface="Lexend"/>
               </a:rPr>
               <a:t>Answer:   729</a:t>
             </a:r>
@@ -6595,11 +6881,11 @@
           <a:p>
             <a:pPr algn="l"/>
             <a:r>
-              <a:rPr sz="3400" b="1" i="0">
+              <a:rPr sz="3229" b="1" i="0">
                 <a:solidFill>
                   <a:srgbClr val="1A1A1A"/>
                 </a:solidFill>
-                <a:latin typeface="Century Schoolbook"/>
+                <a:latin typeface="Lexend"/>
               </a:rPr>
               <a:t>Whiteboards   ·   Question 3 of 9</a:t>
             </a:r>
@@ -6735,11 +7021,11 @@
           <a:p>
             <a:pPr algn="l"/>
             <a:r>
-              <a:rPr sz="1100" b="0" i="1">
+              <a:rPr sz="1040" b="0" i="0">
                 <a:solidFill>
                   <a:srgbClr val="6B6B6B"/>
                 </a:solidFill>
-                <a:latin typeface="Century Schoolbook"/>
+                <a:latin typeface="Lexend"/>
               </a:rPr>
               <a:t>Grade 7 Accelerated · Unit 3 · Lesson 3 — Exponential Expressions</a:t>
             </a:r>
@@ -6770,11 +7056,11 @@
           <a:p>
             <a:pPr algn="r"/>
             <a:r>
-              <a:rPr sz="1100" b="0" i="0">
+              <a:rPr sz="1040" b="0" i="0">
                 <a:solidFill>
                   <a:srgbClr val="6B6B6B"/>
                 </a:solidFill>
-                <a:latin typeface="Century Schoolbook"/>
+                <a:latin typeface="Lexend"/>
               </a:rPr>
               <a:t>19</a:t>
             </a:r>
@@ -6783,7 +7069,7 @@
       </p:sp>
       <p:pic>
         <p:nvPicPr>
-          <p:cNvPr id="8" name="Picture 7" descr="32948134bf5e3591.png"/>
+          <p:cNvPr id="8" name="Picture 7" descr="853f704f39adc6f4.png"/>
           <p:cNvPicPr>
             <a:picLocks noChangeAspect="1"/>
           </p:cNvPicPr>
@@ -6797,8 +7083,8 @@
         </p:blipFill>
         <p:spPr>
           <a:xfrm>
-            <a:off x="5384291" y="2194560"/>
-            <a:ext cx="1392936" cy="1185672"/>
+            <a:off x="5379720" y="2194560"/>
+            <a:ext cx="1402080" cy="1161288"/>
           </a:xfrm>
           <a:prstGeom prst="rect">
             <a:avLst/>
@@ -6829,11 +7115,11 @@
           <a:p>
             <a:pPr algn="ctr"/>
             <a:r>
-              <a:rPr sz="2600" b="1" i="0">
+              <a:rPr sz="2470" b="1" i="0">
                 <a:solidFill>
                   <a:srgbClr val="1A1A1A"/>
                 </a:solidFill>
-                <a:latin typeface="Century Schoolbook"/>
+                <a:latin typeface="Lexend"/>
               </a:rPr>
               <a:t>Answer it.</a:t>
             </a:r>
@@ -6882,11 +7168,11 @@
           <a:p>
             <a:pPr algn="l"/>
             <a:r>
-              <a:rPr sz="3600" b="1" i="0">
+              <a:rPr sz="3420" b="1" i="0">
                 <a:solidFill>
                   <a:srgbClr val="1A1A1A"/>
                 </a:solidFill>
-                <a:latin typeface="Century Schoolbook"/>
+                <a:latin typeface="Lexend"/>
               </a:rPr>
               <a:t>Warm-Up</a:t>
             </a:r>
@@ -7022,11 +7308,11 @@
           <a:p>
             <a:pPr algn="l"/>
             <a:r>
-              <a:rPr sz="1100" b="0" i="1">
+              <a:rPr sz="1040" b="0" i="0">
                 <a:solidFill>
                   <a:srgbClr val="6B6B6B"/>
                 </a:solidFill>
-                <a:latin typeface="Century Schoolbook"/>
+                <a:latin typeface="Lexend"/>
               </a:rPr>
               <a:t>Grade 7 Accelerated · Unit 3 · Lesson 3 — Exponential Expressions</a:t>
             </a:r>
@@ -7057,11 +7343,11 @@
           <a:p>
             <a:pPr algn="r"/>
             <a:r>
-              <a:rPr sz="1100" b="0" i="0">
+              <a:rPr sz="1040" b="0" i="0">
                 <a:solidFill>
                   <a:srgbClr val="6B6B6B"/>
                 </a:solidFill>
-                <a:latin typeface="Century Schoolbook"/>
+                <a:latin typeface="Lexend"/>
               </a:rPr>
               <a:t>2</a:t>
             </a:r>
@@ -7076,8 +7362,8 @@
         </p:nvSpPr>
         <p:spPr>
           <a:xfrm>
-            <a:off x="1874519" y="1566672"/>
-            <a:ext cx="3058734" cy="457200"/>
+            <a:off x="1874519" y="1556004"/>
+            <a:ext cx="2921808" cy="457200"/>
           </a:xfrm>
           <a:prstGeom prst="rect">
             <a:avLst/>
@@ -7092,11 +7378,11 @@
           <a:p>
             <a:pPr algn="l"/>
             <a:r>
-              <a:rPr sz="2300" b="0" i="0">
+              <a:rPr sz="2180" b="0" i="0">
                 <a:solidFill>
                   <a:srgbClr val="1A1A1A"/>
                 </a:solidFill>
-                <a:latin typeface="Century Schoolbook"/>
+                <a:latin typeface="Lexend"/>
               </a:rPr>
               <a:t>1.   Find the value:  </a:t>
             </a:r>
@@ -7105,7 +7391,7 @@
       </p:sp>
       <p:pic>
         <p:nvPicPr>
-          <p:cNvPr id="9" name="Picture 8" descr="0d08d420e081e8bf.png"/>
+          <p:cNvPr id="9" name="Picture 8" descr="7eeabcc1a7697b1d.png"/>
           <p:cNvPicPr>
             <a:picLocks noChangeAspect="1"/>
           </p:cNvPicPr>
@@ -7119,8 +7405,8 @@
         </p:blipFill>
         <p:spPr>
           <a:xfrm>
-            <a:off x="4796094" y="1463040"/>
-            <a:ext cx="469392" cy="664464"/>
+            <a:off x="4659168" y="1463040"/>
+            <a:ext cx="487680" cy="643128"/>
           </a:xfrm>
           <a:prstGeom prst="rect">
             <a:avLst/>
@@ -7135,8 +7421,8 @@
         </p:nvSpPr>
         <p:spPr>
           <a:xfrm>
-            <a:off x="1874519" y="2305812"/>
-            <a:ext cx="1082239" cy="457200"/>
+            <a:off x="1874519" y="2284476"/>
+            <a:ext cx="1049533" cy="457200"/>
           </a:xfrm>
           <a:prstGeom prst="rect">
             <a:avLst/>
@@ -7151,11 +7437,11 @@
           <a:p>
             <a:pPr algn="l"/>
             <a:r>
-              <a:rPr sz="2300" b="0" i="0">
+              <a:rPr sz="2180" b="0" i="0">
                 <a:solidFill>
                   <a:srgbClr val="1A1A1A"/>
                 </a:solidFill>
-                <a:latin typeface="Century Schoolbook"/>
+                <a:latin typeface="Lexend"/>
               </a:rPr>
               <a:t>2.   Is </a:t>
             </a:r>
@@ -7164,7 +7450,7 @@
       </p:sp>
       <p:pic>
         <p:nvPicPr>
-          <p:cNvPr id="11" name="Picture 10" descr="697434924d454a71.png"/>
+          <p:cNvPr id="11" name="Picture 10" descr="bcdd97740536927b.png"/>
           <p:cNvPicPr>
             <a:picLocks noChangeAspect="1"/>
           </p:cNvPicPr>
@@ -7178,8 +7464,8 @@
         </p:blipFill>
         <p:spPr>
           <a:xfrm>
-            <a:off x="2819599" y="2330196"/>
-            <a:ext cx="688848" cy="408432"/>
+            <a:off x="2786893" y="2318004"/>
+            <a:ext cx="710184" cy="390144"/>
           </a:xfrm>
           <a:prstGeom prst="rect">
             <a:avLst/>
@@ -7194,8 +7480,8 @@
         </p:nvSpPr>
         <p:spPr>
           <a:xfrm>
-            <a:off x="3508447" y="2305812"/>
-            <a:ext cx="2879837" cy="457200"/>
+            <a:off x="3497077" y="2284476"/>
+            <a:ext cx="2909769" cy="457200"/>
           </a:xfrm>
           <a:prstGeom prst="rect">
             <a:avLst/>
@@ -7210,11 +7496,11 @@
           <a:p>
             <a:pPr algn="l"/>
             <a:r>
-              <a:rPr sz="2300" b="0" i="0">
+              <a:rPr sz="2180" b="0" i="0">
                 <a:solidFill>
                   <a:srgbClr val="1A1A1A"/>
                 </a:solidFill>
-                <a:latin typeface="Century Schoolbook"/>
+                <a:latin typeface="Lexend"/>
               </a:rPr>
               <a:t> closer to 7 or to 8?</a:t>
             </a:r>
@@ -7229,8 +7515,8 @@
         </p:nvSpPr>
         <p:spPr>
           <a:xfrm>
-            <a:off x="1874519" y="2918460"/>
-            <a:ext cx="1652008" cy="457200"/>
+            <a:off x="1874519" y="2897124"/>
+            <a:ext cx="1612295" cy="457200"/>
           </a:xfrm>
           <a:prstGeom prst="rect">
             <a:avLst/>
@@ -7245,11 +7531,11 @@
           <a:p>
             <a:pPr algn="l"/>
             <a:r>
-              <a:rPr sz="2300" b="0" i="0">
+              <a:rPr sz="2180" b="0" i="0">
                 <a:solidFill>
                   <a:srgbClr val="1A1A1A"/>
                 </a:solidFill>
-                <a:latin typeface="Century Schoolbook"/>
+                <a:latin typeface="Lexend"/>
               </a:rPr>
               <a:t>3.   Solve  </a:t>
             </a:r>
@@ -7258,7 +7544,7 @@
       </p:sp>
       <p:pic>
         <p:nvPicPr>
-          <p:cNvPr id="14" name="Picture 13" descr="7747f117721bd827.png"/>
+          <p:cNvPr id="14" name="Picture 13" descr="c4840976746a8c60.png"/>
           <p:cNvPicPr>
             <a:picLocks noChangeAspect="1"/>
           </p:cNvPicPr>
@@ -7272,8 +7558,8 @@
         </p:blipFill>
         <p:spPr>
           <a:xfrm>
-            <a:off x="3389368" y="3003804"/>
-            <a:ext cx="1658112" cy="286512"/>
+            <a:off x="3349655" y="2983992"/>
+            <a:ext cx="1673352" cy="283464"/>
           </a:xfrm>
           <a:prstGeom prst="rect">
             <a:avLst/>
@@ -7288,8 +7574,8 @@
         </p:nvSpPr>
         <p:spPr>
           <a:xfrm>
-            <a:off x="1874519" y="3531108"/>
-            <a:ext cx="2190435" cy="457200"/>
+            <a:off x="1874519" y="3509772"/>
+            <a:ext cx="2118555" cy="457200"/>
           </a:xfrm>
           <a:prstGeom prst="rect">
             <a:avLst/>
@@ -7304,11 +7590,11 @@
           <a:p>
             <a:pPr algn="l"/>
             <a:r>
-              <a:rPr sz="2300" b="0" i="0">
+              <a:rPr sz="2180" b="0" i="0">
                 <a:solidFill>
                   <a:srgbClr val="1A1A1A"/>
                 </a:solidFill>
-                <a:latin typeface="Century Schoolbook"/>
+                <a:latin typeface="Lexend"/>
               </a:rPr>
               <a:t>4.   Evaluate  </a:t>
             </a:r>
@@ -7317,7 +7603,7 @@
       </p:sp>
       <p:pic>
         <p:nvPicPr>
-          <p:cNvPr id="16" name="Picture 15" descr="2a87b786c67fb6da.png"/>
+          <p:cNvPr id="16" name="Picture 15" descr="3d00c0b948695db0.png"/>
           <p:cNvPicPr>
             <a:picLocks noChangeAspect="1"/>
           </p:cNvPicPr>
@@ -7331,8 +7617,8 @@
         </p:blipFill>
         <p:spPr>
           <a:xfrm>
-            <a:off x="3927795" y="3614928"/>
-            <a:ext cx="1112520" cy="289560"/>
+            <a:off x="3855915" y="3599688"/>
+            <a:ext cx="1127760" cy="277368"/>
           </a:xfrm>
           <a:prstGeom prst="rect">
             <a:avLst/>
@@ -7381,11 +7667,11 @@
           <a:p>
             <a:pPr algn="l"/>
             <a:r>
-              <a:rPr sz="3400" b="1" i="0">
+              <a:rPr sz="3229" b="1" i="0">
                 <a:solidFill>
                   <a:srgbClr val="1A1A1A"/>
                 </a:solidFill>
-                <a:latin typeface="Century Schoolbook"/>
+                <a:latin typeface="Lexend"/>
               </a:rPr>
               <a:t>Whiteboards   ·   Question 3 of 9</a:t>
             </a:r>
@@ -7521,11 +7807,11 @@
           <a:p>
             <a:pPr algn="l"/>
             <a:r>
-              <a:rPr sz="1100" b="0" i="1">
+              <a:rPr sz="1040" b="0" i="0">
                 <a:solidFill>
                   <a:srgbClr val="6B6B6B"/>
                 </a:solidFill>
-                <a:latin typeface="Century Schoolbook"/>
+                <a:latin typeface="Lexend"/>
               </a:rPr>
               <a:t>Grade 7 Accelerated · Unit 3 · Lesson 3 — Exponential Expressions</a:t>
             </a:r>
@@ -7556,11 +7842,11 @@
           <a:p>
             <a:pPr algn="r"/>
             <a:r>
-              <a:rPr sz="1100" b="0" i="0">
+              <a:rPr sz="1040" b="0" i="0">
                 <a:solidFill>
                   <a:srgbClr val="6B6B6B"/>
                 </a:solidFill>
-                <a:latin typeface="Century Schoolbook"/>
+                <a:latin typeface="Lexend"/>
               </a:rPr>
               <a:t>20</a:t>
             </a:r>
@@ -7569,7 +7855,7 @@
       </p:sp>
       <p:pic>
         <p:nvPicPr>
-          <p:cNvPr id="8" name="Picture 7" descr="7bfc7057b3b2cf51.png"/>
+          <p:cNvPr id="8" name="Picture 7" descr="8cfe86bd927791bf.png"/>
           <p:cNvPicPr>
             <a:picLocks noChangeAspect="1"/>
           </p:cNvPicPr>
@@ -7583,8 +7869,8 @@
         </p:blipFill>
         <p:spPr>
           <a:xfrm>
-            <a:off x="5385816" y="2103120"/>
-            <a:ext cx="1389888" cy="1185672"/>
+            <a:off x="5382767" y="2103120"/>
+            <a:ext cx="1395984" cy="1158240"/>
           </a:xfrm>
           <a:prstGeom prst="rect">
             <a:avLst/>
@@ -7599,7 +7885,90 @@
         </p:nvSpPr>
         <p:spPr>
           <a:xfrm>
-            <a:off x="777240" y="4663440"/>
+            <a:off x="3883151" y="3540252"/>
+            <a:ext cx="1141303" cy="457200"/>
+          </a:xfrm>
+          <a:prstGeom prst="rect">
+            <a:avLst/>
+          </a:prstGeom>
+          <a:noFill/>
+        </p:spPr>
+        <p:txBody>
+          <a:bodyPr wrap="none" lIns="45720" rIns="45720" tIns="18288" bIns="18288" anchor="ctr">
+            <a:noAutofit/>
+          </a:bodyPr>
+          <a:lstStyle/>
+          <a:p>
+            <a:pPr algn="l"/>
+            <a:r>
+              <a:rPr sz="2750" b="0" i="0">
+                <a:solidFill>
+                  <a:srgbClr val="1A1A1A"/>
+                </a:solidFill>
+                <a:latin typeface="Lexend"/>
+              </a:rPr>
+              <a:t>Top:  </a:t>
+            </a:r>
+          </a:p>
+        </p:txBody>
+      </p:sp>
+      <p:pic>
+        <p:nvPicPr>
+          <p:cNvPr id="10" name="Picture 9" descr="c8aacd963cc0abc6.png"/>
+          <p:cNvPicPr>
+            <a:picLocks noChangeAspect="1"/>
+          </p:cNvPicPr>
+          <p:nvPr/>
+        </p:nvPicPr>
+        <p:blipFill>
+          <a:blip r:embed="rId3"/>
+          <a:stretch>
+            <a:fillRect/>
+          </a:stretch>
+        </p:blipFill>
+        <p:spPr>
+          <a:xfrm>
+            <a:off x="4887295" y="3582923"/>
+            <a:ext cx="3212592" cy="371856"/>
+          </a:xfrm>
+          <a:prstGeom prst="rect">
+            <a:avLst/>
+          </a:prstGeom>
+        </p:spPr>
+      </p:pic>
+      <p:pic>
+        <p:nvPicPr>
+          <p:cNvPr id="11" name="Picture 10" descr="024670428e914adc.png"/>
+          <p:cNvPicPr>
+            <a:picLocks noChangeAspect="1"/>
+          </p:cNvPicPr>
+          <p:nvPr/>
+        </p:nvPicPr>
+        <p:blipFill>
+          <a:blip r:embed="rId4"/>
+          <a:stretch>
+            <a:fillRect/>
+          </a:stretch>
+        </p:blipFill>
+        <p:spPr>
+          <a:xfrm>
+            <a:off x="3938015" y="4102607"/>
+            <a:ext cx="4395216" cy="722376"/>
+          </a:xfrm>
+          <a:prstGeom prst="rect">
+            <a:avLst/>
+          </a:prstGeom>
+        </p:spPr>
+      </p:pic>
+      <p:sp>
+        <p:nvSpPr>
+          <p:cNvPr id="12" name="TextBox 11"/>
+          <p:cNvSpPr txBox="1"/>
+          <p:nvPr/>
+        </p:nvSpPr>
+        <p:spPr>
+          <a:xfrm>
+            <a:off x="777240" y="4962144"/>
             <a:ext cx="10607040" cy="548640"/>
           </a:xfrm>
           <a:prstGeom prst="rect">
@@ -7615,11 +7984,11 @@
           <a:p>
             <a:pPr algn="ctr"/>
             <a:r>
-              <a:rPr sz="3200" b="1" i="0">
+              <a:rPr sz="3040" b="1" i="0">
                 <a:solidFill>
                   <a:srgbClr val="9E1B32"/>
                 </a:solidFill>
-                <a:latin typeface="Century Schoolbook"/>
+                <a:latin typeface="Lexend"/>
               </a:rPr>
               <a:t>Answer:   0.0625</a:t>
             </a:r>
@@ -7668,11 +8037,11 @@
           <a:p>
             <a:pPr algn="l"/>
             <a:r>
-              <a:rPr sz="3400" b="1" i="0">
+              <a:rPr sz="3229" b="1" i="0">
                 <a:solidFill>
                   <a:srgbClr val="1A1A1A"/>
                 </a:solidFill>
-                <a:latin typeface="Century Schoolbook"/>
+                <a:latin typeface="Lexend"/>
               </a:rPr>
               <a:t>Whiteboards   ·   Question 4 of 9</a:t>
             </a:r>
@@ -7808,11 +8177,11 @@
           <a:p>
             <a:pPr algn="l"/>
             <a:r>
-              <a:rPr sz="1100" b="0" i="1">
+              <a:rPr sz="1040" b="0" i="0">
                 <a:solidFill>
                   <a:srgbClr val="6B6B6B"/>
                 </a:solidFill>
-                <a:latin typeface="Century Schoolbook"/>
+                <a:latin typeface="Lexend"/>
               </a:rPr>
               <a:t>Grade 7 Accelerated · Unit 3 · Lesson 3 — Exponential Expressions</a:t>
             </a:r>
@@ -7843,11 +8212,11 @@
           <a:p>
             <a:pPr algn="r"/>
             <a:r>
-              <a:rPr sz="1100" b="0" i="0">
+              <a:rPr sz="1040" b="0" i="0">
                 <a:solidFill>
                   <a:srgbClr val="6B6B6B"/>
                 </a:solidFill>
-                <a:latin typeface="Century Schoolbook"/>
+                <a:latin typeface="Lexend"/>
               </a:rPr>
               <a:t>21</a:t>
             </a:r>
@@ -7856,7 +8225,7 @@
       </p:sp>
       <p:pic>
         <p:nvPicPr>
-          <p:cNvPr id="8" name="Picture 7" descr="5b85e638d34eb13f.png"/>
+          <p:cNvPr id="8" name="Picture 7" descr="c1a85d6466844e38.png"/>
           <p:cNvPicPr>
             <a:picLocks noChangeAspect="1"/>
           </p:cNvPicPr>
@@ -7871,7 +8240,7 @@
         <p:spPr>
           <a:xfrm>
             <a:off x="5280659" y="2194560"/>
-            <a:ext cx="1600200" cy="1014984"/>
+            <a:ext cx="1600200" cy="993648"/>
           </a:xfrm>
           <a:prstGeom prst="rect">
             <a:avLst/>
@@ -7902,11 +8271,11 @@
           <a:p>
             <a:pPr algn="ctr"/>
             <a:r>
-              <a:rPr sz="2600" b="1" i="0">
+              <a:rPr sz="2470" b="1" i="0">
                 <a:solidFill>
                   <a:srgbClr val="1A1A1A"/>
                 </a:solidFill>
-                <a:latin typeface="Century Schoolbook"/>
+                <a:latin typeface="Lexend"/>
               </a:rPr>
               <a:t>Answer it.</a:t>
             </a:r>
@@ -7955,11 +8324,11 @@
           <a:p>
             <a:pPr algn="l"/>
             <a:r>
-              <a:rPr sz="3400" b="1" i="0">
+              <a:rPr sz="3229" b="1" i="0">
                 <a:solidFill>
                   <a:srgbClr val="1A1A1A"/>
                 </a:solidFill>
-                <a:latin typeface="Century Schoolbook"/>
+                <a:latin typeface="Lexend"/>
               </a:rPr>
               <a:t>Whiteboards   ·   Question 4 of 9</a:t>
             </a:r>
@@ -8095,11 +8464,11 @@
           <a:p>
             <a:pPr algn="l"/>
             <a:r>
-              <a:rPr sz="1100" b="0" i="1">
+              <a:rPr sz="1040" b="0" i="0">
                 <a:solidFill>
                   <a:srgbClr val="6B6B6B"/>
                 </a:solidFill>
-                <a:latin typeface="Century Schoolbook"/>
+                <a:latin typeface="Lexend"/>
               </a:rPr>
               <a:t>Grade 7 Accelerated · Unit 3 · Lesson 3 — Exponential Expressions</a:t>
             </a:r>
@@ -8130,11 +8499,11 @@
           <a:p>
             <a:pPr algn="r"/>
             <a:r>
-              <a:rPr sz="1100" b="0" i="0">
+              <a:rPr sz="1040" b="0" i="0">
                 <a:solidFill>
                   <a:srgbClr val="6B6B6B"/>
                 </a:solidFill>
-                <a:latin typeface="Century Schoolbook"/>
+                <a:latin typeface="Lexend"/>
               </a:rPr>
               <a:t>22</a:t>
             </a:r>
@@ -8143,7 +8512,7 @@
       </p:sp>
       <p:pic>
         <p:nvPicPr>
-          <p:cNvPr id="8" name="Picture 7" descr="e041e4b255d1e34c.png"/>
+          <p:cNvPr id="8" name="Picture 7" descr="201b523e87142514.png"/>
           <p:cNvPicPr>
             <a:picLocks noChangeAspect="1"/>
           </p:cNvPicPr>
@@ -8157,23 +8526,71 @@
         </p:blipFill>
         <p:spPr>
           <a:xfrm>
-            <a:off x="5280659" y="2103120"/>
-            <a:ext cx="1600200" cy="1018032"/>
+            <a:off x="5279135" y="2103120"/>
+            <a:ext cx="1603248" cy="990599"/>
           </a:xfrm>
           <a:prstGeom prst="rect">
             <a:avLst/>
           </a:prstGeom>
         </p:spPr>
       </p:pic>
-      <p:sp>
-        <p:nvSpPr>
-          <p:cNvPr id="9" name="TextBox 8"/>
-          <p:cNvSpPr txBox="1"/>
-          <p:nvPr/>
-        </p:nvSpPr>
-        <p:spPr>
-          <a:xfrm>
-            <a:off x="777240" y="4663440"/>
+      <p:pic>
+        <p:nvPicPr>
+          <p:cNvPr id="9" name="Picture 8" descr="559f26ed92ee9a2f.png"/>
+          <p:cNvPicPr>
+            <a:picLocks noChangeAspect="1"/>
+          </p:cNvPicPr>
+          <p:nvPr/>
+        </p:nvPicPr>
+        <p:blipFill>
+          <a:blip r:embed="rId3"/>
+          <a:stretch>
+            <a:fillRect/>
+          </a:stretch>
+        </p:blipFill>
+        <p:spPr>
+          <a:xfrm>
+            <a:off x="4680203" y="3395471"/>
+            <a:ext cx="2904744" cy="716280"/>
+          </a:xfrm>
+          <a:prstGeom prst="rect">
+            <a:avLst/>
+          </a:prstGeom>
+        </p:spPr>
+      </p:pic>
+      <p:pic>
+        <p:nvPicPr>
+          <p:cNvPr id="10" name="Picture 9" descr="24d3fe5a98bd3a5a.png"/>
+          <p:cNvPicPr>
+            <a:picLocks noChangeAspect="1"/>
+          </p:cNvPicPr>
+          <p:nvPr/>
+        </p:nvPicPr>
+        <p:blipFill>
+          <a:blip r:embed="rId4"/>
+          <a:stretch>
+            <a:fillRect/>
+          </a:stretch>
+        </p:blipFill>
+        <p:spPr>
+          <a:xfrm>
+            <a:off x="4680203" y="4259580"/>
+            <a:ext cx="2910840" cy="371856"/>
+          </a:xfrm>
+          <a:prstGeom prst="rect">
+            <a:avLst/>
+          </a:prstGeom>
+        </p:spPr>
+      </p:pic>
+      <p:sp>
+        <p:nvSpPr>
+          <p:cNvPr id="11" name="TextBox 10"/>
+          <p:cNvSpPr txBox="1"/>
+          <p:nvPr/>
+        </p:nvSpPr>
+        <p:spPr>
+          <a:xfrm>
+            <a:off x="777240" y="4788408"/>
             <a:ext cx="10607040" cy="548640"/>
           </a:xfrm>
           <a:prstGeom prst="rect">
@@ -8189,11 +8606,11 @@
           <a:p>
             <a:pPr algn="ctr"/>
             <a:r>
-              <a:rPr sz="3200" b="1" i="0">
+              <a:rPr sz="3040" b="1" i="0">
                 <a:solidFill>
                   <a:srgbClr val="9E1B32"/>
                 </a:solidFill>
-                <a:latin typeface="Century Schoolbook"/>
+                <a:latin typeface="Lexend"/>
               </a:rPr>
               <a:t>Answer:   6.25</a:t>
             </a:r>
@@ -8242,11 +8659,11 @@
           <a:p>
             <a:pPr algn="l"/>
             <a:r>
-              <a:rPr sz="3400" b="1" i="0">
+              <a:rPr sz="3229" b="1" i="0">
                 <a:solidFill>
                   <a:srgbClr val="1A1A1A"/>
                 </a:solidFill>
-                <a:latin typeface="Century Schoolbook"/>
+                <a:latin typeface="Lexend"/>
               </a:rPr>
               <a:t>Whiteboards   ·   Question 5 of 9</a:t>
             </a:r>
@@ -8382,11 +8799,11 @@
           <a:p>
             <a:pPr algn="l"/>
             <a:r>
-              <a:rPr sz="1100" b="0" i="1">
+              <a:rPr sz="1040" b="0" i="0">
                 <a:solidFill>
                   <a:srgbClr val="6B6B6B"/>
                 </a:solidFill>
-                <a:latin typeface="Century Schoolbook"/>
+                <a:latin typeface="Lexend"/>
               </a:rPr>
               <a:t>Grade 7 Accelerated · Unit 3 · Lesson 3 — Exponential Expressions</a:t>
             </a:r>
@@ -8417,11 +8834,11 @@
           <a:p>
             <a:pPr algn="r"/>
             <a:r>
-              <a:rPr sz="1100" b="0" i="0">
+              <a:rPr sz="1040" b="0" i="0">
                 <a:solidFill>
                   <a:srgbClr val="6B6B6B"/>
                 </a:solidFill>
-                <a:latin typeface="Century Schoolbook"/>
+                <a:latin typeface="Lexend"/>
               </a:rPr>
               <a:t>23</a:t>
             </a:r>
@@ -8430,7 +8847,7 @@
       </p:sp>
       <p:pic>
         <p:nvPicPr>
-          <p:cNvPr id="8" name="Picture 7" descr="85a5d92abe26b906.png"/>
+          <p:cNvPr id="8" name="Picture 7" descr="bc2795e448a34e0c.png"/>
           <p:cNvPicPr>
             <a:picLocks noChangeAspect="1"/>
           </p:cNvPicPr>
@@ -8444,8 +8861,8 @@
         </p:blipFill>
         <p:spPr>
           <a:xfrm>
-            <a:off x="5006340" y="2194560"/>
-            <a:ext cx="2148840" cy="1100328"/>
+            <a:off x="5007864" y="2194560"/>
+            <a:ext cx="2145792" cy="1078992"/>
           </a:xfrm>
           <a:prstGeom prst="rect">
             <a:avLst/>
@@ -8460,7 +8877,7 @@
         </p:nvSpPr>
         <p:spPr>
           <a:xfrm>
-            <a:off x="777240" y="3523488"/>
+            <a:off x="777240" y="3502152"/>
             <a:ext cx="10607040" cy="465151"/>
           </a:xfrm>
           <a:prstGeom prst="rect">
@@ -8476,11 +8893,11 @@
           <a:p>
             <a:pPr algn="ctr"/>
             <a:r>
-              <a:rPr sz="2600" b="0" i="0">
+              <a:rPr sz="2470" b="0" i="0">
                 <a:solidFill>
                   <a:srgbClr val="1A1A1A"/>
                 </a:solidFill>
-                <a:latin typeface="Century Schoolbook"/>
+                <a:latin typeface="Lexend"/>
               </a:rPr>
               <a:t>Which is the value?</a:t>
             </a:r>
@@ -8495,7 +8912,7 @@
         </p:nvSpPr>
         <p:spPr>
           <a:xfrm>
-            <a:off x="1874519" y="4189807"/>
+            <a:off x="1874519" y="4168471"/>
             <a:ext cx="4572000" cy="548640"/>
           </a:xfrm>
           <a:prstGeom prst="rect">
@@ -8511,20 +8928,20 @@
           <a:p>
             <a:pPr algn="l"/>
             <a:r>
-              <a:rPr sz="2400" b="1" i="0">
+              <a:rPr sz="2280" b="1" i="0">
                 <a:solidFill>
                   <a:srgbClr val="1A1A1A"/>
                 </a:solidFill>
-                <a:latin typeface="Century Schoolbook"/>
+                <a:latin typeface="Lexend"/>
               </a:rPr>
               <a:t>A.   </a:t>
             </a:r>
             <a:r>
-              <a:rPr sz="2400" b="0" i="0">
+              <a:rPr sz="2280" b="0" i="0">
                 <a:solidFill>
                   <a:srgbClr val="1A1A1A"/>
                 </a:solidFill>
-                <a:latin typeface="Century Schoolbook"/>
+                <a:latin typeface="Lexend"/>
               </a:rPr>
               <a:t>1/4</a:t>
             </a:r>
@@ -8539,7 +8956,7 @@
         </p:nvSpPr>
         <p:spPr>
           <a:xfrm>
-            <a:off x="6629400" y="4189807"/>
+            <a:off x="6629400" y="4168471"/>
             <a:ext cx="4572000" cy="548640"/>
           </a:xfrm>
           <a:prstGeom prst="rect">
@@ -8555,29 +8972,29 @@
           <a:p>
             <a:pPr algn="l"/>
             <a:r>
-              <a:rPr sz="2400" b="1" i="0">
+              <a:rPr sz="2280" b="1" i="0">
                 <a:solidFill>
                   <a:srgbClr val="1A1A1A"/>
                 </a:solidFill>
-                <a:latin typeface="Century Schoolbook"/>
+                <a:latin typeface="Lexend"/>
               </a:rPr>
               <a:t>B.   </a:t>
             </a:r>
             <a:r>
-              <a:rPr sz="2400" b="0" i="0">
+              <a:rPr sz="2280" b="0" i="0">
                 <a:solidFill>
                   <a:srgbClr val="1A1A1A"/>
                 </a:solidFill>
-                <a:latin typeface="Century Schoolbook"/>
+                <a:latin typeface="Lexend"/>
               </a:rPr>
               <a:t>2</a:t>
             </a:r>
             <a:r>
-              <a:rPr sz="2400" b="0" i="0" baseline="30000">
+              <a:rPr sz="2280" b="0" i="0" baseline="30000">
                 <a:solidFill>
                   <a:srgbClr val="1A1A1A"/>
                 </a:solidFill>
-                <a:latin typeface="Century Schoolbook"/>
+                <a:latin typeface="Lexend"/>
               </a:rPr>
               <a:t>22</a:t>
             </a:r>
@@ -8592,7 +9009,7 @@
         </p:nvSpPr>
         <p:spPr>
           <a:xfrm>
-            <a:off x="1874519" y="4875607"/>
+            <a:off x="1874519" y="4854271"/>
             <a:ext cx="4572000" cy="548640"/>
           </a:xfrm>
           <a:prstGeom prst="rect">
@@ -8608,20 +9025,20 @@
           <a:p>
             <a:pPr algn="l"/>
             <a:r>
-              <a:rPr sz="2400" b="1" i="0">
+              <a:rPr sz="2280" b="1" i="0">
                 <a:solidFill>
                   <a:srgbClr val="1A1A1A"/>
                 </a:solidFill>
-                <a:latin typeface="Century Schoolbook"/>
+                <a:latin typeface="Lexend"/>
               </a:rPr>
               <a:t>C.   </a:t>
             </a:r>
             <a:r>
-              <a:rPr sz="2400" b="0" i="0">
+              <a:rPr sz="2280" b="0" i="0">
                 <a:solidFill>
                   <a:srgbClr val="1A1A1A"/>
                 </a:solidFill>
-                <a:latin typeface="Century Schoolbook"/>
+                <a:latin typeface="Lexend"/>
               </a:rPr>
               <a:t>0</a:t>
             </a:r>
@@ -8636,7 +9053,7 @@
         </p:nvSpPr>
         <p:spPr>
           <a:xfrm>
-            <a:off x="6629400" y="4875607"/>
+            <a:off x="6629400" y="4854271"/>
             <a:ext cx="4572000" cy="548640"/>
           </a:xfrm>
           <a:prstGeom prst="rect">
@@ -8652,20 +9069,20 @@
           <a:p>
             <a:pPr algn="l"/>
             <a:r>
-              <a:rPr sz="2400" b="1" i="0">
+              <a:rPr sz="2280" b="1" i="0">
                 <a:solidFill>
                   <a:srgbClr val="1A1A1A"/>
                 </a:solidFill>
-                <a:latin typeface="Century Schoolbook"/>
+                <a:latin typeface="Lexend"/>
               </a:rPr>
               <a:t>D.   </a:t>
             </a:r>
             <a:r>
-              <a:rPr sz="2400" b="0" i="0">
+              <a:rPr sz="2280" b="0" i="0">
                 <a:solidFill>
                   <a:srgbClr val="1A1A1A"/>
                 </a:solidFill>
-                <a:latin typeface="Century Schoolbook"/>
+                <a:latin typeface="Lexend"/>
               </a:rPr>
               <a:t>4</a:t>
             </a:r>
@@ -8696,11 +9113,11 @@
           <a:p>
             <a:pPr algn="ctr"/>
             <a:r>
-              <a:rPr sz="2600" b="1" i="0">
+              <a:rPr sz="2470" b="1" i="0">
                 <a:solidFill>
                   <a:srgbClr val="1A1A1A"/>
                 </a:solidFill>
-                <a:latin typeface="Century Schoolbook"/>
+                <a:latin typeface="Lexend"/>
               </a:rPr>
               <a:t>Answer it.</a:t>
             </a:r>
@@ -8749,11 +9166,11 @@
           <a:p>
             <a:pPr algn="l"/>
             <a:r>
-              <a:rPr sz="3400" b="1" i="0">
+              <a:rPr sz="3229" b="1" i="0">
                 <a:solidFill>
                   <a:srgbClr val="1A1A1A"/>
                 </a:solidFill>
-                <a:latin typeface="Century Schoolbook"/>
+                <a:latin typeface="Lexend"/>
               </a:rPr>
               <a:t>Whiteboards   ·   Question 5 of 9</a:t>
             </a:r>
@@ -8889,11 +9306,11 @@
           <a:p>
             <a:pPr algn="l"/>
             <a:r>
-              <a:rPr sz="1100" b="0" i="1">
+              <a:rPr sz="1040" b="0" i="0">
                 <a:solidFill>
                   <a:srgbClr val="6B6B6B"/>
                 </a:solidFill>
-                <a:latin typeface="Century Schoolbook"/>
+                <a:latin typeface="Lexend"/>
               </a:rPr>
               <a:t>Grade 7 Accelerated · Unit 3 · Lesson 3 — Exponential Expressions</a:t>
             </a:r>
@@ -8924,11 +9341,11 @@
           <a:p>
             <a:pPr algn="r"/>
             <a:r>
-              <a:rPr sz="1100" b="0" i="0">
+              <a:rPr sz="1040" b="0" i="0">
                 <a:solidFill>
                   <a:srgbClr val="6B6B6B"/>
                 </a:solidFill>
-                <a:latin typeface="Century Schoolbook"/>
+                <a:latin typeface="Lexend"/>
               </a:rPr>
               <a:t>24</a:t>
             </a:r>
@@ -8937,7 +9354,7 @@
       </p:sp>
       <p:pic>
         <p:nvPicPr>
-          <p:cNvPr id="8" name="Picture 7" descr="c78ed1ad0d5dedd3.png"/>
+          <p:cNvPr id="8" name="Picture 7" descr="0dc5a9a7ac0e3290.png"/>
           <p:cNvPicPr>
             <a:picLocks noChangeAspect="1"/>
           </p:cNvPicPr>
@@ -8952,7 +9369,7 @@
         <p:spPr>
           <a:xfrm>
             <a:off x="5009387" y="2103120"/>
-            <a:ext cx="2142744" cy="1094232"/>
+            <a:ext cx="2142744" cy="1072896"/>
           </a:xfrm>
           <a:prstGeom prst="rect">
             <a:avLst/>
@@ -8967,7 +9384,7 @@
         </p:nvSpPr>
         <p:spPr>
           <a:xfrm>
-            <a:off x="777240" y="3425952"/>
+            <a:off x="777240" y="3404616"/>
             <a:ext cx="10607040" cy="465151"/>
           </a:xfrm>
           <a:prstGeom prst="rect">
@@ -8983,27 +9400,134 @@
           <a:p>
             <a:pPr algn="ctr"/>
             <a:r>
-              <a:rPr sz="2600" b="0" i="0">
+              <a:rPr sz="2470" b="0" i="0">
                 <a:solidFill>
                   <a:srgbClr val="1A1A1A"/>
                 </a:solidFill>
-                <a:latin typeface="Century Schoolbook"/>
+                <a:latin typeface="Lexend"/>
               </a:rPr>
               <a:t>Which is the value?</a:t>
             </a:r>
           </a:p>
         </p:txBody>
       </p:sp>
-      <p:sp>
-        <p:nvSpPr>
-          <p:cNvPr id="10" name="TextBox 9"/>
-          <p:cNvSpPr txBox="1"/>
-          <p:nvPr/>
-        </p:nvSpPr>
-        <p:spPr>
-          <a:xfrm>
-            <a:off x="1874519" y="4092271"/>
-            <a:ext cx="4572000" cy="548640"/>
+      <p:pic>
+        <p:nvPicPr>
+          <p:cNvPr id="10" name="Picture 9" descr="0d09560877107fae.png"/>
+          <p:cNvPicPr>
+            <a:picLocks noChangeAspect="1"/>
+          </p:cNvPicPr>
+          <p:nvPr/>
+        </p:nvPicPr>
+        <p:blipFill>
+          <a:blip r:embed="rId3"/>
+          <a:stretch>
+            <a:fillRect/>
+          </a:stretch>
+        </p:blipFill>
+        <p:spPr>
+          <a:xfrm>
+            <a:off x="2874945" y="4105987"/>
+            <a:ext cx="1097280" cy="304800"/>
+          </a:xfrm>
+          <a:prstGeom prst="rect">
+            <a:avLst/>
+          </a:prstGeom>
+        </p:spPr>
+      </p:pic>
+      <p:sp>
+        <p:nvSpPr>
+          <p:cNvPr id="11" name="TextBox 10"/>
+          <p:cNvSpPr txBox="1"/>
+          <p:nvPr/>
+        </p:nvSpPr>
+        <p:spPr>
+          <a:xfrm>
+            <a:off x="3972225" y="4029787"/>
+            <a:ext cx="3113692" cy="457200"/>
+          </a:xfrm>
+          <a:prstGeom prst="rect">
+            <a:avLst/>
+          </a:prstGeom>
+          <a:noFill/>
+        </p:spPr>
+        <p:txBody>
+          <a:bodyPr wrap="none" lIns="45720" rIns="45720" tIns="18288" bIns="18288" anchor="ctr">
+            <a:noAutofit/>
+          </a:bodyPr>
+          <a:lstStyle/>
+          <a:p>
+            <a:pPr algn="l"/>
+            <a:r>
+              <a:rPr sz="2750" b="0" i="0">
+                <a:solidFill>
+                  <a:srgbClr val="1A1A1A"/>
+                </a:solidFill>
+                <a:latin typeface="Lexend"/>
+              </a:rPr>
+              <a:t>,   so the top is   </a:t>
+            </a:r>
+          </a:p>
+        </p:txBody>
+      </p:sp>
+      <p:pic>
+        <p:nvPicPr>
+          <p:cNvPr id="12" name="Picture 11" descr="2fb277e921b4c8c4.png"/>
+          <p:cNvPicPr>
+            <a:picLocks noChangeAspect="1"/>
+          </p:cNvPicPr>
+          <p:nvPr/>
+        </p:nvPicPr>
+        <p:blipFill>
+          <a:blip r:embed="rId4"/>
+          <a:stretch>
+            <a:fillRect/>
+          </a:stretch>
+        </p:blipFill>
+        <p:spPr>
+          <a:xfrm>
+            <a:off x="6948758" y="4072459"/>
+            <a:ext cx="2450592" cy="371856"/>
+          </a:xfrm>
+          <a:prstGeom prst="rect">
+            <a:avLst/>
+          </a:prstGeom>
+        </p:spPr>
+      </p:pic>
+      <p:pic>
+        <p:nvPicPr>
+          <p:cNvPr id="13" name="Picture 12" descr="06fcc5f13e113159.png"/>
+          <p:cNvPicPr>
+            <a:picLocks noChangeAspect="1"/>
+          </p:cNvPicPr>
+          <p:nvPr/>
+        </p:nvPicPr>
+        <p:blipFill>
+          <a:blip r:embed="rId5"/>
+          <a:stretch>
+            <a:fillRect/>
+          </a:stretch>
+        </p:blipFill>
+        <p:spPr>
+          <a:xfrm>
+            <a:off x="2874945" y="4592143"/>
+            <a:ext cx="3008376" cy="716280"/>
+          </a:xfrm>
+          <a:prstGeom prst="rect">
+            <a:avLst/>
+          </a:prstGeom>
+        </p:spPr>
+      </p:pic>
+      <p:sp>
+        <p:nvSpPr>
+          <p:cNvPr id="14" name="TextBox 13"/>
+          <p:cNvSpPr txBox="1"/>
+          <p:nvPr/>
+        </p:nvSpPr>
+        <p:spPr>
+          <a:xfrm>
+            <a:off x="777240" y="5445583"/>
+            <a:ext cx="10607040" cy="548640"/>
           </a:xfrm>
           <a:prstGeom prst="rect">
             <a:avLst/>
@@ -9016,198 +9540,13 @@
           </a:bodyPr>
           <a:lstStyle/>
           <a:p>
-            <a:pPr algn="l"/>
-            <a:r>
-              <a:rPr sz="2400" b="1" i="0">
-                <a:solidFill>
-                  <a:srgbClr val="1A1A1A"/>
-                </a:solidFill>
-                <a:latin typeface="Century Schoolbook"/>
-              </a:rPr>
-              <a:t>A.   </a:t>
-            </a:r>
-            <a:r>
-              <a:rPr sz="2400" b="0" i="0">
-                <a:solidFill>
-                  <a:srgbClr val="1A1A1A"/>
-                </a:solidFill>
-                <a:latin typeface="Century Schoolbook"/>
-              </a:rPr>
-              <a:t>1/4</a:t>
-            </a:r>
-          </a:p>
-        </p:txBody>
-      </p:sp>
-      <p:sp>
-        <p:nvSpPr>
-          <p:cNvPr id="11" name="TextBox 10"/>
-          <p:cNvSpPr txBox="1"/>
-          <p:nvPr/>
-        </p:nvSpPr>
-        <p:spPr>
-          <a:xfrm>
-            <a:off x="6629400" y="4092271"/>
-            <a:ext cx="4572000" cy="548640"/>
-          </a:xfrm>
-          <a:prstGeom prst="rect">
-            <a:avLst/>
-          </a:prstGeom>
-          <a:noFill/>
-        </p:spPr>
-        <p:txBody>
-          <a:bodyPr wrap="square" lIns="45720" rIns="45720" tIns="18288" bIns="18288" anchor="t">
-            <a:spAutoFit/>
-          </a:bodyPr>
-          <a:lstStyle/>
-          <a:p>
-            <a:pPr algn="l"/>
-            <a:r>
-              <a:rPr sz="2400" b="1" i="0">
-                <a:solidFill>
-                  <a:srgbClr val="1A1A1A"/>
-                </a:solidFill>
-                <a:latin typeface="Century Schoolbook"/>
-              </a:rPr>
-              <a:t>B.   </a:t>
-            </a:r>
-            <a:r>
-              <a:rPr sz="2400" b="0" i="0">
-                <a:solidFill>
-                  <a:srgbClr val="1A1A1A"/>
-                </a:solidFill>
-                <a:latin typeface="Century Schoolbook"/>
-              </a:rPr>
-              <a:t>2</a:t>
-            </a:r>
-            <a:r>
-              <a:rPr sz="2400" b="0" i="0" baseline="30000">
-                <a:solidFill>
-                  <a:srgbClr val="1A1A1A"/>
-                </a:solidFill>
-                <a:latin typeface="Century Schoolbook"/>
-              </a:rPr>
-              <a:t>22</a:t>
-            </a:r>
-          </a:p>
-        </p:txBody>
-      </p:sp>
-      <p:sp>
-        <p:nvSpPr>
-          <p:cNvPr id="12" name="TextBox 11"/>
-          <p:cNvSpPr txBox="1"/>
-          <p:nvPr/>
-        </p:nvSpPr>
-        <p:spPr>
-          <a:xfrm>
-            <a:off x="1874519" y="4778071"/>
-            <a:ext cx="4572000" cy="548640"/>
-          </a:xfrm>
-          <a:prstGeom prst="rect">
-            <a:avLst/>
-          </a:prstGeom>
-          <a:noFill/>
-        </p:spPr>
-        <p:txBody>
-          <a:bodyPr wrap="square" lIns="45720" rIns="45720" tIns="18288" bIns="18288" anchor="t">
-            <a:spAutoFit/>
-          </a:bodyPr>
-          <a:lstStyle/>
-          <a:p>
-            <a:pPr algn="l"/>
-            <a:r>
-              <a:rPr sz="2400" b="1" i="0">
-                <a:solidFill>
-                  <a:srgbClr val="1A1A1A"/>
-                </a:solidFill>
-                <a:latin typeface="Century Schoolbook"/>
-              </a:rPr>
-              <a:t>C.   </a:t>
-            </a:r>
-            <a:r>
-              <a:rPr sz="2400" b="0" i="0">
-                <a:solidFill>
-                  <a:srgbClr val="1A1A1A"/>
-                </a:solidFill>
-                <a:latin typeface="Century Schoolbook"/>
-              </a:rPr>
-              <a:t>0</a:t>
-            </a:r>
-          </a:p>
-        </p:txBody>
-      </p:sp>
-      <p:sp>
-        <p:nvSpPr>
-          <p:cNvPr id="13" name="TextBox 12"/>
-          <p:cNvSpPr txBox="1"/>
-          <p:nvPr/>
-        </p:nvSpPr>
-        <p:spPr>
-          <a:xfrm>
-            <a:off x="6629400" y="4778071"/>
-            <a:ext cx="4572000" cy="548640"/>
-          </a:xfrm>
-          <a:prstGeom prst="rect">
-            <a:avLst/>
-          </a:prstGeom>
-          <a:noFill/>
-        </p:spPr>
-        <p:txBody>
-          <a:bodyPr wrap="square" lIns="45720" rIns="45720" tIns="18288" bIns="18288" anchor="t">
-            <a:spAutoFit/>
-          </a:bodyPr>
-          <a:lstStyle/>
-          <a:p>
-            <a:pPr algn="l"/>
-            <a:r>
-              <a:rPr sz="2400" b="1" i="0">
+            <a:pPr algn="ctr"/>
+            <a:r>
+              <a:rPr sz="3040" b="1" i="0">
                 <a:solidFill>
                   <a:srgbClr val="9E1B32"/>
                 </a:solidFill>
-                <a:latin typeface="Century Schoolbook"/>
-              </a:rPr>
-              <a:t>D.   </a:t>
-            </a:r>
-            <a:r>
-              <a:rPr sz="2400" b="1" i="0">
-                <a:solidFill>
-                  <a:srgbClr val="9E1B32"/>
-                </a:solidFill>
-                <a:latin typeface="Century Schoolbook"/>
-              </a:rPr>
-              <a:t>4</a:t>
-            </a:r>
-          </a:p>
-        </p:txBody>
-      </p:sp>
-      <p:sp>
-        <p:nvSpPr>
-          <p:cNvPr id="14" name="TextBox 13"/>
-          <p:cNvSpPr txBox="1"/>
-          <p:nvPr/>
-        </p:nvSpPr>
-        <p:spPr>
-          <a:xfrm>
-            <a:off x="777240" y="5632704"/>
-            <a:ext cx="10607040" cy="548640"/>
-          </a:xfrm>
-          <a:prstGeom prst="rect">
-            <a:avLst/>
-          </a:prstGeom>
-          <a:noFill/>
-        </p:spPr>
-        <p:txBody>
-          <a:bodyPr wrap="square" lIns="45720" rIns="45720" tIns="18288" bIns="18288" anchor="t">
-            <a:spAutoFit/>
-          </a:bodyPr>
-          <a:lstStyle/>
-          <a:p>
-            <a:pPr algn="ctr"/>
-            <a:r>
-              <a:rPr sz="3200" b="1" i="0">
-                <a:solidFill>
-                  <a:srgbClr val="9E1B32"/>
-                </a:solidFill>
-                <a:latin typeface="Century Schoolbook"/>
+                <a:latin typeface="Lexend"/>
               </a:rPr>
               <a:t>Answer:   D — 4</a:t>
             </a:r>
@@ -9256,11 +9595,11 @@
           <a:p>
             <a:pPr algn="l"/>
             <a:r>
-              <a:rPr sz="3400" b="1" i="0">
+              <a:rPr sz="3229" b="1" i="0">
                 <a:solidFill>
                   <a:srgbClr val="1A1A1A"/>
                 </a:solidFill>
-                <a:latin typeface="Century Schoolbook"/>
+                <a:latin typeface="Lexend"/>
               </a:rPr>
               <a:t>Whiteboards   ·   Question 6 of 9</a:t>
             </a:r>
@@ -9396,11 +9735,11 @@
           <a:p>
             <a:pPr algn="l"/>
             <a:r>
-              <a:rPr sz="1100" b="0" i="1">
+              <a:rPr sz="1040" b="0" i="0">
                 <a:solidFill>
                   <a:srgbClr val="6B6B6B"/>
                 </a:solidFill>
-                <a:latin typeface="Century Schoolbook"/>
+                <a:latin typeface="Lexend"/>
               </a:rPr>
               <a:t>Grade 7 Accelerated · Unit 3 · Lesson 3 — Exponential Expressions</a:t>
             </a:r>
@@ -9431,11 +9770,11 @@
           <a:p>
             <a:pPr algn="r"/>
             <a:r>
-              <a:rPr sz="1100" b="0" i="0">
+              <a:rPr sz="1040" b="0" i="0">
                 <a:solidFill>
                   <a:srgbClr val="6B6B6B"/>
                 </a:solidFill>
-                <a:latin typeface="Century Schoolbook"/>
+                <a:latin typeface="Lexend"/>
               </a:rPr>
               <a:t>25</a:t>
             </a:r>
@@ -9444,7 +9783,7 @@
       </p:sp>
       <p:pic>
         <p:nvPicPr>
-          <p:cNvPr id="8" name="Picture 7" descr="36dd69d05a8fa1b0.png"/>
+          <p:cNvPr id="8" name="Picture 7" descr="4f0d140d692f52a8.png"/>
           <p:cNvPicPr>
             <a:picLocks noChangeAspect="1"/>
           </p:cNvPicPr>
@@ -9458,8 +9797,8 @@
         </p:blipFill>
         <p:spPr>
           <a:xfrm>
-            <a:off x="5074919" y="2194560"/>
-            <a:ext cx="2011680" cy="1005840"/>
+            <a:off x="5059680" y="2194560"/>
+            <a:ext cx="2042160" cy="984504"/>
           </a:xfrm>
           <a:prstGeom prst="rect">
             <a:avLst/>
@@ -9474,7 +9813,7 @@
         </p:nvSpPr>
         <p:spPr>
           <a:xfrm>
-            <a:off x="777240" y="3429000"/>
+            <a:off x="777240" y="3407664"/>
             <a:ext cx="10607040" cy="465151"/>
           </a:xfrm>
           <a:prstGeom prst="rect">
@@ -9490,11 +9829,11 @@
           <a:p>
             <a:pPr algn="ctr"/>
             <a:r>
-              <a:rPr sz="2600" b="0" i="0">
+              <a:rPr sz="2470" b="0" i="0">
                 <a:solidFill>
                   <a:srgbClr val="1A1A1A"/>
                 </a:solidFill>
-                <a:latin typeface="Century Schoolbook"/>
+                <a:latin typeface="Lexend"/>
               </a:rPr>
               <a:t>Which expression is equivalent?</a:t>
             </a:r>
@@ -9509,7 +9848,7 @@
         </p:nvSpPr>
         <p:spPr>
           <a:xfrm>
-            <a:off x="1874519" y="4095319"/>
+            <a:off x="1874519" y="4073983"/>
             <a:ext cx="4572000" cy="548640"/>
           </a:xfrm>
           <a:prstGeom prst="rect">
@@ -9525,47 +9864,47 @@
           <a:p>
             <a:pPr algn="l"/>
             <a:r>
-              <a:rPr sz="2400" b="1" i="0">
+              <a:rPr sz="2280" b="1" i="0">
                 <a:solidFill>
                   <a:srgbClr val="1A1A1A"/>
                 </a:solidFill>
-                <a:latin typeface="Century Schoolbook"/>
+                <a:latin typeface="Lexend"/>
               </a:rPr>
               <a:t>A.   </a:t>
             </a:r>
             <a:r>
-              <a:rPr sz="2400" b="0" i="0">
+              <a:rPr sz="2280" b="0" i="0">
                 <a:solidFill>
                   <a:srgbClr val="1A1A1A"/>
                 </a:solidFill>
-                <a:latin typeface="Century Schoolbook"/>
+                <a:latin typeface="Lexend"/>
               </a:rPr>
               <a:t>0.2</a:t>
             </a:r>
             <a:r>
-              <a:rPr sz="2400" b="0" i="0" baseline="30000">
+              <a:rPr sz="2280" b="0" i="0" baseline="30000">
                 <a:solidFill>
                   <a:srgbClr val="1A1A1A"/>
                 </a:solidFill>
-                <a:latin typeface="Century Schoolbook"/>
+                <a:latin typeface="Lexend"/>
               </a:rPr>
               <a:t>0</a:t>
             </a:r>
             <a:r>
-              <a:rPr sz="2400" b="0" i="0">
+              <a:rPr sz="2280" b="0" i="0">
                 <a:solidFill>
                   <a:srgbClr val="1A1A1A"/>
                 </a:solidFill>
-                <a:latin typeface="Century Schoolbook"/>
+                <a:latin typeface="Lexend"/>
               </a:rPr>
               <a:t> · 0.1</a:t>
             </a:r>
             <a:r>
-              <a:rPr sz="2400" b="0" i="0" baseline="30000">
+              <a:rPr sz="2280" b="0" i="0" baseline="30000">
                 <a:solidFill>
                   <a:srgbClr val="1A1A1A"/>
                 </a:solidFill>
-                <a:latin typeface="Century Schoolbook"/>
+                <a:latin typeface="Lexend"/>
               </a:rPr>
               <a:t>2</a:t>
             </a:r>
@@ -9580,7 +9919,7 @@
         </p:nvSpPr>
         <p:spPr>
           <a:xfrm>
-            <a:off x="6629400" y="4095319"/>
+            <a:off x="6629400" y="4073983"/>
             <a:ext cx="4572000" cy="548640"/>
           </a:xfrm>
           <a:prstGeom prst="rect">
@@ -9596,47 +9935,47 @@
           <a:p>
             <a:pPr algn="l"/>
             <a:r>
-              <a:rPr sz="2400" b="1" i="0">
+              <a:rPr sz="2280" b="1" i="0">
                 <a:solidFill>
                   <a:srgbClr val="1A1A1A"/>
                 </a:solidFill>
-                <a:latin typeface="Century Schoolbook"/>
+                <a:latin typeface="Lexend"/>
               </a:rPr>
               <a:t>B.   </a:t>
             </a:r>
             <a:r>
-              <a:rPr sz="2400" b="0" i="0">
+              <a:rPr sz="2280" b="0" i="0">
                 <a:solidFill>
                   <a:srgbClr val="1A1A1A"/>
                 </a:solidFill>
-                <a:latin typeface="Century Schoolbook"/>
+                <a:latin typeface="Lexend"/>
               </a:rPr>
               <a:t>0.2</a:t>
             </a:r>
             <a:r>
-              <a:rPr sz="2400" b="0" i="0" baseline="30000">
+              <a:rPr sz="2280" b="0" i="0" baseline="30000">
                 <a:solidFill>
                   <a:srgbClr val="1A1A1A"/>
                 </a:solidFill>
-                <a:latin typeface="Century Schoolbook"/>
+                <a:latin typeface="Lexend"/>
               </a:rPr>
               <a:t>3</a:t>
             </a:r>
             <a:r>
-              <a:rPr sz="2400" b="0" i="0">
+              <a:rPr sz="2280" b="0" i="0">
                 <a:solidFill>
                   <a:srgbClr val="1A1A1A"/>
                 </a:solidFill>
-                <a:latin typeface="Century Schoolbook"/>
+                <a:latin typeface="Lexend"/>
               </a:rPr>
               <a:t> · 0.1</a:t>
             </a:r>
             <a:r>
-              <a:rPr sz="2400" b="0" i="0" baseline="30000">
+              <a:rPr sz="2280" b="0" i="0" baseline="30000">
                 <a:solidFill>
                   <a:srgbClr val="1A1A1A"/>
                 </a:solidFill>
-                <a:latin typeface="Century Schoolbook"/>
+                <a:latin typeface="Lexend"/>
               </a:rPr>
               <a:t>2</a:t>
             </a:r>
@@ -9651,7 +9990,7 @@
         </p:nvSpPr>
         <p:spPr>
           <a:xfrm>
-            <a:off x="1874519" y="4781119"/>
+            <a:off x="1874519" y="4759783"/>
             <a:ext cx="4572000" cy="548640"/>
           </a:xfrm>
           <a:prstGeom prst="rect">
@@ -9667,29 +10006,29 @@
           <a:p>
             <a:pPr algn="l"/>
             <a:r>
-              <a:rPr sz="2400" b="1" i="0">
+              <a:rPr sz="2280" b="1" i="0">
                 <a:solidFill>
                   <a:srgbClr val="1A1A1A"/>
                 </a:solidFill>
-                <a:latin typeface="Century Schoolbook"/>
+                <a:latin typeface="Lexend"/>
               </a:rPr>
               <a:t>C.   </a:t>
             </a:r>
             <a:r>
-              <a:rPr sz="2400" b="0" i="0">
+              <a:rPr sz="2280" b="0" i="0">
                 <a:solidFill>
                   <a:srgbClr val="1A1A1A"/>
                 </a:solidFill>
-                <a:latin typeface="Century Schoolbook"/>
+                <a:latin typeface="Lexend"/>
               </a:rPr>
               <a:t>0.1</a:t>
             </a:r>
             <a:r>
-              <a:rPr sz="2400" b="0" i="0" baseline="30000">
+              <a:rPr sz="2280" b="0" i="0" baseline="30000">
                 <a:solidFill>
                   <a:srgbClr val="1A1A1A"/>
                 </a:solidFill>
-                <a:latin typeface="Century Schoolbook"/>
+                <a:latin typeface="Lexend"/>
               </a:rPr>
               <a:t>5</a:t>
             </a:r>
@@ -9704,7 +10043,7 @@
         </p:nvSpPr>
         <p:spPr>
           <a:xfrm>
-            <a:off x="6629400" y="4781119"/>
+            <a:off x="6629400" y="4759783"/>
             <a:ext cx="4572000" cy="548640"/>
           </a:xfrm>
           <a:prstGeom prst="rect">
@@ -9720,29 +10059,29 @@
           <a:p>
             <a:pPr algn="l"/>
             <a:r>
-              <a:rPr sz="2400" b="1" i="0">
+              <a:rPr sz="2280" b="1" i="0">
                 <a:solidFill>
                   <a:srgbClr val="1A1A1A"/>
                 </a:solidFill>
-                <a:latin typeface="Century Schoolbook"/>
+                <a:latin typeface="Lexend"/>
               </a:rPr>
               <a:t>D.   </a:t>
             </a:r>
             <a:r>
-              <a:rPr sz="2400" b="0" i="0">
+              <a:rPr sz="2280" b="0" i="0">
                 <a:solidFill>
                   <a:srgbClr val="1A1A1A"/>
                 </a:solidFill>
-                <a:latin typeface="Century Schoolbook"/>
+                <a:latin typeface="Lexend"/>
               </a:rPr>
               <a:t>0.1</a:t>
             </a:r>
             <a:r>
-              <a:rPr sz="2400" b="0" i="0" baseline="30000">
+              <a:rPr sz="2280" b="0" i="0" baseline="30000">
                 <a:solidFill>
                   <a:srgbClr val="1A1A1A"/>
                 </a:solidFill>
-                <a:latin typeface="Century Schoolbook"/>
+                <a:latin typeface="Lexend"/>
               </a:rPr>
               <a:t>6</a:t>
             </a:r>
@@ -9773,11 +10112,11 @@
           <a:p>
             <a:pPr algn="ctr"/>
             <a:r>
-              <a:rPr sz="2600" b="1" i="0">
+              <a:rPr sz="2470" b="1" i="0">
                 <a:solidFill>
                   <a:srgbClr val="1A1A1A"/>
                 </a:solidFill>
-                <a:latin typeface="Century Schoolbook"/>
+                <a:latin typeface="Lexend"/>
               </a:rPr>
               <a:t>Answer it.</a:t>
             </a:r>
@@ -9826,11 +10165,11 @@
           <a:p>
             <a:pPr algn="l"/>
             <a:r>
-              <a:rPr sz="3400" b="1" i="0">
+              <a:rPr sz="3229" b="1" i="0">
                 <a:solidFill>
                   <a:srgbClr val="1A1A1A"/>
                 </a:solidFill>
-                <a:latin typeface="Century Schoolbook"/>
+                <a:latin typeface="Lexend"/>
               </a:rPr>
               <a:t>Whiteboards   ·   Question 6 of 9</a:t>
             </a:r>
@@ -9966,11 +10305,11 @@
           <a:p>
             <a:pPr algn="l"/>
             <a:r>
-              <a:rPr sz="1100" b="0" i="1">
+              <a:rPr sz="1040" b="0" i="0">
                 <a:solidFill>
                   <a:srgbClr val="6B6B6B"/>
                 </a:solidFill>
-                <a:latin typeface="Century Schoolbook"/>
+                <a:latin typeface="Lexend"/>
               </a:rPr>
               <a:t>Grade 7 Accelerated · Unit 3 · Lesson 3 — Exponential Expressions</a:t>
             </a:r>
@@ -10001,11 +10340,11 @@
           <a:p>
             <a:pPr algn="r"/>
             <a:r>
-              <a:rPr sz="1100" b="0" i="0">
+              <a:rPr sz="1040" b="0" i="0">
                 <a:solidFill>
                   <a:srgbClr val="6B6B6B"/>
                 </a:solidFill>
-                <a:latin typeface="Century Schoolbook"/>
+                <a:latin typeface="Lexend"/>
               </a:rPr>
               <a:t>26</a:t>
             </a:r>
@@ -10014,7 +10353,7 @@
       </p:sp>
       <p:pic>
         <p:nvPicPr>
-          <p:cNvPr id="8" name="Picture 7" descr="916206a62c8d46a5.png"/>
+          <p:cNvPr id="8" name="Picture 7" descr="d5144192dfe296fc.png"/>
           <p:cNvPicPr>
             <a:picLocks noChangeAspect="1"/>
           </p:cNvPicPr>
@@ -10028,8 +10367,8 @@
         </p:blipFill>
         <p:spPr>
           <a:xfrm>
-            <a:off x="5074919" y="2103120"/>
-            <a:ext cx="2011680" cy="1005840"/>
+            <a:off x="5056631" y="2103120"/>
+            <a:ext cx="2048256" cy="984504"/>
           </a:xfrm>
           <a:prstGeom prst="rect">
             <a:avLst/>
@@ -10044,7 +10383,7 @@
         </p:nvSpPr>
         <p:spPr>
           <a:xfrm>
-            <a:off x="777240" y="3337560"/>
+            <a:off x="777240" y="3316224"/>
             <a:ext cx="10607040" cy="465151"/>
           </a:xfrm>
           <a:prstGeom prst="rect">
@@ -10060,27 +10399,75 @@
           <a:p>
             <a:pPr algn="ctr"/>
             <a:r>
-              <a:rPr sz="2600" b="0" i="0">
+              <a:rPr sz="2470" b="0" i="0">
                 <a:solidFill>
                   <a:srgbClr val="1A1A1A"/>
                 </a:solidFill>
-                <a:latin typeface="Century Schoolbook"/>
+                <a:latin typeface="Lexend"/>
               </a:rPr>
               <a:t>Which expression is equivalent?</a:t>
             </a:r>
           </a:p>
         </p:txBody>
       </p:sp>
-      <p:sp>
-        <p:nvSpPr>
-          <p:cNvPr id="10" name="TextBox 9"/>
-          <p:cNvSpPr txBox="1"/>
-          <p:nvPr/>
-        </p:nvSpPr>
-        <p:spPr>
-          <a:xfrm>
-            <a:off x="1874519" y="4003879"/>
-            <a:ext cx="4572000" cy="548640"/>
+      <p:pic>
+        <p:nvPicPr>
+          <p:cNvPr id="10" name="Picture 9" descr="94a1e1b1de4bfcce.png"/>
+          <p:cNvPicPr>
+            <a:picLocks noChangeAspect="1"/>
+          </p:cNvPicPr>
+          <p:nvPr/>
+        </p:nvPicPr>
+        <p:blipFill>
+          <a:blip r:embed="rId3"/>
+          <a:stretch>
+            <a:fillRect/>
+          </a:stretch>
+        </p:blipFill>
+        <p:spPr>
+          <a:xfrm>
+            <a:off x="4312919" y="3964255"/>
+            <a:ext cx="2980944" cy="713232"/>
+          </a:xfrm>
+          <a:prstGeom prst="rect">
+            <a:avLst/>
+          </a:prstGeom>
+        </p:spPr>
+      </p:pic>
+      <p:pic>
+        <p:nvPicPr>
+          <p:cNvPr id="11" name="Picture 10" descr="f5db90305a3cc13e.png"/>
+          <p:cNvPicPr>
+            <a:picLocks noChangeAspect="1"/>
+          </p:cNvPicPr>
+          <p:nvPr/>
+        </p:nvPicPr>
+        <p:blipFill>
+          <a:blip r:embed="rId4"/>
+          <a:stretch>
+            <a:fillRect/>
+          </a:stretch>
+        </p:blipFill>
+        <p:spPr>
+          <a:xfrm>
+            <a:off x="4312919" y="4858843"/>
+            <a:ext cx="3648456" cy="304800"/>
+          </a:xfrm>
+          <a:prstGeom prst="rect">
+            <a:avLst/>
+          </a:prstGeom>
+        </p:spPr>
+      </p:pic>
+      <p:sp>
+        <p:nvSpPr>
+          <p:cNvPr id="12" name="TextBox 11"/>
+          <p:cNvSpPr txBox="1"/>
+          <p:nvPr/>
+        </p:nvSpPr>
+        <p:spPr>
+          <a:xfrm>
+            <a:off x="777240" y="5354143"/>
+            <a:ext cx="10607040" cy="548640"/>
           </a:xfrm>
           <a:prstGeom prst="rect">
             <a:avLst/>
@@ -10093,270 +10480,22 @@
           </a:bodyPr>
           <a:lstStyle/>
           <a:p>
-            <a:pPr algn="l"/>
-            <a:r>
-              <a:rPr sz="2400" b="1" i="0">
-                <a:solidFill>
-                  <a:srgbClr val="1A1A1A"/>
-                </a:solidFill>
-                <a:latin typeface="Century Schoolbook"/>
-              </a:rPr>
-              <a:t>A.   </a:t>
-            </a:r>
-            <a:r>
-              <a:rPr sz="2400" b="0" i="0">
-                <a:solidFill>
-                  <a:srgbClr val="1A1A1A"/>
-                </a:solidFill>
-                <a:latin typeface="Century Schoolbook"/>
-              </a:rPr>
-              <a:t>0.2</a:t>
-            </a:r>
-            <a:r>
-              <a:rPr sz="2400" b="0" i="0" baseline="30000">
-                <a:solidFill>
-                  <a:srgbClr val="1A1A1A"/>
-                </a:solidFill>
-                <a:latin typeface="Century Schoolbook"/>
-              </a:rPr>
-              <a:t>0</a:t>
-            </a:r>
-            <a:r>
-              <a:rPr sz="2400" b="0" i="0">
-                <a:solidFill>
-                  <a:srgbClr val="1A1A1A"/>
-                </a:solidFill>
-                <a:latin typeface="Century Schoolbook"/>
-              </a:rPr>
-              <a:t> · 0.1</a:t>
-            </a:r>
-            <a:r>
-              <a:rPr sz="2400" b="0" i="0" baseline="30000">
-                <a:solidFill>
-                  <a:srgbClr val="1A1A1A"/>
-                </a:solidFill>
-                <a:latin typeface="Century Schoolbook"/>
-              </a:rPr>
-              <a:t>2</a:t>
-            </a:r>
-          </a:p>
-        </p:txBody>
-      </p:sp>
-      <p:sp>
-        <p:nvSpPr>
-          <p:cNvPr id="11" name="TextBox 10"/>
-          <p:cNvSpPr txBox="1"/>
-          <p:nvPr/>
-        </p:nvSpPr>
-        <p:spPr>
-          <a:xfrm>
-            <a:off x="6629400" y="4003879"/>
-            <a:ext cx="4572000" cy="548640"/>
-          </a:xfrm>
-          <a:prstGeom prst="rect">
-            <a:avLst/>
-          </a:prstGeom>
-          <a:noFill/>
-        </p:spPr>
-        <p:txBody>
-          <a:bodyPr wrap="square" lIns="45720" rIns="45720" tIns="18288" bIns="18288" anchor="t">
-            <a:spAutoFit/>
-          </a:bodyPr>
-          <a:lstStyle/>
-          <a:p>
-            <a:pPr algn="l"/>
-            <a:r>
-              <a:rPr sz="2400" b="1" i="0">
-                <a:solidFill>
-                  <a:srgbClr val="1A1A1A"/>
-                </a:solidFill>
-                <a:latin typeface="Century Schoolbook"/>
-              </a:rPr>
-              <a:t>B.   </a:t>
-            </a:r>
-            <a:r>
-              <a:rPr sz="2400" b="0" i="0">
-                <a:solidFill>
-                  <a:srgbClr val="1A1A1A"/>
-                </a:solidFill>
-                <a:latin typeface="Century Schoolbook"/>
-              </a:rPr>
-              <a:t>0.2</a:t>
-            </a:r>
-            <a:r>
-              <a:rPr sz="2400" b="0" i="0" baseline="30000">
-                <a:solidFill>
-                  <a:srgbClr val="1A1A1A"/>
-                </a:solidFill>
-                <a:latin typeface="Century Schoolbook"/>
-              </a:rPr>
-              <a:t>3</a:t>
-            </a:r>
-            <a:r>
-              <a:rPr sz="2400" b="0" i="0">
-                <a:solidFill>
-                  <a:srgbClr val="1A1A1A"/>
-                </a:solidFill>
-                <a:latin typeface="Century Schoolbook"/>
-              </a:rPr>
-              <a:t> · 0.1</a:t>
-            </a:r>
-            <a:r>
-              <a:rPr sz="2400" b="0" i="0" baseline="30000">
-                <a:solidFill>
-                  <a:srgbClr val="1A1A1A"/>
-                </a:solidFill>
-                <a:latin typeface="Century Schoolbook"/>
-              </a:rPr>
-              <a:t>2</a:t>
-            </a:r>
-          </a:p>
-        </p:txBody>
-      </p:sp>
-      <p:sp>
-        <p:nvSpPr>
-          <p:cNvPr id="12" name="TextBox 11"/>
-          <p:cNvSpPr txBox="1"/>
-          <p:nvPr/>
-        </p:nvSpPr>
-        <p:spPr>
-          <a:xfrm>
-            <a:off x="1874519" y="4689679"/>
-            <a:ext cx="4572000" cy="548640"/>
-          </a:xfrm>
-          <a:prstGeom prst="rect">
-            <a:avLst/>
-          </a:prstGeom>
-          <a:noFill/>
-        </p:spPr>
-        <p:txBody>
-          <a:bodyPr wrap="square" lIns="45720" rIns="45720" tIns="18288" bIns="18288" anchor="t">
-            <a:spAutoFit/>
-          </a:bodyPr>
-          <a:lstStyle/>
-          <a:p>
-            <a:pPr algn="l"/>
-            <a:r>
-              <a:rPr sz="2400" b="1" i="0">
+            <a:pPr algn="ctr"/>
+            <a:r>
+              <a:rPr sz="3040" b="1" i="0">
                 <a:solidFill>
                   <a:srgbClr val="9E1B32"/>
                 </a:solidFill>
-                <a:latin typeface="Century Schoolbook"/>
-              </a:rPr>
-              <a:t>C.   </a:t>
-            </a:r>
-            <a:r>
-              <a:rPr sz="2400" b="1" i="0">
+                <a:latin typeface="Lexend"/>
+              </a:rPr>
+              <a:t>Answer:   C — 0.1</a:t>
+            </a:r>
+            <a:r>
+              <a:rPr sz="3040" b="1" i="0" baseline="30000">
                 <a:solidFill>
                   <a:srgbClr val="9E1B32"/>
                 </a:solidFill>
-                <a:latin typeface="Century Schoolbook"/>
-              </a:rPr>
-              <a:t>0.1</a:t>
-            </a:r>
-            <a:r>
-              <a:rPr sz="2400" b="1" i="0" baseline="30000">
-                <a:solidFill>
-                  <a:srgbClr val="9E1B32"/>
-                </a:solidFill>
-                <a:latin typeface="Century Schoolbook"/>
-              </a:rPr>
-              <a:t>5</a:t>
-            </a:r>
-          </a:p>
-        </p:txBody>
-      </p:sp>
-      <p:sp>
-        <p:nvSpPr>
-          <p:cNvPr id="13" name="TextBox 12"/>
-          <p:cNvSpPr txBox="1"/>
-          <p:nvPr/>
-        </p:nvSpPr>
-        <p:spPr>
-          <a:xfrm>
-            <a:off x="6629400" y="4689679"/>
-            <a:ext cx="4572000" cy="548640"/>
-          </a:xfrm>
-          <a:prstGeom prst="rect">
-            <a:avLst/>
-          </a:prstGeom>
-          <a:noFill/>
-        </p:spPr>
-        <p:txBody>
-          <a:bodyPr wrap="square" lIns="45720" rIns="45720" tIns="18288" bIns="18288" anchor="t">
-            <a:spAutoFit/>
-          </a:bodyPr>
-          <a:lstStyle/>
-          <a:p>
-            <a:pPr algn="l"/>
-            <a:r>
-              <a:rPr sz="2400" b="1" i="0">
-                <a:solidFill>
-                  <a:srgbClr val="1A1A1A"/>
-                </a:solidFill>
-                <a:latin typeface="Century Schoolbook"/>
-              </a:rPr>
-              <a:t>D.   </a:t>
-            </a:r>
-            <a:r>
-              <a:rPr sz="2400" b="0" i="0">
-                <a:solidFill>
-                  <a:srgbClr val="1A1A1A"/>
-                </a:solidFill>
-                <a:latin typeface="Century Schoolbook"/>
-              </a:rPr>
-              <a:t>0.1</a:t>
-            </a:r>
-            <a:r>
-              <a:rPr sz="2400" b="0" i="0" baseline="30000">
-                <a:solidFill>
-                  <a:srgbClr val="1A1A1A"/>
-                </a:solidFill>
-                <a:latin typeface="Century Schoolbook"/>
-              </a:rPr>
-              <a:t>6</a:t>
-            </a:r>
-          </a:p>
-        </p:txBody>
-      </p:sp>
-      <p:sp>
-        <p:nvSpPr>
-          <p:cNvPr id="14" name="TextBox 13"/>
-          <p:cNvSpPr txBox="1"/>
-          <p:nvPr/>
-        </p:nvSpPr>
-        <p:spPr>
-          <a:xfrm>
-            <a:off x="777240" y="5632704"/>
-            <a:ext cx="10607040" cy="548640"/>
-          </a:xfrm>
-          <a:prstGeom prst="rect">
-            <a:avLst/>
-          </a:prstGeom>
-          <a:noFill/>
-        </p:spPr>
-        <p:txBody>
-          <a:bodyPr wrap="square" lIns="45720" rIns="45720" tIns="18288" bIns="18288" anchor="t">
-            <a:spAutoFit/>
-          </a:bodyPr>
-          <a:lstStyle/>
-          <a:p>
-            <a:pPr algn="ctr"/>
-            <a:r>
-              <a:rPr sz="3200" b="1" i="0">
-                <a:solidFill>
-                  <a:srgbClr val="9E1B32"/>
-                </a:solidFill>
-                <a:latin typeface="Century Schoolbook"/>
-              </a:rPr>
-              <a:t>Answer:   C — 0.1</a:t>
-            </a:r>
-            <a:r>
-              <a:rPr sz="3200" b="1" i="0" baseline="30000">
-                <a:solidFill>
-                  <a:srgbClr val="9E1B32"/>
-                </a:solidFill>
-                <a:latin typeface="Century Schoolbook"/>
+                <a:latin typeface="Lexend"/>
               </a:rPr>
               <a:t>5</a:t>
             </a:r>
@@ -10405,11 +10544,11 @@
           <a:p>
             <a:pPr algn="l"/>
             <a:r>
-              <a:rPr sz="3400" b="1" i="0">
+              <a:rPr sz="3229" b="1" i="0">
                 <a:solidFill>
                   <a:srgbClr val="1A1A1A"/>
                 </a:solidFill>
-                <a:latin typeface="Century Schoolbook"/>
+                <a:latin typeface="Lexend"/>
               </a:rPr>
               <a:t>Whiteboards   ·   Question 7 of 9</a:t>
             </a:r>
@@ -10545,11 +10684,11 @@
           <a:p>
             <a:pPr algn="l"/>
             <a:r>
-              <a:rPr sz="1100" b="0" i="1">
+              <a:rPr sz="1040" b="0" i="0">
                 <a:solidFill>
                   <a:srgbClr val="6B6B6B"/>
                 </a:solidFill>
-                <a:latin typeface="Century Schoolbook"/>
+                <a:latin typeface="Lexend"/>
               </a:rPr>
               <a:t>Grade 7 Accelerated · Unit 3 · Lesson 3 — Exponential Expressions</a:t>
             </a:r>
@@ -10580,11 +10719,11 @@
           <a:p>
             <a:pPr algn="r"/>
             <a:r>
-              <a:rPr sz="1100" b="0" i="0">
+              <a:rPr sz="1040" b="0" i="0">
                 <a:solidFill>
                   <a:srgbClr val="6B6B6B"/>
                 </a:solidFill>
-                <a:latin typeface="Century Schoolbook"/>
+                <a:latin typeface="Lexend"/>
               </a:rPr>
               <a:t>27</a:t>
             </a:r>
@@ -10593,7 +10732,7 @@
       </p:sp>
       <p:pic>
         <p:nvPicPr>
-          <p:cNvPr id="8" name="Picture 7" descr="1564dccdbc1be462.png"/>
+          <p:cNvPr id="8" name="Picture 7" descr="1f6a545d117e0fef.png"/>
           <p:cNvPicPr>
             <a:picLocks noChangeAspect="1"/>
           </p:cNvPicPr>
@@ -10607,8 +10746,8 @@
         </p:blipFill>
         <p:spPr>
           <a:xfrm>
-            <a:off x="4840224" y="2194560"/>
-            <a:ext cx="2481072" cy="518160"/>
+            <a:off x="4853939" y="2194560"/>
+            <a:ext cx="2453640" cy="509016"/>
           </a:xfrm>
           <a:prstGeom prst="rect">
             <a:avLst/>
@@ -10639,11 +10778,11 @@
           <a:p>
             <a:pPr algn="ctr"/>
             <a:r>
-              <a:rPr sz="2600" b="1" i="0">
+              <a:rPr sz="2470" b="1" i="0">
                 <a:solidFill>
                   <a:srgbClr val="1A1A1A"/>
                 </a:solidFill>
-                <a:latin typeface="Century Schoolbook"/>
+                <a:latin typeface="Lexend"/>
               </a:rPr>
               <a:t>Answer it.</a:t>
             </a:r>
@@ -10692,11 +10831,11 @@
           <a:p>
             <a:pPr algn="l"/>
             <a:r>
-              <a:rPr sz="3400" b="1" i="0">
+              <a:rPr sz="3229" b="1" i="0">
                 <a:solidFill>
                   <a:srgbClr val="1A1A1A"/>
                 </a:solidFill>
-                <a:latin typeface="Century Schoolbook"/>
+                <a:latin typeface="Lexend"/>
               </a:rPr>
               <a:t>Whiteboards   ·   Question 7 of 9</a:t>
             </a:r>
@@ -10832,11 +10971,11 @@
           <a:p>
             <a:pPr algn="l"/>
             <a:r>
-              <a:rPr sz="1100" b="0" i="1">
+              <a:rPr sz="1040" b="0" i="0">
                 <a:solidFill>
                   <a:srgbClr val="6B6B6B"/>
                 </a:solidFill>
-                <a:latin typeface="Century Schoolbook"/>
+                <a:latin typeface="Lexend"/>
               </a:rPr>
               <a:t>Grade 7 Accelerated · Unit 3 · Lesson 3 — Exponential Expressions</a:t>
             </a:r>
@@ -10867,11 +11006,11 @@
           <a:p>
             <a:pPr algn="r"/>
             <a:r>
-              <a:rPr sz="1100" b="0" i="0">
+              <a:rPr sz="1040" b="0" i="0">
                 <a:solidFill>
                   <a:srgbClr val="6B6B6B"/>
                 </a:solidFill>
-                <a:latin typeface="Century Schoolbook"/>
+                <a:latin typeface="Lexend"/>
               </a:rPr>
               <a:t>28</a:t>
             </a:r>
@@ -10880,7 +11019,7 @@
       </p:sp>
       <p:pic>
         <p:nvPicPr>
-          <p:cNvPr id="8" name="Picture 7" descr="51f9e7dda47d9701.png"/>
+          <p:cNvPr id="8" name="Picture 7" descr="4a52109175a88efb.png"/>
           <p:cNvPicPr>
             <a:picLocks noChangeAspect="1"/>
           </p:cNvPicPr>
@@ -10894,17 +11033,65 @@
         </p:blipFill>
         <p:spPr>
           <a:xfrm>
-            <a:off x="4838699" y="2103120"/>
-            <a:ext cx="2484120" cy="518160"/>
+            <a:off x="4852416" y="2103120"/>
+            <a:ext cx="2456688" cy="509016"/>
           </a:xfrm>
           <a:prstGeom prst="rect">
             <a:avLst/>
           </a:prstGeom>
         </p:spPr>
       </p:pic>
-      <p:sp>
-        <p:nvSpPr>
-          <p:cNvPr id="9" name="TextBox 8"/>
+      <p:pic>
+        <p:nvPicPr>
+          <p:cNvPr id="9" name="Picture 8" descr="9994c4103bc07956.png"/>
+          <p:cNvPicPr>
+            <a:picLocks noChangeAspect="1"/>
+          </p:cNvPicPr>
+          <p:nvPr/>
+        </p:nvPicPr>
+        <p:blipFill>
+          <a:blip r:embed="rId3"/>
+          <a:stretch>
+            <a:fillRect/>
+          </a:stretch>
+        </p:blipFill>
+        <p:spPr>
+          <a:xfrm>
+            <a:off x="3584448" y="2933699"/>
+            <a:ext cx="3127248" cy="371856"/>
+          </a:xfrm>
+          <a:prstGeom prst="rect">
+            <a:avLst/>
+          </a:prstGeom>
+        </p:spPr>
+      </p:pic>
+      <p:pic>
+        <p:nvPicPr>
+          <p:cNvPr id="10" name="Picture 9" descr="a3962f919eaa2e56.png"/>
+          <p:cNvPicPr>
+            <a:picLocks noChangeAspect="1"/>
+          </p:cNvPicPr>
+          <p:nvPr/>
+        </p:nvPicPr>
+        <p:blipFill>
+          <a:blip r:embed="rId4"/>
+          <a:stretch>
+            <a:fillRect/>
+          </a:stretch>
+        </p:blipFill>
+        <p:spPr>
+          <a:xfrm>
+            <a:off x="3584448" y="3506724"/>
+            <a:ext cx="5108448" cy="304800"/>
+          </a:xfrm>
+          <a:prstGeom prst="rect">
+            <a:avLst/>
+          </a:prstGeom>
+        </p:spPr>
+      </p:pic>
+      <p:sp>
+        <p:nvSpPr>
+          <p:cNvPr id="11" name="TextBox 10"/>
           <p:cNvSpPr txBox="1"/>
           <p:nvPr/>
         </p:nvSpPr>
@@ -10926,11 +11113,11 @@
           <a:p>
             <a:pPr algn="ctr"/>
             <a:r>
-              <a:rPr sz="3200" b="1" i="0">
+              <a:rPr sz="3040" b="1" i="0">
                 <a:solidFill>
                   <a:srgbClr val="9E1B32"/>
                 </a:solidFill>
-                <a:latin typeface="Century Schoolbook"/>
+                <a:latin typeface="Lexend"/>
               </a:rPr>
               <a:t>Answer:   0.0001</a:t>
             </a:r>
@@ -10979,11 +11166,11 @@
           <a:p>
             <a:pPr algn="l"/>
             <a:r>
-              <a:rPr sz="3400" b="1" i="0">
+              <a:rPr sz="3229" b="1" i="0">
                 <a:solidFill>
                   <a:srgbClr val="1A1A1A"/>
                 </a:solidFill>
-                <a:latin typeface="Century Schoolbook"/>
+                <a:latin typeface="Lexend"/>
               </a:rPr>
               <a:t>Whiteboards   ·   Question 8 of 9</a:t>
             </a:r>
@@ -11119,11 +11306,11 @@
           <a:p>
             <a:pPr algn="l"/>
             <a:r>
-              <a:rPr sz="1100" b="0" i="1">
+              <a:rPr sz="1040" b="0" i="0">
                 <a:solidFill>
                   <a:srgbClr val="6B6B6B"/>
                 </a:solidFill>
-                <a:latin typeface="Century Schoolbook"/>
+                <a:latin typeface="Lexend"/>
               </a:rPr>
               <a:t>Grade 7 Accelerated · Unit 3 · Lesson 3 — Exponential Expressions</a:t>
             </a:r>
@@ -11154,11 +11341,11 @@
           <a:p>
             <a:pPr algn="r"/>
             <a:r>
-              <a:rPr sz="1100" b="0" i="0">
+              <a:rPr sz="1040" b="0" i="0">
                 <a:solidFill>
                   <a:srgbClr val="6B6B6B"/>
                 </a:solidFill>
-                <a:latin typeface="Century Schoolbook"/>
+                <a:latin typeface="Lexend"/>
               </a:rPr>
               <a:t>29</a:t>
             </a:r>
@@ -11167,7 +11354,7 @@
       </p:sp>
       <p:pic>
         <p:nvPicPr>
-          <p:cNvPr id="8" name="Picture 7" descr="a2077b17c7711d12.png"/>
+          <p:cNvPr id="8" name="Picture 7" descr="c207f4faf046fab2.png"/>
           <p:cNvPicPr>
             <a:picLocks noChangeAspect="1"/>
           </p:cNvPicPr>
@@ -11181,8 +11368,8 @@
         </p:blipFill>
         <p:spPr>
           <a:xfrm>
-            <a:off x="4783836" y="2194560"/>
-            <a:ext cx="2593848" cy="1188720"/>
+            <a:off x="4803648" y="2194560"/>
+            <a:ext cx="2554224" cy="1170432"/>
           </a:xfrm>
           <a:prstGeom prst="rect">
             <a:avLst/>
@@ -11213,11 +11400,11 @@
           <a:p>
             <a:pPr algn="ctr"/>
             <a:r>
-              <a:rPr sz="2600" b="1" i="0">
+              <a:rPr sz="2470" b="1" i="0">
                 <a:solidFill>
                   <a:srgbClr val="1A1A1A"/>
                 </a:solidFill>
-                <a:latin typeface="Century Schoolbook"/>
+                <a:latin typeface="Lexend"/>
               </a:rPr>
               <a:t>Answer it.</a:t>
             </a:r>
@@ -11266,11 +11453,11 @@
           <a:p>
             <a:pPr algn="l"/>
             <a:r>
-              <a:rPr sz="3600" b="1" i="0">
+              <a:rPr sz="3420" b="1" i="0">
                 <a:solidFill>
                   <a:srgbClr val="1A1A1A"/>
                 </a:solidFill>
-                <a:latin typeface="Century Schoolbook"/>
+                <a:latin typeface="Lexend"/>
               </a:rPr>
               <a:t>Warm-Up</a:t>
             </a:r>
@@ -11406,11 +11593,11 @@
           <a:p>
             <a:pPr algn="l"/>
             <a:r>
-              <a:rPr sz="1100" b="0" i="1">
+              <a:rPr sz="1040" b="0" i="0">
                 <a:solidFill>
                   <a:srgbClr val="6B6B6B"/>
                 </a:solidFill>
-                <a:latin typeface="Century Schoolbook"/>
+                <a:latin typeface="Lexend"/>
               </a:rPr>
               <a:t>Grade 7 Accelerated · Unit 3 · Lesson 3 — Exponential Expressions</a:t>
             </a:r>
@@ -11441,11 +11628,11 @@
           <a:p>
             <a:pPr algn="r"/>
             <a:r>
-              <a:rPr sz="1100" b="0" i="0">
+              <a:rPr sz="1040" b="0" i="0">
                 <a:solidFill>
                   <a:srgbClr val="6B6B6B"/>
                 </a:solidFill>
-                <a:latin typeface="Century Schoolbook"/>
+                <a:latin typeface="Lexend"/>
               </a:rPr>
               <a:t>3</a:t>
             </a:r>
@@ -11460,8 +11647,8 @@
         </p:nvSpPr>
         <p:spPr>
           <a:xfrm>
-            <a:off x="1874519" y="1566672"/>
-            <a:ext cx="3058734" cy="457200"/>
+            <a:off x="1874519" y="1556004"/>
+            <a:ext cx="2921808" cy="457200"/>
           </a:xfrm>
           <a:prstGeom prst="rect">
             <a:avLst/>
@@ -11476,11 +11663,11 @@
           <a:p>
             <a:pPr algn="l"/>
             <a:r>
-              <a:rPr sz="2300" b="0" i="0">
+              <a:rPr sz="2180" b="0" i="0">
                 <a:solidFill>
                   <a:srgbClr val="1A1A1A"/>
                 </a:solidFill>
-                <a:latin typeface="Century Schoolbook"/>
+                <a:latin typeface="Lexend"/>
               </a:rPr>
               <a:t>1.   Find the value:  </a:t>
             </a:r>
@@ -11489,7 +11676,7 @@
       </p:sp>
       <p:pic>
         <p:nvPicPr>
-          <p:cNvPr id="9" name="Picture 8" descr="0d08d420e081e8bf.png"/>
+          <p:cNvPr id="9" name="Picture 8" descr="7eeabcc1a7697b1d.png"/>
           <p:cNvPicPr>
             <a:picLocks noChangeAspect="1"/>
           </p:cNvPicPr>
@@ -11503,8 +11690,8 @@
         </p:blipFill>
         <p:spPr>
           <a:xfrm>
-            <a:off x="4796094" y="1463040"/>
-            <a:ext cx="469392" cy="664464"/>
+            <a:off x="4659168" y="1463040"/>
+            <a:ext cx="487680" cy="643128"/>
           </a:xfrm>
           <a:prstGeom prst="rect">
             <a:avLst/>
@@ -11519,8 +11706,8 @@
         </p:nvSpPr>
         <p:spPr>
           <a:xfrm>
-            <a:off x="5814126" y="1440180"/>
-            <a:ext cx="743533" cy="457200"/>
+            <a:off x="5695488" y="1440180"/>
+            <a:ext cx="772374" cy="457200"/>
           </a:xfrm>
           <a:prstGeom prst="rect">
             <a:avLst/>
@@ -11535,11 +11722,11 @@
           <a:p>
             <a:pPr algn="l"/>
             <a:r>
-              <a:rPr sz="2300" b="1" i="0">
+              <a:rPr sz="2180" b="1" i="0">
                 <a:solidFill>
                   <a:srgbClr val="9E1B32"/>
                 </a:solidFill>
-                <a:latin typeface="Century Schoolbook"/>
+                <a:latin typeface="Lexend"/>
               </a:rPr>
               <a:t>100</a:t>
             </a:r>
@@ -11554,8 +11741,8 @@
         </p:nvSpPr>
         <p:spPr>
           <a:xfrm>
-            <a:off x="1874519" y="2305812"/>
-            <a:ext cx="1082239" cy="457200"/>
+            <a:off x="1874519" y="2284476"/>
+            <a:ext cx="1049533" cy="457200"/>
           </a:xfrm>
           <a:prstGeom prst="rect">
             <a:avLst/>
@@ -11570,11 +11757,11 @@
           <a:p>
             <a:pPr algn="l"/>
             <a:r>
-              <a:rPr sz="2300" b="0" i="0">
+              <a:rPr sz="2180" b="0" i="0">
                 <a:solidFill>
                   <a:srgbClr val="1A1A1A"/>
                 </a:solidFill>
-                <a:latin typeface="Century Schoolbook"/>
+                <a:latin typeface="Lexend"/>
               </a:rPr>
               <a:t>2.   Is </a:t>
             </a:r>
@@ -11583,7 +11770,7 @@
       </p:sp>
       <p:pic>
         <p:nvPicPr>
-          <p:cNvPr id="12" name="Picture 11" descr="697434924d454a71.png"/>
+          <p:cNvPr id="12" name="Picture 11" descr="bcdd97740536927b.png"/>
           <p:cNvPicPr>
             <a:picLocks noChangeAspect="1"/>
           </p:cNvPicPr>
@@ -11597,8 +11784,8 @@
         </p:blipFill>
         <p:spPr>
           <a:xfrm>
-            <a:off x="2819599" y="2330196"/>
-            <a:ext cx="688848" cy="408432"/>
+            <a:off x="2786893" y="2318004"/>
+            <a:ext cx="710184" cy="390144"/>
           </a:xfrm>
           <a:prstGeom prst="rect">
             <a:avLst/>
@@ -11613,8 +11800,8 @@
         </p:nvSpPr>
         <p:spPr>
           <a:xfrm>
-            <a:off x="3508447" y="2305812"/>
-            <a:ext cx="2879837" cy="457200"/>
+            <a:off x="3497077" y="2284476"/>
+            <a:ext cx="2909769" cy="457200"/>
           </a:xfrm>
           <a:prstGeom prst="rect">
             <a:avLst/>
@@ -11629,11 +11816,11 @@
           <a:p>
             <a:pPr algn="l"/>
             <a:r>
-              <a:rPr sz="2300" b="0" i="0">
+              <a:rPr sz="2180" b="0" i="0">
                 <a:solidFill>
                   <a:srgbClr val="1A1A1A"/>
                 </a:solidFill>
-                <a:latin typeface="Century Schoolbook"/>
+                <a:latin typeface="Lexend"/>
               </a:rPr>
               <a:t> closer to 7 or to 8?</a:t>
             </a:r>
@@ -11648,8 +11835,8 @@
         </p:nvSpPr>
         <p:spPr>
           <a:xfrm>
-            <a:off x="6799764" y="2305812"/>
-            <a:ext cx="388052" cy="457200"/>
+            <a:off x="6818326" y="2284476"/>
+            <a:ext cx="372970" cy="457200"/>
           </a:xfrm>
           <a:prstGeom prst="rect">
             <a:avLst/>
@@ -11664,11 +11851,11 @@
           <a:p>
             <a:pPr algn="l"/>
             <a:r>
-              <a:rPr sz="2300" b="1" i="0">
+              <a:rPr sz="2180" b="1" i="0">
                 <a:solidFill>
                   <a:srgbClr val="9E1B32"/>
                 </a:solidFill>
-                <a:latin typeface="Century Schoolbook"/>
+                <a:latin typeface="Lexend"/>
               </a:rPr>
               <a:t>7</a:t>
             </a:r>
@@ -11683,8 +11870,8 @@
         </p:nvSpPr>
         <p:spPr>
           <a:xfrm>
-            <a:off x="1874519" y="2918460"/>
-            <a:ext cx="1652008" cy="457200"/>
+            <a:off x="1874519" y="2897124"/>
+            <a:ext cx="1612295" cy="457200"/>
           </a:xfrm>
           <a:prstGeom prst="rect">
             <a:avLst/>
@@ -11699,11 +11886,11 @@
           <a:p>
             <a:pPr algn="l"/>
             <a:r>
-              <a:rPr sz="2300" b="0" i="0">
+              <a:rPr sz="2180" b="0" i="0">
                 <a:solidFill>
                   <a:srgbClr val="1A1A1A"/>
                 </a:solidFill>
-                <a:latin typeface="Century Schoolbook"/>
+                <a:latin typeface="Lexend"/>
               </a:rPr>
               <a:t>3.   Solve  </a:t>
             </a:r>
@@ -11712,7 +11899,7 @@
       </p:sp>
       <p:pic>
         <p:nvPicPr>
-          <p:cNvPr id="16" name="Picture 15" descr="7747f117721bd827.png"/>
+          <p:cNvPr id="16" name="Picture 15" descr="c4840976746a8c60.png"/>
           <p:cNvPicPr>
             <a:picLocks noChangeAspect="1"/>
           </p:cNvPicPr>
@@ -11726,8 +11913,8 @@
         </p:blipFill>
         <p:spPr>
           <a:xfrm>
-            <a:off x="3389368" y="3003804"/>
-            <a:ext cx="1658112" cy="286512"/>
+            <a:off x="3349655" y="2983992"/>
+            <a:ext cx="1673352" cy="283464"/>
           </a:xfrm>
           <a:prstGeom prst="rect">
             <a:avLst/>
@@ -11742,8 +11929,8 @@
         </p:nvSpPr>
         <p:spPr>
           <a:xfrm>
-            <a:off x="5596120" y="2918460"/>
-            <a:ext cx="942623" cy="457200"/>
+            <a:off x="5571647" y="2897124"/>
+            <a:ext cx="935332" cy="457200"/>
           </a:xfrm>
           <a:prstGeom prst="rect">
             <a:avLst/>
@@ -11758,11 +11945,11 @@
           <a:p>
             <a:pPr algn="l"/>
             <a:r>
-              <a:rPr sz="2300" b="1" i="0">
+              <a:rPr sz="2180" b="1" i="0">
                 <a:solidFill>
                   <a:srgbClr val="9E1B32"/>
                 </a:solidFill>
-                <a:latin typeface="Century Schoolbook"/>
+                <a:latin typeface="Lexend"/>
               </a:rPr>
               <a:t>x = 5</a:t>
             </a:r>
@@ -11777,8 +11964,8 @@
         </p:nvSpPr>
         <p:spPr>
           <a:xfrm>
-            <a:off x="1874519" y="3531108"/>
-            <a:ext cx="2190435" cy="457200"/>
+            <a:off x="1874519" y="3509772"/>
+            <a:ext cx="2118555" cy="457200"/>
           </a:xfrm>
           <a:prstGeom prst="rect">
             <a:avLst/>
@@ -11793,11 +11980,11 @@
           <a:p>
             <a:pPr algn="l"/>
             <a:r>
-              <a:rPr sz="2300" b="0" i="0">
+              <a:rPr sz="2180" b="0" i="0">
                 <a:solidFill>
                   <a:srgbClr val="1A1A1A"/>
                 </a:solidFill>
-                <a:latin typeface="Century Schoolbook"/>
+                <a:latin typeface="Lexend"/>
               </a:rPr>
               <a:t>4.   Evaluate  </a:t>
             </a:r>
@@ -11806,7 +11993,7 @@
       </p:sp>
       <p:pic>
         <p:nvPicPr>
-          <p:cNvPr id="19" name="Picture 18" descr="2a87b786c67fb6da.png"/>
+          <p:cNvPr id="19" name="Picture 18" descr="3d00c0b948695db0.png"/>
           <p:cNvPicPr>
             <a:picLocks noChangeAspect="1"/>
           </p:cNvPicPr>
@@ -11820,8 +12007,8 @@
         </p:blipFill>
         <p:spPr>
           <a:xfrm>
-            <a:off x="3927795" y="3614928"/>
-            <a:ext cx="1112520" cy="289560"/>
+            <a:off x="3855915" y="3599688"/>
+            <a:ext cx="1127760" cy="277368"/>
           </a:xfrm>
           <a:prstGeom prst="rect">
             <a:avLst/>
@@ -11836,8 +12023,8 @@
         </p:nvSpPr>
         <p:spPr>
           <a:xfrm>
-            <a:off x="5588955" y="3531108"/>
-            <a:ext cx="565792" cy="457200"/>
+            <a:off x="5532315" y="3509772"/>
+            <a:ext cx="584137" cy="457200"/>
           </a:xfrm>
           <a:prstGeom prst="rect">
             <a:avLst/>
@@ -11852,11 +12039,11 @@
           <a:p>
             <a:pPr algn="l"/>
             <a:r>
-              <a:rPr sz="2300" b="1" i="0">
+              <a:rPr sz="2180" b="1" i="0">
                 <a:solidFill>
                   <a:srgbClr val="9E1B32"/>
                 </a:solidFill>
-                <a:latin typeface="Century Schoolbook"/>
+                <a:latin typeface="Lexend"/>
               </a:rPr>
               <a:t>50</a:t>
             </a:r>
@@ -11905,11 +12092,11 @@
           <a:p>
             <a:pPr algn="l"/>
             <a:r>
-              <a:rPr sz="3400" b="1" i="0">
+              <a:rPr sz="3229" b="1" i="0">
                 <a:solidFill>
                   <a:srgbClr val="1A1A1A"/>
                 </a:solidFill>
-                <a:latin typeface="Century Schoolbook"/>
+                <a:latin typeface="Lexend"/>
               </a:rPr>
               <a:t>Whiteboards   ·   Question 8 of 9</a:t>
             </a:r>
@@ -12045,11 +12232,11 @@
           <a:p>
             <a:pPr algn="l"/>
             <a:r>
-              <a:rPr sz="1100" b="0" i="1">
+              <a:rPr sz="1040" b="0" i="0">
                 <a:solidFill>
                   <a:srgbClr val="6B6B6B"/>
                 </a:solidFill>
-                <a:latin typeface="Century Schoolbook"/>
+                <a:latin typeface="Lexend"/>
               </a:rPr>
               <a:t>Grade 7 Accelerated · Unit 3 · Lesson 3 — Exponential Expressions</a:t>
             </a:r>
@@ -12080,11 +12267,11 @@
           <a:p>
             <a:pPr algn="r"/>
             <a:r>
-              <a:rPr sz="1100" b="0" i="0">
+              <a:rPr sz="1040" b="0" i="0">
                 <a:solidFill>
                   <a:srgbClr val="6B6B6B"/>
                 </a:solidFill>
-                <a:latin typeface="Century Schoolbook"/>
+                <a:latin typeface="Lexend"/>
               </a:rPr>
               <a:t>30</a:t>
             </a:r>
@@ -12093,7 +12280,7 @@
       </p:sp>
       <p:pic>
         <p:nvPicPr>
-          <p:cNvPr id="8" name="Picture 7" descr="c2f375830fedead4.png"/>
+          <p:cNvPr id="8" name="Picture 7" descr="b21b3b08159601a5.png"/>
           <p:cNvPicPr>
             <a:picLocks noChangeAspect="1"/>
           </p:cNvPicPr>
@@ -12107,8 +12294,8 @@
         </p:blipFill>
         <p:spPr>
           <a:xfrm>
-            <a:off x="4786883" y="2103120"/>
-            <a:ext cx="2587752" cy="1185672"/>
+            <a:off x="4806695" y="2103120"/>
+            <a:ext cx="2548128" cy="1170432"/>
           </a:xfrm>
           <a:prstGeom prst="rect">
             <a:avLst/>
@@ -12123,7 +12310,149 @@
         </p:nvSpPr>
         <p:spPr>
           <a:xfrm>
-            <a:off x="777240" y="4663440"/>
+            <a:off x="3762714" y="3552444"/>
+            <a:ext cx="996779" cy="457200"/>
+          </a:xfrm>
+          <a:prstGeom prst="rect">
+            <a:avLst/>
+          </a:prstGeom>
+          <a:noFill/>
+        </p:spPr>
+        <p:txBody>
+          <a:bodyPr wrap="none" lIns="45720" rIns="45720" tIns="18288" bIns="18288" anchor="ctr">
+            <a:noAutofit/>
+          </a:bodyPr>
+          <a:lstStyle/>
+          <a:p>
+            <a:pPr algn="l"/>
+            <a:r>
+              <a:rPr sz="2330" b="0" i="0">
+                <a:solidFill>
+                  <a:srgbClr val="1A1A1A"/>
+                </a:solidFill>
+                <a:latin typeface="Lexend"/>
+              </a:rPr>
+              <a:t>Top:  </a:t>
+            </a:r>
+          </a:p>
+        </p:txBody>
+      </p:sp>
+      <p:pic>
+        <p:nvPicPr>
+          <p:cNvPr id="10" name="Picture 9" descr="7cb6b0e37124900a.png"/>
+          <p:cNvPicPr>
+            <a:picLocks noChangeAspect="1"/>
+          </p:cNvPicPr>
+          <p:nvPr/>
+        </p:nvPicPr>
+        <p:blipFill>
+          <a:blip r:embed="rId3"/>
+          <a:stretch>
+            <a:fillRect/>
+          </a:stretch>
+        </p:blipFill>
+        <p:spPr>
+          <a:xfrm>
+            <a:off x="4622333" y="3624072"/>
+            <a:ext cx="3776472" cy="313944"/>
+          </a:xfrm>
+          <a:prstGeom prst="rect">
+            <a:avLst/>
+          </a:prstGeom>
+        </p:spPr>
+      </p:pic>
+      <p:sp>
+        <p:nvSpPr>
+          <p:cNvPr id="11" name="TextBox 10"/>
+          <p:cNvSpPr txBox="1"/>
+          <p:nvPr/>
+        </p:nvSpPr>
+        <p:spPr>
+          <a:xfrm>
+            <a:off x="3762714" y="4055363"/>
+            <a:ext cx="1583270" cy="457200"/>
+          </a:xfrm>
+          <a:prstGeom prst="rect">
+            <a:avLst/>
+          </a:prstGeom>
+          <a:noFill/>
+        </p:spPr>
+        <p:txBody>
+          <a:bodyPr wrap="none" lIns="45720" rIns="45720" tIns="18288" bIns="18288" anchor="ctr">
+            <a:noAutofit/>
+          </a:bodyPr>
+          <a:lstStyle/>
+          <a:p>
+            <a:pPr algn="l"/>
+            <a:r>
+              <a:rPr sz="2330" b="0" i="0">
+                <a:solidFill>
+                  <a:srgbClr val="1A1A1A"/>
+                </a:solidFill>
+                <a:latin typeface="Lexend"/>
+              </a:rPr>
+              <a:t>Bottom:  </a:t>
+            </a:r>
+          </a:p>
+        </p:txBody>
+      </p:sp>
+      <p:pic>
+        <p:nvPicPr>
+          <p:cNvPr id="12" name="Picture 11" descr="7fc1a3bd4f31f497.png"/>
+          <p:cNvPicPr>
+            <a:picLocks noChangeAspect="1"/>
+          </p:cNvPicPr>
+          <p:nvPr/>
+        </p:nvPicPr>
+        <p:blipFill>
+          <a:blip r:embed="rId4"/>
+          <a:stretch>
+            <a:fillRect/>
+          </a:stretch>
+        </p:blipFill>
+        <p:spPr>
+          <a:xfrm>
+            <a:off x="5208824" y="4126992"/>
+            <a:ext cx="1103376" cy="313944"/>
+          </a:xfrm>
+          <a:prstGeom prst="rect">
+            <a:avLst/>
+          </a:prstGeom>
+        </p:spPr>
+      </p:pic>
+      <p:pic>
+        <p:nvPicPr>
+          <p:cNvPr id="13" name="Picture 12" descr="9f85f887b8d2d3a5.png"/>
+          <p:cNvPicPr>
+            <a:picLocks noChangeAspect="1"/>
+          </p:cNvPicPr>
+          <p:nvPr/>
+        </p:nvPicPr>
+        <p:blipFill>
+          <a:blip r:embed="rId5"/>
+          <a:stretch>
+            <a:fillRect/>
+          </a:stretch>
+        </p:blipFill>
+        <p:spPr>
+          <a:xfrm>
+            <a:off x="3817578" y="4632960"/>
+            <a:ext cx="1469136" cy="307848"/>
+          </a:xfrm>
+          <a:prstGeom prst="rect">
+            <a:avLst/>
+          </a:prstGeom>
+        </p:spPr>
+      </p:pic>
+      <p:sp>
+        <p:nvSpPr>
+          <p:cNvPr id="14" name="TextBox 13"/>
+          <p:cNvSpPr txBox="1"/>
+          <p:nvPr/>
+        </p:nvSpPr>
+        <p:spPr>
+          <a:xfrm>
+            <a:off x="777240" y="5129784"/>
             <a:ext cx="10607040" cy="548640"/>
           </a:xfrm>
           <a:prstGeom prst="rect">
@@ -12139,11 +12468,11 @@
           <a:p>
             <a:pPr algn="ctr"/>
             <a:r>
-              <a:rPr sz="3200" b="1" i="0">
+              <a:rPr sz="3040" b="1" i="0">
                 <a:solidFill>
                   <a:srgbClr val="9E1B32"/>
                 </a:solidFill>
-                <a:latin typeface="Century Schoolbook"/>
+                <a:latin typeface="Lexend"/>
               </a:rPr>
               <a:t>Answer:   −64</a:t>
             </a:r>
@@ -12192,11 +12521,11 @@
           <a:p>
             <a:pPr algn="l"/>
             <a:r>
-              <a:rPr sz="3400" b="1" i="0">
+              <a:rPr sz="3229" b="1" i="0">
                 <a:solidFill>
                   <a:srgbClr val="1A1A1A"/>
                 </a:solidFill>
-                <a:latin typeface="Century Schoolbook"/>
+                <a:latin typeface="Lexend"/>
               </a:rPr>
               <a:t>Whiteboards   ·   Question 9 of 9</a:t>
             </a:r>
@@ -12332,11 +12661,11 @@
           <a:p>
             <a:pPr algn="l"/>
             <a:r>
-              <a:rPr sz="1100" b="0" i="1">
+              <a:rPr sz="1040" b="0" i="0">
                 <a:solidFill>
                   <a:srgbClr val="6B6B6B"/>
                 </a:solidFill>
-                <a:latin typeface="Century Schoolbook"/>
+                <a:latin typeface="Lexend"/>
               </a:rPr>
               <a:t>Grade 7 Accelerated · Unit 3 · Lesson 3 — Exponential Expressions</a:t>
             </a:r>
@@ -12367,11 +12696,11 @@
           <a:p>
             <a:pPr algn="r"/>
             <a:r>
-              <a:rPr sz="1100" b="0" i="0">
+              <a:rPr sz="1040" b="0" i="0">
                 <a:solidFill>
                   <a:srgbClr val="6B6B6B"/>
                 </a:solidFill>
-                <a:latin typeface="Century Schoolbook"/>
+                <a:latin typeface="Lexend"/>
               </a:rPr>
               <a:t>31</a:t>
             </a:r>
@@ -12386,8 +12715,8 @@
         </p:nvSpPr>
         <p:spPr>
           <a:xfrm>
-            <a:off x="1176876" y="2369820"/>
-            <a:ext cx="2867900" cy="457200"/>
+            <a:off x="1292037" y="2362199"/>
+            <a:ext cx="2771239" cy="457200"/>
           </a:xfrm>
           <a:prstGeom prst="rect">
             <a:avLst/>
@@ -12402,11 +12731,11 @@
           <a:p>
             <a:pPr algn="l"/>
             <a:r>
-              <a:rPr sz="2600" b="0" i="0">
+              <a:rPr sz="2470" b="0" i="0">
                 <a:solidFill>
                   <a:srgbClr val="1A1A1A"/>
                 </a:solidFill>
-                <a:latin typeface="Century Schoolbook"/>
+                <a:latin typeface="Lexend"/>
               </a:rPr>
               <a:t>Winston writes  </a:t>
             </a:r>
@@ -12415,7 +12744,7 @@
       </p:sp>
       <p:pic>
         <p:nvPicPr>
-          <p:cNvPr id="9" name="Picture 8" descr="8510a940fc60582e.png"/>
+          <p:cNvPr id="9" name="Picture 8" descr="c980b6f8e4155c31.png"/>
           <p:cNvPicPr>
             <a:picLocks noChangeAspect="1"/>
           </p:cNvPicPr>
@@ -12429,8 +12758,8 @@
         </p:blipFill>
         <p:spPr>
           <a:xfrm>
-            <a:off x="3907616" y="2194560"/>
-            <a:ext cx="2185416" cy="807720"/>
+            <a:off x="3926116" y="2196083"/>
+            <a:ext cx="2170176" cy="789432"/>
           </a:xfrm>
           <a:prstGeom prst="rect">
             <a:avLst/>
@@ -12445,8 +12774,8 @@
         </p:nvSpPr>
         <p:spPr>
           <a:xfrm>
-            <a:off x="6093032" y="2369820"/>
-            <a:ext cx="2925902" cy="457200"/>
+            <a:off x="6096292" y="2362199"/>
+            <a:ext cx="2862460" cy="457200"/>
           </a:xfrm>
           <a:prstGeom prst="rect">
             <a:avLst/>
@@ -12461,11 +12790,11 @@
           <a:p>
             <a:pPr algn="l"/>
             <a:r>
-              <a:rPr sz="2600" b="0" i="0">
+              <a:rPr sz="2470" b="0" i="0">
                 <a:solidFill>
                   <a:srgbClr val="1A1A1A"/>
                 </a:solidFill>
-                <a:latin typeface="Century Schoolbook"/>
+                <a:latin typeface="Lexend"/>
               </a:rPr>
               <a:t>.   Yvette writes  </a:t>
             </a:r>
@@ -12474,7 +12803,7 @@
       </p:sp>
       <p:pic>
         <p:nvPicPr>
-          <p:cNvPr id="11" name="Picture 10" descr="895c1949fc6ae630.png"/>
+          <p:cNvPr id="11" name="Picture 10" descr="149a6d7e3b789f2e.png"/>
           <p:cNvPicPr>
             <a:picLocks noChangeAspect="1"/>
           </p:cNvPicPr>
@@ -12488,8 +12817,8 @@
         </p:blipFill>
         <p:spPr>
           <a:xfrm>
-            <a:off x="8881775" y="2194560"/>
-            <a:ext cx="1932432" cy="807720"/>
+            <a:off x="8821592" y="2194560"/>
+            <a:ext cx="1898904" cy="792480"/>
           </a:xfrm>
           <a:prstGeom prst="rect">
             <a:avLst/>
@@ -12504,8 +12833,8 @@
         </p:nvSpPr>
         <p:spPr>
           <a:xfrm>
-            <a:off x="10814207" y="2369820"/>
-            <a:ext cx="307595" cy="457200"/>
+            <a:off x="10720496" y="2362199"/>
+            <a:ext cx="286146" cy="457200"/>
           </a:xfrm>
           <a:prstGeom prst="rect">
             <a:avLst/>
@@ -12520,11 +12849,11 @@
           <a:p>
             <a:pPr algn="l"/>
             <a:r>
-              <a:rPr sz="2600" b="0" i="0">
+              <a:rPr sz="2470" b="0" i="0">
                 <a:solidFill>
                   <a:srgbClr val="1A1A1A"/>
                 </a:solidFill>
-                <a:latin typeface="Century Schoolbook"/>
+                <a:latin typeface="Lexend"/>
               </a:rPr>
               <a:t>.</a:t>
             </a:r>
@@ -12539,7 +12868,7 @@
         </p:nvSpPr>
         <p:spPr>
           <a:xfrm>
-            <a:off x="777240" y="3276599"/>
+            <a:off x="777240" y="3261360"/>
             <a:ext cx="10607040" cy="465151"/>
           </a:xfrm>
           <a:prstGeom prst="rect">
@@ -12555,11 +12884,11 @@
           <a:p>
             <a:pPr algn="ctr"/>
             <a:r>
-              <a:rPr sz="2600" b="0" i="0">
+              <a:rPr sz="2470" b="0" i="0">
                 <a:solidFill>
                   <a:srgbClr val="1A1A1A"/>
                 </a:solidFill>
-                <a:latin typeface="Century Schoolbook"/>
+                <a:latin typeface="Lexend"/>
               </a:rPr>
               <a:t>Do they get the same value? Explain.</a:t>
             </a:r>
@@ -12590,11 +12919,11 @@
           <a:p>
             <a:pPr algn="ctr"/>
             <a:r>
-              <a:rPr sz="2600" b="1" i="0">
+              <a:rPr sz="2470" b="1" i="0">
                 <a:solidFill>
                   <a:srgbClr val="1A1A1A"/>
                 </a:solidFill>
-                <a:latin typeface="Century Schoolbook"/>
+                <a:latin typeface="Lexend"/>
               </a:rPr>
               <a:t>Write your answer in sentences.</a:t>
             </a:r>
@@ -12643,11 +12972,11 @@
           <a:p>
             <a:pPr algn="l"/>
             <a:r>
-              <a:rPr sz="3400" b="1" i="0">
+              <a:rPr sz="3229" b="1" i="0">
                 <a:solidFill>
                   <a:srgbClr val="1A1A1A"/>
                 </a:solidFill>
-                <a:latin typeface="Century Schoolbook"/>
+                <a:latin typeface="Lexend"/>
               </a:rPr>
               <a:t>Whiteboards   ·   Question 9 of 9</a:t>
             </a:r>
@@ -12783,11 +13112,11 @@
           <a:p>
             <a:pPr algn="l"/>
             <a:r>
-              <a:rPr sz="1100" b="0" i="1">
+              <a:rPr sz="1040" b="0" i="0">
                 <a:solidFill>
                   <a:srgbClr val="6B6B6B"/>
                 </a:solidFill>
-                <a:latin typeface="Century Schoolbook"/>
+                <a:latin typeface="Lexend"/>
               </a:rPr>
               <a:t>Grade 7 Accelerated · Unit 3 · Lesson 3 — Exponential Expressions</a:t>
             </a:r>
@@ -12818,11 +13147,11 @@
           <a:p>
             <a:pPr algn="r"/>
             <a:r>
-              <a:rPr sz="1100" b="0" i="0">
+              <a:rPr sz="1040" b="0" i="0">
                 <a:solidFill>
                   <a:srgbClr val="6B6B6B"/>
                 </a:solidFill>
-                <a:latin typeface="Century Schoolbook"/>
+                <a:latin typeface="Lexend"/>
               </a:rPr>
               <a:t>32</a:t>
             </a:r>
@@ -12837,8 +13166,8 @@
         </p:nvSpPr>
         <p:spPr>
           <a:xfrm>
-            <a:off x="1178400" y="2276856"/>
-            <a:ext cx="2867900" cy="457200"/>
+            <a:off x="1290513" y="2270760"/>
+            <a:ext cx="2771239" cy="457200"/>
           </a:xfrm>
           <a:prstGeom prst="rect">
             <a:avLst/>
@@ -12853,11 +13182,11 @@
           <a:p>
             <a:pPr algn="l"/>
             <a:r>
-              <a:rPr sz="2600" b="0" i="0">
+              <a:rPr sz="2470" b="0" i="0">
                 <a:solidFill>
                   <a:srgbClr val="1A1A1A"/>
                 </a:solidFill>
-                <a:latin typeface="Century Schoolbook"/>
+                <a:latin typeface="Lexend"/>
               </a:rPr>
               <a:t>Winston writes  </a:t>
             </a:r>
@@ -12866,7 +13195,7 @@
       </p:sp>
       <p:pic>
         <p:nvPicPr>
-          <p:cNvPr id="9" name="Picture 8" descr="7499f9d1d2ab2e70.png"/>
+          <p:cNvPr id="9" name="Picture 8" descr="e64c2044df877351.png"/>
           <p:cNvPicPr>
             <a:picLocks noChangeAspect="1"/>
           </p:cNvPicPr>
@@ -12880,8 +13209,8 @@
         </p:blipFill>
         <p:spPr>
           <a:xfrm>
-            <a:off x="3909140" y="2103120"/>
-            <a:ext cx="2188464" cy="804672"/>
+            <a:off x="3924592" y="2104644"/>
+            <a:ext cx="2176272" cy="789432"/>
           </a:xfrm>
           <a:prstGeom prst="rect">
             <a:avLst/>
@@ -12896,8 +13225,8 @@
         </p:nvSpPr>
         <p:spPr>
           <a:xfrm>
-            <a:off x="6097604" y="2276856"/>
-            <a:ext cx="2925902" cy="457200"/>
+            <a:off x="6100864" y="2270760"/>
+            <a:ext cx="2862460" cy="457200"/>
           </a:xfrm>
           <a:prstGeom prst="rect">
             <a:avLst/>
@@ -12912,11 +13241,11 @@
           <a:p>
             <a:pPr algn="l"/>
             <a:r>
-              <a:rPr sz="2600" b="0" i="0">
+              <a:rPr sz="2470" b="0" i="0">
                 <a:solidFill>
                   <a:srgbClr val="1A1A1A"/>
                 </a:solidFill>
-                <a:latin typeface="Century Schoolbook"/>
+                <a:latin typeface="Lexend"/>
               </a:rPr>
               <a:t>.   Yvette writes  </a:t>
             </a:r>
@@ -12925,7 +13254,7 @@
       </p:sp>
       <p:pic>
         <p:nvPicPr>
-          <p:cNvPr id="11" name="Picture 10" descr="dc00211af1d70f1b.png"/>
+          <p:cNvPr id="11" name="Picture 10" descr="cee0462912012dcd.png"/>
           <p:cNvPicPr>
             <a:picLocks noChangeAspect="1"/>
           </p:cNvPicPr>
@@ -12939,8 +13268,8 @@
         </p:blipFill>
         <p:spPr>
           <a:xfrm>
-            <a:off x="8886347" y="2103120"/>
-            <a:ext cx="1926335" cy="804672"/>
+            <a:off x="8826164" y="2103120"/>
+            <a:ext cx="1895856" cy="792480"/>
           </a:xfrm>
           <a:prstGeom prst="rect">
             <a:avLst/>
@@ -12955,8 +13284,8 @@
         </p:nvSpPr>
         <p:spPr>
           <a:xfrm>
-            <a:off x="10812683" y="2276856"/>
-            <a:ext cx="307595" cy="457200"/>
+            <a:off x="10722020" y="2270760"/>
+            <a:ext cx="286146" cy="457200"/>
           </a:xfrm>
           <a:prstGeom prst="rect">
             <a:avLst/>
@@ -12971,11 +13300,11 @@
           <a:p>
             <a:pPr algn="l"/>
             <a:r>
-              <a:rPr sz="2600" b="0" i="0">
+              <a:rPr sz="2470" b="0" i="0">
                 <a:solidFill>
                   <a:srgbClr val="1A1A1A"/>
                 </a:solidFill>
-                <a:latin typeface="Century Schoolbook"/>
+                <a:latin typeface="Lexend"/>
               </a:rPr>
               <a:t>.</a:t>
             </a:r>
@@ -12990,7 +13319,7 @@
         </p:nvSpPr>
         <p:spPr>
           <a:xfrm>
-            <a:off x="777240" y="3182111"/>
+            <a:off x="777240" y="3169919"/>
             <a:ext cx="10607040" cy="465151"/>
           </a:xfrm>
           <a:prstGeom prst="rect">
@@ -13006,11 +13335,11 @@
           <a:p>
             <a:pPr algn="ctr"/>
             <a:r>
-              <a:rPr sz="2600" b="0" i="0">
+              <a:rPr sz="2470" b="0" i="0">
                 <a:solidFill>
                   <a:srgbClr val="1A1A1A"/>
                 </a:solidFill>
-                <a:latin typeface="Century Schoolbook"/>
+                <a:latin typeface="Lexend"/>
               </a:rPr>
               <a:t>Do they get the same value? Explain.</a:t>
             </a:r>
@@ -13025,7 +13354,149 @@
         </p:nvSpPr>
         <p:spPr>
           <a:xfrm>
-            <a:off x="777240" y="4663440"/>
+            <a:off x="4324019" y="3795091"/>
+            <a:ext cx="1690777" cy="457200"/>
+          </a:xfrm>
+          <a:prstGeom prst="rect">
+            <a:avLst/>
+          </a:prstGeom>
+          <a:noFill/>
+        </p:spPr>
+        <p:txBody>
+          <a:bodyPr wrap="none" lIns="45720" rIns="45720" tIns="18288" bIns="18288" anchor="ctr">
+            <a:noAutofit/>
+          </a:bodyPr>
+          <a:lstStyle/>
+          <a:p>
+            <a:pPr algn="l"/>
+            <a:r>
+              <a:rPr sz="2330" b="0" i="0">
+                <a:solidFill>
+                  <a:srgbClr val="1A1A1A"/>
+                </a:solidFill>
+                <a:latin typeface="Lexend"/>
+              </a:rPr>
+              <a:t>Winston:  </a:t>
+            </a:r>
+          </a:p>
+        </p:txBody>
+      </p:sp>
+      <p:pic>
+        <p:nvPicPr>
+          <p:cNvPr id="15" name="Picture 14" descr="39098cfa8576ec81.png"/>
+          <p:cNvPicPr>
+            <a:picLocks noChangeAspect="1"/>
+          </p:cNvPicPr>
+          <p:nvPr/>
+        </p:nvPicPr>
+        <p:blipFill>
+          <a:blip r:embed="rId4"/>
+          <a:stretch>
+            <a:fillRect/>
+          </a:stretch>
+        </p:blipFill>
+        <p:spPr>
+          <a:xfrm>
+            <a:off x="5877636" y="3866719"/>
+            <a:ext cx="1962911" cy="313944"/>
+          </a:xfrm>
+          <a:prstGeom prst="rect">
+            <a:avLst/>
+          </a:prstGeom>
+        </p:spPr>
+      </p:pic>
+      <p:sp>
+        <p:nvSpPr>
+          <p:cNvPr id="16" name="TextBox 15"/>
+          <p:cNvSpPr txBox="1"/>
+          <p:nvPr/>
+        </p:nvSpPr>
+        <p:spPr>
+          <a:xfrm>
+            <a:off x="4324019" y="4395547"/>
+            <a:ext cx="1441943" cy="457200"/>
+          </a:xfrm>
+          <a:prstGeom prst="rect">
+            <a:avLst/>
+          </a:prstGeom>
+          <a:noFill/>
+        </p:spPr>
+        <p:txBody>
+          <a:bodyPr wrap="none" lIns="45720" rIns="45720" tIns="18288" bIns="18288" anchor="ctr">
+            <a:noAutofit/>
+          </a:bodyPr>
+          <a:lstStyle/>
+          <a:p>
+            <a:pPr algn="l"/>
+            <a:r>
+              <a:rPr sz="2330" b="0" i="0">
+                <a:solidFill>
+                  <a:srgbClr val="1A1A1A"/>
+                </a:solidFill>
+                <a:latin typeface="Lexend"/>
+              </a:rPr>
+              <a:t>Yvette:  </a:t>
+            </a:r>
+          </a:p>
+        </p:txBody>
+      </p:sp>
+      <p:pic>
+        <p:nvPicPr>
+          <p:cNvPr id="17" name="Picture 16" descr="c0e6871a3ee6bdb1.png"/>
+          <p:cNvPicPr>
+            <a:picLocks noChangeAspect="1"/>
+          </p:cNvPicPr>
+          <p:nvPr/>
+        </p:nvPicPr>
+        <p:blipFill>
+          <a:blip r:embed="rId5"/>
+          <a:stretch>
+            <a:fillRect/>
+          </a:stretch>
+        </p:blipFill>
+        <p:spPr>
+          <a:xfrm>
+            <a:off x="5628802" y="4320871"/>
+            <a:ext cx="2069591" cy="606552"/>
+          </a:xfrm>
+          <a:prstGeom prst="rect">
+            <a:avLst/>
+          </a:prstGeom>
+        </p:spPr>
+      </p:pic>
+      <p:pic>
+        <p:nvPicPr>
+          <p:cNvPr id="18" name="Picture 17" descr="8539984585d0f2a0.png"/>
+          <p:cNvPicPr>
+            <a:picLocks noChangeAspect="1"/>
+          </p:cNvPicPr>
+          <p:nvPr/>
+        </p:nvPicPr>
+        <p:blipFill>
+          <a:blip r:embed="rId6"/>
+          <a:stretch>
+            <a:fillRect/>
+          </a:stretch>
+        </p:blipFill>
+        <p:spPr>
+          <a:xfrm>
+            <a:off x="4378883" y="5095063"/>
+            <a:ext cx="890016" cy="259080"/>
+          </a:xfrm>
+          <a:prstGeom prst="rect">
+            <a:avLst/>
+          </a:prstGeom>
+        </p:spPr>
+      </p:pic>
+      <p:sp>
+        <p:nvSpPr>
+          <p:cNvPr id="19" name="TextBox 18"/>
+          <p:cNvSpPr txBox="1"/>
+          <p:nvPr/>
+        </p:nvSpPr>
+        <p:spPr>
+          <a:xfrm>
+            <a:off x="777240" y="5567503"/>
             <a:ext cx="10607040" cy="548640"/>
           </a:xfrm>
           <a:prstGeom prst="rect">
@@ -13041,29 +13512,29 @@
           <a:p>
             <a:pPr algn="ctr"/>
             <a:r>
-              <a:rPr sz="3200" b="1" i="0">
+              <a:rPr sz="3040" b="1" i="0">
                 <a:solidFill>
                   <a:srgbClr val="9E1B32"/>
                 </a:solidFill>
-                <a:latin typeface="Century Schoolbook"/>
+                <a:latin typeface="Lexend"/>
               </a:rPr>
               <a:t>Answer:   Yes — both give 2</a:t>
             </a:r>
             <a:r>
-              <a:rPr sz="3200" b="1" i="0" baseline="30000">
+              <a:rPr sz="3040" b="1" i="0" baseline="30000">
                 <a:solidFill>
                   <a:srgbClr val="9E1B32"/>
                 </a:solidFill>
-                <a:latin typeface="Century Schoolbook"/>
+                <a:latin typeface="Lexend"/>
               </a:rPr>
               <a:t>6</a:t>
             </a:r>
             <a:r>
-              <a:rPr sz="3200" b="1" i="0">
+              <a:rPr sz="3040" b="1" i="0">
                 <a:solidFill>
                   <a:srgbClr val="9E1B32"/>
                 </a:solidFill>
-                <a:latin typeface="Century Schoolbook"/>
+                <a:latin typeface="Lexend"/>
               </a:rPr>
               <a:t> = 64</a:t>
             </a:r>
@@ -13112,11 +13583,11 @@
           <a:p>
             <a:pPr algn="l"/>
             <a:r>
-              <a:rPr sz="3600" b="1" i="0">
+              <a:rPr sz="3420" b="1" i="0">
                 <a:solidFill>
                   <a:srgbClr val="1A1A1A"/>
                 </a:solidFill>
-                <a:latin typeface="Century Schoolbook"/>
+                <a:latin typeface="Lexend"/>
               </a:rPr>
               <a:t>Independent Set</a:t>
             </a:r>
@@ -13252,11 +13723,11 @@
           <a:p>
             <a:pPr algn="l"/>
             <a:r>
-              <a:rPr sz="1100" b="0" i="1">
+              <a:rPr sz="1040" b="0" i="0">
                 <a:solidFill>
                   <a:srgbClr val="6B6B6B"/>
                 </a:solidFill>
-                <a:latin typeface="Century Schoolbook"/>
+                <a:latin typeface="Lexend"/>
               </a:rPr>
               <a:t>Grade 7 Accelerated · Unit 3 · Lesson 3 — Exponential Expressions</a:t>
             </a:r>
@@ -13287,11 +13758,11 @@
           <a:p>
             <a:pPr algn="r"/>
             <a:r>
-              <a:rPr sz="1100" b="0" i="0">
+              <a:rPr sz="1040" b="0" i="0">
                 <a:solidFill>
                   <a:srgbClr val="6B6B6B"/>
                 </a:solidFill>
-                <a:latin typeface="Century Schoolbook"/>
+                <a:latin typeface="Lexend"/>
               </a:rPr>
               <a:t>33</a:t>
             </a:r>
@@ -13306,7 +13777,7 @@
         </p:nvSpPr>
         <p:spPr>
           <a:xfrm>
-            <a:off x="960120" y="1616964"/>
+            <a:off x="960120" y="1610868"/>
             <a:ext cx="548640" cy="457200"/>
           </a:xfrm>
           <a:prstGeom prst="rect">
@@ -13322,11 +13793,11 @@
           <a:p>
             <a:pPr algn="l"/>
             <a:r>
-              <a:rPr sz="2300" b="1" i="0">
+              <a:rPr sz="2180" b="1" i="0">
                 <a:solidFill>
                   <a:srgbClr val="0B5394"/>
                 </a:solidFill>
-                <a:latin typeface="Century Schoolbook"/>
+                <a:latin typeface="Lexend"/>
               </a:rPr>
               <a:t>1.</a:t>
             </a:r>
@@ -13341,8 +13812,8 @@
         </p:nvSpPr>
         <p:spPr>
           <a:xfrm>
-            <a:off x="1554480" y="1616964"/>
-            <a:ext cx="2548440" cy="457200"/>
+            <a:off x="1554480" y="1610868"/>
+            <a:ext cx="2460558" cy="457200"/>
           </a:xfrm>
           <a:prstGeom prst="rect">
             <a:avLst/>
@@ -13357,11 +13828,11 @@
           <a:p>
             <a:pPr algn="l"/>
             <a:r>
-              <a:rPr sz="2300" b="0" i="0">
+              <a:rPr sz="2180" b="0" i="0">
                 <a:solidFill>
                   <a:srgbClr val="1A1A1A"/>
                 </a:solidFill>
-                <a:latin typeface="Century Schoolbook"/>
+                <a:latin typeface="Lexend"/>
               </a:rPr>
               <a:t>Find the value.  </a:t>
             </a:r>
@@ -13370,7 +13841,7 @@
       </p:sp>
       <p:pic>
         <p:nvPicPr>
-          <p:cNvPr id="10" name="Picture 9" descr="c3712374923f9761.png"/>
+          <p:cNvPr id="10" name="Picture 9" descr="c7e89364d519cf49.png"/>
           <p:cNvPicPr>
             <a:picLocks noChangeAspect="1"/>
           </p:cNvPicPr>
@@ -13384,8 +13855,8 @@
         </p:blipFill>
         <p:spPr>
           <a:xfrm>
-            <a:off x="3965760" y="1517904"/>
-            <a:ext cx="795528" cy="655320"/>
+            <a:off x="3877878" y="1517904"/>
+            <a:ext cx="862584" cy="643128"/>
           </a:xfrm>
           <a:prstGeom prst="rect">
             <a:avLst/>
@@ -13400,7 +13871,7 @@
         </p:nvSpPr>
         <p:spPr>
           <a:xfrm>
-            <a:off x="960120" y="2333244"/>
+            <a:off x="960120" y="2321052"/>
             <a:ext cx="548640" cy="457200"/>
           </a:xfrm>
           <a:prstGeom prst="rect">
@@ -13416,11 +13887,11 @@
           <a:p>
             <a:pPr algn="l"/>
             <a:r>
-              <a:rPr sz="2300" b="1" i="0">
+              <a:rPr sz="2180" b="1" i="0">
                 <a:solidFill>
                   <a:srgbClr val="0B5394"/>
                 </a:solidFill>
-                <a:latin typeface="Century Schoolbook"/>
+                <a:latin typeface="Lexend"/>
               </a:rPr>
               <a:t>2.</a:t>
             </a:r>
@@ -13435,8 +13906,8 @@
         </p:nvSpPr>
         <p:spPr>
           <a:xfrm>
-            <a:off x="1554480" y="2333244"/>
-            <a:ext cx="2548440" cy="457200"/>
+            <a:off x="1554480" y="2321052"/>
+            <a:ext cx="2460558" cy="457200"/>
           </a:xfrm>
           <a:prstGeom prst="rect">
             <a:avLst/>
@@ -13451,11 +13922,11 @@
           <a:p>
             <a:pPr algn="l"/>
             <a:r>
-              <a:rPr sz="2300" b="0" i="0">
+              <a:rPr sz="2180" b="0" i="0">
                 <a:solidFill>
                   <a:srgbClr val="1A1A1A"/>
                 </a:solidFill>
-                <a:latin typeface="Century Schoolbook"/>
+                <a:latin typeface="Lexend"/>
               </a:rPr>
               <a:t>Find the value.  </a:t>
             </a:r>
@@ -13464,7 +13935,7 @@
       </p:sp>
       <p:pic>
         <p:nvPicPr>
-          <p:cNvPr id="13" name="Picture 12" descr="838223a6e608c3dd.png"/>
+          <p:cNvPr id="13" name="Picture 12" descr="4708afb69f8d23f6.png"/>
           <p:cNvPicPr>
             <a:picLocks noChangeAspect="1"/>
           </p:cNvPicPr>
@@ -13478,8 +13949,8 @@
         </p:blipFill>
         <p:spPr>
           <a:xfrm>
-            <a:off x="3965760" y="2394204"/>
-            <a:ext cx="1109472" cy="335280"/>
+            <a:off x="3877878" y="2383536"/>
+            <a:ext cx="1121664" cy="332232"/>
           </a:xfrm>
           <a:prstGeom prst="rect">
             <a:avLst/>
@@ -13494,7 +13965,7 @@
         </p:nvSpPr>
         <p:spPr>
           <a:xfrm>
-            <a:off x="960120" y="3057144"/>
+            <a:off x="960120" y="3032760"/>
             <a:ext cx="548640" cy="457200"/>
           </a:xfrm>
           <a:prstGeom prst="rect">
@@ -13510,11 +13981,11 @@
           <a:p>
             <a:pPr algn="l"/>
             <a:r>
-              <a:rPr sz="2300" b="1" i="0">
+              <a:rPr sz="2180" b="1" i="0">
                 <a:solidFill>
                   <a:srgbClr val="0B5394"/>
                 </a:solidFill>
-                <a:latin typeface="Century Schoolbook"/>
+                <a:latin typeface="Lexend"/>
               </a:rPr>
               <a:t>3.</a:t>
             </a:r>
@@ -13529,8 +14000,8 @@
         </p:nvSpPr>
         <p:spPr>
           <a:xfrm>
-            <a:off x="1554480" y="3057144"/>
-            <a:ext cx="3168165" cy="457200"/>
+            <a:off x="1554480" y="3032760"/>
+            <a:ext cx="3169643" cy="457200"/>
           </a:xfrm>
           <a:prstGeom prst="rect">
             <a:avLst/>
@@ -13545,11 +14016,11 @@
           <a:p>
             <a:pPr algn="l"/>
             <a:r>
-              <a:rPr sz="2300" b="0" i="0">
+              <a:rPr sz="2180" b="0" i="0">
                 <a:solidFill>
                   <a:srgbClr val="1A1A1A"/>
                 </a:solidFill>
-                <a:latin typeface="Century Schoolbook"/>
+                <a:latin typeface="Lexend"/>
               </a:rPr>
               <a:t>Write as one power.  </a:t>
             </a:r>
@@ -13558,7 +14029,7 @@
       </p:sp>
       <p:pic>
         <p:nvPicPr>
-          <p:cNvPr id="16" name="Picture 15" descr="c3aa4635365ee7a4.png"/>
+          <p:cNvPr id="16" name="Picture 15" descr="9089217fb5b948da.png"/>
           <p:cNvPicPr>
             <a:picLocks noChangeAspect="1"/>
           </p:cNvPicPr>
@@ -13572,8 +14043,8 @@
         </p:blipFill>
         <p:spPr>
           <a:xfrm>
-            <a:off x="4585485" y="2950464"/>
-            <a:ext cx="801624" cy="670560"/>
+            <a:off x="4586963" y="2938272"/>
+            <a:ext cx="819912" cy="646176"/>
           </a:xfrm>
           <a:prstGeom prst="rect">
             <a:avLst/>
@@ -13588,7 +14059,7 @@
         </p:nvSpPr>
         <p:spPr>
           <a:xfrm>
-            <a:off x="960120" y="3781044"/>
+            <a:off x="960120" y="3744468"/>
             <a:ext cx="548640" cy="457200"/>
           </a:xfrm>
           <a:prstGeom prst="rect">
@@ -13604,11 +14075,11 @@
           <a:p>
             <a:pPr algn="l"/>
             <a:r>
-              <a:rPr sz="2300" b="1" i="0">
+              <a:rPr sz="2180" b="1" i="0">
                 <a:solidFill>
                   <a:srgbClr val="0B5394"/>
                 </a:solidFill>
-                <a:latin typeface="Century Schoolbook"/>
+                <a:latin typeface="Lexend"/>
               </a:rPr>
               <a:t>4.</a:t>
             </a:r>
@@ -13623,8 +14094,8 @@
         </p:nvSpPr>
         <p:spPr>
           <a:xfrm>
-            <a:off x="1554480" y="3781044"/>
-            <a:ext cx="2548440" cy="457200"/>
+            <a:off x="1554480" y="3744468"/>
+            <a:ext cx="2460558" cy="457200"/>
           </a:xfrm>
           <a:prstGeom prst="rect">
             <a:avLst/>
@@ -13639,11 +14110,11 @@
           <a:p>
             <a:pPr algn="l"/>
             <a:r>
-              <a:rPr sz="2300" b="0" i="0">
+              <a:rPr sz="2180" b="0" i="0">
                 <a:solidFill>
                   <a:srgbClr val="1A1A1A"/>
                 </a:solidFill>
-                <a:latin typeface="Century Schoolbook"/>
+                <a:latin typeface="Lexend"/>
               </a:rPr>
               <a:t>Find the value.  </a:t>
             </a:r>
@@ -13652,7 +14123,7 @@
       </p:sp>
       <p:pic>
         <p:nvPicPr>
-          <p:cNvPr id="19" name="Picture 18" descr="f06c6a4d76a6bc03.png"/>
+          <p:cNvPr id="19" name="Picture 18" descr="271b6d25ef87d17b.png"/>
           <p:cNvPicPr>
             <a:picLocks noChangeAspect="1"/>
           </p:cNvPicPr>
@@ -13666,8 +14137,8 @@
         </p:blipFill>
         <p:spPr>
           <a:xfrm>
-            <a:off x="3965760" y="3842004"/>
-            <a:ext cx="1612392" cy="335280"/>
+            <a:off x="3877878" y="3806952"/>
+            <a:ext cx="1624584" cy="332232"/>
           </a:xfrm>
           <a:prstGeom prst="rect">
             <a:avLst/>
@@ -13682,7 +14153,7 @@
         </p:nvSpPr>
         <p:spPr>
           <a:xfrm>
-            <a:off x="960120" y="4556760"/>
+            <a:off x="960120" y="4515611"/>
             <a:ext cx="548640" cy="457200"/>
           </a:xfrm>
           <a:prstGeom prst="rect">
@@ -13698,11 +14169,11 @@
           <a:p>
             <a:pPr algn="l"/>
             <a:r>
-              <a:rPr sz="2300" b="1" i="0">
+              <a:rPr sz="2180" b="1" i="0">
                 <a:solidFill>
                   <a:srgbClr val="0B5394"/>
                 </a:solidFill>
-                <a:latin typeface="Century Schoolbook"/>
+                <a:latin typeface="Lexend"/>
               </a:rPr>
               <a:t>5.</a:t>
             </a:r>
@@ -13717,8 +14188,8 @@
         </p:nvSpPr>
         <p:spPr>
           <a:xfrm>
-            <a:off x="1554480" y="4556760"/>
-            <a:ext cx="2548440" cy="457200"/>
+            <a:off x="1554480" y="4515611"/>
+            <a:ext cx="2460558" cy="457200"/>
           </a:xfrm>
           <a:prstGeom prst="rect">
             <a:avLst/>
@@ -13733,11 +14204,11 @@
           <a:p>
             <a:pPr algn="l"/>
             <a:r>
-              <a:rPr sz="2300" b="0" i="0">
+              <a:rPr sz="2180" b="0" i="0">
                 <a:solidFill>
                   <a:srgbClr val="1A1A1A"/>
                 </a:solidFill>
-                <a:latin typeface="Century Schoolbook"/>
+                <a:latin typeface="Lexend"/>
               </a:rPr>
               <a:t>Find the value.  </a:t>
             </a:r>
@@ -13746,7 +14217,7 @@
       </p:sp>
       <p:pic>
         <p:nvPicPr>
-          <p:cNvPr id="22" name="Picture 21" descr="b0ae21ade1d55a48.png"/>
+          <p:cNvPr id="22" name="Picture 21" descr="4cda08a3e11dfd11.png"/>
           <p:cNvPicPr>
             <a:picLocks noChangeAspect="1"/>
           </p:cNvPicPr>
@@ -13760,8 +14231,8 @@
         </p:blipFill>
         <p:spPr>
           <a:xfrm>
-            <a:off x="3965760" y="4398264"/>
-            <a:ext cx="1688592" cy="774192"/>
+            <a:off x="3877878" y="4361688"/>
+            <a:ext cx="1621536" cy="765048"/>
           </a:xfrm>
           <a:prstGeom prst="rect">
             <a:avLst/>
@@ -13776,7 +14247,7 @@
         </p:nvSpPr>
         <p:spPr>
           <a:xfrm>
-            <a:off x="960120" y="5458968"/>
+            <a:off x="960120" y="5404104"/>
             <a:ext cx="548640" cy="457200"/>
           </a:xfrm>
           <a:prstGeom prst="rect">
@@ -13792,11 +14263,11 @@
           <a:p>
             <a:pPr algn="l"/>
             <a:r>
-              <a:rPr sz="2300" b="1" i="0">
+              <a:rPr sz="2180" b="1" i="0">
                 <a:solidFill>
                   <a:srgbClr val="0B5394"/>
                 </a:solidFill>
-                <a:latin typeface="Century Schoolbook"/>
+                <a:latin typeface="Lexend"/>
               </a:rPr>
               <a:t>6.</a:t>
             </a:r>
@@ -13811,8 +14282,8 @@
         </p:nvSpPr>
         <p:spPr>
           <a:xfrm>
-            <a:off x="1554480" y="5458968"/>
-            <a:ext cx="1841475" cy="457200"/>
+            <a:off x="1554480" y="5404104"/>
+            <a:ext cx="1813370" cy="457200"/>
           </a:xfrm>
           <a:prstGeom prst="rect">
             <a:avLst/>
@@ -13827,11 +14298,11 @@
           <a:p>
             <a:pPr algn="l"/>
             <a:r>
-              <a:rPr sz="2300" b="0" i="0">
+              <a:rPr sz="2180" b="0" i="0">
                 <a:solidFill>
                   <a:srgbClr val="1A1A1A"/>
                 </a:solidFill>
-                <a:latin typeface="Century Schoolbook"/>
+                <a:latin typeface="Lexend"/>
               </a:rPr>
               <a:t>Show that  </a:t>
             </a:r>
@@ -13840,7 +14311,7 @@
       </p:sp>
       <p:pic>
         <p:nvPicPr>
-          <p:cNvPr id="25" name="Picture 24" descr="e88c5dabf2ca6570.png"/>
+          <p:cNvPr id="25" name="Picture 24" descr="ae2b35341e662e17.png"/>
           <p:cNvPicPr>
             <a:picLocks noChangeAspect="1"/>
           </p:cNvPicPr>
@@ -13854,8 +14325,8 @@
         </p:blipFill>
         <p:spPr>
           <a:xfrm>
-            <a:off x="3258795" y="5355336"/>
-            <a:ext cx="975360" cy="664464"/>
+            <a:off x="3230690" y="5309616"/>
+            <a:ext cx="996696" cy="646176"/>
           </a:xfrm>
           <a:prstGeom prst="rect">
             <a:avLst/>
@@ -13870,8 +14341,8 @@
         </p:nvSpPr>
         <p:spPr>
           <a:xfrm>
-            <a:off x="4234155" y="5458968"/>
-            <a:ext cx="1093755" cy="457200"/>
+            <a:off x="4227386" y="5404104"/>
+            <a:ext cx="1087500" cy="457200"/>
           </a:xfrm>
           <a:prstGeom prst="rect">
             <a:avLst/>
@@ -13886,11 +14357,11 @@
           <a:p>
             <a:pPr algn="l"/>
             <a:r>
-              <a:rPr sz="2300" b="0" i="0">
+              <a:rPr sz="2180" b="0" i="0">
                 <a:solidFill>
                   <a:srgbClr val="1A1A1A"/>
                 </a:solidFill>
-                <a:latin typeface="Century Schoolbook"/>
+                <a:latin typeface="Lexend"/>
               </a:rPr>
               <a:t>  and  </a:t>
             </a:r>
@@ -13899,7 +14370,7 @@
       </p:sp>
       <p:pic>
         <p:nvPicPr>
-          <p:cNvPr id="27" name="Picture 26" descr="f77131d9c4c01025.png"/>
+          <p:cNvPr id="27" name="Picture 26" descr="b168ae64df955b71.png"/>
           <p:cNvPicPr>
             <a:picLocks noChangeAspect="1"/>
           </p:cNvPicPr>
@@ -13913,8 +14384,8 @@
         </p:blipFill>
         <p:spPr>
           <a:xfrm>
-            <a:off x="5190750" y="5355336"/>
-            <a:ext cx="469392" cy="664464"/>
+            <a:off x="5177727" y="5311140"/>
+            <a:ext cx="499871" cy="643128"/>
           </a:xfrm>
           <a:prstGeom prst="rect">
             <a:avLst/>
@@ -13929,8 +14400,8 @@
         </p:nvSpPr>
         <p:spPr>
           <a:xfrm>
-            <a:off x="5660142" y="5458968"/>
-            <a:ext cx="3372988" cy="457200"/>
+            <a:off x="5677599" y="5404104"/>
+            <a:ext cx="3387054" cy="457200"/>
           </a:xfrm>
           <a:prstGeom prst="rect">
             <a:avLst/>
@@ -13945,11 +14416,11 @@
           <a:p>
             <a:pPr algn="l"/>
             <a:r>
-              <a:rPr sz="2300" b="0" i="0">
+              <a:rPr sz="2180" b="0" i="0">
                 <a:solidFill>
                   <a:srgbClr val="1A1A1A"/>
                 </a:solidFill>
-                <a:latin typeface="Century Schoolbook"/>
+                <a:latin typeface="Lexend"/>
               </a:rPr>
               <a:t>  have the same value.</a:t>
             </a:r>
@@ -13998,11 +14469,11 @@
           <a:p>
             <a:pPr algn="l"/>
             <a:r>
-              <a:rPr sz="3600" b="1" i="0">
+              <a:rPr sz="3420" b="1" i="0">
                 <a:solidFill>
                   <a:srgbClr val="1A1A1A"/>
                 </a:solidFill>
-                <a:latin typeface="Century Schoolbook"/>
+                <a:latin typeface="Lexend"/>
               </a:rPr>
               <a:t>IXL</a:t>
             </a:r>
@@ -14138,11 +14609,11 @@
           <a:p>
             <a:pPr algn="l"/>
             <a:r>
-              <a:rPr sz="1100" b="0" i="1">
+              <a:rPr sz="1040" b="0" i="0">
                 <a:solidFill>
                   <a:srgbClr val="6B6B6B"/>
                 </a:solidFill>
-                <a:latin typeface="Century Schoolbook"/>
+                <a:latin typeface="Lexend"/>
               </a:rPr>
               <a:t>Grade 7 Accelerated · Unit 3 · Lesson 3 — Exponential Expressions</a:t>
             </a:r>
@@ -14173,11 +14644,11 @@
           <a:p>
             <a:pPr algn="r"/>
             <a:r>
-              <a:rPr sz="1100" b="0" i="0">
+              <a:rPr sz="1040" b="0" i="0">
                 <a:solidFill>
                   <a:srgbClr val="6B6B6B"/>
                 </a:solidFill>
-                <a:latin typeface="Century Schoolbook"/>
+                <a:latin typeface="Lexend"/>
               </a:rPr>
               <a:t>34</a:t>
             </a:r>
@@ -14208,11 +14679,11 @@
           <a:p>
             <a:pPr algn="l"/>
             <a:r>
-              <a:rPr sz="2100" b="1" i="0">
+              <a:rPr sz="1989" b="1" i="0">
                 <a:solidFill>
                   <a:srgbClr val="0B5394"/>
                 </a:solidFill>
-                <a:latin typeface="Century Schoolbook"/>
+                <a:latin typeface="Lexend"/>
               </a:rPr>
               <a:t>1.</a:t>
             </a:r>
@@ -14243,11 +14714,11 @@
           <a:p>
             <a:pPr algn="l"/>
             <a:r>
-              <a:rPr sz="2100" b="0" i="0">
+              <a:rPr sz="1989" b="0" i="0">
                 <a:solidFill>
                   <a:srgbClr val="1A1A1A"/>
                 </a:solidFill>
-                <a:latin typeface="Century Schoolbook"/>
+                <a:latin typeface="Lexend"/>
               </a:rPr>
               <a:t>Open IXL and start today's skills.</a:t>
             </a:r>
@@ -14278,11 +14749,11 @@
           <a:p>
             <a:pPr algn="l"/>
             <a:r>
-              <a:rPr sz="2100" b="1" i="0">
+              <a:rPr sz="1989" b="1" i="0">
                 <a:solidFill>
                   <a:srgbClr val="0B5394"/>
                 </a:solidFill>
-                <a:latin typeface="Century Schoolbook"/>
+                <a:latin typeface="Lexend"/>
               </a:rPr>
               <a:t>2.</a:t>
             </a:r>
@@ -14313,11 +14784,11 @@
           <a:p>
             <a:pPr algn="l"/>
             <a:r>
-              <a:rPr sz="2100" b="0" i="0">
+              <a:rPr sz="1989" b="0" i="0">
                 <a:solidFill>
                   <a:srgbClr val="1A1A1A"/>
                 </a:solidFill>
-                <a:latin typeface="Century Schoolbook"/>
+                <a:latin typeface="Lexend"/>
               </a:rPr>
               <a:t>Work on paper where the question needs work. The answer box does not show it.</a:t>
             </a:r>
@@ -14348,11 +14819,11 @@
           <a:p>
             <a:pPr algn="l"/>
             <a:r>
-              <a:rPr sz="2100" b="1" i="0">
+              <a:rPr sz="1989" b="1" i="0">
                 <a:solidFill>
                   <a:srgbClr val="0B5394"/>
                 </a:solidFill>
-                <a:latin typeface="Century Schoolbook"/>
+                <a:latin typeface="Lexend"/>
               </a:rPr>
               <a:t>3.</a:t>
             </a:r>
@@ -14383,11 +14854,11 @@
           <a:p>
             <a:pPr algn="l"/>
             <a:r>
-              <a:rPr sz="2100" b="0" i="0">
+              <a:rPr sz="1989" b="0" i="0">
                 <a:solidFill>
                   <a:srgbClr val="1A1A1A"/>
                 </a:solidFill>
-                <a:latin typeface="Century Schoolbook"/>
+                <a:latin typeface="Lexend"/>
               </a:rPr>
               <a:t>Every skill listed is required, to a SmartScore of 67. Due at the start of the next class.</a:t>
             </a:r>
@@ -14418,11 +14889,11 @@
           <a:p>
             <a:pPr algn="l"/>
             <a:r>
-              <a:rPr sz="2100" b="1" i="0">
+              <a:rPr sz="1989" b="1" i="0">
                 <a:solidFill>
                   <a:srgbClr val="1A1A1A"/>
                 </a:solidFill>
-                <a:latin typeface="Century Schoolbook"/>
+                <a:latin typeface="Lexend"/>
               </a:rPr>
               <a:t>Today's skills — all required</a:t>
             </a:r>
@@ -14453,11 +14924,11 @@
           <a:p>
             <a:pPr algn="l"/>
             <a:r>
-              <a:rPr sz="1900" b="0" i="0">
+              <a:rPr sz="1810" b="0" i="0">
                 <a:solidFill>
                   <a:srgbClr val="1A1A1A"/>
                 </a:solidFill>
-                <a:latin typeface="Century Schoolbook"/>
+                <a:latin typeface="Lexend"/>
               </a:rPr>
               <a:t>Evaluate expressions using properties of exponents — ZE9</a:t>
             </a:r>
@@ -14506,11 +14977,11 @@
           <a:p>
             <a:pPr algn="l"/>
             <a:r>
-              <a:rPr sz="3600" b="1" i="0">
+              <a:rPr sz="3420" b="1" i="0">
                 <a:solidFill>
                   <a:srgbClr val="1A1A1A"/>
                 </a:solidFill>
-                <a:latin typeface="Century Schoolbook"/>
+                <a:latin typeface="Lexend"/>
               </a:rPr>
               <a:t>Notes</a:t>
             </a:r>
@@ -14646,11 +15117,11 @@
           <a:p>
             <a:pPr algn="l"/>
             <a:r>
-              <a:rPr sz="1100" b="0" i="1">
+              <a:rPr sz="1040" b="0" i="0">
                 <a:solidFill>
                   <a:srgbClr val="6B6B6B"/>
                 </a:solidFill>
-                <a:latin typeface="Century Schoolbook"/>
+                <a:latin typeface="Lexend"/>
               </a:rPr>
               <a:t>Grade 7 Accelerated · Unit 3 · Lesson 3 — Exponential Expressions</a:t>
             </a:r>
@@ -14681,11 +15152,11 @@
           <a:p>
             <a:pPr algn="r"/>
             <a:r>
-              <a:rPr sz="1100" b="0" i="0">
+              <a:rPr sz="1040" b="0" i="0">
                 <a:solidFill>
                   <a:srgbClr val="6B6B6B"/>
                 </a:solidFill>
-                <a:latin typeface="Century Schoolbook"/>
+                <a:latin typeface="Lexend"/>
               </a:rPr>
               <a:t>4</a:t>
             </a:r>
@@ -14716,11 +15187,11 @@
           <a:p>
             <a:pPr algn="l"/>
             <a:r>
-              <a:rPr sz="2500" b="1" i="0">
+              <a:rPr sz="2380" b="1" i="0">
                 <a:solidFill>
                   <a:srgbClr val="1A1A1A"/>
                 </a:solidFill>
-                <a:latin typeface="Century Schoolbook"/>
+                <a:latin typeface="Lexend"/>
               </a:rPr>
               <a:t>I.  The seven laws, in one place</a:t>
             </a:r>
@@ -14793,11 +15264,11 @@
                     <a:p>
                       <a:pPr algn="ctr"/>
                       <a:r>
-                        <a:rPr sz="1600" b="1">
+                        <a:rPr sz="1520" b="1">
                           <a:solidFill>
                             <a:srgbClr val="1A1A1A"/>
                           </a:solidFill>
-                          <a:latin typeface="Century Schoolbook"/>
+                          <a:latin typeface="Lexend"/>
                         </a:rPr>
                         <a:t>Law</a:t>
                       </a:r>
@@ -14840,11 +15311,11 @@
                     <a:p>
                       <a:pPr algn="ctr"/>
                       <a:r>
-                        <a:rPr sz="1600" b="1">
+                        <a:rPr sz="1520" b="1">
                           <a:solidFill>
                             <a:srgbClr val="1A1A1A"/>
                           </a:solidFill>
-                          <a:latin typeface="Century Schoolbook"/>
+                          <a:latin typeface="Lexend"/>
                         </a:rPr>
                         <a:t>Rule</a:t>
                       </a:r>
@@ -14887,11 +15358,11 @@
                     <a:p>
                       <a:pPr algn="ctr"/>
                       <a:r>
-                        <a:rPr sz="1600" b="1">
+                        <a:rPr sz="1520" b="1">
                           <a:solidFill>
                             <a:srgbClr val="1A1A1A"/>
                           </a:solidFill>
-                          <a:latin typeface="Century Schoolbook"/>
+                          <a:latin typeface="Lexend"/>
                         </a:rPr>
                         <a:t>Example</a:t>
                       </a:r>
@@ -14936,11 +15407,11 @@
                     <a:p>
                       <a:pPr algn="ctr"/>
                       <a:r>
-                        <a:rPr sz="1600" b="0">
+                        <a:rPr sz="1520" b="0">
                           <a:solidFill>
                             <a:srgbClr val="1A1A1A"/>
                           </a:solidFill>
-                          <a:latin typeface="Century Schoolbook"/>
+                          <a:latin typeface="Lexend"/>
                         </a:rPr>
                         <a:t>Product of powers</a:t>
                       </a:r>
@@ -14983,56 +15454,56 @@
                     <a:p>
                       <a:pPr algn="ctr"/>
                       <a:r>
-                        <a:rPr sz="1600" b="0">
+                        <a:rPr sz="1520" b="0">
                           <a:solidFill>
                             <a:srgbClr val="1A1A1A"/>
                           </a:solidFill>
-                          <a:latin typeface="Century Schoolbook"/>
+                          <a:latin typeface="Lexend"/>
                         </a:rPr>
                         <a:t>a</a:t>
                       </a:r>
                       <a:r>
-                        <a:rPr sz="1600" b="0" baseline="30000">
+                        <a:rPr sz="1520" b="0" baseline="30000">
                           <a:solidFill>
                             <a:srgbClr val="1A1A1A"/>
                           </a:solidFill>
-                          <a:latin typeface="Century Schoolbook"/>
+                          <a:latin typeface="Lexend"/>
                         </a:rPr>
                         <a:t>m</a:t>
                       </a:r>
                       <a:r>
-                        <a:rPr sz="1600" b="0">
+                        <a:rPr sz="1520" b="0">
                           <a:solidFill>
                             <a:srgbClr val="1A1A1A"/>
                           </a:solidFill>
-                          <a:latin typeface="Century Schoolbook"/>
+                          <a:latin typeface="Lexend"/>
                         </a:rPr>
                         <a:t> · a</a:t>
                       </a:r>
                       <a:r>
-                        <a:rPr sz="1600" b="0" baseline="30000">
+                        <a:rPr sz="1520" b="0" baseline="30000">
                           <a:solidFill>
                             <a:srgbClr val="1A1A1A"/>
                           </a:solidFill>
-                          <a:latin typeface="Century Schoolbook"/>
+                          <a:latin typeface="Lexend"/>
                         </a:rPr>
                         <a:t>n</a:t>
                       </a:r>
                       <a:r>
-                        <a:rPr sz="1600" b="0">
+                        <a:rPr sz="1520" b="0">
                           <a:solidFill>
                             <a:srgbClr val="1A1A1A"/>
                           </a:solidFill>
-                          <a:latin typeface="Century Schoolbook"/>
+                          <a:latin typeface="Lexend"/>
                         </a:rPr>
                         <a:t> = a</a:t>
                       </a:r>
                       <a:r>
-                        <a:rPr sz="1600" b="0" baseline="30000">
+                        <a:rPr sz="1520" b="0" baseline="30000">
                           <a:solidFill>
                             <a:srgbClr val="1A1A1A"/>
                           </a:solidFill>
-                          <a:latin typeface="Century Schoolbook"/>
+                          <a:latin typeface="Lexend"/>
                         </a:rPr>
                         <a:t>m+n</a:t>
                       </a:r>
@@ -15075,56 +15546,56 @@
                     <a:p>
                       <a:pPr algn="ctr"/>
                       <a:r>
-                        <a:rPr sz="1600" b="0">
+                        <a:rPr sz="1520" b="0">
                           <a:solidFill>
                             <a:srgbClr val="1A1A1A"/>
                           </a:solidFill>
-                          <a:latin typeface="Century Schoolbook"/>
+                          <a:latin typeface="Lexend"/>
                         </a:rPr>
                         <a:t>2</a:t>
                       </a:r>
                       <a:r>
-                        <a:rPr sz="1600" b="0" baseline="30000">
+                        <a:rPr sz="1520" b="0" baseline="30000">
                           <a:solidFill>
                             <a:srgbClr val="1A1A1A"/>
                           </a:solidFill>
-                          <a:latin typeface="Century Schoolbook"/>
+                          <a:latin typeface="Lexend"/>
                         </a:rPr>
                         <a:t>3</a:t>
                       </a:r>
                       <a:r>
-                        <a:rPr sz="1600" b="0">
+                        <a:rPr sz="1520" b="0">
                           <a:solidFill>
                             <a:srgbClr val="1A1A1A"/>
                           </a:solidFill>
-                          <a:latin typeface="Century Schoolbook"/>
+                          <a:latin typeface="Lexend"/>
                         </a:rPr>
                         <a:t> · 2</a:t>
                       </a:r>
                       <a:r>
-                        <a:rPr sz="1600" b="0" baseline="30000">
+                        <a:rPr sz="1520" b="0" baseline="30000">
                           <a:solidFill>
                             <a:srgbClr val="1A1A1A"/>
                           </a:solidFill>
-                          <a:latin typeface="Century Schoolbook"/>
+                          <a:latin typeface="Lexend"/>
                         </a:rPr>
                         <a:t>1</a:t>
                       </a:r>
                       <a:r>
-                        <a:rPr sz="1600" b="0">
+                        <a:rPr sz="1520" b="0">
                           <a:solidFill>
                             <a:srgbClr val="1A1A1A"/>
                           </a:solidFill>
-                          <a:latin typeface="Century Schoolbook"/>
+                          <a:latin typeface="Lexend"/>
                         </a:rPr>
                         <a:t> = 2</a:t>
                       </a:r>
                       <a:r>
-                        <a:rPr sz="1600" b="0" baseline="30000">
+                        <a:rPr sz="1520" b="0" baseline="30000">
                           <a:solidFill>
                             <a:srgbClr val="1A1A1A"/>
                           </a:solidFill>
-                          <a:latin typeface="Century Schoolbook"/>
+                          <a:latin typeface="Lexend"/>
                         </a:rPr>
                         <a:t>4</a:t>
                       </a:r>
@@ -15169,11 +15640,11 @@
                     <a:p>
                       <a:pPr algn="ctr"/>
                       <a:r>
-                        <a:rPr sz="1600" b="0">
+                        <a:rPr sz="1520" b="0">
                           <a:solidFill>
                             <a:srgbClr val="1A1A1A"/>
                           </a:solidFill>
-                          <a:latin typeface="Century Schoolbook"/>
+                          <a:latin typeface="Lexend"/>
                         </a:rPr>
                         <a:t>Quotient of powers</a:t>
                       </a:r>
@@ -15216,56 +15687,56 @@
                     <a:p>
                       <a:pPr algn="ctr"/>
                       <a:r>
-                        <a:rPr sz="1600" b="0">
+                        <a:rPr sz="1520" b="0">
                           <a:solidFill>
                             <a:srgbClr val="1A1A1A"/>
                           </a:solidFill>
-                          <a:latin typeface="Century Schoolbook"/>
+                          <a:latin typeface="Lexend"/>
                         </a:rPr>
                         <a:t>a</a:t>
                       </a:r>
                       <a:r>
-                        <a:rPr sz="1600" b="0" baseline="30000">
+                        <a:rPr sz="1520" b="0" baseline="30000">
                           <a:solidFill>
                             <a:srgbClr val="1A1A1A"/>
                           </a:solidFill>
-                          <a:latin typeface="Century Schoolbook"/>
+                          <a:latin typeface="Lexend"/>
                         </a:rPr>
                         <a:t>m</a:t>
                       </a:r>
                       <a:r>
-                        <a:rPr sz="1600" b="0">
+                        <a:rPr sz="1520" b="0">
                           <a:solidFill>
                             <a:srgbClr val="1A1A1A"/>
                           </a:solidFill>
-                          <a:latin typeface="Century Schoolbook"/>
+                          <a:latin typeface="Lexend"/>
                         </a:rPr>
                         <a:t> ÷ a</a:t>
                       </a:r>
                       <a:r>
-                        <a:rPr sz="1600" b="0" baseline="30000">
+                        <a:rPr sz="1520" b="0" baseline="30000">
                           <a:solidFill>
                             <a:srgbClr val="1A1A1A"/>
                           </a:solidFill>
-                          <a:latin typeface="Century Schoolbook"/>
+                          <a:latin typeface="Lexend"/>
                         </a:rPr>
                         <a:t>n</a:t>
                       </a:r>
                       <a:r>
-                        <a:rPr sz="1600" b="0">
+                        <a:rPr sz="1520" b="0">
                           <a:solidFill>
                             <a:srgbClr val="1A1A1A"/>
                           </a:solidFill>
-                          <a:latin typeface="Century Schoolbook"/>
+                          <a:latin typeface="Lexend"/>
                         </a:rPr>
                         <a:t> = a</a:t>
                       </a:r>
                       <a:r>
-                        <a:rPr sz="1600" b="0" baseline="30000">
+                        <a:rPr sz="1520" b="0" baseline="30000">
                           <a:solidFill>
                             <a:srgbClr val="1A1A1A"/>
                           </a:solidFill>
-                          <a:latin typeface="Century Schoolbook"/>
+                          <a:latin typeface="Lexend"/>
                         </a:rPr>
                         <a:t>m-n</a:t>
                       </a:r>
@@ -15308,56 +15779,56 @@
                     <a:p>
                       <a:pPr algn="ctr"/>
                       <a:r>
-                        <a:rPr sz="1600" b="0">
+                        <a:rPr sz="1520" b="0">
                           <a:solidFill>
                             <a:srgbClr val="1A1A1A"/>
                           </a:solidFill>
-                          <a:latin typeface="Century Schoolbook"/>
+                          <a:latin typeface="Lexend"/>
                         </a:rPr>
                         <a:t>(−3)</a:t>
                       </a:r>
                       <a:r>
-                        <a:rPr sz="1600" b="0" baseline="30000">
+                        <a:rPr sz="1520" b="0" baseline="30000">
                           <a:solidFill>
                             <a:srgbClr val="1A1A1A"/>
                           </a:solidFill>
-                          <a:latin typeface="Century Schoolbook"/>
+                          <a:latin typeface="Lexend"/>
                         </a:rPr>
                         <a:t>7</a:t>
                       </a:r>
                       <a:r>
-                        <a:rPr sz="1600" b="0">
+                        <a:rPr sz="1520" b="0">
                           <a:solidFill>
                             <a:srgbClr val="1A1A1A"/>
                           </a:solidFill>
-                          <a:latin typeface="Century Schoolbook"/>
+                          <a:latin typeface="Lexend"/>
                         </a:rPr>
                         <a:t> ÷ (−3)</a:t>
                       </a:r>
                       <a:r>
-                        <a:rPr sz="1600" b="0" baseline="30000">
+                        <a:rPr sz="1520" b="0" baseline="30000">
                           <a:solidFill>
                             <a:srgbClr val="1A1A1A"/>
                           </a:solidFill>
-                          <a:latin typeface="Century Schoolbook"/>
+                          <a:latin typeface="Lexend"/>
                         </a:rPr>
                         <a:t>2</a:t>
                       </a:r>
                       <a:r>
-                        <a:rPr sz="1600" b="0">
+                        <a:rPr sz="1520" b="0">
                           <a:solidFill>
                             <a:srgbClr val="1A1A1A"/>
                           </a:solidFill>
-                          <a:latin typeface="Century Schoolbook"/>
+                          <a:latin typeface="Lexend"/>
                         </a:rPr>
                         <a:t> = (−3)</a:t>
                       </a:r>
                       <a:r>
-                        <a:rPr sz="1600" b="0" baseline="30000">
+                        <a:rPr sz="1520" b="0" baseline="30000">
                           <a:solidFill>
                             <a:srgbClr val="1A1A1A"/>
                           </a:solidFill>
-                          <a:latin typeface="Century Schoolbook"/>
+                          <a:latin typeface="Lexend"/>
                         </a:rPr>
                         <a:t>5</a:t>
                       </a:r>
@@ -15402,11 +15873,11 @@
                     <a:p>
                       <a:pPr algn="ctr"/>
                       <a:r>
-                        <a:rPr sz="1600" b="0">
+                        <a:rPr sz="1520" b="0">
                           <a:solidFill>
                             <a:srgbClr val="1A1A1A"/>
                           </a:solidFill>
-                          <a:latin typeface="Century Schoolbook"/>
+                          <a:latin typeface="Lexend"/>
                         </a:rPr>
                         <a:t>Power of a product</a:t>
                       </a:r>
@@ -15449,56 +15920,56 @@
                     <a:p>
                       <a:pPr algn="ctr"/>
                       <a:r>
-                        <a:rPr sz="1600" b="0">
+                        <a:rPr sz="1520" b="0">
                           <a:solidFill>
                             <a:srgbClr val="1A1A1A"/>
                           </a:solidFill>
-                          <a:latin typeface="Century Schoolbook"/>
+                          <a:latin typeface="Lexend"/>
                         </a:rPr>
                         <a:t>(ab)</a:t>
                       </a:r>
                       <a:r>
-                        <a:rPr sz="1600" b="0" baseline="30000">
+                        <a:rPr sz="1520" b="0" baseline="30000">
                           <a:solidFill>
                             <a:srgbClr val="1A1A1A"/>
                           </a:solidFill>
-                          <a:latin typeface="Century Schoolbook"/>
+                          <a:latin typeface="Lexend"/>
                         </a:rPr>
                         <a:t>m</a:t>
                       </a:r>
                       <a:r>
-                        <a:rPr sz="1600" b="0">
+                        <a:rPr sz="1520" b="0">
                           <a:solidFill>
                             <a:srgbClr val="1A1A1A"/>
                           </a:solidFill>
-                          <a:latin typeface="Century Schoolbook"/>
+                          <a:latin typeface="Lexend"/>
                         </a:rPr>
                         <a:t> = a</a:t>
                       </a:r>
                       <a:r>
-                        <a:rPr sz="1600" b="0" baseline="30000">
+                        <a:rPr sz="1520" b="0" baseline="30000">
                           <a:solidFill>
                             <a:srgbClr val="1A1A1A"/>
                           </a:solidFill>
-                          <a:latin typeface="Century Schoolbook"/>
+                          <a:latin typeface="Lexend"/>
                         </a:rPr>
                         <a:t>m</a:t>
                       </a:r>
                       <a:r>
-                        <a:rPr sz="1600" b="0">
+                        <a:rPr sz="1520" b="0">
                           <a:solidFill>
                             <a:srgbClr val="1A1A1A"/>
                           </a:solidFill>
-                          <a:latin typeface="Century Schoolbook"/>
+                          <a:latin typeface="Lexend"/>
                         </a:rPr>
                         <a:t> · b</a:t>
                       </a:r>
                       <a:r>
-                        <a:rPr sz="1600" b="0" baseline="30000">
+                        <a:rPr sz="1520" b="0" baseline="30000">
                           <a:solidFill>
                             <a:srgbClr val="1A1A1A"/>
                           </a:solidFill>
-                          <a:latin typeface="Century Schoolbook"/>
+                          <a:latin typeface="Lexend"/>
                         </a:rPr>
                         <a:t>m</a:t>
                       </a:r>
@@ -15541,56 +16012,56 @@
                     <a:p>
                       <a:pPr algn="ctr"/>
                       <a:r>
-                        <a:rPr sz="1600" b="0">
+                        <a:rPr sz="1520" b="0">
                           <a:solidFill>
                             <a:srgbClr val="1A1A1A"/>
                           </a:solidFill>
-                          <a:latin typeface="Century Schoolbook"/>
+                          <a:latin typeface="Lexend"/>
                         </a:rPr>
                         <a:t>(−7 · 3)</a:t>
                       </a:r>
                       <a:r>
-                        <a:rPr sz="1600" b="0" baseline="30000">
+                        <a:rPr sz="1520" b="0" baseline="30000">
                           <a:solidFill>
                             <a:srgbClr val="1A1A1A"/>
                           </a:solidFill>
-                          <a:latin typeface="Century Schoolbook"/>
+                          <a:latin typeface="Lexend"/>
                         </a:rPr>
                         <a:t>2</a:t>
                       </a:r>
                       <a:r>
-                        <a:rPr sz="1600" b="0">
+                        <a:rPr sz="1520" b="0">
                           <a:solidFill>
                             <a:srgbClr val="1A1A1A"/>
                           </a:solidFill>
-                          <a:latin typeface="Century Schoolbook"/>
+                          <a:latin typeface="Lexend"/>
                         </a:rPr>
                         <a:t> = (−7)</a:t>
                       </a:r>
                       <a:r>
-                        <a:rPr sz="1600" b="0" baseline="30000">
+                        <a:rPr sz="1520" b="0" baseline="30000">
                           <a:solidFill>
                             <a:srgbClr val="1A1A1A"/>
                           </a:solidFill>
-                          <a:latin typeface="Century Schoolbook"/>
+                          <a:latin typeface="Lexend"/>
                         </a:rPr>
                         <a:t>2</a:t>
                       </a:r>
                       <a:r>
-                        <a:rPr sz="1600" b="0">
+                        <a:rPr sz="1520" b="0">
                           <a:solidFill>
                             <a:srgbClr val="1A1A1A"/>
                           </a:solidFill>
-                          <a:latin typeface="Century Schoolbook"/>
+                          <a:latin typeface="Lexend"/>
                         </a:rPr>
                         <a:t> · 3</a:t>
                       </a:r>
                       <a:r>
-                        <a:rPr sz="1600" b="0" baseline="30000">
+                        <a:rPr sz="1520" b="0" baseline="30000">
                           <a:solidFill>
                             <a:srgbClr val="1A1A1A"/>
                           </a:solidFill>
-                          <a:latin typeface="Century Schoolbook"/>
+                          <a:latin typeface="Lexend"/>
                         </a:rPr>
                         <a:t>2</a:t>
                       </a:r>
@@ -15635,11 +16106,11 @@
                     <a:p>
                       <a:pPr algn="ctr"/>
                       <a:r>
-                        <a:rPr sz="1600" b="0">
+                        <a:rPr sz="1520" b="0">
                           <a:solidFill>
                             <a:srgbClr val="1A1A1A"/>
                           </a:solidFill>
-                          <a:latin typeface="Century Schoolbook"/>
+                          <a:latin typeface="Lexend"/>
                         </a:rPr>
                         <a:t>Power of a quotient</a:t>
                       </a:r>
@@ -15682,56 +16153,56 @@
                     <a:p>
                       <a:pPr algn="ctr"/>
                       <a:r>
-                        <a:rPr sz="1600" b="0">
+                        <a:rPr sz="1520" b="0">
                           <a:solidFill>
                             <a:srgbClr val="1A1A1A"/>
                           </a:solidFill>
-                          <a:latin typeface="Century Schoolbook"/>
+                          <a:latin typeface="Lexend"/>
                         </a:rPr>
                         <a:t>(a ÷ b)</a:t>
                       </a:r>
                       <a:r>
-                        <a:rPr sz="1600" b="0" baseline="30000">
+                        <a:rPr sz="1520" b="0" baseline="30000">
                           <a:solidFill>
                             <a:srgbClr val="1A1A1A"/>
                           </a:solidFill>
-                          <a:latin typeface="Century Schoolbook"/>
+                          <a:latin typeface="Lexend"/>
                         </a:rPr>
                         <a:t>m</a:t>
                       </a:r>
                       <a:r>
-                        <a:rPr sz="1600" b="0">
+                        <a:rPr sz="1520" b="0">
                           <a:solidFill>
                             <a:srgbClr val="1A1A1A"/>
                           </a:solidFill>
-                          <a:latin typeface="Century Schoolbook"/>
+                          <a:latin typeface="Lexend"/>
                         </a:rPr>
                         <a:t> = a</a:t>
                       </a:r>
                       <a:r>
-                        <a:rPr sz="1600" b="0" baseline="30000">
+                        <a:rPr sz="1520" b="0" baseline="30000">
                           <a:solidFill>
                             <a:srgbClr val="1A1A1A"/>
                           </a:solidFill>
-                          <a:latin typeface="Century Schoolbook"/>
+                          <a:latin typeface="Lexend"/>
                         </a:rPr>
                         <a:t>m</a:t>
                       </a:r>
                       <a:r>
-                        <a:rPr sz="1600" b="0">
+                        <a:rPr sz="1520" b="0">
                           <a:solidFill>
                             <a:srgbClr val="1A1A1A"/>
                           </a:solidFill>
-                          <a:latin typeface="Century Schoolbook"/>
+                          <a:latin typeface="Lexend"/>
                         </a:rPr>
                         <a:t> ÷ b</a:t>
                       </a:r>
                       <a:r>
-                        <a:rPr sz="1600" b="0" baseline="30000">
+                        <a:rPr sz="1520" b="0" baseline="30000">
                           <a:solidFill>
                             <a:srgbClr val="1A1A1A"/>
                           </a:solidFill>
-                          <a:latin typeface="Century Schoolbook"/>
+                          <a:latin typeface="Lexend"/>
                         </a:rPr>
                         <a:t>m</a:t>
                       </a:r>
@@ -15774,56 +16245,56 @@
                     <a:p>
                       <a:pPr algn="ctr"/>
                       <a:r>
-                        <a:rPr sz="1600" b="0">
+                        <a:rPr sz="1520" b="0">
                           <a:solidFill>
                             <a:srgbClr val="1A1A1A"/>
                           </a:solidFill>
-                          <a:latin typeface="Century Schoolbook"/>
+                          <a:latin typeface="Lexend"/>
                         </a:rPr>
                         <a:t>(13 ÷ 5)</a:t>
                       </a:r>
                       <a:r>
-                        <a:rPr sz="1600" b="0" baseline="30000">
+                        <a:rPr sz="1520" b="0" baseline="30000">
                           <a:solidFill>
                             <a:srgbClr val="1A1A1A"/>
                           </a:solidFill>
-                          <a:latin typeface="Century Schoolbook"/>
+                          <a:latin typeface="Lexend"/>
                         </a:rPr>
                         <a:t>3</a:t>
                       </a:r>
                       <a:r>
-                        <a:rPr sz="1600" b="0">
+                        <a:rPr sz="1520" b="0">
                           <a:solidFill>
                             <a:srgbClr val="1A1A1A"/>
                           </a:solidFill>
-                          <a:latin typeface="Century Schoolbook"/>
+                          <a:latin typeface="Lexend"/>
                         </a:rPr>
                         <a:t> = 13</a:t>
                       </a:r>
                       <a:r>
-                        <a:rPr sz="1600" b="0" baseline="30000">
+                        <a:rPr sz="1520" b="0" baseline="30000">
                           <a:solidFill>
                             <a:srgbClr val="1A1A1A"/>
                           </a:solidFill>
-                          <a:latin typeface="Century Schoolbook"/>
+                          <a:latin typeface="Lexend"/>
                         </a:rPr>
                         <a:t>3</a:t>
                       </a:r>
                       <a:r>
-                        <a:rPr sz="1600" b="0">
+                        <a:rPr sz="1520" b="0">
                           <a:solidFill>
                             <a:srgbClr val="1A1A1A"/>
                           </a:solidFill>
-                          <a:latin typeface="Century Schoolbook"/>
+                          <a:latin typeface="Lexend"/>
                         </a:rPr>
                         <a:t> ÷ 5</a:t>
                       </a:r>
                       <a:r>
-                        <a:rPr sz="1600" b="0" baseline="30000">
+                        <a:rPr sz="1520" b="0" baseline="30000">
                           <a:solidFill>
                             <a:srgbClr val="1A1A1A"/>
                           </a:solidFill>
-                          <a:latin typeface="Century Schoolbook"/>
+                          <a:latin typeface="Lexend"/>
                         </a:rPr>
                         <a:t>3</a:t>
                       </a:r>
@@ -15868,11 +16339,11 @@
                     <a:p>
                       <a:pPr algn="ctr"/>
                       <a:r>
-                        <a:rPr sz="1600" b="0">
+                        <a:rPr sz="1520" b="0">
                           <a:solidFill>
                             <a:srgbClr val="1A1A1A"/>
                           </a:solidFill>
-                          <a:latin typeface="Century Schoolbook"/>
+                          <a:latin typeface="Lexend"/>
                         </a:rPr>
                         <a:t>Power of a power</a:t>
                       </a:r>
@@ -15915,56 +16386,56 @@
                     <a:p>
                       <a:pPr algn="ctr"/>
                       <a:r>
-                        <a:rPr sz="1600" b="0">
+                        <a:rPr sz="1520" b="0">
                           <a:solidFill>
                             <a:srgbClr val="1A1A1A"/>
                           </a:solidFill>
-                          <a:latin typeface="Century Schoolbook"/>
+                          <a:latin typeface="Lexend"/>
                         </a:rPr>
                         <a:t>(a</a:t>
                       </a:r>
                       <a:r>
-                        <a:rPr sz="1600" b="0" baseline="30000">
+                        <a:rPr sz="1520" b="0" baseline="30000">
                           <a:solidFill>
                             <a:srgbClr val="1A1A1A"/>
                           </a:solidFill>
-                          <a:latin typeface="Century Schoolbook"/>
+                          <a:latin typeface="Lexend"/>
                         </a:rPr>
                         <a:t>m</a:t>
                       </a:r>
                       <a:r>
-                        <a:rPr sz="1600" b="0">
+                        <a:rPr sz="1520" b="0">
                           <a:solidFill>
                             <a:srgbClr val="1A1A1A"/>
                           </a:solidFill>
-                          <a:latin typeface="Century Schoolbook"/>
+                          <a:latin typeface="Lexend"/>
                         </a:rPr>
                         <a:t>)</a:t>
                       </a:r>
                       <a:r>
-                        <a:rPr sz="1600" b="0" baseline="30000">
+                        <a:rPr sz="1520" b="0" baseline="30000">
                           <a:solidFill>
                             <a:srgbClr val="1A1A1A"/>
                           </a:solidFill>
-                          <a:latin typeface="Century Schoolbook"/>
+                          <a:latin typeface="Lexend"/>
                         </a:rPr>
                         <a:t>n</a:t>
                       </a:r>
                       <a:r>
-                        <a:rPr sz="1600" b="0">
+                        <a:rPr sz="1520" b="0">
                           <a:solidFill>
                             <a:srgbClr val="1A1A1A"/>
                           </a:solidFill>
-                          <a:latin typeface="Century Schoolbook"/>
+                          <a:latin typeface="Lexend"/>
                         </a:rPr>
                         <a:t> = a</a:t>
                       </a:r>
                       <a:r>
-                        <a:rPr sz="1600" b="0" baseline="30000">
+                        <a:rPr sz="1520" b="0" baseline="30000">
                           <a:solidFill>
                             <a:srgbClr val="1A1A1A"/>
                           </a:solidFill>
-                          <a:latin typeface="Century Schoolbook"/>
+                          <a:latin typeface="Lexend"/>
                         </a:rPr>
                         <a:t>mn</a:t>
                       </a:r>
@@ -16007,56 +16478,56 @@
                     <a:p>
                       <a:pPr algn="ctr"/>
                       <a:r>
-                        <a:rPr sz="1600" b="0">
+                        <a:rPr sz="1520" b="0">
                           <a:solidFill>
                             <a:srgbClr val="1A1A1A"/>
                           </a:solidFill>
-                          <a:latin typeface="Century Schoolbook"/>
+                          <a:latin typeface="Lexend"/>
                         </a:rPr>
                         <a:t>(6</a:t>
                       </a:r>
                       <a:r>
-                        <a:rPr sz="1600" b="0" baseline="30000">
+                        <a:rPr sz="1520" b="0" baseline="30000">
                           <a:solidFill>
                             <a:srgbClr val="1A1A1A"/>
                           </a:solidFill>
-                          <a:latin typeface="Century Schoolbook"/>
+                          <a:latin typeface="Lexend"/>
                         </a:rPr>
                         <a:t>3</a:t>
                       </a:r>
                       <a:r>
-                        <a:rPr sz="1600" b="0">
+                        <a:rPr sz="1520" b="0">
                           <a:solidFill>
                             <a:srgbClr val="1A1A1A"/>
                           </a:solidFill>
-                          <a:latin typeface="Century Schoolbook"/>
+                          <a:latin typeface="Lexend"/>
                         </a:rPr>
                         <a:t>)</a:t>
                       </a:r>
                       <a:r>
-                        <a:rPr sz="1600" b="0" baseline="30000">
+                        <a:rPr sz="1520" b="0" baseline="30000">
                           <a:solidFill>
                             <a:srgbClr val="1A1A1A"/>
                           </a:solidFill>
-                          <a:latin typeface="Century Schoolbook"/>
+                          <a:latin typeface="Lexend"/>
                         </a:rPr>
                         <a:t>4</a:t>
                       </a:r>
                       <a:r>
-                        <a:rPr sz="1600" b="0">
+                        <a:rPr sz="1520" b="0">
                           <a:solidFill>
                             <a:srgbClr val="1A1A1A"/>
                           </a:solidFill>
-                          <a:latin typeface="Century Schoolbook"/>
+                          <a:latin typeface="Lexend"/>
                         </a:rPr>
                         <a:t> = 6</a:t>
                       </a:r>
                       <a:r>
-                        <a:rPr sz="1600" b="0" baseline="30000">
+                        <a:rPr sz="1520" b="0" baseline="30000">
                           <a:solidFill>
                             <a:srgbClr val="1A1A1A"/>
                           </a:solidFill>
-                          <a:latin typeface="Century Schoolbook"/>
+                          <a:latin typeface="Lexend"/>
                         </a:rPr>
                         <a:t>12</a:t>
                       </a:r>
@@ -16101,11 +16572,11 @@
                     <a:p>
                       <a:pPr algn="ctr"/>
                       <a:r>
-                        <a:rPr sz="1600" b="0">
+                        <a:rPr sz="1520" b="0">
                           <a:solidFill>
                             <a:srgbClr val="1A1A1A"/>
                           </a:solidFill>
-                          <a:latin typeface="Century Schoolbook"/>
+                          <a:latin typeface="Lexend"/>
                         </a:rPr>
                         <a:t>Identity exponent</a:t>
                       </a:r>
@@ -16148,29 +16619,29 @@
                     <a:p>
                       <a:pPr algn="ctr"/>
                       <a:r>
-                        <a:rPr sz="1600" b="0">
+                        <a:rPr sz="1520" b="0">
                           <a:solidFill>
                             <a:srgbClr val="1A1A1A"/>
                           </a:solidFill>
-                          <a:latin typeface="Century Schoolbook"/>
+                          <a:latin typeface="Lexend"/>
                         </a:rPr>
                         <a:t>a</a:t>
                       </a:r>
                       <a:r>
-                        <a:rPr sz="1600" b="0" baseline="30000">
+                        <a:rPr sz="1520" b="0" baseline="30000">
                           <a:solidFill>
                             <a:srgbClr val="1A1A1A"/>
                           </a:solidFill>
-                          <a:latin typeface="Century Schoolbook"/>
+                          <a:latin typeface="Lexend"/>
                         </a:rPr>
                         <a:t>1</a:t>
                       </a:r>
                       <a:r>
-                        <a:rPr sz="1600" b="0">
+                        <a:rPr sz="1520" b="0">
                           <a:solidFill>
                             <a:srgbClr val="1A1A1A"/>
                           </a:solidFill>
-                          <a:latin typeface="Century Schoolbook"/>
+                          <a:latin typeface="Lexend"/>
                         </a:rPr>
                         <a:t> = a</a:t>
                       </a:r>
@@ -16213,29 +16684,29 @@
                     <a:p>
                       <a:pPr algn="ctr"/>
                       <a:r>
-                        <a:rPr sz="1600" b="0">
+                        <a:rPr sz="1520" b="0">
                           <a:solidFill>
                             <a:srgbClr val="1A1A1A"/>
                           </a:solidFill>
-                          <a:latin typeface="Century Schoolbook"/>
+                          <a:latin typeface="Lexend"/>
                         </a:rPr>
                         <a:t>15</a:t>
                       </a:r>
                       <a:r>
-                        <a:rPr sz="1600" b="0" baseline="30000">
+                        <a:rPr sz="1520" b="0" baseline="30000">
                           <a:solidFill>
                             <a:srgbClr val="1A1A1A"/>
                           </a:solidFill>
-                          <a:latin typeface="Century Schoolbook"/>
+                          <a:latin typeface="Lexend"/>
                         </a:rPr>
                         <a:t>1</a:t>
                       </a:r>
                       <a:r>
-                        <a:rPr sz="1600" b="0">
+                        <a:rPr sz="1520" b="0">
                           <a:solidFill>
                             <a:srgbClr val="1A1A1A"/>
                           </a:solidFill>
-                          <a:latin typeface="Century Schoolbook"/>
+                          <a:latin typeface="Lexend"/>
                         </a:rPr>
                         <a:t> = 15</a:t>
                       </a:r>
@@ -16280,11 +16751,11 @@
                     <a:p>
                       <a:pPr algn="ctr"/>
                       <a:r>
-                        <a:rPr sz="1600" b="0">
+                        <a:rPr sz="1520" b="0">
                           <a:solidFill>
                             <a:srgbClr val="1A1A1A"/>
                           </a:solidFill>
-                          <a:latin typeface="Century Schoolbook"/>
+                          <a:latin typeface="Lexend"/>
                         </a:rPr>
                         <a:t>Zero exponent</a:t>
                       </a:r>
@@ -16327,29 +16798,29 @@
                     <a:p>
                       <a:pPr algn="ctr"/>
                       <a:r>
-                        <a:rPr sz="1600" b="0">
+                        <a:rPr sz="1520" b="0">
                           <a:solidFill>
                             <a:srgbClr val="1A1A1A"/>
                           </a:solidFill>
-                          <a:latin typeface="Century Schoolbook"/>
+                          <a:latin typeface="Lexend"/>
                         </a:rPr>
                         <a:t>a</a:t>
                       </a:r>
                       <a:r>
-                        <a:rPr sz="1600" b="0" baseline="30000">
+                        <a:rPr sz="1520" b="0" baseline="30000">
                           <a:solidFill>
                             <a:srgbClr val="1A1A1A"/>
                           </a:solidFill>
-                          <a:latin typeface="Century Schoolbook"/>
+                          <a:latin typeface="Lexend"/>
                         </a:rPr>
                         <a:t>0</a:t>
                       </a:r>
                       <a:r>
-                        <a:rPr sz="1600" b="0">
+                        <a:rPr sz="1520" b="0">
                           <a:solidFill>
                             <a:srgbClr val="1A1A1A"/>
                           </a:solidFill>
-                          <a:latin typeface="Century Schoolbook"/>
+                          <a:latin typeface="Lexend"/>
                         </a:rPr>
                         <a:t> = 1</a:t>
                       </a:r>
@@ -16392,29 +16863,29 @@
                     <a:p>
                       <a:pPr algn="ctr"/>
                       <a:r>
-                        <a:rPr sz="1600" b="0">
+                        <a:rPr sz="1520" b="0">
                           <a:solidFill>
                             <a:srgbClr val="1A1A1A"/>
                           </a:solidFill>
-                          <a:latin typeface="Century Schoolbook"/>
+                          <a:latin typeface="Lexend"/>
                         </a:rPr>
                         <a:t>127</a:t>
                       </a:r>
                       <a:r>
-                        <a:rPr sz="1600" b="0" baseline="30000">
+                        <a:rPr sz="1520" b="0" baseline="30000">
                           <a:solidFill>
                             <a:srgbClr val="1A1A1A"/>
                           </a:solidFill>
-                          <a:latin typeface="Century Schoolbook"/>
+                          <a:latin typeface="Lexend"/>
                         </a:rPr>
                         <a:t>0</a:t>
                       </a:r>
                       <a:r>
-                        <a:rPr sz="1600" b="0">
+                        <a:rPr sz="1520" b="0">
                           <a:solidFill>
                             <a:srgbClr val="1A1A1A"/>
                           </a:solidFill>
-                          <a:latin typeface="Century Schoolbook"/>
+                          <a:latin typeface="Lexend"/>
                         </a:rPr>
                         <a:t> = 1</a:t>
                       </a:r>
@@ -16497,11 +16968,11 @@
           <a:p>
             <a:pPr algn="l"/>
             <a:r>
-              <a:rPr sz="3600" b="1" i="0">
+              <a:rPr sz="3420" b="1" i="0">
                 <a:solidFill>
                   <a:srgbClr val="1A1A1A"/>
                 </a:solidFill>
-                <a:latin typeface="Century Schoolbook"/>
+                <a:latin typeface="Lexend"/>
               </a:rPr>
               <a:t>Notes</a:t>
             </a:r>
@@ -16637,11 +17108,11 @@
           <a:p>
             <a:pPr algn="l"/>
             <a:r>
-              <a:rPr sz="1100" b="0" i="1">
+              <a:rPr sz="1040" b="0" i="0">
                 <a:solidFill>
                   <a:srgbClr val="6B6B6B"/>
                 </a:solidFill>
-                <a:latin typeface="Century Schoolbook"/>
+                <a:latin typeface="Lexend"/>
               </a:rPr>
               <a:t>Grade 7 Accelerated · Unit 3 · Lesson 3 — Exponential Expressions</a:t>
             </a:r>
@@ -16672,11 +17143,11 @@
           <a:p>
             <a:pPr algn="r"/>
             <a:r>
-              <a:rPr sz="1100" b="0" i="0">
+              <a:rPr sz="1040" b="0" i="0">
                 <a:solidFill>
                   <a:srgbClr val="6B6B6B"/>
                 </a:solidFill>
-                <a:latin typeface="Century Schoolbook"/>
+                <a:latin typeface="Lexend"/>
               </a:rPr>
               <a:t>5</a:t>
             </a:r>
@@ -16707,11 +17178,11 @@
           <a:p>
             <a:pPr algn="l"/>
             <a:r>
-              <a:rPr sz="2500" b="1" i="0">
+              <a:rPr sz="2380" b="1" i="0">
                 <a:solidFill>
                   <a:srgbClr val="1A1A1A"/>
                 </a:solidFill>
-                <a:latin typeface="Century Schoolbook"/>
+                <a:latin typeface="Lexend"/>
               </a:rPr>
               <a:t>II.  More than one law — make a plan, then follow it</a:t>
             </a:r>
@@ -16761,8 +17232,8 @@
         </p:nvSpPr>
         <p:spPr>
           <a:xfrm>
-            <a:off x="3330561" y="2167128"/>
-            <a:ext cx="1854989" cy="457200"/>
+            <a:off x="3405456" y="2159508"/>
+            <a:ext cx="1781398" cy="457200"/>
           </a:xfrm>
           <a:prstGeom prst="rect">
             <a:avLst/>
@@ -16777,11 +17248,11 @@
           <a:p>
             <a:pPr algn="l"/>
             <a:r>
-              <a:rPr sz="2600" b="0" i="0">
+              <a:rPr sz="2470" b="0" i="0">
                 <a:solidFill>
                   <a:srgbClr val="1A1A1A"/>
                 </a:solidFill>
-                <a:latin typeface="Century Schoolbook"/>
+                <a:latin typeface="Lexend"/>
               </a:rPr>
               <a:t>Winston:  </a:t>
             </a:r>
@@ -16790,7 +17261,7 @@
       </p:sp>
       <p:pic>
         <p:nvPicPr>
-          <p:cNvPr id="11" name="Picture 10" descr="2d268109f28c9abf.png"/>
+          <p:cNvPr id="11" name="Picture 10" descr="26de40715e21e66c.png"/>
           <p:cNvPicPr>
             <a:picLocks noChangeAspect="1"/>
           </p:cNvPicPr>
@@ -16804,8 +17275,8 @@
         </p:blipFill>
         <p:spPr>
           <a:xfrm>
-            <a:off x="5048390" y="1993392"/>
-            <a:ext cx="3782568" cy="804672"/>
+            <a:off x="5049695" y="1993392"/>
+            <a:ext cx="3706368" cy="789432"/>
           </a:xfrm>
           <a:prstGeom prst="rect">
             <a:avLst/>
@@ -16820,8 +17291,8 @@
         </p:nvSpPr>
         <p:spPr>
           <a:xfrm>
-            <a:off x="2943041" y="3316224"/>
-            <a:ext cx="1621140" cy="457200"/>
+            <a:off x="2981866" y="3297936"/>
+            <a:ext cx="1610546" cy="457200"/>
           </a:xfrm>
           <a:prstGeom prst="rect">
             <a:avLst/>
@@ -16836,11 +17307,11 @@
           <a:p>
             <a:pPr algn="l"/>
             <a:r>
-              <a:rPr sz="2600" b="0" i="0">
+              <a:rPr sz="2470" b="0" i="0">
                 <a:solidFill>
                   <a:srgbClr val="1A1A1A"/>
                 </a:solidFill>
-                <a:latin typeface="Century Schoolbook"/>
+                <a:latin typeface="Lexend"/>
               </a:rPr>
               <a:t>Yvette:   </a:t>
             </a:r>
@@ -16849,7 +17320,7 @@
       </p:sp>
       <p:pic>
         <p:nvPicPr>
-          <p:cNvPr id="13" name="Picture 12" descr="20e6fc4620e3ea78.png"/>
+          <p:cNvPr id="13" name="Picture 12" descr="354e7e69552fdcc9.png"/>
           <p:cNvPicPr>
             <a:picLocks noChangeAspect="1"/>
           </p:cNvPicPr>
@@ -16863,8 +17334,8 @@
         </p:blipFill>
         <p:spPr>
           <a:xfrm>
-            <a:off x="4427022" y="3072384"/>
-            <a:ext cx="4791456" cy="944880"/>
+            <a:off x="4455253" y="3057144"/>
+            <a:ext cx="4724400" cy="938784"/>
           </a:xfrm>
           <a:prstGeom prst="rect">
             <a:avLst/>
@@ -16879,7 +17350,7 @@
         </p:nvSpPr>
         <p:spPr>
           <a:xfrm>
-            <a:off x="987552" y="4355592"/>
+            <a:off x="987552" y="4334256"/>
             <a:ext cx="10131551" cy="475488"/>
           </a:xfrm>
           <a:prstGeom prst="rect">
@@ -16895,11 +17366,11 @@
           <a:p>
             <a:pPr algn="l"/>
             <a:r>
-              <a:rPr sz="2300" b="0" i="0">
+              <a:rPr sz="2180" b="0" i="0">
                 <a:solidFill>
                   <a:srgbClr val="1A1A1A"/>
                 </a:solidFill>
-                <a:latin typeface="Century Schoolbook"/>
+                <a:latin typeface="Lexend"/>
               </a:rPr>
               <a:t>Different plans, same value. Any correct sequence of laws gives the same answer.</a:t>
             </a:r>
@@ -16948,11 +17419,11 @@
           <a:p>
             <a:pPr algn="l"/>
             <a:r>
-              <a:rPr sz="3600" b="1" i="0">
+              <a:rPr sz="3420" b="1" i="0">
                 <a:solidFill>
                   <a:srgbClr val="1A1A1A"/>
                 </a:solidFill>
-                <a:latin typeface="Century Schoolbook"/>
+                <a:latin typeface="Lexend"/>
               </a:rPr>
               <a:t>Notes</a:t>
             </a:r>
@@ -17088,11 +17559,11 @@
           <a:p>
             <a:pPr algn="l"/>
             <a:r>
-              <a:rPr sz="1100" b="0" i="1">
+              <a:rPr sz="1040" b="0" i="0">
                 <a:solidFill>
                   <a:srgbClr val="6B6B6B"/>
                 </a:solidFill>
-                <a:latin typeface="Century Schoolbook"/>
+                <a:latin typeface="Lexend"/>
               </a:rPr>
               <a:t>Grade 7 Accelerated · Unit 3 · Lesson 3 — Exponential Expressions</a:t>
             </a:r>
@@ -17123,11 +17594,11 @@
           <a:p>
             <a:pPr algn="r"/>
             <a:r>
-              <a:rPr sz="1100" b="0" i="0">
+              <a:rPr sz="1040" b="0" i="0">
                 <a:solidFill>
                   <a:srgbClr val="6B6B6B"/>
                 </a:solidFill>
-                <a:latin typeface="Century Schoolbook"/>
+                <a:latin typeface="Lexend"/>
               </a:rPr>
               <a:t>6</a:t>
             </a:r>
@@ -17158,11 +17629,11 @@
           <a:p>
             <a:pPr algn="l"/>
             <a:r>
-              <a:rPr sz="2500" b="1" i="0">
+              <a:rPr sz="2380" b="1" i="0">
                 <a:solidFill>
                   <a:srgbClr val="1A1A1A"/>
                 </a:solidFill>
-                <a:latin typeface="Century Schoolbook"/>
+                <a:latin typeface="Lexend"/>
               </a:rPr>
               <a:t>III.  Order of operations still applies</a:t>
             </a:r>
@@ -17228,11 +17699,11 @@
           <a:p>
             <a:pPr algn="l"/>
             <a:r>
-              <a:rPr sz="2300" b="0" i="0">
+              <a:rPr sz="2180" b="0" i="0">
                 <a:solidFill>
                   <a:srgbClr val="1A1A1A"/>
                 </a:solidFill>
-                <a:latin typeface="Century Schoolbook"/>
+                <a:latin typeface="Lexend"/>
               </a:rPr>
               <a:t>A.</a:t>
             </a:r>
@@ -17263,11 +17734,11 @@
           <a:p>
             <a:pPr algn="l"/>
             <a:r>
-              <a:rPr sz="2300" b="0" i="0">
+              <a:rPr sz="2180" b="0" i="0">
                 <a:solidFill>
                   <a:srgbClr val="1A1A1A"/>
                 </a:solidFill>
-                <a:latin typeface="Century Schoolbook"/>
+                <a:latin typeface="Lexend"/>
               </a:rPr>
               <a:t>Parentheses first — including a fraction bar, which is a pair of parentheses in disguise.</a:t>
             </a:r>
@@ -17298,11 +17769,11 @@
           <a:p>
             <a:pPr algn="l"/>
             <a:r>
-              <a:rPr sz="2300" b="0" i="0">
+              <a:rPr sz="2180" b="0" i="0">
                 <a:solidFill>
                   <a:srgbClr val="1A1A1A"/>
                 </a:solidFill>
-                <a:latin typeface="Century Schoolbook"/>
+                <a:latin typeface="Lexend"/>
               </a:rPr>
               <a:t>B.</a:t>
             </a:r>
@@ -17333,11 +17804,11 @@
           <a:p>
             <a:pPr algn="l"/>
             <a:r>
-              <a:rPr sz="2300" b="0" i="0">
+              <a:rPr sz="2180" b="0" i="0">
                 <a:solidFill>
                   <a:srgbClr val="1A1A1A"/>
                 </a:solidFill>
-                <a:latin typeface="Century Schoolbook"/>
+                <a:latin typeface="Lexend"/>
               </a:rPr>
               <a:t>Exponents next — the laws of exponents are applied here.</a:t>
             </a:r>
@@ -17368,11 +17839,11 @@
           <a:p>
             <a:pPr algn="l"/>
             <a:r>
-              <a:rPr sz="2300" b="0" i="0">
+              <a:rPr sz="2180" b="0" i="0">
                 <a:solidFill>
                   <a:srgbClr val="1A1A1A"/>
                 </a:solidFill>
-                <a:latin typeface="Century Schoolbook"/>
+                <a:latin typeface="Lexend"/>
               </a:rPr>
               <a:t>C.</a:t>
             </a:r>
@@ -17403,11 +17874,11 @@
           <a:p>
             <a:pPr algn="l"/>
             <a:r>
-              <a:rPr sz="2300" b="0" i="0">
+              <a:rPr sz="2180" b="0" i="0">
                 <a:solidFill>
                   <a:srgbClr val="1A1A1A"/>
                 </a:solidFill>
-                <a:latin typeface="Century Schoolbook"/>
+                <a:latin typeface="Lexend"/>
               </a:rPr>
               <a:t>Then multiply and divide, left to right; then add and subtract.</a:t>
             </a:r>
@@ -17438,11 +17909,11 @@
           <a:p>
             <a:pPr algn="l"/>
             <a:r>
-              <a:rPr sz="2300" b="0" i="0">
+              <a:rPr sz="2180" b="0" i="0">
                 <a:solidFill>
                   <a:srgbClr val="1A1A1A"/>
                 </a:solidFill>
-                <a:latin typeface="Century Schoolbook"/>
+                <a:latin typeface="Lexend"/>
               </a:rPr>
               <a:t>D.</a:t>
             </a:r>
@@ -17458,7 +17929,7 @@
         <p:spPr>
           <a:xfrm>
             <a:off x="1581912" y="4686299"/>
-            <a:ext cx="4078112" cy="457200"/>
+            <a:ext cx="3942872" cy="457200"/>
           </a:xfrm>
           <a:prstGeom prst="rect">
             <a:avLst/>
@@ -17473,11 +17944,11 @@
           <a:p>
             <a:pPr algn="l"/>
             <a:r>
-              <a:rPr sz="2300" b="1" i="0">
+              <a:rPr sz="2180" b="1" i="0">
                 <a:solidFill>
                   <a:srgbClr val="1A1A1A"/>
                 </a:solidFill>
-                <a:latin typeface="Century Schoolbook"/>
+                <a:latin typeface="Lexend"/>
               </a:rPr>
               <a:t>Never across a + or a −:  </a:t>
             </a:r>
@@ -17486,7 +17957,7 @@
       </p:sp>
       <p:pic>
         <p:nvPicPr>
-          <p:cNvPr id="18" name="Picture 17" descr="b0973f9ba7881b29.png"/>
+          <p:cNvPr id="18" name="Picture 17" descr="b054382c410b7179.png"/>
           <p:cNvPicPr>
             <a:picLocks noChangeAspect="1"/>
           </p:cNvPicPr>
@@ -17500,8 +17971,8 @@
         </p:blipFill>
         <p:spPr>
           <a:xfrm>
-            <a:off x="5522864" y="4738115"/>
-            <a:ext cx="3118104" cy="353568"/>
+            <a:off x="5387624" y="4745736"/>
+            <a:ext cx="3041904" cy="338328"/>
           </a:xfrm>
           <a:prstGeom prst="rect">
             <a:avLst/>
@@ -17516,8 +17987,8 @@
         </p:nvSpPr>
         <p:spPr>
           <a:xfrm>
-            <a:off x="8640968" y="4686299"/>
-            <a:ext cx="1002676" cy="457200"/>
+            <a:off x="8429528" y="4686299"/>
+            <a:ext cx="975347" cy="457200"/>
           </a:xfrm>
           <a:prstGeom prst="rect">
             <a:avLst/>
@@ -17532,11 +18003,11 @@
           <a:p>
             <a:pPr algn="l"/>
             <a:r>
-              <a:rPr sz="2300" b="1" i="0">
+              <a:rPr sz="2180" b="1" i="0">
                 <a:solidFill>
                   <a:srgbClr val="1A1A1A"/>
                 </a:solidFill>
-                <a:latin typeface="Century Schoolbook"/>
+                <a:latin typeface="Lexend"/>
               </a:rPr>
               <a:t>, not </a:t>
             </a:r>
@@ -17545,7 +18016,7 @@
       </p:sp>
       <p:pic>
         <p:nvPicPr>
-          <p:cNvPr id="20" name="Picture 19" descr="c3382604741c4038.png"/>
+          <p:cNvPr id="20" name="Picture 19" descr="b8a8a24b141b26c2.png"/>
           <p:cNvPicPr>
             <a:picLocks noChangeAspect="1"/>
           </p:cNvPicPr>
@@ -17559,8 +18030,8 @@
         </p:blipFill>
         <p:spPr>
           <a:xfrm>
-            <a:off x="9506485" y="4744211"/>
-            <a:ext cx="326136" cy="341376"/>
+            <a:off x="9267716" y="4748783"/>
+            <a:ext cx="335280" cy="332232"/>
           </a:xfrm>
           <a:prstGeom prst="rect">
             <a:avLst/>
@@ -17575,8 +18046,8 @@
         </p:nvSpPr>
         <p:spPr>
           <a:xfrm>
-            <a:off x="9832621" y="4686299"/>
-            <a:ext cx="296395" cy="457200"/>
+            <a:off x="9602996" y="4686299"/>
+            <a:ext cx="285896" cy="457200"/>
           </a:xfrm>
           <a:prstGeom prst="rect">
             <a:avLst/>
@@ -17591,11 +18062,11 @@
           <a:p>
             <a:pPr algn="l"/>
             <a:r>
-              <a:rPr sz="2300" b="1" i="0">
+              <a:rPr sz="2180" b="1" i="0">
                 <a:solidFill>
                   <a:srgbClr val="1A1A1A"/>
                 </a:solidFill>
-                <a:latin typeface="Century Schoolbook"/>
+                <a:latin typeface="Lexend"/>
               </a:rPr>
               <a:t>.</a:t>
             </a:r>
@@ -17644,11 +18115,11 @@
           <a:p>
             <a:pPr algn="l"/>
             <a:r>
-              <a:rPr sz="3600" b="1" i="0">
+              <a:rPr sz="3420" b="1" i="0">
                 <a:solidFill>
                   <a:srgbClr val="1A1A1A"/>
                 </a:solidFill>
-                <a:latin typeface="Century Schoolbook"/>
+                <a:latin typeface="Lexend"/>
               </a:rPr>
               <a:t>Example 1</a:t>
             </a:r>
@@ -17784,11 +18255,11 @@
           <a:p>
             <a:pPr algn="l"/>
             <a:r>
-              <a:rPr sz="1100" b="0" i="1">
+              <a:rPr sz="1040" b="0" i="0">
                 <a:solidFill>
                   <a:srgbClr val="6B6B6B"/>
                 </a:solidFill>
-                <a:latin typeface="Century Schoolbook"/>
+                <a:latin typeface="Lexend"/>
               </a:rPr>
               <a:t>Grade 7 Accelerated · Unit 3 · Lesson 3 — Exponential Expressions</a:t>
             </a:r>
@@ -17819,11 +18290,11 @@
           <a:p>
             <a:pPr algn="r"/>
             <a:r>
-              <a:rPr sz="1100" b="0" i="0">
+              <a:rPr sz="1040" b="0" i="0">
                 <a:solidFill>
                   <a:srgbClr val="6B6B6B"/>
                 </a:solidFill>
-                <a:latin typeface="Century Schoolbook"/>
+                <a:latin typeface="Lexend"/>
               </a:rPr>
               <a:t>7</a:t>
             </a:r>
@@ -17832,7 +18303,7 @@
       </p:sp>
       <p:pic>
         <p:nvPicPr>
-          <p:cNvPr id="8" name="Picture 7" descr="9c240cefdf3b14b2.png"/>
+          <p:cNvPr id="8" name="Picture 7" descr="871450e41cfad6fa.png"/>
           <p:cNvPicPr>
             <a:picLocks noChangeAspect="1"/>
           </p:cNvPicPr>
@@ -17846,8 +18317,8 @@
         </p:blipFill>
         <p:spPr>
           <a:xfrm>
-            <a:off x="5591555" y="2103120"/>
-            <a:ext cx="978408" cy="804672"/>
+            <a:off x="5548883" y="2103120"/>
+            <a:ext cx="1063752" cy="792480"/>
           </a:xfrm>
           <a:prstGeom prst="rect">
             <a:avLst/>
@@ -17862,7 +18333,7 @@
         </p:nvSpPr>
         <p:spPr>
           <a:xfrm>
-            <a:off x="777240" y="3410712"/>
+            <a:off x="777240" y="3398520"/>
             <a:ext cx="10607040" cy="429370"/>
           </a:xfrm>
           <a:prstGeom prst="rect">
@@ -17878,11 +18349,11 @@
           <a:p>
             <a:pPr algn="ctr"/>
             <a:r>
-              <a:rPr sz="2400" b="1" i="0">
+              <a:rPr sz="2280" b="1" i="0">
                 <a:solidFill>
                   <a:srgbClr val="1A1A1A"/>
                 </a:solidFill>
-                <a:latin typeface="Century Schoolbook"/>
+                <a:latin typeface="Lexend"/>
               </a:rPr>
               <a:t>Make a plan. Then find the value.</a:t>
             </a:r>
@@ -17931,11 +18402,11 @@
           <a:p>
             <a:pPr algn="l"/>
             <a:r>
-              <a:rPr sz="3600" b="1" i="0">
+              <a:rPr sz="3420" b="1" i="0">
                 <a:solidFill>
                   <a:srgbClr val="1A1A1A"/>
                 </a:solidFill>
-                <a:latin typeface="Century Schoolbook"/>
+                <a:latin typeface="Lexend"/>
               </a:rPr>
               <a:t>Example 1</a:t>
             </a:r>
@@ -18071,11 +18542,11 @@
           <a:p>
             <a:pPr algn="l"/>
             <a:r>
-              <a:rPr sz="1100" b="0" i="1">
+              <a:rPr sz="1040" b="0" i="0">
                 <a:solidFill>
                   <a:srgbClr val="6B6B6B"/>
                 </a:solidFill>
-                <a:latin typeface="Century Schoolbook"/>
+                <a:latin typeface="Lexend"/>
               </a:rPr>
               <a:t>Grade 7 Accelerated · Unit 3 · Lesson 3 — Exponential Expressions</a:t>
             </a:r>
@@ -18106,11 +18577,11 @@
           <a:p>
             <a:pPr algn="r"/>
             <a:r>
-              <a:rPr sz="1100" b="0" i="0">
+              <a:rPr sz="1040" b="0" i="0">
                 <a:solidFill>
                   <a:srgbClr val="6B6B6B"/>
                 </a:solidFill>
-                <a:latin typeface="Century Schoolbook"/>
+                <a:latin typeface="Lexend"/>
               </a:rPr>
               <a:t>8</a:t>
             </a:r>
@@ -18119,7 +18590,7 @@
       </p:sp>
       <p:pic>
         <p:nvPicPr>
-          <p:cNvPr id="8" name="Picture 7" descr="cfcc880844c57bbb.png"/>
+          <p:cNvPr id="8" name="Picture 7" descr="5359036a1f698d51.png"/>
           <p:cNvPicPr>
             <a:picLocks noChangeAspect="1"/>
           </p:cNvPicPr>
@@ -18134,7 +18605,7 @@
         <p:spPr>
           <a:xfrm>
             <a:off x="1828800" y="1920240"/>
-            <a:ext cx="3026664" cy="804672"/>
+            <a:ext cx="3115056" cy="792480"/>
           </a:xfrm>
           <a:prstGeom prst="rect">
             <a:avLst/>
@@ -18143,7 +18614,7 @@
       </p:pic>
       <p:pic>
         <p:nvPicPr>
-          <p:cNvPr id="9" name="Picture 8" descr="4c8aa7fdd39a6875.png"/>
+          <p:cNvPr id="9" name="Picture 8" descr="a9f26448e74da49a.png"/>
           <p:cNvPicPr>
             <a:picLocks noChangeAspect="1"/>
           </p:cNvPicPr>
@@ -18157,8 +18628,8 @@
         </p:blipFill>
         <p:spPr>
           <a:xfrm>
-            <a:off x="1828800" y="2999232"/>
-            <a:ext cx="3041904" cy="804672"/>
+            <a:off x="1828800" y="2987040"/>
+            <a:ext cx="3121152" cy="792480"/>
           </a:xfrm>
           <a:prstGeom prst="rect">
             <a:avLst/>
@@ -18167,7 +18638,7 @@
       </p:pic>
       <p:pic>
         <p:nvPicPr>
-          <p:cNvPr id="10" name="Picture 9" descr="8fb9fcec01a757f9.png"/>
+          <p:cNvPr id="10" name="Picture 9" descr="55388f3dbeaaa931.png"/>
           <p:cNvPicPr>
             <a:picLocks noChangeAspect="1"/>
           </p:cNvPicPr>
@@ -18181,8 +18652,8 @@
         </p:blipFill>
         <p:spPr>
           <a:xfrm>
-            <a:off x="1828800" y="4078224"/>
-            <a:ext cx="1981199" cy="804672"/>
+            <a:off x="1828800" y="4053839"/>
+            <a:ext cx="2014727" cy="786384"/>
           </a:xfrm>
           <a:prstGeom prst="rect">
             <a:avLst/>
@@ -18197,7 +18668,7 @@
         </p:nvSpPr>
         <p:spPr>
           <a:xfrm>
-            <a:off x="777240" y="5340096"/>
+            <a:off x="777240" y="5297424"/>
             <a:ext cx="10607040" cy="548640"/>
           </a:xfrm>
           <a:prstGeom prst="rect">
@@ -18213,11 +18684,11 @@
           <a:p>
             <a:pPr algn="ctr"/>
             <a:r>
-              <a:rPr sz="3200" b="1" i="0">
+              <a:rPr sz="3040" b="1" i="0">
                 <a:solidFill>
                   <a:srgbClr val="9E1B32"/>
                 </a:solidFill>
-                <a:latin typeface="Century Schoolbook"/>
+                <a:latin typeface="Lexend"/>
               </a:rPr>
               <a:t>Answer:   64</a:t>
             </a:r>
@@ -18266,11 +18737,11 @@
           <a:p>
             <a:pPr algn="l"/>
             <a:r>
-              <a:rPr sz="3600" b="1" i="0">
+              <a:rPr sz="3420" b="1" i="0">
                 <a:solidFill>
                   <a:srgbClr val="1A1A1A"/>
                 </a:solidFill>
-                <a:latin typeface="Century Schoolbook"/>
+                <a:latin typeface="Lexend"/>
               </a:rPr>
               <a:t>Your Turn</a:t>
             </a:r>
@@ -18406,11 +18877,11 @@
           <a:p>
             <a:pPr algn="l"/>
             <a:r>
-              <a:rPr sz="1100" b="0" i="1">
+              <a:rPr sz="1040" b="0" i="0">
                 <a:solidFill>
                   <a:srgbClr val="6B6B6B"/>
                 </a:solidFill>
-                <a:latin typeface="Century Schoolbook"/>
+                <a:latin typeface="Lexend"/>
               </a:rPr>
               <a:t>Grade 7 Accelerated · Unit 3 · Lesson 3 — Exponential Expressions</a:t>
             </a:r>
@@ -18441,11 +18912,11 @@
           <a:p>
             <a:pPr algn="r"/>
             <a:r>
-              <a:rPr sz="1100" b="0" i="0">
+              <a:rPr sz="1040" b="0" i="0">
                 <a:solidFill>
                   <a:srgbClr val="6B6B6B"/>
                 </a:solidFill>
-                <a:latin typeface="Century Schoolbook"/>
+                <a:latin typeface="Lexend"/>
               </a:rPr>
               <a:t>9</a:t>
             </a:r>
@@ -18454,7 +18925,7 @@
       </p:sp>
       <p:pic>
         <p:nvPicPr>
-          <p:cNvPr id="8" name="Picture 7" descr="ecdab13571b725e6.png"/>
+          <p:cNvPr id="8" name="Picture 7" descr="7c1c49302d0312d8.png"/>
           <p:cNvPicPr>
             <a:picLocks noChangeAspect="1"/>
           </p:cNvPicPr>
@@ -18468,8 +18939,8 @@
         </p:blipFill>
         <p:spPr>
           <a:xfrm>
-            <a:off x="5469636" y="2194560"/>
-            <a:ext cx="1222248" cy="1018032"/>
+            <a:off x="5431536" y="1600200"/>
+            <a:ext cx="1298448" cy="996696"/>
           </a:xfrm>
           <a:prstGeom prst="rect">
             <a:avLst/>
@@ -18484,7 +18955,7 @@
         </p:nvSpPr>
         <p:spPr>
           <a:xfrm>
-            <a:off x="777240" y="3715512"/>
+            <a:off x="777240" y="3099816"/>
             <a:ext cx="10607040" cy="429370"/>
           </a:xfrm>
           <a:prstGeom prst="rect">
@@ -18500,11 +18971,11 @@
           <a:p>
             <a:pPr algn="ctr"/>
             <a:r>
-              <a:rPr sz="2400" b="1" i="0">
+              <a:rPr sz="2280" b="1" i="0">
                 <a:solidFill>
                   <a:srgbClr val="1A1A1A"/>
                 </a:solidFill>
-                <a:latin typeface="Century Schoolbook"/>
+                <a:latin typeface="Lexend"/>
               </a:rPr>
               <a:t>Make a plan. Then find the value.</a:t>
             </a:r>

--- a/a7/build/out/u3/A7 3.03 Exponential Expressions - Slides.pptx
+++ b/a7/build/out/u3/A7 3.03 Exponential Expressions - Slides.pptx
@@ -12715,7 +12715,7 @@
         </p:nvSpPr>
         <p:spPr>
           <a:xfrm>
-            <a:off x="1292037" y="2362199"/>
+            <a:off x="1223457" y="2362199"/>
             <a:ext cx="2771239" cy="457200"/>
           </a:xfrm>
           <a:prstGeom prst="rect">
@@ -12744,7 +12744,7 @@
       </p:sp>
       <p:pic>
         <p:nvPicPr>
-          <p:cNvPr id="9" name="Picture 8" descr="c980b6f8e4155c31.png"/>
+          <p:cNvPr id="9" name="Picture 8" descr="fb17c489e50a3792.png"/>
           <p:cNvPicPr>
             <a:picLocks noChangeAspect="1"/>
           </p:cNvPicPr>
@@ -12758,8 +12758,8 @@
         </p:blipFill>
         <p:spPr>
           <a:xfrm>
-            <a:off x="3926116" y="2196083"/>
-            <a:ext cx="2170176" cy="789432"/>
+            <a:off x="3857536" y="2196083"/>
+            <a:ext cx="2234184" cy="789432"/>
           </a:xfrm>
           <a:prstGeom prst="rect">
             <a:avLst/>
@@ -12774,7 +12774,7 @@
         </p:nvSpPr>
         <p:spPr>
           <a:xfrm>
-            <a:off x="6096292" y="2362199"/>
+            <a:off x="6091720" y="2362199"/>
             <a:ext cx="2862460" cy="457200"/>
           </a:xfrm>
           <a:prstGeom prst="rect">
@@ -12803,7 +12803,7 @@
       </p:sp>
       <p:pic>
         <p:nvPicPr>
-          <p:cNvPr id="11" name="Picture 10" descr="149a6d7e3b789f2e.png"/>
+          <p:cNvPr id="11" name="Picture 10" descr="56efae9f876bdcd7.png"/>
           <p:cNvPicPr>
             <a:picLocks noChangeAspect="1"/>
           </p:cNvPicPr>
@@ -12817,8 +12817,8 @@
         </p:blipFill>
         <p:spPr>
           <a:xfrm>
-            <a:off x="8821592" y="2194560"/>
-            <a:ext cx="1898904" cy="792480"/>
+            <a:off x="8817020" y="2194560"/>
+            <a:ext cx="1972056" cy="792480"/>
           </a:xfrm>
           <a:prstGeom prst="rect">
             <a:avLst/>
@@ -12833,7 +12833,7 @@
         </p:nvSpPr>
         <p:spPr>
           <a:xfrm>
-            <a:off x="10720496" y="2362199"/>
+            <a:off x="10789076" y="2362199"/>
             <a:ext cx="286146" cy="457200"/>
           </a:xfrm>
           <a:prstGeom prst="rect">
@@ -13166,7 +13166,7 @@
         </p:nvSpPr>
         <p:spPr>
           <a:xfrm>
-            <a:off x="1290513" y="2270760"/>
+            <a:off x="1226505" y="2269236"/>
             <a:ext cx="2771239" cy="457200"/>
           </a:xfrm>
           <a:prstGeom prst="rect">
@@ -13195,7 +13195,7 @@
       </p:sp>
       <p:pic>
         <p:nvPicPr>
-          <p:cNvPr id="9" name="Picture 8" descr="e64c2044df877351.png"/>
+          <p:cNvPr id="9" name="Picture 8" descr="aefdad52317ca883.png"/>
           <p:cNvPicPr>
             <a:picLocks noChangeAspect="1"/>
           </p:cNvPicPr>
@@ -13209,8 +13209,8 @@
         </p:blipFill>
         <p:spPr>
           <a:xfrm>
-            <a:off x="3924592" y="2104644"/>
-            <a:ext cx="2176272" cy="789432"/>
+            <a:off x="3860584" y="2106168"/>
+            <a:ext cx="2234184" cy="783336"/>
           </a:xfrm>
           <a:prstGeom prst="rect">
             <a:avLst/>
@@ -13225,7 +13225,7 @@
         </p:nvSpPr>
         <p:spPr>
           <a:xfrm>
-            <a:off x="6100864" y="2270760"/>
+            <a:off x="6094768" y="2269236"/>
             <a:ext cx="2862460" cy="457200"/>
           </a:xfrm>
           <a:prstGeom prst="rect">
@@ -13254,7 +13254,7 @@
       </p:sp>
       <p:pic>
         <p:nvPicPr>
-          <p:cNvPr id="11" name="Picture 10" descr="cee0462912012dcd.png"/>
+          <p:cNvPr id="11" name="Picture 10" descr="405cad7d58f4a905.png"/>
           <p:cNvPicPr>
             <a:picLocks noChangeAspect="1"/>
           </p:cNvPicPr>
@@ -13268,8 +13268,8 @@
         </p:blipFill>
         <p:spPr>
           <a:xfrm>
-            <a:off x="8826164" y="2103120"/>
-            <a:ext cx="1895856" cy="792480"/>
+            <a:off x="8820068" y="2103120"/>
+            <a:ext cx="1965960" cy="789432"/>
           </a:xfrm>
           <a:prstGeom prst="rect">
             <a:avLst/>
@@ -13284,7 +13284,7 @@
         </p:nvSpPr>
         <p:spPr>
           <a:xfrm>
-            <a:off x="10722020" y="2270760"/>
+            <a:off x="10786028" y="2269236"/>
             <a:ext cx="286146" cy="457200"/>
           </a:xfrm>
           <a:prstGeom prst="rect">
@@ -13319,7 +13319,7 @@
         </p:nvSpPr>
         <p:spPr>
           <a:xfrm>
-            <a:off x="777240" y="3169919"/>
+            <a:off x="777240" y="3166871"/>
             <a:ext cx="10607040" cy="465151"/>
           </a:xfrm>
           <a:prstGeom prst="rect">
@@ -13354,7 +13354,7 @@
         </p:nvSpPr>
         <p:spPr>
           <a:xfrm>
-            <a:off x="4324019" y="3795091"/>
+            <a:off x="4292015" y="3792043"/>
             <a:ext cx="1690777" cy="457200"/>
           </a:xfrm>
           <a:prstGeom prst="rect">
@@ -13383,7 +13383,7 @@
       </p:sp>
       <p:pic>
         <p:nvPicPr>
-          <p:cNvPr id="15" name="Picture 14" descr="39098cfa8576ec81.png"/>
+          <p:cNvPr id="15" name="Picture 14" descr="fb99ef7e2271fb1b.png"/>
           <p:cNvPicPr>
             <a:picLocks noChangeAspect="1"/>
           </p:cNvPicPr>
@@ -13397,8 +13397,8 @@
         </p:blipFill>
         <p:spPr>
           <a:xfrm>
-            <a:off x="5877636" y="3866719"/>
-            <a:ext cx="1962911" cy="313944"/>
+            <a:off x="5845632" y="3863671"/>
+            <a:ext cx="2023872" cy="313944"/>
           </a:xfrm>
           <a:prstGeom prst="rect">
             <a:avLst/>
@@ -13413,7 +13413,7 @@
         </p:nvSpPr>
         <p:spPr>
           <a:xfrm>
-            <a:off x="4324019" y="4395547"/>
+            <a:off x="4292015" y="4390975"/>
             <a:ext cx="1441943" cy="457200"/>
           </a:xfrm>
           <a:prstGeom prst="rect">
@@ -13442,7 +13442,7 @@
       </p:sp>
       <p:pic>
         <p:nvPicPr>
-          <p:cNvPr id="17" name="Picture 16" descr="c0e6871a3ee6bdb1.png"/>
+          <p:cNvPr id="17" name="Picture 16" descr="ba4bf2d7c561be20.png"/>
           <p:cNvPicPr>
             <a:picLocks noChangeAspect="1"/>
           </p:cNvPicPr>
@@ -13456,8 +13456,8 @@
         </p:blipFill>
         <p:spPr>
           <a:xfrm>
-            <a:off x="5628802" y="4320871"/>
-            <a:ext cx="2069591" cy="606552"/>
+            <a:off x="5596798" y="4317823"/>
+            <a:ext cx="2054352" cy="603504"/>
           </a:xfrm>
           <a:prstGeom prst="rect">
             <a:avLst/>
@@ -13466,7 +13466,7 @@
       </p:pic>
       <p:pic>
         <p:nvPicPr>
-          <p:cNvPr id="18" name="Picture 17" descr="8539984585d0f2a0.png"/>
+          <p:cNvPr id="18" name="Picture 17" descr="45583768a555bd63.png"/>
           <p:cNvPicPr>
             <a:picLocks noChangeAspect="1"/>
           </p:cNvPicPr>
@@ -13480,8 +13480,8 @@
         </p:blipFill>
         <p:spPr>
           <a:xfrm>
-            <a:off x="4378883" y="5095063"/>
-            <a:ext cx="890016" cy="259080"/>
+            <a:off x="4346879" y="5060011"/>
+            <a:ext cx="1338072" cy="316992"/>
           </a:xfrm>
           <a:prstGeom prst="rect">
             <a:avLst/>
@@ -13496,7 +13496,7 @@
         </p:nvSpPr>
         <p:spPr>
           <a:xfrm>
-            <a:off x="777240" y="5567503"/>
+            <a:off x="777240" y="5561407"/>
             <a:ext cx="10607040" cy="548640"/>
           </a:xfrm>
           <a:prstGeom prst="rect">
@@ -13518,7 +13518,7 @@
                 </a:solidFill>
                 <a:latin typeface="Lexend"/>
               </a:rPr>
-              <a:t>Answer:   Yes — both give 2</a:t>
+              <a:t>Answer:   Yes — both give 4</a:t>
             </a:r>
             <a:r>
               <a:rPr sz="3040" b="1" i="0" baseline="30000">
@@ -13536,7 +13536,7 @@
                 </a:solidFill>
                 <a:latin typeface="Lexend"/>
               </a:rPr>
-              <a:t> = 64</a:t>
+              <a:t> = 4,096</a:t>
             </a:r>
           </a:p>
         </p:txBody>
@@ -13965,7 +13965,7 @@
         </p:nvSpPr>
         <p:spPr>
           <a:xfrm>
-            <a:off x="960120" y="3032760"/>
+            <a:off x="960120" y="3029712"/>
             <a:ext cx="548640" cy="457200"/>
           </a:xfrm>
           <a:prstGeom prst="rect">
@@ -14000,7 +14000,7 @@
         </p:nvSpPr>
         <p:spPr>
           <a:xfrm>
-            <a:off x="1554480" y="3032760"/>
+            <a:off x="1554480" y="3029712"/>
             <a:ext cx="3169643" cy="457200"/>
           </a:xfrm>
           <a:prstGeom prst="rect">
@@ -14029,7 +14029,7 @@
       </p:sp>
       <p:pic>
         <p:nvPicPr>
-          <p:cNvPr id="16" name="Picture 15" descr="9089217fb5b948da.png"/>
+          <p:cNvPr id="16" name="Picture 15" descr="f8e03137ad627c1f.png"/>
           <p:cNvPicPr>
             <a:picLocks noChangeAspect="1"/>
           </p:cNvPicPr>
@@ -14044,7 +14044,7 @@
         <p:spPr>
           <a:xfrm>
             <a:off x="4586963" y="2938272"/>
-            <a:ext cx="819912" cy="646176"/>
+            <a:ext cx="810768" cy="640080"/>
           </a:xfrm>
           <a:prstGeom prst="rect">
             <a:avLst/>
@@ -14059,7 +14059,7 @@
         </p:nvSpPr>
         <p:spPr>
           <a:xfrm>
-            <a:off x="960120" y="3744468"/>
+            <a:off x="960120" y="3738371"/>
             <a:ext cx="548640" cy="457200"/>
           </a:xfrm>
           <a:prstGeom prst="rect">
@@ -14094,7 +14094,7 @@
         </p:nvSpPr>
         <p:spPr>
           <a:xfrm>
-            <a:off x="1554480" y="3744468"/>
+            <a:off x="1554480" y="3738371"/>
             <a:ext cx="2460558" cy="457200"/>
           </a:xfrm>
           <a:prstGeom prst="rect">
@@ -14137,7 +14137,7 @@
         </p:blipFill>
         <p:spPr>
           <a:xfrm>
-            <a:off x="3877878" y="3806952"/>
+            <a:off x="3877878" y="3800855"/>
             <a:ext cx="1624584" cy="332232"/>
           </a:xfrm>
           <a:prstGeom prst="rect">
@@ -14153,7 +14153,7 @@
         </p:nvSpPr>
         <p:spPr>
           <a:xfrm>
-            <a:off x="960120" y="4515611"/>
+            <a:off x="960120" y="4509516"/>
             <a:ext cx="548640" cy="457200"/>
           </a:xfrm>
           <a:prstGeom prst="rect">
@@ -14188,7 +14188,7 @@
         </p:nvSpPr>
         <p:spPr>
           <a:xfrm>
-            <a:off x="1554480" y="4515611"/>
+            <a:off x="1554480" y="4509516"/>
             <a:ext cx="2460558" cy="457200"/>
           </a:xfrm>
           <a:prstGeom prst="rect">
@@ -14231,7 +14231,7 @@
         </p:blipFill>
         <p:spPr>
           <a:xfrm>
-            <a:off x="3877878" y="4361688"/>
+            <a:off x="3877878" y="4355592"/>
             <a:ext cx="1621536" cy="765048"/>
           </a:xfrm>
           <a:prstGeom prst="rect">
@@ -14247,7 +14247,7 @@
         </p:nvSpPr>
         <p:spPr>
           <a:xfrm>
-            <a:off x="960120" y="5404104"/>
+            <a:off x="960120" y="5398008"/>
             <a:ext cx="548640" cy="457200"/>
           </a:xfrm>
           <a:prstGeom prst="rect">
@@ -14282,7 +14282,7 @@
         </p:nvSpPr>
         <p:spPr>
           <a:xfrm>
-            <a:off x="1554480" y="5404104"/>
+            <a:off x="1554480" y="5398008"/>
             <a:ext cx="1813370" cy="457200"/>
           </a:xfrm>
           <a:prstGeom prst="rect">
@@ -14325,7 +14325,7 @@
         </p:blipFill>
         <p:spPr>
           <a:xfrm>
-            <a:off x="3230690" y="5309616"/>
+            <a:off x="3230690" y="5303520"/>
             <a:ext cx="996696" cy="646176"/>
           </a:xfrm>
           <a:prstGeom prst="rect">
@@ -14341,7 +14341,7 @@
         </p:nvSpPr>
         <p:spPr>
           <a:xfrm>
-            <a:off x="4227386" y="5404104"/>
+            <a:off x="4227386" y="5398008"/>
             <a:ext cx="1087500" cy="457200"/>
           </a:xfrm>
           <a:prstGeom prst="rect">
@@ -14384,7 +14384,7 @@
         </p:blipFill>
         <p:spPr>
           <a:xfrm>
-            <a:off x="5177727" y="5311140"/>
+            <a:off x="5177727" y="5305044"/>
             <a:ext cx="499871" cy="643128"/>
           </a:xfrm>
           <a:prstGeom prst="rect">
@@ -14400,7 +14400,7 @@
         </p:nvSpPr>
         <p:spPr>
           <a:xfrm>
-            <a:off x="5677599" y="5404104"/>
+            <a:off x="5677599" y="5398008"/>
             <a:ext cx="3387054" cy="457200"/>
           </a:xfrm>
           <a:prstGeom prst="rect">
